--- a/weekly/2026-W33/weekly-2026-W33.pptx
+++ b/weekly/2026-W33/weekly-2026-W33.pptx
@@ -3139,7 +3139,7 @@
                 </a:solidFill>
                 <a:latin typeface="Arial"/>
               </a:rPr>
-              <a:t>2026-W33 · 2026-08-10 to 2026-08-16, week still running · UTC · first-pass yield, units in the box</a:t>
+              <a:t>2026-W33 · 2026-08-10 to 2026-08-16, week still running · UTC · first-pass yield and units, in the box</a:t>
             </a:r>
           </a:p>
         </p:txBody>
@@ -3196,8 +3196,8 @@
         </p:nvSpPr>
         <p:spPr>
           <a:xfrm>
-            <a:off x="384048" y="1280160"/>
-            <a:ext cx="2212848" cy="274320"/>
+            <a:off x="658368" y="1188720"/>
+            <a:ext cx="2743200" cy="237744"/>
           </a:xfrm>
           <a:prstGeom prst="rect">
             <a:avLst/>
@@ -3216,7 +3216,16 @@
               </a:spcAft>
             </a:pPr>
             <a:r>
-              <a:rPr sz="1200" b="1">
+              <a:rPr sz="1000" b="0">
+                <a:solidFill>
+                  <a:srgbClr val="6B6B6B"/>
+                </a:solidFill>
+                <a:latin typeface="Arial"/>
+              </a:rPr>
+              <a:t>@Sigurd   </a:t>
+            </a:r>
+            <a:r>
+              <a:rPr sz="1250" b="1">
                 <a:solidFill>
                   <a:srgbClr val="141414"/>
                 </a:solidFill>
@@ -3224,28 +3233,140 @@
               </a:rPr>
               <a:t>ASIC</a:t>
             </a:r>
-            <a:r>
-              <a:rPr sz="1000" b="0">
-                <a:solidFill>
-                  <a:srgbClr val="6B6B6B"/>
-                </a:solidFill>
-                <a:latin typeface="Arial"/>
-              </a:rPr>
-              <a:t>  @Sigurd</a:t>
-            </a:r>
-          </a:p>
-        </p:txBody>
-      </p:sp>
-      <p:sp>
-        <p:nvSpPr>
-          <p:cNvPr id="5" name="Rounded Rectangle 4"/>
+          </a:p>
+        </p:txBody>
+      </p:sp>
+      <p:cxnSp>
+        <p:nvCxnSpPr>
+          <p:cNvPr id="5" name="Connector 4"/>
+          <p:cNvCxnSpPr/>
+          <p:nvPr/>
+        </p:nvCxnSpPr>
+        <p:spPr>
+          <a:xfrm>
+            <a:off x="2212848" y="1133856"/>
+            <a:ext cx="0" cy="4672584"/>
+          </a:xfrm>
+          <a:prstGeom prst="line">
+            <a:avLst/>
+          </a:prstGeom>
+          <a:ln w="11430">
+            <a:solidFill>
+              <a:srgbClr val="B5B3AC"/>
+            </a:solidFill>
+            <a:prstDash val="dash"/>
+          </a:ln>
+        </p:spPr>
+        <p:style>
+          <a:lnRef idx="2">
+            <a:schemeClr val="accent1"/>
+          </a:lnRef>
+          <a:fillRef idx="0">
+            <a:schemeClr val="accent1"/>
+          </a:fillRef>
+          <a:effectRef idx="1">
+            <a:schemeClr val="accent1"/>
+          </a:effectRef>
+          <a:fontRef idx="minor">
+            <a:schemeClr val="tx1"/>
+          </a:fontRef>
+        </p:style>
+      </p:cxnSp>
+      <p:sp>
+        <p:nvSpPr>
+          <p:cNvPr id="6" name="Rounded Rectangle 5"/>
           <p:cNvSpPr/>
           <p:nvPr/>
         </p:nvSpPr>
         <p:spPr>
           <a:xfrm>
-            <a:off x="384048" y="1572768"/>
-            <a:ext cx="1847088" cy="786384"/>
+            <a:off x="658368" y="1481328"/>
+            <a:ext cx="1298448" cy="640080"/>
+          </a:xfrm>
+          <a:prstGeom prst="roundRect">
+            <a:avLst/>
+          </a:prstGeom>
+          <a:solidFill>
+            <a:srgbClr val="D9D9D9"/>
+          </a:solidFill>
+          <a:ln w="12700">
+            <a:solidFill>
+              <a:srgbClr val="A5A5A5"/>
+            </a:solidFill>
+          </a:ln>
+          <a:effectLst/>
+        </p:spPr>
+        <p:style>
+          <a:lnRef idx="1">
+            <a:schemeClr val="accent1"/>
+          </a:lnRef>
+          <a:fillRef idx="3">
+            <a:schemeClr val="accent1"/>
+          </a:fillRef>
+          <a:effectRef idx="2">
+            <a:schemeClr val="accent1"/>
+          </a:effectRef>
+          <a:fontRef idx="minor">
+            <a:schemeClr val="lt1"/>
+          </a:fontRef>
+        </p:style>
+        <p:txBody>
+          <a:bodyPr rtlCol="0" anchor="ctr"/>
+          <a:lstStyle/>
+          <a:p>
+            <a:pPr algn="ctr"/>
+          </a:p>
+        </p:txBody>
+      </p:sp>
+      <p:sp>
+        <p:nvSpPr>
+          <p:cNvPr id="7" name="TextBox 6"/>
+          <p:cNvSpPr txBox="1"/>
+          <p:nvPr/>
+        </p:nvSpPr>
+        <p:spPr>
+          <a:xfrm>
+            <a:off x="740664" y="1545336"/>
+            <a:ext cx="1133856" cy="530352"/>
+          </a:xfrm>
+          <a:prstGeom prst="rect">
+            <a:avLst/>
+          </a:prstGeom>
+          <a:noFill/>
+        </p:spPr>
+        <p:txBody>
+          <a:bodyPr wrap="square" lIns="0" rIns="0" tIns="0" bIns="0">
+            <a:spAutoFit/>
+          </a:bodyPr>
+          <a:lstStyle/>
+          <a:p>
+            <a:pPr algn="l">
+              <a:spcAft>
+                <a:spcPts val="100"/>
+              </a:spcAft>
+            </a:pPr>
+            <a:r>
+              <a:rPr sz="1250" b="0">
+                <a:solidFill>
+                  <a:srgbClr val="141414"/>
+                </a:solidFill>
+                <a:latin typeface="Arial"/>
+              </a:rPr>
+              <a:t>ASIC</a:t>
+            </a:r>
+          </a:p>
+        </p:txBody>
+      </p:sp>
+      <p:sp>
+        <p:nvSpPr>
+          <p:cNvPr id="8" name="Rounded Rectangle 7"/>
+          <p:cNvSpPr/>
+          <p:nvPr/>
+        </p:nvSpPr>
+        <p:spPr>
+          <a:xfrm>
+            <a:off x="658368" y="2322576"/>
+            <a:ext cx="1298448" cy="640080"/>
           </a:xfrm>
           <a:prstGeom prst="roundRect">
             <a:avLst/>
@@ -3275,7 +3396,7 @@
           </a:fontRef>
         </p:style>
         <p:txBody>
-          <a:bodyPr rtlCol="0" anchor="ctr" wrap="square"/>
+          <a:bodyPr rtlCol="0" anchor="ctr"/>
           <a:lstStyle/>
           <a:p>
             <a:pPr algn="ctr"/>
@@ -3284,14 +3405,14 @@
       </p:sp>
       <p:sp>
         <p:nvSpPr>
-          <p:cNvPr id="6" name="TextBox 5"/>
+          <p:cNvPr id="9" name="TextBox 8"/>
           <p:cNvSpPr txBox="1"/>
           <p:nvPr/>
         </p:nvSpPr>
         <p:spPr>
           <a:xfrm>
-            <a:off x="484632" y="1664208"/>
-            <a:ext cx="1645920" cy="640080"/>
+            <a:off x="740664" y="2386584"/>
+            <a:ext cx="1133856" cy="530352"/>
           </a:xfrm>
           <a:prstGeom prst="rect">
             <a:avLst/>
@@ -3310,7 +3431,7 @@
               </a:spcAft>
             </a:pPr>
             <a:r>
-              <a:rPr sz="1300" b="1">
+              <a:rPr sz="1250" b="1">
                 <a:solidFill>
                   <a:srgbClr val="141414"/>
                 </a:solidFill>
@@ -3335,7 +3456,7 @@
               <a:t>35.3%</a:t>
             </a:r>
             <a:r>
-              <a:rPr sz="850" b="0">
+              <a:rPr sz="800" b="0">
                 <a:solidFill>
                   <a:srgbClr val="6B6B6B"/>
                 </a:solidFill>
@@ -3348,14 +3469,14 @@
       </p:sp>
       <p:sp>
         <p:nvSpPr>
-          <p:cNvPr id="7" name="Rounded Rectangle 6"/>
+          <p:cNvPr id="10" name="Rounded Rectangle 9"/>
           <p:cNvSpPr/>
           <p:nvPr/>
         </p:nvSpPr>
         <p:spPr>
           <a:xfrm>
-            <a:off x="384048" y="2560320"/>
-            <a:ext cx="1847088" cy="786384"/>
+            <a:off x="658368" y="3163824"/>
+            <a:ext cx="1298448" cy="640080"/>
           </a:xfrm>
           <a:prstGeom prst="roundRect">
             <a:avLst/>
@@ -3385,7 +3506,7 @@
           </a:fontRef>
         </p:style>
         <p:txBody>
-          <a:bodyPr rtlCol="0" anchor="ctr" wrap="square"/>
+          <a:bodyPr rtlCol="0" anchor="ctr"/>
           <a:lstStyle/>
           <a:p>
             <a:pPr algn="ctr"/>
@@ -3394,14 +3515,14 @@
       </p:sp>
       <p:sp>
         <p:nvSpPr>
-          <p:cNvPr id="8" name="TextBox 7"/>
+          <p:cNvPr id="11" name="TextBox 10"/>
           <p:cNvSpPr txBox="1"/>
           <p:nvPr/>
         </p:nvSpPr>
         <p:spPr>
           <a:xfrm>
-            <a:off x="484632" y="2651760"/>
-            <a:ext cx="1645920" cy="640080"/>
+            <a:off x="740664" y="3227832"/>
+            <a:ext cx="1133856" cy="530352"/>
           </a:xfrm>
           <a:prstGeom prst="rect">
             <a:avLst/>
@@ -3420,7 +3541,7 @@
               </a:spcAft>
             </a:pPr>
             <a:r>
-              <a:rPr sz="1300" b="1">
+              <a:rPr sz="1250" b="1">
                 <a:solidFill>
                   <a:srgbClr val="141414"/>
                 </a:solidFill>
@@ -3445,35 +3566,185 @@
               <a:t>84.3%</a:t>
             </a:r>
             <a:r>
+              <a:rPr sz="800" b="0">
+                <a:solidFill>
+                  <a:srgbClr val="6B6B6B"/>
+                </a:solidFill>
+                <a:latin typeface="Arial"/>
+              </a:rPr>
+              <a:t>  reported</a:t>
+            </a:r>
+          </a:p>
+        </p:txBody>
+      </p:sp>
+      <p:sp>
+        <p:nvSpPr>
+          <p:cNvPr id="12" name="Rounded Rectangle 11"/>
+          <p:cNvSpPr/>
+          <p:nvPr/>
+        </p:nvSpPr>
+        <p:spPr>
+          <a:xfrm>
+            <a:off x="658368" y="4005072"/>
+            <a:ext cx="1298448" cy="640080"/>
+          </a:xfrm>
+          <a:prstGeom prst="roundRect">
+            <a:avLst/>
+          </a:prstGeom>
+          <a:solidFill>
+            <a:srgbClr val="D9D9D9"/>
+          </a:solidFill>
+          <a:ln w="12700">
+            <a:solidFill>
+              <a:srgbClr val="A5A5A5"/>
+            </a:solidFill>
+          </a:ln>
+          <a:effectLst/>
+        </p:spPr>
+        <p:style>
+          <a:lnRef idx="1">
+            <a:schemeClr val="accent1"/>
+          </a:lnRef>
+          <a:fillRef idx="3">
+            <a:schemeClr val="accent1"/>
+          </a:fillRef>
+          <a:effectRef idx="2">
+            <a:schemeClr val="accent1"/>
+          </a:effectRef>
+          <a:fontRef idx="minor">
+            <a:schemeClr val="lt1"/>
+          </a:fontRef>
+        </p:style>
+        <p:txBody>
+          <a:bodyPr rtlCol="0" anchor="ctr"/>
+          <a:lstStyle/>
+          <a:p>
+            <a:pPr algn="ctr"/>
+          </a:p>
+        </p:txBody>
+      </p:sp>
+      <p:sp>
+        <p:nvSpPr>
+          <p:cNvPr id="13" name="TextBox 12"/>
+          <p:cNvSpPr txBox="1"/>
+          <p:nvPr/>
+        </p:nvSpPr>
+        <p:spPr>
+          <a:xfrm>
+            <a:off x="740664" y="4069080"/>
+            <a:ext cx="1133856" cy="530352"/>
+          </a:xfrm>
+          <a:prstGeom prst="rect">
+            <a:avLst/>
+          </a:prstGeom>
+          <a:noFill/>
+        </p:spPr>
+        <p:txBody>
+          <a:bodyPr wrap="square" lIns="0" rIns="0" tIns="0" bIns="0">
+            <a:spAutoFit/>
+          </a:bodyPr>
+          <a:lstStyle/>
+          <a:p>
+            <a:pPr algn="l">
+              <a:spcAft>
+                <a:spcPts val="100"/>
+              </a:spcAft>
+            </a:pPr>
+            <a:r>
+              <a:rPr sz="1250" b="1">
+                <a:solidFill>
+                  <a:srgbClr val="141414"/>
+                </a:solidFill>
+                <a:latin typeface="Arial"/>
+              </a:rPr>
+              <a:t>SLT</a:t>
+            </a:r>
+          </a:p>
+          <a:p>
+            <a:pPr algn="l">
+              <a:spcAft>
+                <a:spcPts val="100"/>
+              </a:spcAft>
+            </a:pPr>
+            <a:r>
               <a:rPr sz="850" b="0">
                 <a:solidFill>
                   <a:srgbClr val="6B6B6B"/>
                 </a:solidFill>
                 <a:latin typeface="Arial"/>
               </a:rPr>
-              <a:t>  reported</a:t>
+              <a:t>at Sigurd</a:t>
+            </a:r>
+          </a:p>
+        </p:txBody>
+      </p:sp>
+      <p:sp>
+        <p:nvSpPr>
+          <p:cNvPr id="14" name="TextBox 13"/>
+          <p:cNvSpPr txBox="1"/>
+          <p:nvPr/>
+        </p:nvSpPr>
+        <p:spPr>
+          <a:xfrm>
+            <a:off x="2377440" y="1188720"/>
+            <a:ext cx="2743200" cy="237744"/>
+          </a:xfrm>
+          <a:prstGeom prst="rect">
+            <a:avLst/>
+          </a:prstGeom>
+          <a:noFill/>
+        </p:spPr>
+        <p:txBody>
+          <a:bodyPr wrap="square" lIns="0" rIns="0" tIns="0" bIns="0">
+            <a:spAutoFit/>
+          </a:bodyPr>
+          <a:lstStyle/>
+          <a:p>
+            <a:pPr algn="l">
+              <a:spcAft>
+                <a:spcPts val="0"/>
+              </a:spcAft>
+            </a:pPr>
+            <a:r>
+              <a:rPr sz="1000" b="0">
+                <a:solidFill>
+                  <a:srgbClr val="6B6B6B"/>
+                </a:solidFill>
+                <a:latin typeface="Arial"/>
+              </a:rPr>
+              <a:t>@Pega   </a:t>
+            </a:r>
+            <a:r>
+              <a:rPr sz="1250" b="1">
+                <a:solidFill>
+                  <a:srgbClr val="141414"/>
+                </a:solidFill>
+                <a:latin typeface="Arial"/>
+              </a:rPr>
+              <a:t>PCBA L6</a:t>
             </a:r>
           </a:p>
         </p:txBody>
       </p:sp>
       <p:cxnSp>
         <p:nvCxnSpPr>
-          <p:cNvPr id="9" name="Connector 8"/>
+          <p:cNvPr id="15" name="Connector 14"/>
           <p:cNvCxnSpPr/>
           <p:nvPr/>
         </p:nvCxnSpPr>
         <p:spPr>
           <a:xfrm>
-            <a:off x="1307592" y="2359152"/>
-            <a:ext cx="0" cy="201168"/>
+            <a:off x="5285232" y="1133856"/>
+            <a:ext cx="0" cy="4672584"/>
           </a:xfrm>
           <a:prstGeom prst="line">
             <a:avLst/>
           </a:prstGeom>
-          <a:ln w="13970">
+          <a:ln w="11430">
             <a:solidFill>
-              <a:srgbClr val="9A9992"/>
+              <a:srgbClr val="B5B3AC"/>
             </a:solidFill>
+            <a:prstDash val="dash"/>
           </a:ln>
         </p:spPr>
         <p:style>
@@ -3493,14 +3764,216 @@
       </p:cxnSp>
       <p:sp>
         <p:nvSpPr>
-          <p:cNvPr id="10" name="Rounded Rectangle 9"/>
+          <p:cNvPr id="16" name="Rounded Rectangle 15"/>
           <p:cNvSpPr/>
           <p:nvPr/>
         </p:nvSpPr>
         <p:spPr>
           <a:xfrm>
-            <a:off x="384048" y="3547872"/>
-            <a:ext cx="1847088" cy="786384"/>
+            <a:off x="2377440" y="1481328"/>
+            <a:ext cx="1298448" cy="640080"/>
+          </a:xfrm>
+          <a:prstGeom prst="roundRect">
+            <a:avLst/>
+          </a:prstGeom>
+          <a:solidFill>
+            <a:srgbClr val="D9D9D9"/>
+          </a:solidFill>
+          <a:ln w="12700">
+            <a:solidFill>
+              <a:srgbClr val="A5A5A5"/>
+            </a:solidFill>
+          </a:ln>
+          <a:effectLst/>
+        </p:spPr>
+        <p:style>
+          <a:lnRef idx="1">
+            <a:schemeClr val="accent1"/>
+          </a:lnRef>
+          <a:fillRef idx="3">
+            <a:schemeClr val="accent1"/>
+          </a:fillRef>
+          <a:effectRef idx="2">
+            <a:schemeClr val="accent1"/>
+          </a:effectRef>
+          <a:fontRef idx="minor">
+            <a:schemeClr val="lt1"/>
+          </a:fontRef>
+        </p:style>
+        <p:txBody>
+          <a:bodyPr rtlCol="0" anchor="ctr"/>
+          <a:lstStyle/>
+          <a:p>
+            <a:pPr algn="ctr"/>
+          </a:p>
+        </p:txBody>
+      </p:sp>
+      <p:sp>
+        <p:nvSpPr>
+          <p:cNvPr id="17" name="TextBox 16"/>
+          <p:cNvSpPr txBox="1"/>
+          <p:nvPr/>
+        </p:nvSpPr>
+        <p:spPr>
+          <a:xfrm>
+            <a:off x="2459736" y="1545336"/>
+            <a:ext cx="1133856" cy="530352"/>
+          </a:xfrm>
+          <a:prstGeom prst="rect">
+            <a:avLst/>
+          </a:prstGeom>
+          <a:noFill/>
+        </p:spPr>
+        <p:txBody>
+          <a:bodyPr wrap="square" lIns="0" rIns="0" tIns="0" bIns="0">
+            <a:spAutoFit/>
+          </a:bodyPr>
+          <a:lstStyle/>
+          <a:p>
+            <a:pPr algn="l">
+              <a:spcAft>
+                <a:spcPts val="100"/>
+              </a:spcAft>
+            </a:pPr>
+            <a:r>
+              <a:rPr sz="1250" b="0">
+                <a:solidFill>
+                  <a:srgbClr val="141414"/>
+                </a:solidFill>
+                <a:latin typeface="Arial"/>
+              </a:rPr>
+              <a:t>SMT / ICT</a:t>
+            </a:r>
+          </a:p>
+          <a:p>
+            <a:pPr algn="l">
+              <a:spcAft>
+                <a:spcPts val="100"/>
+              </a:spcAft>
+            </a:pPr>
+            <a:r>
+              <a:rPr sz="850" b="0">
+                <a:solidFill>
+                  <a:srgbClr val="6B6B6B"/>
+                </a:solidFill>
+                <a:latin typeface="Arial"/>
+              </a:rPr>
+              <a:t>HPB &amp; VBB &amp; PV1 &amp; PDB</a:t>
+            </a:r>
+          </a:p>
+        </p:txBody>
+      </p:sp>
+      <p:sp>
+        <p:nvSpPr>
+          <p:cNvPr id="18" name="Rounded Rectangle 17"/>
+          <p:cNvSpPr/>
+          <p:nvPr/>
+        </p:nvSpPr>
+        <p:spPr>
+          <a:xfrm>
+            <a:off x="2377440" y="4005072"/>
+            <a:ext cx="1298448" cy="640080"/>
+          </a:xfrm>
+          <a:prstGeom prst="roundRect">
+            <a:avLst/>
+          </a:prstGeom>
+          <a:solidFill>
+            <a:srgbClr val="E6D0DE"/>
+          </a:solidFill>
+          <a:ln w="12700">
+            <a:solidFill>
+              <a:srgbClr val="C29FB8"/>
+            </a:solidFill>
+          </a:ln>
+          <a:effectLst/>
+        </p:spPr>
+        <p:style>
+          <a:lnRef idx="1">
+            <a:schemeClr val="accent1"/>
+          </a:lnRef>
+          <a:fillRef idx="3">
+            <a:schemeClr val="accent1"/>
+          </a:fillRef>
+          <a:effectRef idx="2">
+            <a:schemeClr val="accent1"/>
+          </a:effectRef>
+          <a:fontRef idx="minor">
+            <a:schemeClr val="lt1"/>
+          </a:fontRef>
+        </p:style>
+        <p:txBody>
+          <a:bodyPr rtlCol="0" anchor="ctr"/>
+          <a:lstStyle/>
+          <a:p>
+            <a:pPr algn="ctr"/>
+          </a:p>
+        </p:txBody>
+      </p:sp>
+      <p:sp>
+        <p:nvSpPr>
+          <p:cNvPr id="19" name="TextBox 18"/>
+          <p:cNvSpPr txBox="1"/>
+          <p:nvPr/>
+        </p:nvSpPr>
+        <p:spPr>
+          <a:xfrm>
+            <a:off x="2459736" y="4069080"/>
+            <a:ext cx="1133856" cy="530352"/>
+          </a:xfrm>
+          <a:prstGeom prst="rect">
+            <a:avLst/>
+          </a:prstGeom>
+          <a:noFill/>
+        </p:spPr>
+        <p:txBody>
+          <a:bodyPr wrap="square" lIns="0" rIns="0" tIns="0" bIns="0">
+            <a:spAutoFit/>
+          </a:bodyPr>
+          <a:lstStyle/>
+          <a:p>
+            <a:pPr algn="l">
+              <a:spcAft>
+                <a:spcPts val="100"/>
+              </a:spcAft>
+            </a:pPr>
+            <a:r>
+              <a:rPr sz="1250" b="0">
+                <a:solidFill>
+                  <a:srgbClr val="141414"/>
+                </a:solidFill>
+                <a:latin typeface="Arial"/>
+              </a:rPr>
+              <a:t>Flash / BFT</a:t>
+            </a:r>
+          </a:p>
+          <a:p>
+            <a:pPr algn="l">
+              <a:spcAft>
+                <a:spcPts val="100"/>
+              </a:spcAft>
+            </a:pPr>
+            <a:r>
+              <a:rPr sz="850" b="0">
+                <a:solidFill>
+                  <a:srgbClr val="6B6B6B"/>
+                </a:solidFill>
+                <a:latin typeface="Arial"/>
+              </a:rPr>
+              <a:t>VBB — not in the yield view</a:t>
+            </a:r>
+          </a:p>
+        </p:txBody>
+      </p:sp>
+      <p:sp>
+        <p:nvSpPr>
+          <p:cNvPr id="20" name="Rounded Rectangle 19"/>
+          <p:cNvSpPr/>
+          <p:nvPr/>
+        </p:nvSpPr>
+        <p:spPr>
+          <a:xfrm>
+            <a:off x="3840480" y="1481328"/>
+            <a:ext cx="1298448" cy="640080"/>
           </a:xfrm>
           <a:prstGeom prst="roundRect">
             <a:avLst/>
@@ -3530,7 +4003,7 @@
           </a:fontRef>
         </p:style>
         <p:txBody>
-          <a:bodyPr rtlCol="0" anchor="ctr" wrap="square"/>
+          <a:bodyPr rtlCol="0" anchor="ctr"/>
           <a:lstStyle/>
           <a:p>
             <a:pPr algn="ctr"/>
@@ -3539,14 +4012,14 @@
       </p:sp>
       <p:sp>
         <p:nvSpPr>
-          <p:cNvPr id="11" name="TextBox 10"/>
+          <p:cNvPr id="21" name="TextBox 20"/>
           <p:cNvSpPr txBox="1"/>
           <p:nvPr/>
         </p:nvSpPr>
         <p:spPr>
           <a:xfrm>
-            <a:off x="484632" y="3639312"/>
-            <a:ext cx="1645920" cy="640080"/>
+            <a:off x="3922776" y="1545336"/>
+            <a:ext cx="1133856" cy="530352"/>
           </a:xfrm>
           <a:prstGeom prst="rect">
             <a:avLst/>
@@ -3565,13 +4038,13 @@
               </a:spcAft>
             </a:pPr>
             <a:r>
-              <a:rPr sz="1300" b="1">
+              <a:rPr sz="1250" b="1">
                 <a:solidFill>
                   <a:srgbClr val="141414"/>
                 </a:solidFill>
                 <a:latin typeface="Arial"/>
               </a:rPr>
-              <a:t>SLT</a:t>
+              <a:t>HTT</a:t>
             </a:r>
           </a:p>
           <a:p>
@@ -3581,97 +4054,82 @@
               </a:spcAft>
             </a:pPr>
             <a:r>
+              <a:rPr sz="1600" b="1">
+                <a:solidFill>
+                  <a:srgbClr val="B3281E"/>
+                </a:solidFill>
+                <a:latin typeface="Arial"/>
+              </a:rPr>
+              <a:t>54.3%</a:t>
+            </a:r>
+            <a:r>
               <a:rPr sz="900" b="0">
                 <a:solidFill>
                   <a:srgbClr val="6B6B6B"/>
                 </a:solidFill>
                 <a:latin typeface="Arial"/>
               </a:rPr>
-              <a:t>at Sigurd</a:t>
-            </a:r>
-          </a:p>
-        </p:txBody>
-      </p:sp>
-      <p:cxnSp>
-        <p:nvCxnSpPr>
-          <p:cNvPr id="12" name="Connector 11"/>
-          <p:cNvCxnSpPr/>
-          <p:nvPr/>
-        </p:nvCxnSpPr>
-        <p:spPr>
-          <a:xfrm>
-            <a:off x="1307592" y="3346704"/>
-            <a:ext cx="0" cy="201168"/>
-          </a:xfrm>
-          <a:prstGeom prst="line">
-            <a:avLst/>
-          </a:prstGeom>
-          <a:ln w="13970">
+              <a:t>  170u</a:t>
+            </a:r>
+          </a:p>
+        </p:txBody>
+      </p:sp>
+      <p:sp>
+        <p:nvSpPr>
+          <p:cNvPr id="22" name="Rounded Rectangle 21"/>
+          <p:cNvSpPr/>
+          <p:nvPr/>
+        </p:nvSpPr>
+        <p:spPr>
+          <a:xfrm>
+            <a:off x="3840480" y="2322576"/>
+            <a:ext cx="1298448" cy="640080"/>
+          </a:xfrm>
+          <a:prstGeom prst="roundRect">
+            <a:avLst/>
+          </a:prstGeom>
+          <a:solidFill>
+            <a:srgbClr val="D5E8D4"/>
+          </a:solidFill>
+          <a:ln w="12700">
             <a:solidFill>
-              <a:srgbClr val="9A9992"/>
+              <a:srgbClr val="82B366"/>
             </a:solidFill>
           </a:ln>
+          <a:effectLst/>
         </p:spPr>
         <p:style>
-          <a:lnRef idx="2">
+          <a:lnRef idx="1">
             <a:schemeClr val="accent1"/>
           </a:lnRef>
-          <a:fillRef idx="0">
+          <a:fillRef idx="3">
             <a:schemeClr val="accent1"/>
           </a:fillRef>
-          <a:effectRef idx="1">
+          <a:effectRef idx="2">
             <a:schemeClr val="accent1"/>
           </a:effectRef>
           <a:fontRef idx="minor">
-            <a:schemeClr val="tx1"/>
+            <a:schemeClr val="lt1"/>
           </a:fontRef>
         </p:style>
-      </p:cxnSp>
-      <p:cxnSp>
-        <p:nvCxnSpPr>
-          <p:cNvPr id="13" name="Connector 12"/>
-          <p:cNvCxnSpPr/>
-          <p:nvPr/>
-        </p:nvCxnSpPr>
-        <p:spPr>
-          <a:xfrm flipV="1">
-            <a:off x="2231136" y="1965960"/>
-            <a:ext cx="365760" cy="1975104"/>
-          </a:xfrm>
-          <a:prstGeom prst="line">
-            <a:avLst/>
-          </a:prstGeom>
-          <a:ln w="13970">
-            <a:solidFill>
-              <a:srgbClr val="9A9992"/>
-            </a:solidFill>
-          </a:ln>
-        </p:spPr>
-        <p:style>
-          <a:lnRef idx="2">
-            <a:schemeClr val="accent1"/>
-          </a:lnRef>
-          <a:fillRef idx="0">
-            <a:schemeClr val="accent1"/>
-          </a:fillRef>
-          <a:effectRef idx="1">
-            <a:schemeClr val="accent1"/>
-          </a:effectRef>
-          <a:fontRef idx="minor">
-            <a:schemeClr val="tx1"/>
-          </a:fontRef>
-        </p:style>
-      </p:cxnSp>
-      <p:sp>
-        <p:nvSpPr>
-          <p:cNvPr id="14" name="TextBox 13"/>
+        <p:txBody>
+          <a:bodyPr rtlCol="0" anchor="ctr"/>
+          <a:lstStyle/>
+          <a:p>
+            <a:pPr algn="ctr"/>
+          </a:p>
+        </p:txBody>
+      </p:sp>
+      <p:sp>
+        <p:nvSpPr>
+          <p:cNvPr id="23" name="TextBox 22"/>
           <p:cNvSpPr txBox="1"/>
           <p:nvPr/>
         </p:nvSpPr>
         <p:spPr>
           <a:xfrm>
-            <a:off x="2596896" y="1280160"/>
-            <a:ext cx="2212848" cy="274320"/>
+            <a:off x="3922776" y="2386584"/>
+            <a:ext cx="1133856" cy="530352"/>
           </a:xfrm>
           <a:prstGeom prst="rect">
             <a:avLst/>
@@ -3686,40 +4144,56 @@
           <a:p>
             <a:pPr algn="l">
               <a:spcAft>
-                <a:spcPts val="0"/>
-              </a:spcAft>
-            </a:pPr>
-            <a:r>
-              <a:rPr sz="1200" b="1">
+                <a:spcPts val="100"/>
+              </a:spcAft>
+            </a:pPr>
+            <a:r>
+              <a:rPr sz="1250" b="1">
                 <a:solidFill>
                   <a:srgbClr val="141414"/>
                 </a:solidFill>
                 <a:latin typeface="Arial"/>
               </a:rPr>
-              <a:t>PCBA L6</a:t>
-            </a:r>
-            <a:r>
-              <a:rPr sz="1000" b="0">
+              <a:t>MLT</a:t>
+            </a:r>
+          </a:p>
+          <a:p>
+            <a:pPr algn="l">
+              <a:spcAft>
+                <a:spcPts val="100"/>
+              </a:spcAft>
+            </a:pPr>
+            <a:r>
+              <a:rPr sz="1600" b="1">
+                <a:solidFill>
+                  <a:srgbClr val="B56B00"/>
+                </a:solidFill>
+                <a:latin typeface="Arial"/>
+              </a:rPr>
+              <a:t>65.5%</a:t>
+            </a:r>
+            <a:r>
+              <a:rPr sz="900" b="0">
                 <a:solidFill>
                   <a:srgbClr val="6B6B6B"/>
                 </a:solidFill>
                 <a:latin typeface="Arial"/>
               </a:rPr>
-              <a:t>  @Pega</a:t>
-            </a:r>
-          </a:p>
-        </p:txBody>
-      </p:sp>
-      <p:sp>
-        <p:nvSpPr>
-          <p:cNvPr id="15" name="Rounded Rectangle 14"/>
+              <a:t>  228u</a:t>
+            </a:r>
+          </a:p>
+        </p:txBody>
+      </p:sp>
+      <p:sp>
+        <p:nvSpPr>
+          <p:cNvPr id="24" name="Rounded Rectangle 23"/>
           <p:cNvSpPr/>
           <p:nvPr/>
         </p:nvSpPr>
         <p:spPr>
           <a:xfrm>
-            <a:off x="2596896" y="1572768"/>
-            <a:ext cx="1847088" cy="786384"/>
+            <a:off x="3840480" y="3163824"/>
+            <a:ext cx="1298448" cy="640080"/>
           </a:xfrm>
           <a:prstGeom prst="roundRect">
             <a:avLst/>
@@ -3749,7 +4223,7 @@
           </a:fontRef>
         </p:style>
         <p:txBody>
-          <a:bodyPr rtlCol="0" anchor="ctr" wrap="square"/>
+          <a:bodyPr rtlCol="0" anchor="ctr"/>
           <a:lstStyle/>
           <a:p>
             <a:pPr algn="ctr"/>
@@ -3758,14 +4232,14 @@
       </p:sp>
       <p:sp>
         <p:nvSpPr>
-          <p:cNvPr id="16" name="TextBox 15"/>
+          <p:cNvPr id="25" name="TextBox 24"/>
           <p:cNvSpPr txBox="1"/>
           <p:nvPr/>
         </p:nvSpPr>
         <p:spPr>
           <a:xfrm>
-            <a:off x="2697480" y="1664208"/>
-            <a:ext cx="1645920" cy="640080"/>
+            <a:off x="3922776" y="3227832"/>
+            <a:ext cx="1133856" cy="530352"/>
           </a:xfrm>
           <a:prstGeom prst="rect">
             <a:avLst/>
@@ -3784,27 +4258,111 @@
               </a:spcAft>
             </a:pPr>
             <a:r>
-              <a:rPr sz="1300" b="0">
+              <a:rPr sz="1250" b="0">
                 <a:solidFill>
                   <a:srgbClr val="141414"/>
                 </a:solidFill>
                 <a:latin typeface="Arial"/>
               </a:rPr>
-              <a:t>SMT / ICT</a:t>
-            </a:r>
-          </a:p>
-        </p:txBody>
-      </p:sp>
-      <p:sp>
-        <p:nvSpPr>
-          <p:cNvPr id="17" name="Rounded Rectangle 16"/>
+              <a:t>ASSY</a:t>
+            </a:r>
+          </a:p>
+        </p:txBody>
+      </p:sp>
+      <p:sp>
+        <p:nvSpPr>
+          <p:cNvPr id="26" name="TextBox 25"/>
+          <p:cNvSpPr txBox="1"/>
+          <p:nvPr/>
+        </p:nvSpPr>
+        <p:spPr>
+          <a:xfrm>
+            <a:off x="5358384" y="1188720"/>
+            <a:ext cx="2743200" cy="237744"/>
+          </a:xfrm>
+          <a:prstGeom prst="rect">
+            <a:avLst/>
+          </a:prstGeom>
+          <a:noFill/>
+        </p:spPr>
+        <p:txBody>
+          <a:bodyPr wrap="square" lIns="0" rIns="0" tIns="0" bIns="0">
+            <a:spAutoFit/>
+          </a:bodyPr>
+          <a:lstStyle/>
+          <a:p>
+            <a:pPr algn="l">
+              <a:spcAft>
+                <a:spcPts val="0"/>
+              </a:spcAft>
+            </a:pPr>
+            <a:r>
+              <a:rPr sz="1000" b="0">
+                <a:solidFill>
+                  <a:srgbClr val="6B6B6B"/>
+                </a:solidFill>
+                <a:latin typeface="Arial"/>
+              </a:rPr>
+              <a:t/>
+            </a:r>
+            <a:r>
+              <a:rPr sz="1250" b="1">
+                <a:solidFill>
+                  <a:srgbClr val="141414"/>
+                </a:solidFill>
+                <a:latin typeface="Arial"/>
+              </a:rPr>
+              <a:t>FATP L10 2U/4U</a:t>
+            </a:r>
+          </a:p>
+        </p:txBody>
+      </p:sp>
+      <p:cxnSp>
+        <p:nvCxnSpPr>
+          <p:cNvPr id="27" name="Connector 26"/>
+          <p:cNvCxnSpPr/>
+          <p:nvPr/>
+        </p:nvCxnSpPr>
+        <p:spPr>
+          <a:xfrm>
+            <a:off x="7059168" y="1133856"/>
+            <a:ext cx="0" cy="4672584"/>
+          </a:xfrm>
+          <a:prstGeom prst="line">
+            <a:avLst/>
+          </a:prstGeom>
+          <a:ln w="11430">
+            <a:solidFill>
+              <a:srgbClr val="B5B3AC"/>
+            </a:solidFill>
+            <a:prstDash val="dash"/>
+          </a:ln>
+        </p:spPr>
+        <p:style>
+          <a:lnRef idx="2">
+            <a:schemeClr val="accent1"/>
+          </a:lnRef>
+          <a:fillRef idx="0">
+            <a:schemeClr val="accent1"/>
+          </a:fillRef>
+          <a:effectRef idx="1">
+            <a:schemeClr val="accent1"/>
+          </a:effectRef>
+          <a:fontRef idx="minor">
+            <a:schemeClr val="tx1"/>
+          </a:fontRef>
+        </p:style>
+      </p:cxnSp>
+      <p:sp>
+        <p:nvSpPr>
+          <p:cNvPr id="28" name="Rounded Rectangle 27"/>
           <p:cNvSpPr/>
           <p:nvPr/>
         </p:nvSpPr>
         <p:spPr>
           <a:xfrm>
-            <a:off x="2596896" y="2560320"/>
-            <a:ext cx="1847088" cy="786384"/>
+            <a:off x="5358384" y="1481328"/>
+            <a:ext cx="1078992" cy="640080"/>
           </a:xfrm>
           <a:prstGeom prst="roundRect">
             <a:avLst/>
@@ -3834,7 +4392,7 @@
           </a:fontRef>
         </p:style>
         <p:txBody>
-          <a:bodyPr rtlCol="0" anchor="ctr" wrap="square"/>
+          <a:bodyPr rtlCol="0" anchor="ctr"/>
           <a:lstStyle/>
           <a:p>
             <a:pPr algn="ctr"/>
@@ -3843,14 +4401,14 @@
       </p:sp>
       <p:sp>
         <p:nvSpPr>
-          <p:cNvPr id="18" name="TextBox 17"/>
+          <p:cNvPr id="29" name="TextBox 28"/>
           <p:cNvSpPr txBox="1"/>
           <p:nvPr/>
         </p:nvSpPr>
         <p:spPr>
           <a:xfrm>
-            <a:off x="2697480" y="2651760"/>
-            <a:ext cx="1645920" cy="640080"/>
+            <a:off x="5440680" y="1545336"/>
+            <a:ext cx="914400" cy="530352"/>
           </a:xfrm>
           <a:prstGeom prst="rect">
             <a:avLst/>
@@ -3869,35 +4427,254 @@
               </a:spcAft>
             </a:pPr>
             <a:r>
-              <a:rPr sz="1300" b="0">
+              <a:rPr sz="1250" b="0">
                 <a:solidFill>
                   <a:srgbClr val="141414"/>
                 </a:solidFill>
                 <a:latin typeface="Arial"/>
               </a:rPr>
               <a:t>ASSY</a:t>
+            </a:r>
+          </a:p>
+        </p:txBody>
+      </p:sp>
+      <p:sp>
+        <p:nvSpPr>
+          <p:cNvPr id="30" name="Rectangle 29"/>
+          <p:cNvSpPr/>
+          <p:nvPr/>
+        </p:nvSpPr>
+        <p:spPr>
+          <a:xfrm>
+            <a:off x="6492240" y="1517904"/>
+            <a:ext cx="384048" cy="228600"/>
+          </a:xfrm>
+          <a:prstGeom prst="rect">
+            <a:avLst/>
+          </a:prstGeom>
+          <a:solidFill>
+            <a:srgbClr val="CFE2F3"/>
+          </a:solidFill>
+          <a:ln w="7620">
+            <a:solidFill>
+              <a:srgbClr val="8A8882"/>
+            </a:solidFill>
+          </a:ln>
+          <a:effectLst/>
+        </p:spPr>
+        <p:style>
+          <a:lnRef idx="1">
+            <a:schemeClr val="accent1"/>
+          </a:lnRef>
+          <a:fillRef idx="3">
+            <a:schemeClr val="accent1"/>
+          </a:fillRef>
+          <a:effectRef idx="2">
+            <a:schemeClr val="accent1"/>
+          </a:effectRef>
+          <a:fontRef idx="minor">
+            <a:schemeClr val="lt1"/>
+          </a:fontRef>
+        </p:style>
+        <p:txBody>
+          <a:bodyPr rtlCol="0" anchor="ctr"/>
+          <a:lstStyle/>
+          <a:p>
+            <a:pPr algn="ctr"/>
+          </a:p>
+        </p:txBody>
+      </p:sp>
+      <p:sp>
+        <p:nvSpPr>
+          <p:cNvPr id="31" name="TextBox 30"/>
+          <p:cNvSpPr txBox="1"/>
+          <p:nvPr/>
+        </p:nvSpPr>
+        <p:spPr>
+          <a:xfrm>
+            <a:off x="6492240" y="1545336"/>
+            <a:ext cx="384048" cy="182880"/>
+          </a:xfrm>
+          <a:prstGeom prst="rect">
+            <a:avLst/>
+          </a:prstGeom>
+          <a:noFill/>
+        </p:spPr>
+        <p:txBody>
+          <a:bodyPr wrap="square" lIns="0" rIns="0" tIns="0" bIns="0">
+            <a:spAutoFit/>
+          </a:bodyPr>
+          <a:lstStyle/>
+          <a:p>
+            <a:pPr algn="ctr">
+              <a:spcAft>
+                <a:spcPts val="0"/>
+              </a:spcAft>
+            </a:pPr>
+            <a:r>
+              <a:rPr sz="900" b="1">
+                <a:solidFill>
+                  <a:srgbClr val="141414"/>
+                </a:solidFill>
+                <a:latin typeface="Arial"/>
+              </a:rPr>
+              <a:t>4U</a:t>
+            </a:r>
+          </a:p>
+        </p:txBody>
+      </p:sp>
+      <p:sp>
+        <p:nvSpPr>
+          <p:cNvPr id="32" name="Rectangle 31"/>
+          <p:cNvSpPr/>
+          <p:nvPr/>
+        </p:nvSpPr>
+        <p:spPr>
+          <a:xfrm>
+            <a:off x="6492240" y="1801368"/>
+            <a:ext cx="384048" cy="228600"/>
+          </a:xfrm>
+          <a:prstGeom prst="rect">
+            <a:avLst/>
+          </a:prstGeom>
+          <a:solidFill>
+            <a:srgbClr val="FFF2CC"/>
+          </a:solidFill>
+          <a:ln w="7620">
+            <a:solidFill>
+              <a:srgbClr val="8A8882"/>
+            </a:solidFill>
+          </a:ln>
+          <a:effectLst/>
+        </p:spPr>
+        <p:style>
+          <a:lnRef idx="1">
+            <a:schemeClr val="accent1"/>
+          </a:lnRef>
+          <a:fillRef idx="3">
+            <a:schemeClr val="accent1"/>
+          </a:fillRef>
+          <a:effectRef idx="2">
+            <a:schemeClr val="accent1"/>
+          </a:effectRef>
+          <a:fontRef idx="minor">
+            <a:schemeClr val="lt1"/>
+          </a:fontRef>
+        </p:style>
+        <p:txBody>
+          <a:bodyPr rtlCol="0" anchor="ctr"/>
+          <a:lstStyle/>
+          <a:p>
+            <a:pPr algn="ctr"/>
+          </a:p>
+        </p:txBody>
+      </p:sp>
+      <p:sp>
+        <p:nvSpPr>
+          <p:cNvPr id="33" name="TextBox 32"/>
+          <p:cNvSpPr txBox="1"/>
+          <p:nvPr/>
+        </p:nvSpPr>
+        <p:spPr>
+          <a:xfrm>
+            <a:off x="6492240" y="1828800"/>
+            <a:ext cx="384048" cy="182880"/>
+          </a:xfrm>
+          <a:prstGeom prst="rect">
+            <a:avLst/>
+          </a:prstGeom>
+          <a:noFill/>
+        </p:spPr>
+        <p:txBody>
+          <a:bodyPr wrap="square" lIns="0" rIns="0" tIns="0" bIns="0">
+            <a:spAutoFit/>
+          </a:bodyPr>
+          <a:lstStyle/>
+          <a:p>
+            <a:pPr algn="ctr">
+              <a:spcAft>
+                <a:spcPts val="0"/>
+              </a:spcAft>
+            </a:pPr>
+            <a:r>
+              <a:rPr sz="900" b="1">
+                <a:solidFill>
+                  <a:srgbClr val="141414"/>
+                </a:solidFill>
+                <a:latin typeface="Arial"/>
+              </a:rPr>
+              <a:t>2U</a:t>
+            </a:r>
+          </a:p>
+        </p:txBody>
+      </p:sp>
+      <p:sp>
+        <p:nvSpPr>
+          <p:cNvPr id="34" name="TextBox 33"/>
+          <p:cNvSpPr txBox="1"/>
+          <p:nvPr/>
+        </p:nvSpPr>
+        <p:spPr>
+          <a:xfrm>
+            <a:off x="7242048" y="1188720"/>
+            <a:ext cx="2743200" cy="237744"/>
+          </a:xfrm>
+          <a:prstGeom prst="rect">
+            <a:avLst/>
+          </a:prstGeom>
+          <a:noFill/>
+        </p:spPr>
+        <p:txBody>
+          <a:bodyPr wrap="square" lIns="0" rIns="0" tIns="0" bIns="0">
+            <a:spAutoFit/>
+          </a:bodyPr>
+          <a:lstStyle/>
+          <a:p>
+            <a:pPr algn="l">
+              <a:spcAft>
+                <a:spcPts val="0"/>
+              </a:spcAft>
+            </a:pPr>
+            <a:r>
+              <a:rPr sz="1000" b="0">
+                <a:solidFill>
+                  <a:srgbClr val="6B6B6B"/>
+                </a:solidFill>
+                <a:latin typeface="Arial"/>
+              </a:rPr>
+              <a:t/>
+            </a:r>
+            <a:r>
+              <a:rPr sz="1250" b="1">
+                <a:solidFill>
+                  <a:srgbClr val="141414"/>
+                </a:solidFill>
+                <a:latin typeface="Arial"/>
+              </a:rPr>
+              <a:t>FATP L10 6U</a:t>
             </a:r>
           </a:p>
         </p:txBody>
       </p:sp>
       <p:cxnSp>
         <p:nvCxnSpPr>
-          <p:cNvPr id="19" name="Connector 18"/>
+          <p:cNvPr id="35" name="Connector 34"/>
           <p:cNvCxnSpPr/>
           <p:nvPr/>
         </p:nvCxnSpPr>
         <p:spPr>
           <a:xfrm>
-            <a:off x="3520440" y="2359152"/>
-            <a:ext cx="0" cy="201168"/>
+            <a:off x="10204704" y="1133856"/>
+            <a:ext cx="0" cy="4672584"/>
           </a:xfrm>
           <a:prstGeom prst="line">
             <a:avLst/>
           </a:prstGeom>
-          <a:ln w="13970">
+          <a:ln w="11430">
             <a:solidFill>
-              <a:srgbClr val="9A9992"/>
+              <a:srgbClr val="B5B3AC"/>
             </a:solidFill>
+            <a:prstDash val="dash"/>
           </a:ln>
         </p:spPr>
         <p:style>
@@ -3917,24 +4694,24 @@
       </p:cxnSp>
       <p:sp>
         <p:nvSpPr>
-          <p:cNvPr id="20" name="Rounded Rectangle 19"/>
+          <p:cNvPr id="36" name="Rounded Rectangle 35"/>
           <p:cNvSpPr/>
           <p:nvPr/>
         </p:nvSpPr>
         <p:spPr>
           <a:xfrm>
-            <a:off x="2596896" y="3547872"/>
-            <a:ext cx="1847088" cy="786384"/>
+            <a:off x="7242048" y="2322576"/>
+            <a:ext cx="1389888" cy="640080"/>
           </a:xfrm>
           <a:prstGeom prst="roundRect">
             <a:avLst/>
           </a:prstGeom>
           <a:solidFill>
-            <a:srgbClr val="D5E8D4"/>
+            <a:srgbClr val="F2ECD9"/>
           </a:solidFill>
           <a:ln w="12700">
             <a:solidFill>
-              <a:srgbClr val="82B366"/>
+              <a:srgbClr val="C9B46B"/>
             </a:solidFill>
           </a:ln>
           <a:effectLst/>
@@ -3954,7 +4731,7 @@
           </a:fontRef>
         </p:style>
         <p:txBody>
-          <a:bodyPr rtlCol="0" anchor="ctr" wrap="square"/>
+          <a:bodyPr rtlCol="0" anchor="ctr"/>
           <a:lstStyle/>
           <a:p>
             <a:pPr algn="ctr"/>
@@ -3963,14 +4740,14 @@
       </p:sp>
       <p:sp>
         <p:nvSpPr>
-          <p:cNvPr id="21" name="TextBox 20"/>
+          <p:cNvPr id="37" name="TextBox 36"/>
           <p:cNvSpPr txBox="1"/>
           <p:nvPr/>
         </p:nvSpPr>
         <p:spPr>
           <a:xfrm>
-            <a:off x="2697480" y="3639312"/>
-            <a:ext cx="1645920" cy="640080"/>
+            <a:off x="7324344" y="2386584"/>
+            <a:ext cx="1225296" cy="530352"/>
           </a:xfrm>
           <a:prstGeom prst="rect">
             <a:avLst/>
@@ -3989,13 +4766,13 @@
               </a:spcAft>
             </a:pPr>
             <a:r>
-              <a:rPr sz="1300" b="1">
+              <a:rPr sz="1250" b="1">
                 <a:solidFill>
                   <a:srgbClr val="141414"/>
                 </a:solidFill>
                 <a:latin typeface="Arial"/>
               </a:rPr>
-              <a:t>MLT</a:t>
+              <a:t>FAT / SFT</a:t>
             </a:r>
           </a:p>
           <a:p>
@@ -4005,81 +4782,53 @@
               </a:spcAft>
             </a:pPr>
             <a:r>
-              <a:rPr sz="1700" b="1">
-                <a:solidFill>
-                  <a:srgbClr val="B56B00"/>
-                </a:solidFill>
-                <a:latin typeface="Arial"/>
-              </a:rPr>
-              <a:t>65.5%</a:t>
-            </a:r>
-            <a:r>
-              <a:rPr sz="900" b="0">
+              <a:rPr sz="1100" b="1">
+                <a:solidFill>
+                  <a:srgbClr val="141414"/>
+                </a:solidFill>
+                <a:latin typeface="Arial"/>
+              </a:rPr>
+              <a:t>FAT 2u · SFT 1u</a:t>
+            </a:r>
+          </a:p>
+          <a:p>
+            <a:pPr algn="l">
+              <a:spcAft>
+                <a:spcPts val="100"/>
+              </a:spcAft>
+            </a:pPr>
+            <a:r>
+              <a:rPr sz="800" b="0">
                 <a:solidFill>
                   <a:srgbClr val="6B6B6B"/>
                 </a:solidFill>
                 <a:latin typeface="Arial"/>
               </a:rPr>
-              <a:t>   228 units</a:t>
-            </a:r>
-          </a:p>
-        </p:txBody>
-      </p:sp>
-      <p:cxnSp>
-        <p:nvCxnSpPr>
-          <p:cNvPr id="22" name="Connector 21"/>
-          <p:cNvCxnSpPr/>
-          <p:nvPr/>
-        </p:nvCxnSpPr>
-        <p:spPr>
-          <a:xfrm>
-            <a:off x="3520440" y="3346704"/>
-            <a:ext cx="0" cy="201168"/>
-          </a:xfrm>
-          <a:prstGeom prst="line">
-            <a:avLst/>
-          </a:prstGeom>
-          <a:ln w="13970">
-            <a:solidFill>
-              <a:srgbClr val="9A9992"/>
-            </a:solidFill>
-          </a:ln>
-        </p:spPr>
-        <p:style>
-          <a:lnRef idx="2">
-            <a:schemeClr val="accent1"/>
-          </a:lnRef>
-          <a:fillRef idx="0">
-            <a:schemeClr val="accent1"/>
-          </a:fillRef>
-          <a:effectRef idx="1">
-            <a:schemeClr val="accent1"/>
-          </a:effectRef>
-          <a:fontRef idx="minor">
-            <a:schemeClr val="tx1"/>
-          </a:fontRef>
-        </p:style>
-      </p:cxnSp>
-      <p:sp>
-        <p:nvSpPr>
-          <p:cNvPr id="23" name="Rounded Rectangle 22"/>
+              <a:t>quantity only</a:t>
+            </a:r>
+          </a:p>
+        </p:txBody>
+      </p:sp>
+      <p:sp>
+        <p:nvSpPr>
+          <p:cNvPr id="38" name="Rounded Rectangle 37"/>
           <p:cNvSpPr/>
           <p:nvPr/>
         </p:nvSpPr>
         <p:spPr>
           <a:xfrm>
-            <a:off x="2596896" y="4535424"/>
-            <a:ext cx="1847088" cy="786384"/>
+            <a:off x="7242048" y="3163824"/>
+            <a:ext cx="1389888" cy="640080"/>
           </a:xfrm>
           <a:prstGeom prst="roundRect">
             <a:avLst/>
           </a:prstGeom>
           <a:solidFill>
-            <a:srgbClr val="D5E8D4"/>
+            <a:srgbClr val="F2ECD9"/>
           </a:solidFill>
           <a:ln w="12700">
             <a:solidFill>
-              <a:srgbClr val="82B366"/>
+              <a:srgbClr val="C9B46B"/>
             </a:solidFill>
           </a:ln>
           <a:effectLst/>
@@ -4099,7 +4848,7 @@
           </a:fontRef>
         </p:style>
         <p:txBody>
-          <a:bodyPr rtlCol="0" anchor="ctr" wrap="square"/>
+          <a:bodyPr rtlCol="0" anchor="ctr"/>
           <a:lstStyle/>
           <a:p>
             <a:pPr algn="ctr"/>
@@ -4108,14 +4857,14 @@
       </p:sp>
       <p:sp>
         <p:nvSpPr>
-          <p:cNvPr id="24" name="TextBox 23"/>
+          <p:cNvPr id="39" name="TextBox 38"/>
           <p:cNvSpPr txBox="1"/>
           <p:nvPr/>
         </p:nvSpPr>
         <p:spPr>
           <a:xfrm>
-            <a:off x="2697480" y="4626864"/>
-            <a:ext cx="1645920" cy="640080"/>
+            <a:off x="7324344" y="3227832"/>
+            <a:ext cx="1225296" cy="530352"/>
           </a:xfrm>
           <a:prstGeom prst="rect">
             <a:avLst/>
@@ -4134,13 +4883,29 @@
               </a:spcAft>
             </a:pPr>
             <a:r>
+              <a:rPr sz="1250" b="1">
+                <a:solidFill>
+                  <a:srgbClr val="141414"/>
+                </a:solidFill>
+                <a:latin typeface="Arial"/>
+              </a:rPr>
+              <a:t>2U</a:t>
+            </a:r>
+          </a:p>
+          <a:p>
+            <a:pPr algn="l">
+              <a:spcAft>
+                <a:spcPts val="100"/>
+              </a:spcAft>
+            </a:pPr>
+            <a:r>
               <a:rPr sz="1300" b="1">
                 <a:solidFill>
                   <a:srgbClr val="141414"/>
                 </a:solidFill>
                 <a:latin typeface="Arial"/>
               </a:rPr>
-              <a:t>HTT</a:t>
+              <a:t>3 units</a:t>
             </a:r>
           </a:p>
           <a:p>
@@ -4150,154 +4915,27 @@
               </a:spcAft>
             </a:pPr>
             <a:r>
-              <a:rPr sz="1700" b="1">
-                <a:solidFill>
-                  <a:srgbClr val="B3281E"/>
-                </a:solidFill>
-                <a:latin typeface="Arial"/>
-              </a:rPr>
-              <a:t>54.3%</a:t>
-            </a:r>
-            <a:r>
-              <a:rPr sz="900" b="0">
+              <a:rPr sz="800" b="0">
                 <a:solidFill>
                   <a:srgbClr val="6B6B6B"/>
                 </a:solidFill>
                 <a:latin typeface="Arial"/>
               </a:rPr>
-              <a:t>   170 units</a:t>
-            </a:r>
-          </a:p>
-        </p:txBody>
-      </p:sp>
-      <p:cxnSp>
-        <p:nvCxnSpPr>
-          <p:cNvPr id="25" name="Connector 24"/>
-          <p:cNvCxnSpPr/>
-          <p:nvPr/>
-        </p:nvCxnSpPr>
-        <p:spPr>
-          <a:xfrm>
-            <a:off x="3520440" y="4334256"/>
-            <a:ext cx="0" cy="201168"/>
-          </a:xfrm>
-          <a:prstGeom prst="line">
-            <a:avLst/>
-          </a:prstGeom>
-          <a:ln w="13970">
-            <a:solidFill>
-              <a:srgbClr val="9A9992"/>
-            </a:solidFill>
-          </a:ln>
-        </p:spPr>
-        <p:style>
-          <a:lnRef idx="2">
-            <a:schemeClr val="accent1"/>
-          </a:lnRef>
-          <a:fillRef idx="0">
-            <a:schemeClr val="accent1"/>
-          </a:fillRef>
-          <a:effectRef idx="1">
-            <a:schemeClr val="accent1"/>
-          </a:effectRef>
-          <a:fontRef idx="minor">
-            <a:schemeClr val="tx1"/>
-          </a:fontRef>
-        </p:style>
-      </p:cxnSp>
-      <p:cxnSp>
-        <p:nvCxnSpPr>
-          <p:cNvPr id="26" name="Connector 25"/>
-          <p:cNvCxnSpPr/>
-          <p:nvPr/>
-        </p:nvCxnSpPr>
-        <p:spPr>
-          <a:xfrm flipV="1">
-            <a:off x="4443984" y="1965960"/>
-            <a:ext cx="365760" cy="2962656"/>
-          </a:xfrm>
-          <a:prstGeom prst="line">
-            <a:avLst/>
-          </a:prstGeom>
-          <a:ln w="13970">
-            <a:solidFill>
-              <a:srgbClr val="9A9992"/>
-            </a:solidFill>
-          </a:ln>
-        </p:spPr>
-        <p:style>
-          <a:lnRef idx="2">
-            <a:schemeClr val="accent1"/>
-          </a:lnRef>
-          <a:fillRef idx="0">
-            <a:schemeClr val="accent1"/>
-          </a:fillRef>
-          <a:effectRef idx="1">
-            <a:schemeClr val="accent1"/>
-          </a:effectRef>
-          <a:fontRef idx="minor">
-            <a:schemeClr val="tx1"/>
-          </a:fontRef>
-        </p:style>
-      </p:cxnSp>
-      <p:sp>
-        <p:nvSpPr>
-          <p:cNvPr id="27" name="TextBox 26"/>
-          <p:cNvSpPr txBox="1"/>
-          <p:nvPr/>
-        </p:nvSpPr>
-        <p:spPr>
-          <a:xfrm>
-            <a:off x="4809744" y="1280160"/>
-            <a:ext cx="2212848" cy="274320"/>
-          </a:xfrm>
-          <a:prstGeom prst="rect">
-            <a:avLst/>
-          </a:prstGeom>
-          <a:noFill/>
-        </p:spPr>
-        <p:txBody>
-          <a:bodyPr wrap="square" lIns="0" rIns="0" tIns="0" bIns="0">
-            <a:spAutoFit/>
-          </a:bodyPr>
-          <a:lstStyle/>
-          <a:p>
-            <a:pPr algn="l">
-              <a:spcAft>
-                <a:spcPts val="0"/>
-              </a:spcAft>
-            </a:pPr>
-            <a:r>
-              <a:rPr sz="1200" b="1">
-                <a:solidFill>
-                  <a:srgbClr val="141414"/>
-                </a:solidFill>
-                <a:latin typeface="Arial"/>
-              </a:rPr>
-              <a:t>FATP L10 2U/4U</a:t>
-            </a:r>
-            <a:r>
-              <a:rPr sz="1000" b="0">
-                <a:solidFill>
-                  <a:srgbClr val="6B6B6B"/>
-                </a:solidFill>
-                <a:latin typeface="Arial"/>
-              </a:rPr>
-              <a:t>  </a:t>
-            </a:r>
-          </a:p>
-        </p:txBody>
-      </p:sp>
-      <p:sp>
-        <p:nvSpPr>
-          <p:cNvPr id="28" name="Rounded Rectangle 27"/>
+              <a:t>quantity only</a:t>
+            </a:r>
+          </a:p>
+        </p:txBody>
+      </p:sp>
+      <p:sp>
+        <p:nvSpPr>
+          <p:cNvPr id="40" name="Rounded Rectangle 39"/>
           <p:cNvSpPr/>
           <p:nvPr/>
         </p:nvSpPr>
         <p:spPr>
           <a:xfrm>
-            <a:off x="4809744" y="1572768"/>
-            <a:ext cx="1847088" cy="786384"/>
+            <a:off x="7242048" y="4005072"/>
+            <a:ext cx="1389888" cy="640080"/>
           </a:xfrm>
           <a:prstGeom prst="roundRect">
             <a:avLst/>
@@ -4327,7 +4965,7 @@
           </a:fontRef>
         </p:style>
         <p:txBody>
-          <a:bodyPr rtlCol="0" anchor="ctr" wrap="square"/>
+          <a:bodyPr rtlCol="0" anchor="ctr"/>
           <a:lstStyle/>
           <a:p>
             <a:pPr algn="ctr"/>
@@ -4336,14 +4974,14 @@
       </p:sp>
       <p:sp>
         <p:nvSpPr>
-          <p:cNvPr id="29" name="TextBox 28"/>
+          <p:cNvPr id="41" name="TextBox 40"/>
           <p:cNvSpPr txBox="1"/>
           <p:nvPr/>
         </p:nvSpPr>
         <p:spPr>
           <a:xfrm>
-            <a:off x="4910328" y="1664208"/>
-            <a:ext cx="1645920" cy="640080"/>
+            <a:off x="7324344" y="4069080"/>
+            <a:ext cx="1225296" cy="530352"/>
           </a:xfrm>
           <a:prstGeom prst="rect">
             <a:avLst/>
@@ -4362,7 +5000,7 @@
               </a:spcAft>
             </a:pPr>
             <a:r>
-              <a:rPr sz="1300" b="0">
+              <a:rPr sz="1250" b="0">
                 <a:solidFill>
                   <a:srgbClr val="141414"/>
                 </a:solidFill>
@@ -4371,69 +5009,64 @@
               <a:t>ASSY</a:t>
             </a:r>
           </a:p>
-          <a:p>
-            <a:pPr algn="l">
-              <a:spcAft>
-                <a:spcPts val="100"/>
-              </a:spcAft>
-            </a:pPr>
-            <a:r>
-              <a:rPr sz="900" b="0">
-                <a:solidFill>
-                  <a:srgbClr val="6B6B6B"/>
-                </a:solidFill>
-                <a:latin typeface="Arial"/>
-              </a:rPr>
-              <a:t>4U / 2U</a:t>
-            </a:r>
-          </a:p>
-        </p:txBody>
-      </p:sp>
-      <p:cxnSp>
-        <p:nvCxnSpPr>
-          <p:cNvPr id="30" name="Connector 29"/>
-          <p:cNvCxnSpPr/>
-          <p:nvPr/>
-        </p:nvCxnSpPr>
-        <p:spPr>
-          <a:xfrm>
-            <a:off x="6656832" y="1965960"/>
-            <a:ext cx="365760" cy="0"/>
-          </a:xfrm>
-          <a:prstGeom prst="line">
-            <a:avLst/>
-          </a:prstGeom>
-          <a:ln w="13970">
+        </p:txBody>
+      </p:sp>
+      <p:sp>
+        <p:nvSpPr>
+          <p:cNvPr id="42" name="Rounded Rectangle 41"/>
+          <p:cNvSpPr/>
+          <p:nvPr/>
+        </p:nvSpPr>
+        <p:spPr>
+          <a:xfrm>
+            <a:off x="8741664" y="2322576"/>
+            <a:ext cx="1298448" cy="640080"/>
+          </a:xfrm>
+          <a:prstGeom prst="roundRect">
+            <a:avLst/>
+          </a:prstGeom>
+          <a:solidFill>
+            <a:srgbClr val="F2ECD9"/>
+          </a:solidFill>
+          <a:ln w="12700">
             <a:solidFill>
-              <a:srgbClr val="9A9992"/>
+              <a:srgbClr val="C9B46B"/>
             </a:solidFill>
           </a:ln>
+          <a:effectLst/>
         </p:spPr>
         <p:style>
-          <a:lnRef idx="2">
+          <a:lnRef idx="1">
             <a:schemeClr val="accent1"/>
           </a:lnRef>
-          <a:fillRef idx="0">
+          <a:fillRef idx="3">
             <a:schemeClr val="accent1"/>
           </a:fillRef>
-          <a:effectRef idx="1">
+          <a:effectRef idx="2">
             <a:schemeClr val="accent1"/>
           </a:effectRef>
           <a:fontRef idx="minor">
-            <a:schemeClr val="tx1"/>
+            <a:schemeClr val="lt1"/>
           </a:fontRef>
         </p:style>
-      </p:cxnSp>
-      <p:sp>
-        <p:nvSpPr>
-          <p:cNvPr id="31" name="TextBox 30"/>
+        <p:txBody>
+          <a:bodyPr rtlCol="0" anchor="ctr"/>
+          <a:lstStyle/>
+          <a:p>
+            <a:pPr algn="ctr"/>
+          </a:p>
+        </p:txBody>
+      </p:sp>
+      <p:sp>
+        <p:nvSpPr>
+          <p:cNvPr id="43" name="TextBox 42"/>
           <p:cNvSpPr txBox="1"/>
           <p:nvPr/>
         </p:nvSpPr>
         <p:spPr>
           <a:xfrm>
-            <a:off x="7022592" y="1280160"/>
-            <a:ext cx="2212848" cy="274320"/>
+            <a:off x="8823960" y="2386584"/>
+            <a:ext cx="1133856" cy="530352"/>
           </a:xfrm>
           <a:prstGeom prst="rect">
             <a:avLst/>
@@ -4448,40 +5081,111 @@
           <a:p>
             <a:pPr algn="l">
               <a:spcAft>
+                <a:spcPts val="100"/>
+              </a:spcAft>
+            </a:pPr>
+            <a:r>
+              <a:rPr sz="1250" b="1">
+                <a:solidFill>
+                  <a:srgbClr val="141414"/>
+                </a:solidFill>
+                <a:latin typeface="Arial"/>
+              </a:rPr>
+              <a:t>Runin</a:t>
+            </a:r>
+          </a:p>
+          <a:p>
+            <a:pPr algn="l">
+              <a:spcAft>
+                <a:spcPts val="100"/>
+              </a:spcAft>
+            </a:pPr>
+            <a:r>
+              <a:rPr sz="1300" b="1">
+                <a:solidFill>
+                  <a:srgbClr val="141414"/>
+                </a:solidFill>
+                <a:latin typeface="Arial"/>
+              </a:rPr>
+              <a:t>1 unit</a:t>
+            </a:r>
+          </a:p>
+          <a:p>
+            <a:pPr algn="l">
+              <a:spcAft>
+                <a:spcPts val="100"/>
+              </a:spcAft>
+            </a:pPr>
+            <a:r>
+              <a:rPr sz="800" b="0">
+                <a:solidFill>
+                  <a:srgbClr val="6B6B6B"/>
+                </a:solidFill>
+                <a:latin typeface="Arial"/>
+              </a:rPr>
+              <a:t>quantity only</a:t>
+            </a:r>
+          </a:p>
+        </p:txBody>
+      </p:sp>
+      <p:sp>
+        <p:nvSpPr>
+          <p:cNvPr id="44" name="TextBox 43"/>
+          <p:cNvSpPr txBox="1"/>
+          <p:nvPr/>
+        </p:nvSpPr>
+        <p:spPr>
+          <a:xfrm>
+            <a:off x="10369296" y="1188720"/>
+            <a:ext cx="1655064" cy="237744"/>
+          </a:xfrm>
+          <a:prstGeom prst="rect">
+            <a:avLst/>
+          </a:prstGeom>
+          <a:noFill/>
+        </p:spPr>
+        <p:txBody>
+          <a:bodyPr wrap="square" lIns="0" rIns="0" tIns="0" bIns="0">
+            <a:spAutoFit/>
+          </a:bodyPr>
+          <a:lstStyle/>
+          <a:p>
+            <a:pPr algn="l">
+              <a:spcAft>
                 <a:spcPts val="0"/>
               </a:spcAft>
             </a:pPr>
             <a:r>
-              <a:rPr sz="1200" b="1">
+              <a:rPr sz="1000" b="0">
+                <a:solidFill>
+                  <a:srgbClr val="6B6B6B"/>
+                </a:solidFill>
+                <a:latin typeface="Arial"/>
+              </a:rPr>
+              <a:t/>
+            </a:r>
+            <a:r>
+              <a:rPr sz="1250" b="1">
                 <a:solidFill>
                   <a:srgbClr val="141414"/>
                 </a:solidFill>
                 <a:latin typeface="Arial"/>
               </a:rPr>
-              <a:t>FATP L10 6U</a:t>
-            </a:r>
-            <a:r>
-              <a:rPr sz="1000" b="0">
-                <a:solidFill>
-                  <a:srgbClr val="6B6B6B"/>
-                </a:solidFill>
-                <a:latin typeface="Arial"/>
-              </a:rPr>
-              <a:t>  </a:t>
-            </a:r>
-          </a:p>
-        </p:txBody>
-      </p:sp>
-      <p:sp>
-        <p:nvSpPr>
-          <p:cNvPr id="32" name="Rounded Rectangle 31"/>
+              <a:t>Rack L11</a:t>
+            </a:r>
+          </a:p>
+        </p:txBody>
+      </p:sp>
+      <p:sp>
+        <p:nvSpPr>
+          <p:cNvPr id="45" name="Rounded Rectangle 44"/>
           <p:cNvSpPr/>
           <p:nvPr/>
         </p:nvSpPr>
         <p:spPr>
           <a:xfrm>
-            <a:off x="7022592" y="1572768"/>
-            <a:ext cx="1847088" cy="786384"/>
+            <a:off x="10369296" y="2322576"/>
+            <a:ext cx="1389888" cy="640080"/>
           </a:xfrm>
           <a:prstGeom prst="roundRect">
             <a:avLst/>
@@ -4511,7 +5215,7 @@
           </a:fontRef>
         </p:style>
         <p:txBody>
-          <a:bodyPr rtlCol="0" anchor="ctr" wrap="square"/>
+          <a:bodyPr rtlCol="0" anchor="ctr"/>
           <a:lstStyle/>
           <a:p>
             <a:pPr algn="ctr"/>
@@ -4520,14 +5224,14 @@
       </p:sp>
       <p:sp>
         <p:nvSpPr>
-          <p:cNvPr id="33" name="TextBox 32"/>
+          <p:cNvPr id="46" name="TextBox 45"/>
           <p:cNvSpPr txBox="1"/>
           <p:nvPr/>
         </p:nvSpPr>
         <p:spPr>
           <a:xfrm>
-            <a:off x="7123176" y="1664208"/>
-            <a:ext cx="1645920" cy="640080"/>
+            <a:off x="10451592" y="2386584"/>
+            <a:ext cx="1225296" cy="530352"/>
           </a:xfrm>
           <a:prstGeom prst="rect">
             <a:avLst/>
@@ -4546,7 +5250,7 @@
               </a:spcAft>
             </a:pPr>
             <a:r>
-              <a:rPr sz="1300" b="0">
+              <a:rPr sz="1250" b="0">
                 <a:solidFill>
                   <a:srgbClr val="141414"/>
                 </a:solidFill>
@@ -4559,14 +5263,14 @@
       </p:sp>
       <p:sp>
         <p:nvSpPr>
-          <p:cNvPr id="34" name="Rounded Rectangle 33"/>
+          <p:cNvPr id="47" name="Rounded Rectangle 46"/>
           <p:cNvSpPr/>
           <p:nvPr/>
         </p:nvSpPr>
         <p:spPr>
           <a:xfrm>
-            <a:off x="7022592" y="2560320"/>
-            <a:ext cx="1847088" cy="786384"/>
+            <a:off x="10369296" y="3163824"/>
+            <a:ext cx="1389888" cy="640080"/>
           </a:xfrm>
           <a:prstGeom prst="roundRect">
             <a:avLst/>
@@ -4596,7 +5300,7 @@
           </a:fontRef>
         </p:style>
         <p:txBody>
-          <a:bodyPr rtlCol="0" anchor="ctr" wrap="square"/>
+          <a:bodyPr rtlCol="0" anchor="ctr"/>
           <a:lstStyle/>
           <a:p>
             <a:pPr algn="ctr"/>
@@ -4605,14 +5309,14 @@
       </p:sp>
       <p:sp>
         <p:nvSpPr>
-          <p:cNvPr id="35" name="TextBox 34"/>
+          <p:cNvPr id="48" name="TextBox 47"/>
           <p:cNvSpPr txBox="1"/>
           <p:nvPr/>
         </p:nvSpPr>
         <p:spPr>
           <a:xfrm>
-            <a:off x="7123176" y="2651760"/>
-            <a:ext cx="1645920" cy="640080"/>
+            <a:off x="10451592" y="3227832"/>
+            <a:ext cx="1225296" cy="530352"/>
           </a:xfrm>
           <a:prstGeom prst="rect">
             <a:avLst/>
@@ -4631,13 +5335,29 @@
               </a:spcAft>
             </a:pPr>
             <a:r>
+              <a:rPr sz="1250" b="1">
+                <a:solidFill>
+                  <a:srgbClr val="141414"/>
+                </a:solidFill>
+                <a:latin typeface="Arial"/>
+              </a:rPr>
+              <a:t>FAT / SFT</a:t>
+            </a:r>
+          </a:p>
+          <a:p>
+            <a:pPr algn="l">
+              <a:spcAft>
+                <a:spcPts val="100"/>
+              </a:spcAft>
+            </a:pPr>
+            <a:r>
               <a:rPr sz="1300" b="1">
                 <a:solidFill>
                   <a:srgbClr val="141414"/>
                 </a:solidFill>
                 <a:latin typeface="Arial"/>
               </a:rPr>
-              <a:t>2U</a:t>
+              <a:t>2 units</a:t>
             </a:r>
           </a:p>
           <a:p>
@@ -4647,589 +5367,27 @@
               </a:spcAft>
             </a:pPr>
             <a:r>
-              <a:rPr sz="1200" b="1">
-                <a:solidFill>
-                  <a:srgbClr val="141414"/>
-                </a:solidFill>
-                <a:latin typeface="Arial"/>
-              </a:rPr>
-              <a:t>3 units</a:t>
-            </a:r>
-            <a:r>
-              <a:rPr sz="850" b="0">
+              <a:rPr sz="800" b="0">
                 <a:solidFill>
                   <a:srgbClr val="6B6B6B"/>
                 </a:solidFill>
                 <a:latin typeface="Arial"/>
               </a:rPr>
-              <a:t>  too few for a yield</a:t>
-            </a:r>
-          </a:p>
-        </p:txBody>
-      </p:sp>
-      <p:cxnSp>
-        <p:nvCxnSpPr>
-          <p:cNvPr id="36" name="Connector 35"/>
-          <p:cNvCxnSpPr/>
-          <p:nvPr/>
-        </p:nvCxnSpPr>
-        <p:spPr>
-          <a:xfrm>
-            <a:off x="7946136" y="2359152"/>
-            <a:ext cx="0" cy="201168"/>
-          </a:xfrm>
-          <a:prstGeom prst="line">
-            <a:avLst/>
-          </a:prstGeom>
-          <a:ln w="13970">
-            <a:solidFill>
-              <a:srgbClr val="9A9992"/>
-            </a:solidFill>
-          </a:ln>
-        </p:spPr>
-        <p:style>
-          <a:lnRef idx="2">
-            <a:schemeClr val="accent1"/>
-          </a:lnRef>
-          <a:fillRef idx="0">
-            <a:schemeClr val="accent1"/>
-          </a:fillRef>
-          <a:effectRef idx="1">
-            <a:schemeClr val="accent1"/>
-          </a:effectRef>
-          <a:fontRef idx="minor">
-            <a:schemeClr val="tx1"/>
-          </a:fontRef>
-        </p:style>
-      </p:cxnSp>
-      <p:sp>
-        <p:nvSpPr>
-          <p:cNvPr id="37" name="Rounded Rectangle 36"/>
+              <a:t>quantity only</a:t>
+            </a:r>
+          </a:p>
+        </p:txBody>
+      </p:sp>
+      <p:sp>
+        <p:nvSpPr>
+          <p:cNvPr id="49" name="Rounded Rectangle 48"/>
           <p:cNvSpPr/>
           <p:nvPr/>
         </p:nvSpPr>
         <p:spPr>
           <a:xfrm>
-            <a:off x="7022592" y="3547872"/>
-            <a:ext cx="1847088" cy="786384"/>
-          </a:xfrm>
-          <a:prstGeom prst="roundRect">
-            <a:avLst/>
-          </a:prstGeom>
-          <a:solidFill>
-            <a:srgbClr val="F2ECD9"/>
-          </a:solidFill>
-          <a:ln w="12700">
-            <a:solidFill>
-              <a:srgbClr val="C9B46B"/>
-            </a:solidFill>
-          </a:ln>
-          <a:effectLst/>
-        </p:spPr>
-        <p:style>
-          <a:lnRef idx="1">
-            <a:schemeClr val="accent1"/>
-          </a:lnRef>
-          <a:fillRef idx="3">
-            <a:schemeClr val="accent1"/>
-          </a:fillRef>
-          <a:effectRef idx="2">
-            <a:schemeClr val="accent1"/>
-          </a:effectRef>
-          <a:fontRef idx="minor">
-            <a:schemeClr val="lt1"/>
-          </a:fontRef>
-        </p:style>
-        <p:txBody>
-          <a:bodyPr rtlCol="0" anchor="ctr" wrap="square"/>
-          <a:lstStyle/>
-          <a:p>
-            <a:pPr algn="ctr"/>
-          </a:p>
-        </p:txBody>
-      </p:sp>
-      <p:sp>
-        <p:nvSpPr>
-          <p:cNvPr id="38" name="TextBox 37"/>
-          <p:cNvSpPr txBox="1"/>
-          <p:nvPr/>
-        </p:nvSpPr>
-        <p:spPr>
-          <a:xfrm>
-            <a:off x="7123176" y="3639312"/>
-            <a:ext cx="1645920" cy="640080"/>
-          </a:xfrm>
-          <a:prstGeom prst="rect">
-            <a:avLst/>
-          </a:prstGeom>
-          <a:noFill/>
-        </p:spPr>
-        <p:txBody>
-          <a:bodyPr wrap="square" lIns="0" rIns="0" tIns="0" bIns="0">
-            <a:spAutoFit/>
-          </a:bodyPr>
-          <a:lstStyle/>
-          <a:p>
-            <a:pPr algn="l">
-              <a:spcAft>
-                <a:spcPts val="100"/>
-              </a:spcAft>
-            </a:pPr>
-            <a:r>
-              <a:rPr sz="1300" b="1">
-                <a:solidFill>
-                  <a:srgbClr val="141414"/>
-                </a:solidFill>
-                <a:latin typeface="Arial"/>
-              </a:rPr>
-              <a:t>FAT</a:t>
-            </a:r>
-          </a:p>
-          <a:p>
-            <a:pPr algn="l">
-              <a:spcAft>
-                <a:spcPts val="100"/>
-              </a:spcAft>
-            </a:pPr>
-            <a:r>
-              <a:rPr sz="1200" b="1">
-                <a:solidFill>
-                  <a:srgbClr val="141414"/>
-                </a:solidFill>
-                <a:latin typeface="Arial"/>
-              </a:rPr>
-              <a:t>2 units</a:t>
-            </a:r>
-            <a:r>
-              <a:rPr sz="850" b="0">
-                <a:solidFill>
-                  <a:srgbClr val="6B6B6B"/>
-                </a:solidFill>
-                <a:latin typeface="Arial"/>
-              </a:rPr>
-              <a:t>  too few for a yield</a:t>
-            </a:r>
-          </a:p>
-        </p:txBody>
-      </p:sp>
-      <p:cxnSp>
-        <p:nvCxnSpPr>
-          <p:cNvPr id="39" name="Connector 38"/>
-          <p:cNvCxnSpPr/>
-          <p:nvPr/>
-        </p:nvCxnSpPr>
-        <p:spPr>
-          <a:xfrm>
-            <a:off x="7946136" y="3346704"/>
-            <a:ext cx="0" cy="201168"/>
-          </a:xfrm>
-          <a:prstGeom prst="line">
-            <a:avLst/>
-          </a:prstGeom>
-          <a:ln w="13970">
-            <a:solidFill>
-              <a:srgbClr val="9A9992"/>
-            </a:solidFill>
-          </a:ln>
-        </p:spPr>
-        <p:style>
-          <a:lnRef idx="2">
-            <a:schemeClr val="accent1"/>
-          </a:lnRef>
-          <a:fillRef idx="0">
-            <a:schemeClr val="accent1"/>
-          </a:fillRef>
-          <a:effectRef idx="1">
-            <a:schemeClr val="accent1"/>
-          </a:effectRef>
-          <a:fontRef idx="minor">
-            <a:schemeClr val="tx1"/>
-          </a:fontRef>
-        </p:style>
-      </p:cxnSp>
-      <p:sp>
-        <p:nvSpPr>
-          <p:cNvPr id="40" name="Rounded Rectangle 39"/>
-          <p:cNvSpPr/>
-          <p:nvPr/>
-        </p:nvSpPr>
-        <p:spPr>
-          <a:xfrm>
-            <a:off x="7022592" y="4535424"/>
-            <a:ext cx="1847088" cy="786384"/>
-          </a:xfrm>
-          <a:prstGeom prst="roundRect">
-            <a:avLst/>
-          </a:prstGeom>
-          <a:solidFill>
-            <a:srgbClr val="F2ECD9"/>
-          </a:solidFill>
-          <a:ln w="12700">
-            <a:solidFill>
-              <a:srgbClr val="C9B46B"/>
-            </a:solidFill>
-          </a:ln>
-          <a:effectLst/>
-        </p:spPr>
-        <p:style>
-          <a:lnRef idx="1">
-            <a:schemeClr val="accent1"/>
-          </a:lnRef>
-          <a:fillRef idx="3">
-            <a:schemeClr val="accent1"/>
-          </a:fillRef>
-          <a:effectRef idx="2">
-            <a:schemeClr val="accent1"/>
-          </a:effectRef>
-          <a:fontRef idx="minor">
-            <a:schemeClr val="lt1"/>
-          </a:fontRef>
-        </p:style>
-        <p:txBody>
-          <a:bodyPr rtlCol="0" anchor="ctr" wrap="square"/>
-          <a:lstStyle/>
-          <a:p>
-            <a:pPr algn="ctr"/>
-          </a:p>
-        </p:txBody>
-      </p:sp>
-      <p:sp>
-        <p:nvSpPr>
-          <p:cNvPr id="41" name="TextBox 40"/>
-          <p:cNvSpPr txBox="1"/>
-          <p:nvPr/>
-        </p:nvSpPr>
-        <p:spPr>
-          <a:xfrm>
-            <a:off x="7123176" y="4626864"/>
-            <a:ext cx="1645920" cy="640080"/>
-          </a:xfrm>
-          <a:prstGeom prst="rect">
-            <a:avLst/>
-          </a:prstGeom>
-          <a:noFill/>
-        </p:spPr>
-        <p:txBody>
-          <a:bodyPr wrap="square" lIns="0" rIns="0" tIns="0" bIns="0">
-            <a:spAutoFit/>
-          </a:bodyPr>
-          <a:lstStyle/>
-          <a:p>
-            <a:pPr algn="l">
-              <a:spcAft>
-                <a:spcPts val="100"/>
-              </a:spcAft>
-            </a:pPr>
-            <a:r>
-              <a:rPr sz="1300" b="1">
-                <a:solidFill>
-                  <a:srgbClr val="141414"/>
-                </a:solidFill>
-                <a:latin typeface="Arial"/>
-              </a:rPr>
-              <a:t>SFT</a:t>
-            </a:r>
-          </a:p>
-          <a:p>
-            <a:pPr algn="l">
-              <a:spcAft>
-                <a:spcPts val="100"/>
-              </a:spcAft>
-            </a:pPr>
-            <a:r>
-              <a:rPr sz="1200" b="1">
-                <a:solidFill>
-                  <a:srgbClr val="141414"/>
-                </a:solidFill>
-                <a:latin typeface="Arial"/>
-              </a:rPr>
-              <a:t>1 units</a:t>
-            </a:r>
-            <a:r>
-              <a:rPr sz="850" b="0">
-                <a:solidFill>
-                  <a:srgbClr val="6B6B6B"/>
-                </a:solidFill>
-                <a:latin typeface="Arial"/>
-              </a:rPr>
-              <a:t>  too few for a yield</a:t>
-            </a:r>
-          </a:p>
-        </p:txBody>
-      </p:sp>
-      <p:cxnSp>
-        <p:nvCxnSpPr>
-          <p:cNvPr id="42" name="Connector 41"/>
-          <p:cNvCxnSpPr/>
-          <p:nvPr/>
-        </p:nvCxnSpPr>
-        <p:spPr>
-          <a:xfrm>
-            <a:off x="7946136" y="4334256"/>
-            <a:ext cx="0" cy="201168"/>
-          </a:xfrm>
-          <a:prstGeom prst="line">
-            <a:avLst/>
-          </a:prstGeom>
-          <a:ln w="13970">
-            <a:solidFill>
-              <a:srgbClr val="9A9992"/>
-            </a:solidFill>
-          </a:ln>
-        </p:spPr>
-        <p:style>
-          <a:lnRef idx="2">
-            <a:schemeClr val="accent1"/>
-          </a:lnRef>
-          <a:fillRef idx="0">
-            <a:schemeClr val="accent1"/>
-          </a:fillRef>
-          <a:effectRef idx="1">
-            <a:schemeClr val="accent1"/>
-          </a:effectRef>
-          <a:fontRef idx="minor">
-            <a:schemeClr val="tx1"/>
-          </a:fontRef>
-        </p:style>
-      </p:cxnSp>
-      <p:sp>
-        <p:nvSpPr>
-          <p:cNvPr id="43" name="Rounded Rectangle 42"/>
-          <p:cNvSpPr/>
-          <p:nvPr/>
-        </p:nvSpPr>
-        <p:spPr>
-          <a:xfrm>
-            <a:off x="7022592" y="5522976"/>
-            <a:ext cx="1847088" cy="786384"/>
-          </a:xfrm>
-          <a:prstGeom prst="roundRect">
-            <a:avLst/>
-          </a:prstGeom>
-          <a:solidFill>
-            <a:srgbClr val="F2ECD9"/>
-          </a:solidFill>
-          <a:ln w="12700">
-            <a:solidFill>
-              <a:srgbClr val="C9B46B"/>
-            </a:solidFill>
-          </a:ln>
-          <a:effectLst/>
-        </p:spPr>
-        <p:style>
-          <a:lnRef idx="1">
-            <a:schemeClr val="accent1"/>
-          </a:lnRef>
-          <a:fillRef idx="3">
-            <a:schemeClr val="accent1"/>
-          </a:fillRef>
-          <a:effectRef idx="2">
-            <a:schemeClr val="accent1"/>
-          </a:effectRef>
-          <a:fontRef idx="minor">
-            <a:schemeClr val="lt1"/>
-          </a:fontRef>
-        </p:style>
-        <p:txBody>
-          <a:bodyPr rtlCol="0" anchor="ctr" wrap="square"/>
-          <a:lstStyle/>
-          <a:p>
-            <a:pPr algn="ctr"/>
-          </a:p>
-        </p:txBody>
-      </p:sp>
-      <p:sp>
-        <p:nvSpPr>
-          <p:cNvPr id="44" name="TextBox 43"/>
-          <p:cNvSpPr txBox="1"/>
-          <p:nvPr/>
-        </p:nvSpPr>
-        <p:spPr>
-          <a:xfrm>
-            <a:off x="7123176" y="5614416"/>
-            <a:ext cx="1645920" cy="640080"/>
-          </a:xfrm>
-          <a:prstGeom prst="rect">
-            <a:avLst/>
-          </a:prstGeom>
-          <a:noFill/>
-        </p:spPr>
-        <p:txBody>
-          <a:bodyPr wrap="square" lIns="0" rIns="0" tIns="0" bIns="0">
-            <a:spAutoFit/>
-          </a:bodyPr>
-          <a:lstStyle/>
-          <a:p>
-            <a:pPr algn="l">
-              <a:spcAft>
-                <a:spcPts val="100"/>
-              </a:spcAft>
-            </a:pPr>
-            <a:r>
-              <a:rPr sz="1300" b="1">
-                <a:solidFill>
-                  <a:srgbClr val="141414"/>
-                </a:solidFill>
-                <a:latin typeface="Arial"/>
-              </a:rPr>
-              <a:t>Runin</a:t>
-            </a:r>
-          </a:p>
-          <a:p>
-            <a:pPr algn="l">
-              <a:spcAft>
-                <a:spcPts val="100"/>
-              </a:spcAft>
-            </a:pPr>
-            <a:r>
-              <a:rPr sz="1200" b="1">
-                <a:solidFill>
-                  <a:srgbClr val="141414"/>
-                </a:solidFill>
-                <a:latin typeface="Arial"/>
-              </a:rPr>
-              <a:t>1 units</a:t>
-            </a:r>
-            <a:r>
-              <a:rPr sz="850" b="0">
-                <a:solidFill>
-                  <a:srgbClr val="6B6B6B"/>
-                </a:solidFill>
-                <a:latin typeface="Arial"/>
-              </a:rPr>
-              <a:t>  too few for a yield</a:t>
-            </a:r>
-          </a:p>
-        </p:txBody>
-      </p:sp>
-      <p:cxnSp>
-        <p:nvCxnSpPr>
-          <p:cNvPr id="45" name="Connector 44"/>
-          <p:cNvCxnSpPr/>
-          <p:nvPr/>
-        </p:nvCxnSpPr>
-        <p:spPr>
-          <a:xfrm>
-            <a:off x="7946136" y="5321808"/>
-            <a:ext cx="0" cy="201168"/>
-          </a:xfrm>
-          <a:prstGeom prst="line">
-            <a:avLst/>
-          </a:prstGeom>
-          <a:ln w="13970">
-            <a:solidFill>
-              <a:srgbClr val="9A9992"/>
-            </a:solidFill>
-          </a:ln>
-        </p:spPr>
-        <p:style>
-          <a:lnRef idx="2">
-            <a:schemeClr val="accent1"/>
-          </a:lnRef>
-          <a:fillRef idx="0">
-            <a:schemeClr val="accent1"/>
-          </a:fillRef>
-          <a:effectRef idx="1">
-            <a:schemeClr val="accent1"/>
-          </a:effectRef>
-          <a:fontRef idx="minor">
-            <a:schemeClr val="tx1"/>
-          </a:fontRef>
-        </p:style>
-      </p:cxnSp>
-      <p:cxnSp>
-        <p:nvCxnSpPr>
-          <p:cNvPr id="46" name="Connector 45"/>
-          <p:cNvCxnSpPr/>
-          <p:nvPr/>
-        </p:nvCxnSpPr>
-        <p:spPr>
-          <a:xfrm flipV="1">
-            <a:off x="8869680" y="1965960"/>
-            <a:ext cx="365760" cy="3950208"/>
-          </a:xfrm>
-          <a:prstGeom prst="line">
-            <a:avLst/>
-          </a:prstGeom>
-          <a:ln w="13970">
-            <a:solidFill>
-              <a:srgbClr val="9A9992"/>
-            </a:solidFill>
-          </a:ln>
-        </p:spPr>
-        <p:style>
-          <a:lnRef idx="2">
-            <a:schemeClr val="accent1"/>
-          </a:lnRef>
-          <a:fillRef idx="0">
-            <a:schemeClr val="accent1"/>
-          </a:fillRef>
-          <a:effectRef idx="1">
-            <a:schemeClr val="accent1"/>
-          </a:effectRef>
-          <a:fontRef idx="minor">
-            <a:schemeClr val="tx1"/>
-          </a:fontRef>
-        </p:style>
-      </p:cxnSp>
-      <p:sp>
-        <p:nvSpPr>
-          <p:cNvPr id="47" name="TextBox 46"/>
-          <p:cNvSpPr txBox="1"/>
-          <p:nvPr/>
-        </p:nvSpPr>
-        <p:spPr>
-          <a:xfrm>
-            <a:off x="9235440" y="1280160"/>
-            <a:ext cx="2212848" cy="274320"/>
-          </a:xfrm>
-          <a:prstGeom prst="rect">
-            <a:avLst/>
-          </a:prstGeom>
-          <a:noFill/>
-        </p:spPr>
-        <p:txBody>
-          <a:bodyPr wrap="square" lIns="0" rIns="0" tIns="0" bIns="0">
-            <a:spAutoFit/>
-          </a:bodyPr>
-          <a:lstStyle/>
-          <a:p>
-            <a:pPr algn="l">
-              <a:spcAft>
-                <a:spcPts val="0"/>
-              </a:spcAft>
-            </a:pPr>
-            <a:r>
-              <a:rPr sz="1200" b="1">
-                <a:solidFill>
-                  <a:srgbClr val="141414"/>
-                </a:solidFill>
-                <a:latin typeface="Arial"/>
-              </a:rPr>
-              <a:t>Rack L11</a:t>
-            </a:r>
-            <a:r>
-              <a:rPr sz="1000" b="0">
-                <a:solidFill>
-                  <a:srgbClr val="6B6B6B"/>
-                </a:solidFill>
-                <a:latin typeface="Arial"/>
-              </a:rPr>
-              <a:t>  </a:t>
-            </a:r>
-          </a:p>
-        </p:txBody>
-      </p:sp>
-      <p:sp>
-        <p:nvSpPr>
-          <p:cNvPr id="48" name="Rounded Rectangle 47"/>
-          <p:cNvSpPr/>
-          <p:nvPr/>
-        </p:nvSpPr>
-        <p:spPr>
-          <a:xfrm>
-            <a:off x="9235440" y="1572768"/>
-            <a:ext cx="1847088" cy="786384"/>
+            <a:off x="10369296" y="4005072"/>
+            <a:ext cx="1389888" cy="640080"/>
           </a:xfrm>
           <a:prstGeom prst="roundRect">
             <a:avLst/>
@@ -5259,7 +5417,7 @@
           </a:fontRef>
         </p:style>
         <p:txBody>
-          <a:bodyPr rtlCol="0" anchor="ctr" wrap="square"/>
+          <a:bodyPr rtlCol="0" anchor="ctr"/>
           <a:lstStyle/>
           <a:p>
             <a:pPr algn="ctr"/>
@@ -5268,14 +5426,14 @@
       </p:sp>
       <p:sp>
         <p:nvSpPr>
-          <p:cNvPr id="49" name="TextBox 48"/>
+          <p:cNvPr id="50" name="TextBox 49"/>
           <p:cNvSpPr txBox="1"/>
           <p:nvPr/>
         </p:nvSpPr>
         <p:spPr>
           <a:xfrm>
-            <a:off x="9336024" y="1664208"/>
-            <a:ext cx="1645920" cy="640080"/>
+            <a:off x="10451592" y="4069080"/>
+            <a:ext cx="1225296" cy="530352"/>
           </a:xfrm>
           <a:prstGeom prst="rect">
             <a:avLst/>
@@ -5294,292 +5452,43 @@
               </a:spcAft>
             </a:pPr>
             <a:r>
-              <a:rPr sz="1300" b="0">
+              <a:rPr sz="1250" b="1">
                 <a:solidFill>
                   <a:srgbClr val="141414"/>
                 </a:solidFill>
                 <a:latin typeface="Arial"/>
               </a:rPr>
-              <a:t>ASSY</a:t>
-            </a:r>
-          </a:p>
-        </p:txBody>
-      </p:sp>
-      <p:sp>
-        <p:nvSpPr>
-          <p:cNvPr id="50" name="Rounded Rectangle 49"/>
+              <a:t>Runin</a:t>
+            </a:r>
+          </a:p>
+          <a:p>
+            <a:pPr algn="l">
+              <a:spcAft>
+                <a:spcPts val="100"/>
+              </a:spcAft>
+            </a:pPr>
+            <a:r>
+              <a:rPr sz="850" b="0">
+                <a:solidFill>
+                  <a:srgbClr val="6B6B6B"/>
+                </a:solidFill>
+                <a:latin typeface="Arial"/>
+              </a:rPr>
+              <a:t>counted with FAT / SFT</a:t>
+            </a:r>
+          </a:p>
+        </p:txBody>
+      </p:sp>
+      <p:sp>
+        <p:nvSpPr>
+          <p:cNvPr id="51" name="Rounded Rectangle 50"/>
           <p:cNvSpPr/>
           <p:nvPr/>
         </p:nvSpPr>
         <p:spPr>
           <a:xfrm>
-            <a:off x="9235440" y="2560320"/>
-            <a:ext cx="1847088" cy="786384"/>
-          </a:xfrm>
-          <a:prstGeom prst="roundRect">
-            <a:avLst/>
-          </a:prstGeom>
-          <a:solidFill>
-            <a:srgbClr val="D5E8D4"/>
-          </a:solidFill>
-          <a:ln w="12700">
-            <a:solidFill>
-              <a:srgbClr val="82B366"/>
-            </a:solidFill>
-          </a:ln>
-          <a:effectLst/>
-        </p:spPr>
-        <p:style>
-          <a:lnRef idx="1">
-            <a:schemeClr val="accent1"/>
-          </a:lnRef>
-          <a:fillRef idx="3">
-            <a:schemeClr val="accent1"/>
-          </a:fillRef>
-          <a:effectRef idx="2">
-            <a:schemeClr val="accent1"/>
-          </a:effectRef>
-          <a:fontRef idx="minor">
-            <a:schemeClr val="lt1"/>
-          </a:fontRef>
-        </p:style>
-        <p:txBody>
-          <a:bodyPr rtlCol="0" anchor="ctr" wrap="square"/>
-          <a:lstStyle/>
-          <a:p>
-            <a:pPr algn="ctr"/>
-          </a:p>
-        </p:txBody>
-      </p:sp>
-      <p:sp>
-        <p:nvSpPr>
-          <p:cNvPr id="51" name="TextBox 50"/>
-          <p:cNvSpPr txBox="1"/>
-          <p:nvPr/>
-        </p:nvSpPr>
-        <p:spPr>
-          <a:xfrm>
-            <a:off x="9336024" y="2651760"/>
-            <a:ext cx="1645920" cy="640080"/>
-          </a:xfrm>
-          <a:prstGeom prst="rect">
-            <a:avLst/>
-          </a:prstGeom>
-          <a:noFill/>
-        </p:spPr>
-        <p:txBody>
-          <a:bodyPr wrap="square" lIns="0" rIns="0" tIns="0" bIns="0">
-            <a:spAutoFit/>
-          </a:bodyPr>
-          <a:lstStyle/>
-          <a:p>
-            <a:pPr algn="l">
-              <a:spcAft>
-                <a:spcPts val="100"/>
-              </a:spcAft>
-            </a:pPr>
-            <a:r>
-              <a:rPr sz="1300" b="1">
-                <a:solidFill>
-                  <a:srgbClr val="141414"/>
-                </a:solidFill>
-                <a:latin typeface="Arial"/>
-              </a:rPr>
-              <a:t>Provisioning</a:t>
-            </a:r>
-          </a:p>
-        </p:txBody>
-      </p:sp>
-      <p:cxnSp>
-        <p:nvCxnSpPr>
-          <p:cNvPr id="52" name="Connector 51"/>
-          <p:cNvCxnSpPr/>
-          <p:nvPr/>
-        </p:nvCxnSpPr>
-        <p:spPr>
-          <a:xfrm>
-            <a:off x="10158984" y="2359152"/>
-            <a:ext cx="0" cy="201168"/>
-          </a:xfrm>
-          <a:prstGeom prst="line">
-            <a:avLst/>
-          </a:prstGeom>
-          <a:ln w="13970">
-            <a:solidFill>
-              <a:srgbClr val="9A9992"/>
-            </a:solidFill>
-          </a:ln>
-        </p:spPr>
-        <p:style>
-          <a:lnRef idx="2">
-            <a:schemeClr val="accent1"/>
-          </a:lnRef>
-          <a:fillRef idx="0">
-            <a:schemeClr val="accent1"/>
-          </a:fillRef>
-          <a:effectRef idx="1">
-            <a:schemeClr val="accent1"/>
-          </a:effectRef>
-          <a:fontRef idx="minor">
-            <a:schemeClr val="tx1"/>
-          </a:fontRef>
-        </p:style>
-      </p:cxnSp>
-      <p:sp>
-        <p:nvSpPr>
-          <p:cNvPr id="53" name="Rounded Rectangle 52"/>
-          <p:cNvSpPr/>
-          <p:nvPr/>
-        </p:nvSpPr>
-        <p:spPr>
-          <a:xfrm>
-            <a:off x="9235440" y="3547872"/>
-            <a:ext cx="1847088" cy="786384"/>
-          </a:xfrm>
-          <a:prstGeom prst="roundRect">
-            <a:avLst/>
-          </a:prstGeom>
-          <a:solidFill>
-            <a:srgbClr val="F2ECD9"/>
-          </a:solidFill>
-          <a:ln w="12700">
-            <a:solidFill>
-              <a:srgbClr val="C9B46B"/>
-            </a:solidFill>
-          </a:ln>
-          <a:effectLst/>
-        </p:spPr>
-        <p:style>
-          <a:lnRef idx="1">
-            <a:schemeClr val="accent1"/>
-          </a:lnRef>
-          <a:fillRef idx="3">
-            <a:schemeClr val="accent1"/>
-          </a:fillRef>
-          <a:effectRef idx="2">
-            <a:schemeClr val="accent1"/>
-          </a:effectRef>
-          <a:fontRef idx="minor">
-            <a:schemeClr val="lt1"/>
-          </a:fontRef>
-        </p:style>
-        <p:txBody>
-          <a:bodyPr rtlCol="0" anchor="ctr" wrap="square"/>
-          <a:lstStyle/>
-          <a:p>
-            <a:pPr algn="ctr"/>
-          </a:p>
-        </p:txBody>
-      </p:sp>
-      <p:sp>
-        <p:nvSpPr>
-          <p:cNvPr id="54" name="TextBox 53"/>
-          <p:cNvSpPr txBox="1"/>
-          <p:nvPr/>
-        </p:nvSpPr>
-        <p:spPr>
-          <a:xfrm>
-            <a:off x="9336024" y="3639312"/>
-            <a:ext cx="1645920" cy="640080"/>
-          </a:xfrm>
-          <a:prstGeom prst="rect">
-            <a:avLst/>
-          </a:prstGeom>
-          <a:noFill/>
-        </p:spPr>
-        <p:txBody>
-          <a:bodyPr wrap="square" lIns="0" rIns="0" tIns="0" bIns="0">
-            <a:spAutoFit/>
-          </a:bodyPr>
-          <a:lstStyle/>
-          <a:p>
-            <a:pPr algn="l">
-              <a:spcAft>
-                <a:spcPts val="100"/>
-              </a:spcAft>
-            </a:pPr>
-            <a:r>
-              <a:rPr sz="1300" b="1">
-                <a:solidFill>
-                  <a:srgbClr val="141414"/>
-                </a:solidFill>
-                <a:latin typeface="Arial"/>
-              </a:rPr>
-              <a:t>SFT / Runin</a:t>
-            </a:r>
-          </a:p>
-          <a:p>
-            <a:pPr algn="l">
-              <a:spcAft>
-                <a:spcPts val="100"/>
-              </a:spcAft>
-            </a:pPr>
-            <a:r>
-              <a:rPr sz="1200" b="1">
-                <a:solidFill>
-                  <a:srgbClr val="141414"/>
-                </a:solidFill>
-                <a:latin typeface="Arial"/>
-              </a:rPr>
-              <a:t>2 units</a:t>
-            </a:r>
-            <a:r>
-              <a:rPr sz="850" b="0">
-                <a:solidFill>
-                  <a:srgbClr val="6B6B6B"/>
-                </a:solidFill>
-                <a:latin typeface="Arial"/>
-              </a:rPr>
-              <a:t>  too few for a yield</a:t>
-            </a:r>
-          </a:p>
-        </p:txBody>
-      </p:sp>
-      <p:cxnSp>
-        <p:nvCxnSpPr>
-          <p:cNvPr id="55" name="Connector 54"/>
-          <p:cNvCxnSpPr/>
-          <p:nvPr/>
-        </p:nvCxnSpPr>
-        <p:spPr>
-          <a:xfrm>
-            <a:off x="10158984" y="3346704"/>
-            <a:ext cx="0" cy="201168"/>
-          </a:xfrm>
-          <a:prstGeom prst="line">
-            <a:avLst/>
-          </a:prstGeom>
-          <a:ln w="13970">
-            <a:solidFill>
-              <a:srgbClr val="9A9992"/>
-            </a:solidFill>
-          </a:ln>
-        </p:spPr>
-        <p:style>
-          <a:lnRef idx="2">
-            <a:schemeClr val="accent1"/>
-          </a:lnRef>
-          <a:fillRef idx="0">
-            <a:schemeClr val="accent1"/>
-          </a:fillRef>
-          <a:effectRef idx="1">
-            <a:schemeClr val="accent1"/>
-          </a:effectRef>
-          <a:fontRef idx="minor">
-            <a:schemeClr val="tx1"/>
-          </a:fontRef>
-        </p:style>
-      </p:cxnSp>
-      <p:sp>
-        <p:nvSpPr>
-          <p:cNvPr id="56" name="Rounded Rectangle 55"/>
-          <p:cNvSpPr/>
-          <p:nvPr/>
-        </p:nvSpPr>
-        <p:spPr>
-          <a:xfrm>
-            <a:off x="9235440" y="4535424"/>
-            <a:ext cx="1847088" cy="786384"/>
+            <a:off x="10369296" y="4846320"/>
+            <a:ext cx="1389888" cy="640080"/>
           </a:xfrm>
           <a:prstGeom prst="roundRect">
             <a:avLst/>
@@ -5609,7 +5518,7 @@
           </a:fontRef>
         </p:style>
         <p:txBody>
-          <a:bodyPr rtlCol="0" anchor="ctr" wrap="square"/>
+          <a:bodyPr rtlCol="0" anchor="ctr"/>
           <a:lstStyle/>
           <a:p>
             <a:pPr algn="ctr"/>
@@ -5618,14 +5527,14 @@
       </p:sp>
       <p:sp>
         <p:nvSpPr>
-          <p:cNvPr id="57" name="TextBox 56"/>
+          <p:cNvPr id="52" name="TextBox 51"/>
           <p:cNvSpPr txBox="1"/>
           <p:nvPr/>
         </p:nvSpPr>
         <p:spPr>
           <a:xfrm>
-            <a:off x="9336024" y="4626864"/>
-            <a:ext cx="1645920" cy="640080"/>
+            <a:off x="10451592" y="4910328"/>
+            <a:ext cx="1225296" cy="530352"/>
           </a:xfrm>
           <a:prstGeom prst="rect">
             <a:avLst/>
@@ -5644,7 +5553,7 @@
               </a:spcAft>
             </a:pPr>
             <a:r>
-              <a:rPr sz="1300" b="0">
+              <a:rPr sz="1250" b="0">
                 <a:solidFill>
                   <a:srgbClr val="141414"/>
                 </a:solidFill>
@@ -5657,13 +5566,13 @@
       </p:sp>
       <p:cxnSp>
         <p:nvCxnSpPr>
-          <p:cNvPr id="58" name="Connector 57"/>
+          <p:cNvPr id="53" name="Connector 52"/>
           <p:cNvCxnSpPr/>
           <p:nvPr/>
         </p:nvCxnSpPr>
         <p:spPr>
           <a:xfrm>
-            <a:off x="10158984" y="4334256"/>
+            <a:off x="1307592" y="2121408"/>
             <a:ext cx="0" cy="201168"/>
           </a:xfrm>
           <a:prstGeom prst="line">
@@ -5671,8 +5580,9 @@
           </a:prstGeom>
           <a:ln w="13970">
             <a:solidFill>
-              <a:srgbClr val="9A9992"/>
+              <a:srgbClr val="8A8882"/>
             </a:solidFill>
+            <a:tailEnd type="triangle" w="sm" len="sm"/>
           </a:ln>
         </p:spPr>
         <p:style>
@@ -5690,6 +5600,185 @@
           </a:fontRef>
         </p:style>
       </p:cxnSp>
+      <p:cxnSp>
+        <p:nvCxnSpPr>
+          <p:cNvPr id="54" name="Connector 53"/>
+          <p:cNvCxnSpPr/>
+          <p:nvPr/>
+        </p:nvCxnSpPr>
+        <p:spPr>
+          <a:xfrm>
+            <a:off x="1307592" y="2962656"/>
+            <a:ext cx="0" cy="201168"/>
+          </a:xfrm>
+          <a:prstGeom prst="line">
+            <a:avLst/>
+          </a:prstGeom>
+          <a:ln w="13970">
+            <a:solidFill>
+              <a:srgbClr val="8A8882"/>
+            </a:solidFill>
+            <a:tailEnd type="triangle" w="sm" len="sm"/>
+          </a:ln>
+        </p:spPr>
+        <p:style>
+          <a:lnRef idx="2">
+            <a:schemeClr val="accent1"/>
+          </a:lnRef>
+          <a:fillRef idx="0">
+            <a:schemeClr val="accent1"/>
+          </a:fillRef>
+          <a:effectRef idx="1">
+            <a:schemeClr val="accent1"/>
+          </a:effectRef>
+          <a:fontRef idx="minor">
+            <a:schemeClr val="tx1"/>
+          </a:fontRef>
+        </p:style>
+      </p:cxnSp>
+      <p:cxnSp>
+        <p:nvCxnSpPr>
+          <p:cNvPr id="55" name="Connector 54"/>
+          <p:cNvCxnSpPr/>
+          <p:nvPr/>
+        </p:nvCxnSpPr>
+        <p:spPr>
+          <a:xfrm>
+            <a:off x="1307592" y="3803904"/>
+            <a:ext cx="0" cy="201168"/>
+          </a:xfrm>
+          <a:prstGeom prst="line">
+            <a:avLst/>
+          </a:prstGeom>
+          <a:ln w="13970">
+            <a:solidFill>
+              <a:srgbClr val="8A8882"/>
+            </a:solidFill>
+            <a:tailEnd type="triangle" w="sm" len="sm"/>
+          </a:ln>
+        </p:spPr>
+        <p:style>
+          <a:lnRef idx="2">
+            <a:schemeClr val="accent1"/>
+          </a:lnRef>
+          <a:fillRef idx="0">
+            <a:schemeClr val="accent1"/>
+          </a:fillRef>
+          <a:effectRef idx="1">
+            <a:schemeClr val="accent1"/>
+          </a:effectRef>
+          <a:fontRef idx="minor">
+            <a:schemeClr val="tx1"/>
+          </a:fontRef>
+        </p:style>
+      </p:cxnSp>
+      <p:cxnSp>
+        <p:nvCxnSpPr>
+          <p:cNvPr id="56" name="Connector 55"/>
+          <p:cNvCxnSpPr/>
+          <p:nvPr/>
+        </p:nvCxnSpPr>
+        <p:spPr>
+          <a:xfrm>
+            <a:off x="1956815" y="3483864"/>
+            <a:ext cx="1069849" cy="0"/>
+          </a:xfrm>
+          <a:prstGeom prst="line">
+            <a:avLst/>
+          </a:prstGeom>
+          <a:ln w="13970">
+            <a:solidFill>
+              <a:srgbClr val="8A8882"/>
+            </a:solidFill>
+          </a:ln>
+        </p:spPr>
+        <p:style>
+          <a:lnRef idx="2">
+            <a:schemeClr val="accent1"/>
+          </a:lnRef>
+          <a:fillRef idx="0">
+            <a:schemeClr val="accent1"/>
+          </a:fillRef>
+          <a:effectRef idx="1">
+            <a:schemeClr val="accent1"/>
+          </a:effectRef>
+          <a:fontRef idx="minor">
+            <a:schemeClr val="tx1"/>
+          </a:fontRef>
+        </p:style>
+      </p:cxnSp>
+      <p:cxnSp>
+        <p:nvCxnSpPr>
+          <p:cNvPr id="57" name="Connector 56"/>
+          <p:cNvCxnSpPr/>
+          <p:nvPr/>
+        </p:nvCxnSpPr>
+        <p:spPr>
+          <a:xfrm flipV="1">
+            <a:off x="3026664" y="2121408"/>
+            <a:ext cx="0" cy="1362456"/>
+          </a:xfrm>
+          <a:prstGeom prst="line">
+            <a:avLst/>
+          </a:prstGeom>
+          <a:ln w="13970">
+            <a:solidFill>
+              <a:srgbClr val="8A8882"/>
+            </a:solidFill>
+            <a:tailEnd type="triangle" w="sm" len="sm"/>
+          </a:ln>
+        </p:spPr>
+        <p:style>
+          <a:lnRef idx="2">
+            <a:schemeClr val="accent1"/>
+          </a:lnRef>
+          <a:fillRef idx="0">
+            <a:schemeClr val="accent1"/>
+          </a:fillRef>
+          <a:effectRef idx="1">
+            <a:schemeClr val="accent1"/>
+          </a:effectRef>
+          <a:fontRef idx="minor">
+            <a:schemeClr val="tx1"/>
+          </a:fontRef>
+        </p:style>
+      </p:cxnSp>
+      <p:cxnSp>
+        <p:nvCxnSpPr>
+          <p:cNvPr id="58" name="Connector 57"/>
+          <p:cNvCxnSpPr/>
+          <p:nvPr/>
+        </p:nvCxnSpPr>
+        <p:spPr>
+          <a:xfrm>
+            <a:off x="3026664" y="2121408"/>
+            <a:ext cx="0" cy="1883664"/>
+          </a:xfrm>
+          <a:prstGeom prst="line">
+            <a:avLst/>
+          </a:prstGeom>
+          <a:ln w="13970">
+            <a:solidFill>
+              <a:srgbClr val="8A8882"/>
+            </a:solidFill>
+            <a:tailEnd type="triangle" w="sm" len="sm"/>
+          </a:ln>
+        </p:spPr>
+        <p:style>
+          <a:lnRef idx="2">
+            <a:schemeClr val="accent1"/>
+          </a:lnRef>
+          <a:fillRef idx="0">
+            <a:schemeClr val="accent1"/>
+          </a:fillRef>
+          <a:effectRef idx="1">
+            <a:schemeClr val="accent1"/>
+          </a:effectRef>
+          <a:fontRef idx="minor">
+            <a:schemeClr val="tx1"/>
+          </a:fontRef>
+        </p:style>
+      </p:cxnSp>
       <p:sp>
         <p:nvSpPr>
           <p:cNvPr id="59" name="TextBox 58"/>
@@ -5698,8 +5787,8 @@
         </p:nvSpPr>
         <p:spPr>
           <a:xfrm>
-            <a:off x="384048" y="6053328"/>
-            <a:ext cx="11423599" cy="640080"/>
+            <a:off x="3072384" y="3822192"/>
+            <a:ext cx="822960" cy="182880"/>
           </a:xfrm>
           <a:prstGeom prst="rect">
             <a:avLst/>
@@ -5714,9 +5803,630 @@
           <a:p>
             <a:pPr algn="l">
               <a:spcAft>
-                <a:spcPts val="200"/>
-              </a:spcAft>
-            </a:pPr>
+                <a:spcPts val="0"/>
+              </a:spcAft>
+            </a:pPr>
+            <a:r>
+              <a:rPr sz="850" b="0">
+                <a:solidFill>
+                  <a:srgbClr val="6B6B6B"/>
+                </a:solidFill>
+                <a:latin typeface="Arial"/>
+              </a:rPr>
+              <a:t>VBB</a:t>
+            </a:r>
+          </a:p>
+        </p:txBody>
+      </p:sp>
+      <p:cxnSp>
+        <p:nvCxnSpPr>
+          <p:cNvPr id="60" name="Connector 59"/>
+          <p:cNvCxnSpPr/>
+          <p:nvPr/>
+        </p:nvCxnSpPr>
+        <p:spPr>
+          <a:xfrm>
+            <a:off x="3675887" y="4325112"/>
+            <a:ext cx="813817" cy="0"/>
+          </a:xfrm>
+          <a:prstGeom prst="line">
+            <a:avLst/>
+          </a:prstGeom>
+          <a:ln w="13970">
+            <a:solidFill>
+              <a:srgbClr val="8A8882"/>
+            </a:solidFill>
+          </a:ln>
+        </p:spPr>
+        <p:style>
+          <a:lnRef idx="2">
+            <a:schemeClr val="accent1"/>
+          </a:lnRef>
+          <a:fillRef idx="0">
+            <a:schemeClr val="accent1"/>
+          </a:fillRef>
+          <a:effectRef idx="1">
+            <a:schemeClr val="accent1"/>
+          </a:effectRef>
+          <a:fontRef idx="minor">
+            <a:schemeClr val="tx1"/>
+          </a:fontRef>
+        </p:style>
+      </p:cxnSp>
+      <p:cxnSp>
+        <p:nvCxnSpPr>
+          <p:cNvPr id="61" name="Connector 60"/>
+          <p:cNvCxnSpPr/>
+          <p:nvPr/>
+        </p:nvCxnSpPr>
+        <p:spPr>
+          <a:xfrm flipV="1">
+            <a:off x="4489704" y="3803904"/>
+            <a:ext cx="0" cy="521208"/>
+          </a:xfrm>
+          <a:prstGeom prst="line">
+            <a:avLst/>
+          </a:prstGeom>
+          <a:ln w="13970">
+            <a:solidFill>
+              <a:srgbClr val="8A8882"/>
+            </a:solidFill>
+            <a:tailEnd type="triangle" w="sm" len="sm"/>
+          </a:ln>
+        </p:spPr>
+        <p:style>
+          <a:lnRef idx="2">
+            <a:schemeClr val="accent1"/>
+          </a:lnRef>
+          <a:fillRef idx="0">
+            <a:schemeClr val="accent1"/>
+          </a:fillRef>
+          <a:effectRef idx="1">
+            <a:schemeClr val="accent1"/>
+          </a:effectRef>
+          <a:fontRef idx="minor">
+            <a:schemeClr val="tx1"/>
+          </a:fontRef>
+        </p:style>
+      </p:cxnSp>
+      <p:cxnSp>
+        <p:nvCxnSpPr>
+          <p:cNvPr id="62" name="Connector 61"/>
+          <p:cNvCxnSpPr/>
+          <p:nvPr/>
+        </p:nvCxnSpPr>
+        <p:spPr>
+          <a:xfrm flipV="1">
+            <a:off x="4489704" y="2962656"/>
+            <a:ext cx="0" cy="201168"/>
+          </a:xfrm>
+          <a:prstGeom prst="line">
+            <a:avLst/>
+          </a:prstGeom>
+          <a:ln w="13970">
+            <a:solidFill>
+              <a:srgbClr val="8A8882"/>
+            </a:solidFill>
+            <a:tailEnd type="triangle" w="sm" len="sm"/>
+          </a:ln>
+        </p:spPr>
+        <p:style>
+          <a:lnRef idx="2">
+            <a:schemeClr val="accent1"/>
+          </a:lnRef>
+          <a:fillRef idx="0">
+            <a:schemeClr val="accent1"/>
+          </a:fillRef>
+          <a:effectRef idx="1">
+            <a:schemeClr val="accent1"/>
+          </a:effectRef>
+          <a:fontRef idx="minor">
+            <a:schemeClr val="tx1"/>
+          </a:fontRef>
+        </p:style>
+      </p:cxnSp>
+      <p:cxnSp>
+        <p:nvCxnSpPr>
+          <p:cNvPr id="63" name="Connector 62"/>
+          <p:cNvCxnSpPr/>
+          <p:nvPr/>
+        </p:nvCxnSpPr>
+        <p:spPr>
+          <a:xfrm flipV="1">
+            <a:off x="4489704" y="2121408"/>
+            <a:ext cx="0" cy="201168"/>
+          </a:xfrm>
+          <a:prstGeom prst="line">
+            <a:avLst/>
+          </a:prstGeom>
+          <a:ln w="13970">
+            <a:solidFill>
+              <a:srgbClr val="8A8882"/>
+            </a:solidFill>
+            <a:tailEnd type="triangle" w="sm" len="sm"/>
+          </a:ln>
+        </p:spPr>
+        <p:style>
+          <a:lnRef idx="2">
+            <a:schemeClr val="accent1"/>
+          </a:lnRef>
+          <a:fillRef idx="0">
+            <a:schemeClr val="accent1"/>
+          </a:fillRef>
+          <a:effectRef idx="1">
+            <a:schemeClr val="accent1"/>
+          </a:effectRef>
+          <a:fontRef idx="minor">
+            <a:schemeClr val="tx1"/>
+          </a:fontRef>
+        </p:style>
+      </p:cxnSp>
+      <p:cxnSp>
+        <p:nvCxnSpPr>
+          <p:cNvPr id="64" name="Connector 63"/>
+          <p:cNvCxnSpPr/>
+          <p:nvPr/>
+        </p:nvCxnSpPr>
+        <p:spPr>
+          <a:xfrm>
+            <a:off x="5138928" y="1801368"/>
+            <a:ext cx="219456" cy="0"/>
+          </a:xfrm>
+          <a:prstGeom prst="line">
+            <a:avLst/>
+          </a:prstGeom>
+          <a:ln w="13970">
+            <a:solidFill>
+              <a:srgbClr val="8A8882"/>
+            </a:solidFill>
+            <a:tailEnd type="triangle" w="sm" len="sm"/>
+          </a:ln>
+        </p:spPr>
+        <p:style>
+          <a:lnRef idx="2">
+            <a:schemeClr val="accent1"/>
+          </a:lnRef>
+          <a:fillRef idx="0">
+            <a:schemeClr val="accent1"/>
+          </a:fillRef>
+          <a:effectRef idx="1">
+            <a:schemeClr val="accent1"/>
+          </a:effectRef>
+          <a:fontRef idx="minor">
+            <a:schemeClr val="tx1"/>
+          </a:fontRef>
+        </p:style>
+      </p:cxnSp>
+      <p:cxnSp>
+        <p:nvCxnSpPr>
+          <p:cNvPr id="65" name="Connector 64"/>
+          <p:cNvCxnSpPr/>
+          <p:nvPr/>
+        </p:nvCxnSpPr>
+        <p:spPr>
+          <a:xfrm>
+            <a:off x="6437376" y="1801368"/>
+            <a:ext cx="1499616" cy="0"/>
+          </a:xfrm>
+          <a:prstGeom prst="line">
+            <a:avLst/>
+          </a:prstGeom>
+          <a:ln w="13970">
+            <a:solidFill>
+              <a:srgbClr val="8A8882"/>
+            </a:solidFill>
+          </a:ln>
+        </p:spPr>
+        <p:style>
+          <a:lnRef idx="2">
+            <a:schemeClr val="accent1"/>
+          </a:lnRef>
+          <a:fillRef idx="0">
+            <a:schemeClr val="accent1"/>
+          </a:fillRef>
+          <a:effectRef idx="1">
+            <a:schemeClr val="accent1"/>
+          </a:effectRef>
+          <a:fontRef idx="minor">
+            <a:schemeClr val="tx1"/>
+          </a:fontRef>
+        </p:style>
+      </p:cxnSp>
+      <p:cxnSp>
+        <p:nvCxnSpPr>
+          <p:cNvPr id="66" name="Connector 65"/>
+          <p:cNvCxnSpPr/>
+          <p:nvPr/>
+        </p:nvCxnSpPr>
+        <p:spPr>
+          <a:xfrm>
+            <a:off x="7936992" y="1801368"/>
+            <a:ext cx="0" cy="521208"/>
+          </a:xfrm>
+          <a:prstGeom prst="line">
+            <a:avLst/>
+          </a:prstGeom>
+          <a:ln w="13970">
+            <a:solidFill>
+              <a:srgbClr val="8A8882"/>
+            </a:solidFill>
+            <a:tailEnd type="triangle" w="sm" len="sm"/>
+          </a:ln>
+        </p:spPr>
+        <p:style>
+          <a:lnRef idx="2">
+            <a:schemeClr val="accent1"/>
+          </a:lnRef>
+          <a:fillRef idx="0">
+            <a:schemeClr val="accent1"/>
+          </a:fillRef>
+          <a:effectRef idx="1">
+            <a:schemeClr val="accent1"/>
+          </a:effectRef>
+          <a:fontRef idx="minor">
+            <a:schemeClr val="tx1"/>
+          </a:fontRef>
+        </p:style>
+      </p:cxnSp>
+      <p:cxnSp>
+        <p:nvCxnSpPr>
+          <p:cNvPr id="67" name="Connector 66"/>
+          <p:cNvCxnSpPr/>
+          <p:nvPr/>
+        </p:nvCxnSpPr>
+        <p:spPr>
+          <a:xfrm>
+            <a:off x="5897880" y="2121408"/>
+            <a:ext cx="0" cy="2203704"/>
+          </a:xfrm>
+          <a:prstGeom prst="line">
+            <a:avLst/>
+          </a:prstGeom>
+          <a:ln w="13970">
+            <a:solidFill>
+              <a:srgbClr val="8A8882"/>
+            </a:solidFill>
+          </a:ln>
+        </p:spPr>
+        <p:style>
+          <a:lnRef idx="2">
+            <a:schemeClr val="accent1"/>
+          </a:lnRef>
+          <a:fillRef idx="0">
+            <a:schemeClr val="accent1"/>
+          </a:fillRef>
+          <a:effectRef idx="1">
+            <a:schemeClr val="accent1"/>
+          </a:effectRef>
+          <a:fontRef idx="minor">
+            <a:schemeClr val="tx1"/>
+          </a:fontRef>
+        </p:style>
+      </p:cxnSp>
+      <p:cxnSp>
+        <p:nvCxnSpPr>
+          <p:cNvPr id="68" name="Connector 67"/>
+          <p:cNvCxnSpPr/>
+          <p:nvPr/>
+        </p:nvCxnSpPr>
+        <p:spPr>
+          <a:xfrm>
+            <a:off x="5897880" y="4325112"/>
+            <a:ext cx="1344168" cy="0"/>
+          </a:xfrm>
+          <a:prstGeom prst="line">
+            <a:avLst/>
+          </a:prstGeom>
+          <a:ln w="13970">
+            <a:solidFill>
+              <a:srgbClr val="8A8882"/>
+            </a:solidFill>
+            <a:tailEnd type="triangle" w="sm" len="sm"/>
+          </a:ln>
+        </p:spPr>
+        <p:style>
+          <a:lnRef idx="2">
+            <a:schemeClr val="accent1"/>
+          </a:lnRef>
+          <a:fillRef idx="0">
+            <a:schemeClr val="accent1"/>
+          </a:fillRef>
+          <a:effectRef idx="1">
+            <a:schemeClr val="accent1"/>
+          </a:effectRef>
+          <a:fontRef idx="minor">
+            <a:schemeClr val="tx1"/>
+          </a:fontRef>
+        </p:style>
+      </p:cxnSp>
+      <p:cxnSp>
+        <p:nvCxnSpPr>
+          <p:cNvPr id="69" name="Connector 68"/>
+          <p:cNvCxnSpPr/>
+          <p:nvPr/>
+        </p:nvCxnSpPr>
+        <p:spPr>
+          <a:xfrm flipV="1">
+            <a:off x="7936992" y="3803904"/>
+            <a:ext cx="0" cy="201168"/>
+          </a:xfrm>
+          <a:prstGeom prst="line">
+            <a:avLst/>
+          </a:prstGeom>
+          <a:ln w="13970">
+            <a:solidFill>
+              <a:srgbClr val="8A8882"/>
+            </a:solidFill>
+            <a:tailEnd type="triangle" w="sm" len="sm"/>
+          </a:ln>
+        </p:spPr>
+        <p:style>
+          <a:lnRef idx="2">
+            <a:schemeClr val="accent1"/>
+          </a:lnRef>
+          <a:fillRef idx="0">
+            <a:schemeClr val="accent1"/>
+          </a:fillRef>
+          <a:effectRef idx="1">
+            <a:schemeClr val="accent1"/>
+          </a:effectRef>
+          <a:fontRef idx="minor">
+            <a:schemeClr val="tx1"/>
+          </a:fontRef>
+        </p:style>
+      </p:cxnSp>
+      <p:cxnSp>
+        <p:nvCxnSpPr>
+          <p:cNvPr id="70" name="Connector 69"/>
+          <p:cNvCxnSpPr/>
+          <p:nvPr/>
+        </p:nvCxnSpPr>
+        <p:spPr>
+          <a:xfrm flipV="1">
+            <a:off x="7936992" y="2962656"/>
+            <a:ext cx="0" cy="201168"/>
+          </a:xfrm>
+          <a:prstGeom prst="line">
+            <a:avLst/>
+          </a:prstGeom>
+          <a:ln w="13970">
+            <a:solidFill>
+              <a:srgbClr val="8A8882"/>
+            </a:solidFill>
+            <a:tailEnd type="triangle" w="sm" len="sm"/>
+          </a:ln>
+        </p:spPr>
+        <p:style>
+          <a:lnRef idx="2">
+            <a:schemeClr val="accent1"/>
+          </a:lnRef>
+          <a:fillRef idx="0">
+            <a:schemeClr val="accent1"/>
+          </a:fillRef>
+          <a:effectRef idx="1">
+            <a:schemeClr val="accent1"/>
+          </a:effectRef>
+          <a:fontRef idx="minor">
+            <a:schemeClr val="tx1"/>
+          </a:fontRef>
+        </p:style>
+      </p:cxnSp>
+      <p:cxnSp>
+        <p:nvCxnSpPr>
+          <p:cNvPr id="71" name="Connector 70"/>
+          <p:cNvCxnSpPr/>
+          <p:nvPr/>
+        </p:nvCxnSpPr>
+        <p:spPr>
+          <a:xfrm>
+            <a:off x="8631936" y="2642616"/>
+            <a:ext cx="109728" cy="0"/>
+          </a:xfrm>
+          <a:prstGeom prst="line">
+            <a:avLst/>
+          </a:prstGeom>
+          <a:ln w="13970">
+            <a:solidFill>
+              <a:srgbClr val="8A8882"/>
+            </a:solidFill>
+            <a:tailEnd type="triangle" w="sm" len="sm"/>
+          </a:ln>
+        </p:spPr>
+        <p:style>
+          <a:lnRef idx="2">
+            <a:schemeClr val="accent1"/>
+          </a:lnRef>
+          <a:fillRef idx="0">
+            <a:schemeClr val="accent1"/>
+          </a:fillRef>
+          <a:effectRef idx="1">
+            <a:schemeClr val="accent1"/>
+          </a:effectRef>
+          <a:fontRef idx="minor">
+            <a:schemeClr val="tx1"/>
+          </a:fontRef>
+        </p:style>
+      </p:cxnSp>
+      <p:cxnSp>
+        <p:nvCxnSpPr>
+          <p:cNvPr id="72" name="Connector 71"/>
+          <p:cNvCxnSpPr/>
+          <p:nvPr/>
+        </p:nvCxnSpPr>
+        <p:spPr>
+          <a:xfrm>
+            <a:off x="10040112" y="2642616"/>
+            <a:ext cx="329184" cy="0"/>
+          </a:xfrm>
+          <a:prstGeom prst="line">
+            <a:avLst/>
+          </a:prstGeom>
+          <a:ln w="13970">
+            <a:solidFill>
+              <a:srgbClr val="8A8882"/>
+            </a:solidFill>
+            <a:tailEnd type="triangle" w="sm" len="sm"/>
+          </a:ln>
+        </p:spPr>
+        <p:style>
+          <a:lnRef idx="2">
+            <a:schemeClr val="accent1"/>
+          </a:lnRef>
+          <a:fillRef idx="0">
+            <a:schemeClr val="accent1"/>
+          </a:fillRef>
+          <a:effectRef idx="1">
+            <a:schemeClr val="accent1"/>
+          </a:effectRef>
+          <a:fontRef idx="minor">
+            <a:schemeClr val="tx1"/>
+          </a:fontRef>
+        </p:style>
+      </p:cxnSp>
+      <p:cxnSp>
+        <p:nvCxnSpPr>
+          <p:cNvPr id="73" name="Connector 72"/>
+          <p:cNvCxnSpPr/>
+          <p:nvPr/>
+        </p:nvCxnSpPr>
+        <p:spPr>
+          <a:xfrm>
+            <a:off x="11064240" y="2962656"/>
+            <a:ext cx="0" cy="201168"/>
+          </a:xfrm>
+          <a:prstGeom prst="line">
+            <a:avLst/>
+          </a:prstGeom>
+          <a:ln w="13970">
+            <a:solidFill>
+              <a:srgbClr val="8A8882"/>
+            </a:solidFill>
+            <a:tailEnd type="triangle" w="sm" len="sm"/>
+          </a:ln>
+        </p:spPr>
+        <p:style>
+          <a:lnRef idx="2">
+            <a:schemeClr val="accent1"/>
+          </a:lnRef>
+          <a:fillRef idx="0">
+            <a:schemeClr val="accent1"/>
+          </a:fillRef>
+          <a:effectRef idx="1">
+            <a:schemeClr val="accent1"/>
+          </a:effectRef>
+          <a:fontRef idx="minor">
+            <a:schemeClr val="tx1"/>
+          </a:fontRef>
+        </p:style>
+      </p:cxnSp>
+      <p:cxnSp>
+        <p:nvCxnSpPr>
+          <p:cNvPr id="74" name="Connector 73"/>
+          <p:cNvCxnSpPr/>
+          <p:nvPr/>
+        </p:nvCxnSpPr>
+        <p:spPr>
+          <a:xfrm>
+            <a:off x="11064240" y="3803904"/>
+            <a:ext cx="0" cy="201168"/>
+          </a:xfrm>
+          <a:prstGeom prst="line">
+            <a:avLst/>
+          </a:prstGeom>
+          <a:ln w="13970">
+            <a:solidFill>
+              <a:srgbClr val="8A8882"/>
+            </a:solidFill>
+            <a:tailEnd type="triangle" w="sm" len="sm"/>
+          </a:ln>
+        </p:spPr>
+        <p:style>
+          <a:lnRef idx="2">
+            <a:schemeClr val="accent1"/>
+          </a:lnRef>
+          <a:fillRef idx="0">
+            <a:schemeClr val="accent1"/>
+          </a:fillRef>
+          <a:effectRef idx="1">
+            <a:schemeClr val="accent1"/>
+          </a:effectRef>
+          <a:fontRef idx="minor">
+            <a:schemeClr val="tx1"/>
+          </a:fontRef>
+        </p:style>
+      </p:cxnSp>
+      <p:cxnSp>
+        <p:nvCxnSpPr>
+          <p:cNvPr id="75" name="Connector 74"/>
+          <p:cNvCxnSpPr/>
+          <p:nvPr/>
+        </p:nvCxnSpPr>
+        <p:spPr>
+          <a:xfrm>
+            <a:off x="11064240" y="4645152"/>
+            <a:ext cx="0" cy="201168"/>
+          </a:xfrm>
+          <a:prstGeom prst="line">
+            <a:avLst/>
+          </a:prstGeom>
+          <a:ln w="13970">
+            <a:solidFill>
+              <a:srgbClr val="8A8882"/>
+            </a:solidFill>
+            <a:tailEnd type="triangle" w="sm" len="sm"/>
+          </a:ln>
+        </p:spPr>
+        <p:style>
+          <a:lnRef idx="2">
+            <a:schemeClr val="accent1"/>
+          </a:lnRef>
+          <a:fillRef idx="0">
+            <a:schemeClr val="accent1"/>
+          </a:fillRef>
+          <a:effectRef idx="1">
+            <a:schemeClr val="accent1"/>
+          </a:effectRef>
+          <a:fontRef idx="minor">
+            <a:schemeClr val="tx1"/>
+          </a:fontRef>
+        </p:style>
+      </p:cxnSp>
+      <p:sp>
+        <p:nvSpPr>
+          <p:cNvPr id="76" name="TextBox 75"/>
+          <p:cNvSpPr txBox="1"/>
+          <p:nvPr/>
+        </p:nvSpPr>
+        <p:spPr>
+          <a:xfrm>
+            <a:off x="658368" y="5989320"/>
+            <a:ext cx="10911535" cy="731520"/>
+          </a:xfrm>
+          <a:prstGeom prst="rect">
+            <a:avLst/>
+          </a:prstGeom>
+          <a:noFill/>
+        </p:spPr>
+        <p:txBody>
+          <a:bodyPr wrap="square" lIns="0" rIns="0" tIns="0" bIns="0">
+            <a:spAutoFit/>
+          </a:bodyPr>
+          <a:lstStyle/>
+          <a:p>
+            <a:pPr algn="l">
+              <a:spcAft>
+                <a:spcPts val="100"/>
+              </a:spcAft>
+            </a:pPr>
+            <a:r>
+              <a:rPr sz="950" b="1">
+                <a:solidFill>
+                  <a:srgbClr val="6B6B6B"/>
+                </a:solidFill>
+                <a:latin typeface="Arial"/>
+              </a:rPr>
+              <a:t>Green</a:t>
+            </a:r>
             <a:r>
               <a:rPr sz="950" b="0">
                 <a:solidFill>
@@ -5724,7 +6434,16 @@
                 </a:solidFill>
                 <a:latin typeface="Arial"/>
               </a:rPr>
-              <a:t>Green = the step yields and we measure it. </a:t>
+              <a:t> = yields, and we measure it.   </a:t>
+            </a:r>
+            <a:r>
+              <a:rPr sz="950" b="1">
+                <a:solidFill>
+                  <a:srgbClr val="6B6B6B"/>
+                </a:solidFill>
+                <a:latin typeface="Arial"/>
+              </a:rPr>
+              <a:t>Amber</a:t>
             </a:r>
             <a:r>
               <a:rPr sz="950" b="0">
@@ -5733,7 +6452,16 @@
                 </a:solidFill>
                 <a:latin typeface="Arial"/>
               </a:rPr>
-              <a:t>Amber = it ran, under 20 units, so no yield is reported — the count is. </a:t>
+              <a:t> = quantity only, no yield reported.   </a:t>
+            </a:r>
+            <a:r>
+              <a:rPr sz="950" b="1">
+                <a:solidFill>
+                  <a:srgbClr val="6B6B6B"/>
+                </a:solidFill>
+                <a:latin typeface="Arial"/>
+              </a:rPr>
+              <a:t>Grey</a:t>
             </a:r>
             <a:r>
               <a:rPr sz="950" b="0">
@@ -5742,23 +6470,39 @@
                 </a:solidFill>
                 <a:latin typeface="Arial"/>
               </a:rPr>
-              <a:t>Grey = builds or moves, no verdict.</a:t>
-            </a:r>
-          </a:p>
-          <a:p>
-            <a:pPr algn="l">
-              <a:spcAft>
-                <a:spcPts val="200"/>
-              </a:spcAft>
-            </a:pPr>
-            <a:r>
-              <a:rPr sz="900" b="0">
+              <a:t> = builds, moves, or measured elsewhere.</a:t>
+            </a:r>
+          </a:p>
+          <a:p>
+            <a:pPr algn="l">
+              <a:spcAft>
+                <a:spcPts val="100"/>
+              </a:spcAft>
+            </a:pPr>
+            <a:r>
+              <a:rPr sz="850" b="0">
                 <a:solidFill>
                   <a:srgbClr val="6B6B6B"/>
                 </a:solidFill>
                 <a:latin typeface="Arial"/>
               </a:rPr>
-              <a:t>Source: pega2 – pega5 (ESVM), one row per unit. WST and FT reported by Sigurd. VBB provisioning omitted — not part of the product test flow. Amber this week: L10 FAT (2u), L10 SFT (1u), L10 RIN (1u), L10 2U (3u), L11 Test (2u).</a:t>
+              <a:t>Quantity only: L10 FAT, L10 SFT, L10 RIN, L10 2U, L11 Test. L10 and L11 are chassis and rack level and in bring-up — a percentage over three chassis swings 33 points on one unit, so the counts are published and the yields are not.</a:t>
+            </a:r>
+          </a:p>
+          <a:p>
+            <a:pPr algn="l">
+              <a:spcAft>
+                <a:spcPts val="100"/>
+              </a:spcAft>
+            </a:pPr>
+            <a:r>
+              <a:rPr sz="850" b="0">
+                <a:solidFill>
+                  <a:srgbClr val="6B6B6B"/>
+                </a:solidFill>
+                <a:latin typeface="Arial"/>
+              </a:rPr>
+              <a:t>Source: pega2 – pega5 (ESVM), one row per unit. WST and FT reported by Sigurd. VBB provisioning drawn for the flow but left out of the yield view.</a:t>
             </a:r>
           </a:p>
         </p:txBody>
@@ -7161,7 +7905,7 @@
                 </a:solidFill>
                 <a:latin typeface="Arial"/>
               </a:rPr>
-              <a:t>not enough units</a:t>
+              <a:t>quantity only</a:t>
             </a:r>
           </a:p>
         </p:txBody>
@@ -7235,11 +7979,11 @@
             <a:r>
               <a:rPr sz="1400" b="1">
                 <a:solidFill>
-                  <a:srgbClr val="B3281E"/>
-                </a:solidFill>
-                <a:latin typeface="Arial"/>
-              </a:rPr>
-              <a:t>100.0%</a:t>
+                  <a:srgbClr val="141414"/>
+                </a:solidFill>
+                <a:latin typeface="Arial"/>
+              </a:rPr>
+              <a:t>—</a:t>
             </a:r>
           </a:p>
           <a:p>
@@ -7255,7 +7999,7 @@
                 </a:solidFill>
                 <a:latin typeface="Arial"/>
               </a:rPr>
-              <a:t>2 of 2 units re-run</a:t>
+              <a:t>chassis and rack level, in bring-up — quantity only</a:t>
             </a:r>
           </a:p>
         </p:txBody>
@@ -7459,7 +8203,7 @@
                 </a:solidFill>
                 <a:latin typeface="Arial"/>
               </a:rPr>
-              <a:t>not enough units</a:t>
+              <a:t>quantity only</a:t>
             </a:r>
           </a:p>
         </p:txBody>
@@ -7533,11 +8277,11 @@
             <a:r>
               <a:rPr sz="1400" b="1">
                 <a:solidFill>
-                  <a:srgbClr val="B3281E"/>
-                </a:solidFill>
-                <a:latin typeface="Arial"/>
-              </a:rPr>
-              <a:t>100.0%</a:t>
+                  <a:srgbClr val="141414"/>
+                </a:solidFill>
+                <a:latin typeface="Arial"/>
+              </a:rPr>
+              <a:t>—</a:t>
             </a:r>
           </a:p>
           <a:p>
@@ -7553,7 +8297,7 @@
                 </a:solidFill>
                 <a:latin typeface="Arial"/>
               </a:rPr>
-              <a:t>1 of 1 units re-run</a:t>
+              <a:t>chassis and rack level, in bring-up — quantity only</a:t>
             </a:r>
           </a:p>
         </p:txBody>
@@ -7757,7 +8501,7 @@
                 </a:solidFill>
                 <a:latin typeface="Arial"/>
               </a:rPr>
-              <a:t>not enough units</a:t>
+              <a:t>quantity only</a:t>
             </a:r>
           </a:p>
         </p:txBody>
@@ -7831,11 +8575,11 @@
             <a:r>
               <a:rPr sz="1400" b="1">
                 <a:solidFill>
-                  <a:srgbClr val="B3281E"/>
-                </a:solidFill>
-                <a:latin typeface="Arial"/>
-              </a:rPr>
-              <a:t>100.0%</a:t>
+                  <a:srgbClr val="141414"/>
+                </a:solidFill>
+                <a:latin typeface="Arial"/>
+              </a:rPr>
+              <a:t>—</a:t>
             </a:r>
           </a:p>
           <a:p>
@@ -7851,7 +8595,7 @@
                 </a:solidFill>
                 <a:latin typeface="Arial"/>
               </a:rPr>
-              <a:t>1 of 1 units re-run</a:t>
+              <a:t>chassis and rack level, in bring-up — quantity only</a:t>
             </a:r>
           </a:p>
         </p:txBody>
@@ -8055,7 +8799,7 @@
                 </a:solidFill>
                 <a:latin typeface="Arial"/>
               </a:rPr>
-              <a:t>not enough units</a:t>
+              <a:t>quantity only</a:t>
             </a:r>
           </a:p>
         </p:txBody>
@@ -8129,11 +8873,11 @@
             <a:r>
               <a:rPr sz="1400" b="1">
                 <a:solidFill>
-                  <a:srgbClr val="B3281E"/>
-                </a:solidFill>
-                <a:latin typeface="Arial"/>
-              </a:rPr>
-              <a:t>66.7%</a:t>
+                  <a:srgbClr val="141414"/>
+                </a:solidFill>
+                <a:latin typeface="Arial"/>
+              </a:rPr>
+              <a:t>—</a:t>
             </a:r>
           </a:p>
           <a:p>
@@ -8149,7 +8893,7 @@
                 </a:solidFill>
                 <a:latin typeface="Arial"/>
               </a:rPr>
-              <a:t>2 of 3 units re-run</a:t>
+              <a:t>chassis and rack level, in bring-up — quantity only</a:t>
             </a:r>
           </a:p>
         </p:txBody>
@@ -8353,7 +9097,7 @@
                 </a:solidFill>
                 <a:latin typeface="Arial"/>
               </a:rPr>
-              <a:t>not enough units</a:t>
+              <a:t>quantity only</a:t>
             </a:r>
           </a:p>
         </p:txBody>
@@ -8427,11 +9171,11 @@
             <a:r>
               <a:rPr sz="1400" b="1">
                 <a:solidFill>
-                  <a:srgbClr val="B3281E"/>
-                </a:solidFill>
-                <a:latin typeface="Arial"/>
-              </a:rPr>
-              <a:t>100.0%</a:t>
+                  <a:srgbClr val="141414"/>
+                </a:solidFill>
+                <a:latin typeface="Arial"/>
+              </a:rPr>
+              <a:t>—</a:t>
             </a:r>
           </a:p>
           <a:p>
@@ -8447,7 +9191,7 @@
                 </a:solidFill>
                 <a:latin typeface="Arial"/>
               </a:rPr>
-              <a:t>2 of 2 units re-run</a:t>
+              <a:t>chassis and rack level, in bring-up — quantity only</a:t>
             </a:r>
           </a:p>
         </p:txBody>

--- a/weekly/2026-W33/weekly-2026-W33.pptx
+++ b/weekly/2026-W33/weekly-2026-W33.pptx
@@ -7,6 +7,8 @@
   <p:sldIdLst>
     <p:sldId id="256" r:id="rId7"/>
     <p:sldId id="257" r:id="rId8"/>
+    <p:sldId id="258" r:id="rId9"/>
+    <p:sldId id="259" r:id="rId10"/>
   </p:sldIdLst>
   <p:sldSz cx="12191695" cy="6858000" type="screen4x3"/>
   <p:notesSz cx="6858000" cy="9144000"/>
@@ -3123,7 +3125,7 @@
                 </a:solidFill>
                 <a:latin typeface="Arial"/>
               </a:rPr>
-              <a:t>Production test flow — yield and quantity</a:t>
+              <a:t>How to read this</a:t>
             </a:r>
           </a:p>
           <a:p>
@@ -3139,7 +3141,7 @@
                 </a:solidFill>
                 <a:latin typeface="Arial"/>
               </a:rPr>
-              <a:t>2026-W33 · 2026-08-10 to 2026-08-16, week still running · UTC · first-pass yield and units, in the box</a:t>
+              <a:t>three numbers, and why the table on the next pages is broken out by test step</a:t>
             </a:r>
           </a:p>
         </p:txBody>
@@ -3196,8 +3198,63 @@
         </p:nvSpPr>
         <p:spPr>
           <a:xfrm>
-            <a:off x="658368" y="1188720"/>
-            <a:ext cx="2743200" cy="237744"/>
+            <a:off x="566928" y="1481328"/>
+            <a:ext cx="2331720" cy="1005840"/>
+          </a:xfrm>
+          <a:prstGeom prst="rect">
+            <a:avLst/>
+          </a:prstGeom>
+          <a:noFill/>
+        </p:spPr>
+        <p:txBody>
+          <a:bodyPr wrap="square" lIns="0" rIns="0" tIns="0" bIns="0">
+            <a:spAutoFit/>
+          </a:bodyPr>
+          <a:lstStyle/>
+          <a:p>
+            <a:pPr algn="l">
+              <a:spcAft>
+                <a:spcPts val="200"/>
+              </a:spcAft>
+            </a:pPr>
+            <a:r>
+              <a:rPr sz="1700" b="1">
+                <a:solidFill>
+                  <a:srgbClr val="141414"/>
+                </a:solidFill>
+                <a:latin typeface="Arial"/>
+              </a:rPr>
+              <a:t>1.  Capacity</a:t>
+            </a:r>
+          </a:p>
+          <a:p>
+            <a:pPr algn="l">
+              <a:spcAft>
+                <a:spcPts val="200"/>
+              </a:spcAft>
+            </a:pPr>
+            <a:r>
+              <a:rPr sz="1150" b="0">
+                <a:solidFill>
+                  <a:srgbClr val="6B6B6B"/>
+                </a:solidFill>
+                <a:latin typeface="Arial"/>
+              </a:rPr>
+              <a:t>How many units a step can put through in a week.</a:t>
+            </a:r>
+          </a:p>
+        </p:txBody>
+      </p:sp>
+      <p:sp>
+        <p:nvSpPr>
+          <p:cNvPr id="5" name="TextBox 4"/>
+          <p:cNvSpPr txBox="1"/>
+          <p:nvPr/>
+        </p:nvSpPr>
+        <p:spPr>
+          <a:xfrm>
+            <a:off x="3063240" y="1517904"/>
+            <a:ext cx="4206240" cy="1188720"/>
           </a:xfrm>
           <a:prstGeom prst="rect">
             <a:avLst/>
@@ -3216,83 +3273,368 @@
               </a:spcAft>
             </a:pPr>
             <a:r>
-              <a:rPr sz="1000" b="0">
+              <a:rPr sz="1200" b="0">
+                <a:solidFill>
+                  <a:srgbClr val="141414"/>
+                </a:solidFill>
+                <a:latin typeface="Arial"/>
+              </a:rPr>
+              <a:t>Counted here as units and runs at each step: 407 step-visits across 573 runs this week. Runs exceed visits because a unit can occupy a station more than once — which is why capacity and retest are the same conversation.</a:t>
+            </a:r>
+          </a:p>
+        </p:txBody>
+      </p:sp>
+      <p:sp>
+        <p:nvSpPr>
+          <p:cNvPr id="6" name="TextBox 5"/>
+          <p:cNvSpPr txBox="1"/>
+          <p:nvPr/>
+        </p:nvSpPr>
+        <p:spPr>
+          <a:xfrm>
+            <a:off x="7543800" y="1517904"/>
+            <a:ext cx="4114800" cy="1188720"/>
+          </a:xfrm>
+          <a:prstGeom prst="rect">
+            <a:avLst/>
+          </a:prstGeom>
+          <a:noFill/>
+        </p:spPr>
+        <p:txBody>
+          <a:bodyPr wrap="square" lIns="0" rIns="0" tIns="0" bIns="0">
+            <a:spAutoFit/>
+          </a:bodyPr>
+          <a:lstStyle/>
+          <a:p>
+            <a:pPr algn="l">
+              <a:spcAft>
+                <a:spcPts val="0"/>
+              </a:spcAft>
+            </a:pPr>
+            <a:r>
+              <a:rPr sz="1200" b="1">
+                <a:solidFill>
+                  <a:srgbClr val="141414"/>
+                </a:solidFill>
+                <a:latin typeface="Arial"/>
+              </a:rPr>
+              <a:t>Why it matters.  </a:t>
+            </a:r>
+            <a:r>
+              <a:rPr sz="1200" b="0">
+                <a:solidFill>
+                  <a:srgbClr val="141414"/>
+                </a:solidFill>
+                <a:latin typeface="Arial"/>
+              </a:rPr>
+              <a:t>It sets the schedule. A station cannot ship what it cannot test, and every re-run is a slot a new unit did not get.</a:t>
+            </a:r>
+          </a:p>
+        </p:txBody>
+      </p:sp>
+      <p:sp>
+        <p:nvSpPr>
+          <p:cNvPr id="7" name="TextBox 6"/>
+          <p:cNvSpPr txBox="1"/>
+          <p:nvPr/>
+        </p:nvSpPr>
+        <p:spPr>
+          <a:xfrm>
+            <a:off x="566928" y="2926080"/>
+            <a:ext cx="2331720" cy="1005840"/>
+          </a:xfrm>
+          <a:prstGeom prst="rect">
+            <a:avLst/>
+          </a:prstGeom>
+          <a:noFill/>
+        </p:spPr>
+        <p:txBody>
+          <a:bodyPr wrap="square" lIns="0" rIns="0" tIns="0" bIns="0">
+            <a:spAutoFit/>
+          </a:bodyPr>
+          <a:lstStyle/>
+          <a:p>
+            <a:pPr algn="l">
+              <a:spcAft>
+                <a:spcPts val="200"/>
+              </a:spcAft>
+            </a:pPr>
+            <a:r>
+              <a:rPr sz="1700" b="1">
+                <a:solidFill>
+                  <a:srgbClr val="141414"/>
+                </a:solidFill>
+                <a:latin typeface="Arial"/>
+              </a:rPr>
+              <a:t>2.  Yield</a:t>
+            </a:r>
+          </a:p>
+          <a:p>
+            <a:pPr algn="l">
+              <a:spcAft>
+                <a:spcPts val="200"/>
+              </a:spcAft>
+            </a:pPr>
+            <a:r>
+              <a:rPr sz="1150" b="0">
                 <a:solidFill>
                   <a:srgbClr val="6B6B6B"/>
                 </a:solidFill>
                 <a:latin typeface="Arial"/>
               </a:rPr>
-              <a:t>@Sigurd   </a:t>
-            </a:r>
-            <a:r>
-              <a:rPr sz="1250" b="1">
+              <a:t>The share of units that pass.</a:t>
+            </a:r>
+          </a:p>
+        </p:txBody>
+      </p:sp>
+      <p:sp>
+        <p:nvSpPr>
+          <p:cNvPr id="8" name="TextBox 7"/>
+          <p:cNvSpPr txBox="1"/>
+          <p:nvPr/>
+        </p:nvSpPr>
+        <p:spPr>
+          <a:xfrm>
+            <a:off x="3063240" y="2962656"/>
+            <a:ext cx="4206240" cy="1188720"/>
+          </a:xfrm>
+          <a:prstGeom prst="rect">
+            <a:avLst/>
+          </a:prstGeom>
+          <a:noFill/>
+        </p:spPr>
+        <p:txBody>
+          <a:bodyPr wrap="square" lIns="0" rIns="0" tIns="0" bIns="0">
+            <a:spAutoFit/>
+          </a:bodyPr>
+          <a:lstStyle/>
+          <a:p>
+            <a:pPr algn="l">
+              <a:spcAft>
+                <a:spcPts val="0"/>
+              </a:spcAft>
+            </a:pPr>
+            <a:r>
+              <a:rPr sz="1200" b="0">
                 <a:solidFill>
                   <a:srgbClr val="141414"/>
                 </a:solidFill>
                 <a:latin typeface="Arial"/>
               </a:rPr>
-              <a:t>ASIC</a:t>
-            </a:r>
-          </a:p>
-        </p:txBody>
-      </p:sp>
-      <p:cxnSp>
-        <p:nvCxnSpPr>
-          <p:cNvPr id="5" name="Connector 4"/>
-          <p:cNvCxnSpPr/>
-          <p:nvPr/>
-        </p:nvCxnSpPr>
-        <p:spPr>
-          <a:xfrm>
-            <a:off x="2212848" y="1133856"/>
-            <a:ext cx="0" cy="4672584"/>
-          </a:xfrm>
-          <a:prstGeom prst="line">
-            <a:avLst/>
-          </a:prstGeom>
-          <a:ln w="11430">
-            <a:solidFill>
-              <a:srgbClr val="B5B3AC"/>
-            </a:solidFill>
-            <a:prstDash val="dash"/>
-          </a:ln>
-        </p:spPr>
-        <p:style>
-          <a:lnRef idx="2">
-            <a:schemeClr val="accent1"/>
-          </a:lnRef>
-          <a:fillRef idx="0">
-            <a:schemeClr val="accent1"/>
-          </a:fillRef>
-          <a:effectRef idx="1">
-            <a:schemeClr val="accent1"/>
-          </a:effectRef>
-          <a:fontRef idx="minor">
-            <a:schemeClr val="tx1"/>
-          </a:fontRef>
-        </p:style>
-      </p:cxnSp>
-      <p:sp>
-        <p:nvSpPr>
-          <p:cNvPr id="6" name="Rounded Rectangle 5"/>
+              <a:t>First-pass yield counts units that passed on their first attempt (65.5% at MLT). Yield after retest counts units that passed eventually (74.6%). The gap between them is work done twice.</a:t>
+            </a:r>
+          </a:p>
+        </p:txBody>
+      </p:sp>
+      <p:sp>
+        <p:nvSpPr>
+          <p:cNvPr id="9" name="TextBox 8"/>
+          <p:cNvSpPr txBox="1"/>
+          <p:nvPr/>
+        </p:nvSpPr>
+        <p:spPr>
+          <a:xfrm>
+            <a:off x="7543800" y="2962656"/>
+            <a:ext cx="4114800" cy="1188720"/>
+          </a:xfrm>
+          <a:prstGeom prst="rect">
+            <a:avLst/>
+          </a:prstGeom>
+          <a:noFill/>
+        </p:spPr>
+        <p:txBody>
+          <a:bodyPr wrap="square" lIns="0" rIns="0" tIns="0" bIns="0">
+            <a:spAutoFit/>
+          </a:bodyPr>
+          <a:lstStyle/>
+          <a:p>
+            <a:pPr algn="l">
+              <a:spcAft>
+                <a:spcPts val="0"/>
+              </a:spcAft>
+            </a:pPr>
+            <a:r>
+              <a:rPr sz="1200" b="1">
+                <a:solidFill>
+                  <a:srgbClr val="141414"/>
+                </a:solidFill>
+                <a:latin typeface="Arial"/>
+              </a:rPr>
+              <a:t>Why it matters.  </a:t>
+            </a:r>
+            <a:r>
+              <a:rPr sz="1200" b="0">
+                <a:solidFill>
+                  <a:srgbClr val="141414"/>
+                </a:solidFill>
+                <a:latin typeface="Arial"/>
+              </a:rPr>
+              <a:t>It sets how many units you must start to ship one. At a rolled 35.6% through MLT and HTT, roughly three modules are started for every one that comes out clean first time.</a:t>
+            </a:r>
+          </a:p>
+        </p:txBody>
+      </p:sp>
+      <p:sp>
+        <p:nvSpPr>
+          <p:cNvPr id="10" name="TextBox 9"/>
+          <p:cNvSpPr txBox="1"/>
+          <p:nvPr/>
+        </p:nvSpPr>
+        <p:spPr>
+          <a:xfrm>
+            <a:off x="566928" y="4370832"/>
+            <a:ext cx="2331720" cy="1005840"/>
+          </a:xfrm>
+          <a:prstGeom prst="rect">
+            <a:avLst/>
+          </a:prstGeom>
+          <a:noFill/>
+        </p:spPr>
+        <p:txBody>
+          <a:bodyPr wrap="square" lIns="0" rIns="0" tIns="0" bIns="0">
+            <a:spAutoFit/>
+          </a:bodyPr>
+          <a:lstStyle/>
+          <a:p>
+            <a:pPr algn="l">
+              <a:spcAft>
+                <a:spcPts val="200"/>
+              </a:spcAft>
+            </a:pPr>
+            <a:r>
+              <a:rPr sz="1700" b="1">
+                <a:solidFill>
+                  <a:srgbClr val="141414"/>
+                </a:solidFill>
+                <a:latin typeface="Arial"/>
+              </a:rPr>
+              <a:t>3.  Retest</a:t>
+            </a:r>
+          </a:p>
+          <a:p>
+            <a:pPr algn="l">
+              <a:spcAft>
+                <a:spcPts val="200"/>
+              </a:spcAft>
+            </a:pPr>
+            <a:r>
+              <a:rPr sz="1150" b="0">
+                <a:solidFill>
+                  <a:srgbClr val="6B6B6B"/>
+                </a:solidFill>
+                <a:latin typeface="Arial"/>
+              </a:rPr>
+              <a:t>The share of units that had to be run again.</a:t>
+            </a:r>
+          </a:p>
+        </p:txBody>
+      </p:sp>
+      <p:sp>
+        <p:nvSpPr>
+          <p:cNvPr id="11" name="TextBox 10"/>
+          <p:cNvSpPr txBox="1"/>
+          <p:nvPr/>
+        </p:nvSpPr>
+        <p:spPr>
+          <a:xfrm>
+            <a:off x="3063240" y="4407408"/>
+            <a:ext cx="4206240" cy="1188720"/>
+          </a:xfrm>
+          <a:prstGeom prst="rect">
+            <a:avLst/>
+          </a:prstGeom>
+          <a:noFill/>
+        </p:spPr>
+        <p:txBody>
+          <a:bodyPr wrap="square" lIns="0" rIns="0" tIns="0" bIns="0">
+            <a:spAutoFit/>
+          </a:bodyPr>
+          <a:lstStyle/>
+          <a:p>
+            <a:pPr algn="l">
+              <a:spcAft>
+                <a:spcPts val="0"/>
+              </a:spcAft>
+            </a:pPr>
+            <a:r>
+              <a:rPr sz="1200" b="0">
+                <a:solidFill>
+                  <a:srgbClr val="141414"/>
+                </a:solidFill>
+                <a:latin typeface="Arial"/>
+              </a:rPr>
+              <a:t>19.7% of units at MLT and 27.6% at HTT came back for a second run — 45 and 47 units. Not the same as failures: a unit can be re-run and pass, and most are.</a:t>
+            </a:r>
+          </a:p>
+        </p:txBody>
+      </p:sp>
+      <p:sp>
+        <p:nvSpPr>
+          <p:cNvPr id="12" name="TextBox 11"/>
+          <p:cNvSpPr txBox="1"/>
+          <p:nvPr/>
+        </p:nvSpPr>
+        <p:spPr>
+          <a:xfrm>
+            <a:off x="7543800" y="4407408"/>
+            <a:ext cx="4114800" cy="1188720"/>
+          </a:xfrm>
+          <a:prstGeom prst="rect">
+            <a:avLst/>
+          </a:prstGeom>
+          <a:noFill/>
+        </p:spPr>
+        <p:txBody>
+          <a:bodyPr wrap="square" lIns="0" rIns="0" tIns="0" bIns="0">
+            <a:spAutoFit/>
+          </a:bodyPr>
+          <a:lstStyle/>
+          <a:p>
+            <a:pPr algn="l">
+              <a:spcAft>
+                <a:spcPts val="0"/>
+              </a:spcAft>
+            </a:pPr>
+            <a:r>
+              <a:rPr sz="1200" b="1">
+                <a:solidFill>
+                  <a:srgbClr val="141414"/>
+                </a:solidFill>
+                <a:latin typeface="Arial"/>
+              </a:rPr>
+              <a:t>Why it matters.  </a:t>
+            </a:r>
+            <a:r>
+              <a:rPr sz="1200" b="0">
+                <a:solidFill>
+                  <a:srgbClr val="141414"/>
+                </a:solidFill>
+                <a:latin typeface="Arial"/>
+              </a:rPr>
+              <a:t>It is where yield loss turns into capacity loss. Recovering a unit on the second try protects the shipment and costs the station time it will not get back.</a:t>
+            </a:r>
+          </a:p>
+        </p:txBody>
+      </p:sp>
+      <p:sp>
+        <p:nvSpPr>
+          <p:cNvPr id="13" name="Rectangle 12"/>
           <p:cNvSpPr/>
           <p:nvPr/>
         </p:nvSpPr>
         <p:spPr>
           <a:xfrm>
-            <a:off x="658368" y="1481328"/>
-            <a:ext cx="1298448" cy="640080"/>
-          </a:xfrm>
-          <a:prstGeom prst="roundRect">
+            <a:off x="566928" y="5779008"/>
+            <a:ext cx="11057839" cy="12700"/>
+          </a:xfrm>
+          <a:prstGeom prst="rect">
             <a:avLst/>
           </a:prstGeom>
           <a:solidFill>
-            <a:srgbClr val="D9D9D9"/>
+            <a:srgbClr val="D8D6CF"/>
           </a:solidFill>
-          <a:ln w="12700">
-            <a:solidFill>
-              <a:srgbClr val="A5A5A5"/>
-            </a:solidFill>
+          <a:ln>
+            <a:noFill/>
           </a:ln>
           <a:effectLst/>
         </p:spPr>
@@ -3320,3189 +3662,48 @@
       </p:sp>
       <p:sp>
         <p:nvSpPr>
-          <p:cNvPr id="7" name="TextBox 6"/>
-          <p:cNvSpPr txBox="1"/>
-          <p:nvPr/>
-        </p:nvSpPr>
-        <p:spPr>
-          <a:xfrm>
-            <a:off x="740664" y="1545336"/>
-            <a:ext cx="1133856" cy="530352"/>
-          </a:xfrm>
-          <a:prstGeom prst="rect">
-            <a:avLst/>
-          </a:prstGeom>
-          <a:noFill/>
-        </p:spPr>
-        <p:txBody>
-          <a:bodyPr wrap="square" lIns="0" rIns="0" tIns="0" bIns="0">
-            <a:spAutoFit/>
-          </a:bodyPr>
-          <a:lstStyle/>
-          <a:p>
-            <a:pPr algn="l">
-              <a:spcAft>
-                <a:spcPts val="100"/>
-              </a:spcAft>
-            </a:pPr>
-            <a:r>
-              <a:rPr sz="1250" b="0">
+          <p:cNvPr id="14" name="TextBox 13"/>
+          <p:cNvSpPr txBox="1"/>
+          <p:nvPr/>
+        </p:nvSpPr>
+        <p:spPr>
+          <a:xfrm>
+            <a:off x="566928" y="5943600"/>
+            <a:ext cx="11057839" cy="640080"/>
+          </a:xfrm>
+          <a:prstGeom prst="rect">
+            <a:avLst/>
+          </a:prstGeom>
+          <a:noFill/>
+        </p:spPr>
+        <p:txBody>
+          <a:bodyPr wrap="square" lIns="0" rIns="0" tIns="0" bIns="0">
+            <a:spAutoFit/>
+          </a:bodyPr>
+          <a:lstStyle/>
+          <a:p>
+            <a:pPr algn="l">
+              <a:spcAft>
+                <a:spcPts val="0"/>
+              </a:spcAft>
+            </a:pPr>
+            <a:r>
+              <a:rPr sz="1300" b="1">
                 <a:solidFill>
                   <a:srgbClr val="141414"/>
                 </a:solidFill>
                 <a:latin typeface="Arial"/>
               </a:rPr>
-              <a:t>ASIC</a:t>
-            </a:r>
-          </a:p>
-        </p:txBody>
-      </p:sp>
-      <p:sp>
-        <p:nvSpPr>
-          <p:cNvPr id="8" name="Rounded Rectangle 7"/>
-          <p:cNvSpPr/>
-          <p:nvPr/>
-        </p:nvSpPr>
-        <p:spPr>
-          <a:xfrm>
-            <a:off x="658368" y="2322576"/>
-            <a:ext cx="1298448" cy="640080"/>
-          </a:xfrm>
-          <a:prstGeom prst="roundRect">
-            <a:avLst/>
-          </a:prstGeom>
-          <a:solidFill>
-            <a:srgbClr val="D5E8D4"/>
-          </a:solidFill>
-          <a:ln w="12700">
-            <a:solidFill>
-              <a:srgbClr val="82B366"/>
-            </a:solidFill>
-          </a:ln>
-          <a:effectLst/>
-        </p:spPr>
-        <p:style>
-          <a:lnRef idx="1">
-            <a:schemeClr val="accent1"/>
-          </a:lnRef>
-          <a:fillRef idx="3">
-            <a:schemeClr val="accent1"/>
-          </a:fillRef>
-          <a:effectRef idx="2">
-            <a:schemeClr val="accent1"/>
-          </a:effectRef>
-          <a:fontRef idx="minor">
-            <a:schemeClr val="lt1"/>
-          </a:fontRef>
-        </p:style>
-        <p:txBody>
-          <a:bodyPr rtlCol="0" anchor="ctr"/>
-          <a:lstStyle/>
-          <a:p>
-            <a:pPr algn="ctr"/>
-          </a:p>
-        </p:txBody>
-      </p:sp>
-      <p:sp>
-        <p:nvSpPr>
-          <p:cNvPr id="9" name="TextBox 8"/>
-          <p:cNvSpPr txBox="1"/>
-          <p:nvPr/>
-        </p:nvSpPr>
-        <p:spPr>
-          <a:xfrm>
-            <a:off x="740664" y="2386584"/>
-            <a:ext cx="1133856" cy="530352"/>
-          </a:xfrm>
-          <a:prstGeom prst="rect">
-            <a:avLst/>
-          </a:prstGeom>
-          <a:noFill/>
-        </p:spPr>
-        <p:txBody>
-          <a:bodyPr wrap="square" lIns="0" rIns="0" tIns="0" bIns="0">
-            <a:spAutoFit/>
-          </a:bodyPr>
-          <a:lstStyle/>
-          <a:p>
-            <a:pPr algn="l">
-              <a:spcAft>
-                <a:spcPts val="100"/>
-              </a:spcAft>
-            </a:pPr>
-            <a:r>
-              <a:rPr sz="1250" b="1">
+              <a:t>Why it is broken out by test step:  </a:t>
+            </a:r>
+            <a:r>
+              <a:rPr sz="1300" b="0">
                 <a:solidFill>
                   <a:srgbClr val="141414"/>
                 </a:solidFill>
                 <a:latin typeface="Arial"/>
               </a:rPr>
-              <a:t>WST</a:t>
-            </a:r>
-          </a:p>
-          <a:p>
-            <a:pPr algn="l">
-              <a:spcAft>
-                <a:spcPts val="100"/>
-              </a:spcAft>
-            </a:pPr>
-            <a:r>
-              <a:rPr sz="1500" b="1">
-                <a:solidFill>
-                  <a:srgbClr val="B3281E"/>
-                </a:solidFill>
-                <a:latin typeface="Arial"/>
-              </a:rPr>
-              <a:t>35.3%</a:t>
-            </a:r>
-            <a:r>
-              <a:rPr sz="800" b="0">
-                <a:solidFill>
-                  <a:srgbClr val="6B6B6B"/>
-                </a:solidFill>
-                <a:latin typeface="Arial"/>
-              </a:rPr>
-              <a:t>  reported</a:t>
-            </a:r>
-          </a:p>
-        </p:txBody>
-      </p:sp>
-      <p:sp>
-        <p:nvSpPr>
-          <p:cNvPr id="10" name="Rounded Rectangle 9"/>
-          <p:cNvSpPr/>
-          <p:nvPr/>
-        </p:nvSpPr>
-        <p:spPr>
-          <a:xfrm>
-            <a:off x="658368" y="3163824"/>
-            <a:ext cx="1298448" cy="640080"/>
-          </a:xfrm>
-          <a:prstGeom prst="roundRect">
-            <a:avLst/>
-          </a:prstGeom>
-          <a:solidFill>
-            <a:srgbClr val="D5E8D4"/>
-          </a:solidFill>
-          <a:ln w="12700">
-            <a:solidFill>
-              <a:srgbClr val="82B366"/>
-            </a:solidFill>
-          </a:ln>
-          <a:effectLst/>
-        </p:spPr>
-        <p:style>
-          <a:lnRef idx="1">
-            <a:schemeClr val="accent1"/>
-          </a:lnRef>
-          <a:fillRef idx="3">
-            <a:schemeClr val="accent1"/>
-          </a:fillRef>
-          <a:effectRef idx="2">
-            <a:schemeClr val="accent1"/>
-          </a:effectRef>
-          <a:fontRef idx="minor">
-            <a:schemeClr val="lt1"/>
-          </a:fontRef>
-        </p:style>
-        <p:txBody>
-          <a:bodyPr rtlCol="0" anchor="ctr"/>
-          <a:lstStyle/>
-          <a:p>
-            <a:pPr algn="ctr"/>
-          </a:p>
-        </p:txBody>
-      </p:sp>
-      <p:sp>
-        <p:nvSpPr>
-          <p:cNvPr id="11" name="TextBox 10"/>
-          <p:cNvSpPr txBox="1"/>
-          <p:nvPr/>
-        </p:nvSpPr>
-        <p:spPr>
-          <a:xfrm>
-            <a:off x="740664" y="3227832"/>
-            <a:ext cx="1133856" cy="530352"/>
-          </a:xfrm>
-          <a:prstGeom prst="rect">
-            <a:avLst/>
-          </a:prstGeom>
-          <a:noFill/>
-        </p:spPr>
-        <p:txBody>
-          <a:bodyPr wrap="square" lIns="0" rIns="0" tIns="0" bIns="0">
-            <a:spAutoFit/>
-          </a:bodyPr>
-          <a:lstStyle/>
-          <a:p>
-            <a:pPr algn="l">
-              <a:spcAft>
-                <a:spcPts val="100"/>
-              </a:spcAft>
-            </a:pPr>
-            <a:r>
-              <a:rPr sz="1250" b="1">
-                <a:solidFill>
-                  <a:srgbClr val="141414"/>
-                </a:solidFill>
-                <a:latin typeface="Arial"/>
-              </a:rPr>
-              <a:t>FT</a:t>
-            </a:r>
-          </a:p>
-          <a:p>
-            <a:pPr algn="l">
-              <a:spcAft>
-                <a:spcPts val="100"/>
-              </a:spcAft>
-            </a:pPr>
-            <a:r>
-              <a:rPr sz="1500" b="1">
-                <a:solidFill>
-                  <a:srgbClr val="B56B00"/>
-                </a:solidFill>
-                <a:latin typeface="Arial"/>
-              </a:rPr>
-              <a:t>84.3%</a:t>
-            </a:r>
-            <a:r>
-              <a:rPr sz="800" b="0">
-                <a:solidFill>
-                  <a:srgbClr val="6B6B6B"/>
-                </a:solidFill>
-                <a:latin typeface="Arial"/>
-              </a:rPr>
-              <a:t>  reported</a:t>
-            </a:r>
-          </a:p>
-        </p:txBody>
-      </p:sp>
-      <p:sp>
-        <p:nvSpPr>
-          <p:cNvPr id="12" name="Rounded Rectangle 11"/>
-          <p:cNvSpPr/>
-          <p:nvPr/>
-        </p:nvSpPr>
-        <p:spPr>
-          <a:xfrm>
-            <a:off x="658368" y="4005072"/>
-            <a:ext cx="1298448" cy="640080"/>
-          </a:xfrm>
-          <a:prstGeom prst="roundRect">
-            <a:avLst/>
-          </a:prstGeom>
-          <a:solidFill>
-            <a:srgbClr val="D9D9D9"/>
-          </a:solidFill>
-          <a:ln w="12700">
-            <a:solidFill>
-              <a:srgbClr val="A5A5A5"/>
-            </a:solidFill>
-          </a:ln>
-          <a:effectLst/>
-        </p:spPr>
-        <p:style>
-          <a:lnRef idx="1">
-            <a:schemeClr val="accent1"/>
-          </a:lnRef>
-          <a:fillRef idx="3">
-            <a:schemeClr val="accent1"/>
-          </a:fillRef>
-          <a:effectRef idx="2">
-            <a:schemeClr val="accent1"/>
-          </a:effectRef>
-          <a:fontRef idx="minor">
-            <a:schemeClr val="lt1"/>
-          </a:fontRef>
-        </p:style>
-        <p:txBody>
-          <a:bodyPr rtlCol="0" anchor="ctr"/>
-          <a:lstStyle/>
-          <a:p>
-            <a:pPr algn="ctr"/>
-          </a:p>
-        </p:txBody>
-      </p:sp>
-      <p:sp>
-        <p:nvSpPr>
-          <p:cNvPr id="13" name="TextBox 12"/>
-          <p:cNvSpPr txBox="1"/>
-          <p:nvPr/>
-        </p:nvSpPr>
-        <p:spPr>
-          <a:xfrm>
-            <a:off x="740664" y="4069080"/>
-            <a:ext cx="1133856" cy="530352"/>
-          </a:xfrm>
-          <a:prstGeom prst="rect">
-            <a:avLst/>
-          </a:prstGeom>
-          <a:noFill/>
-        </p:spPr>
-        <p:txBody>
-          <a:bodyPr wrap="square" lIns="0" rIns="0" tIns="0" bIns="0">
-            <a:spAutoFit/>
-          </a:bodyPr>
-          <a:lstStyle/>
-          <a:p>
-            <a:pPr algn="l">
-              <a:spcAft>
-                <a:spcPts val="100"/>
-              </a:spcAft>
-            </a:pPr>
-            <a:r>
-              <a:rPr sz="1250" b="1">
-                <a:solidFill>
-                  <a:srgbClr val="141414"/>
-                </a:solidFill>
-                <a:latin typeface="Arial"/>
-              </a:rPr>
-              <a:t>SLT</a:t>
-            </a:r>
-          </a:p>
-          <a:p>
-            <a:pPr algn="l">
-              <a:spcAft>
-                <a:spcPts val="100"/>
-              </a:spcAft>
-            </a:pPr>
-            <a:r>
-              <a:rPr sz="850" b="0">
-                <a:solidFill>
-                  <a:srgbClr val="6B6B6B"/>
-                </a:solidFill>
-                <a:latin typeface="Arial"/>
-              </a:rPr>
-              <a:t>at Sigurd</a:t>
-            </a:r>
-          </a:p>
-        </p:txBody>
-      </p:sp>
-      <p:sp>
-        <p:nvSpPr>
-          <p:cNvPr id="14" name="TextBox 13"/>
-          <p:cNvSpPr txBox="1"/>
-          <p:nvPr/>
-        </p:nvSpPr>
-        <p:spPr>
-          <a:xfrm>
-            <a:off x="2377440" y="1188720"/>
-            <a:ext cx="2743200" cy="237744"/>
-          </a:xfrm>
-          <a:prstGeom prst="rect">
-            <a:avLst/>
-          </a:prstGeom>
-          <a:noFill/>
-        </p:spPr>
-        <p:txBody>
-          <a:bodyPr wrap="square" lIns="0" rIns="0" tIns="0" bIns="0">
-            <a:spAutoFit/>
-          </a:bodyPr>
-          <a:lstStyle/>
-          <a:p>
-            <a:pPr algn="l">
-              <a:spcAft>
-                <a:spcPts val="0"/>
-              </a:spcAft>
-            </a:pPr>
-            <a:r>
-              <a:rPr sz="1000" b="0">
-                <a:solidFill>
-                  <a:srgbClr val="6B6B6B"/>
-                </a:solidFill>
-                <a:latin typeface="Arial"/>
-              </a:rPr>
-              <a:t>@Pega   </a:t>
-            </a:r>
-            <a:r>
-              <a:rPr sz="1250" b="1">
-                <a:solidFill>
-                  <a:srgbClr val="141414"/>
-                </a:solidFill>
-                <a:latin typeface="Arial"/>
-              </a:rPr>
-              <a:t>PCBA L6</a:t>
-            </a:r>
-          </a:p>
-        </p:txBody>
-      </p:sp>
-      <p:cxnSp>
-        <p:nvCxnSpPr>
-          <p:cNvPr id="15" name="Connector 14"/>
-          <p:cNvCxnSpPr/>
-          <p:nvPr/>
-        </p:nvCxnSpPr>
-        <p:spPr>
-          <a:xfrm>
-            <a:off x="5285232" y="1133856"/>
-            <a:ext cx="0" cy="4672584"/>
-          </a:xfrm>
-          <a:prstGeom prst="line">
-            <a:avLst/>
-          </a:prstGeom>
-          <a:ln w="11430">
-            <a:solidFill>
-              <a:srgbClr val="B5B3AC"/>
-            </a:solidFill>
-            <a:prstDash val="dash"/>
-          </a:ln>
-        </p:spPr>
-        <p:style>
-          <a:lnRef idx="2">
-            <a:schemeClr val="accent1"/>
-          </a:lnRef>
-          <a:fillRef idx="0">
-            <a:schemeClr val="accent1"/>
-          </a:fillRef>
-          <a:effectRef idx="1">
-            <a:schemeClr val="accent1"/>
-          </a:effectRef>
-          <a:fontRef idx="minor">
-            <a:schemeClr val="tx1"/>
-          </a:fontRef>
-        </p:style>
-      </p:cxnSp>
-      <p:sp>
-        <p:nvSpPr>
-          <p:cNvPr id="16" name="Rounded Rectangle 15"/>
-          <p:cNvSpPr/>
-          <p:nvPr/>
-        </p:nvSpPr>
-        <p:spPr>
-          <a:xfrm>
-            <a:off x="2377440" y="1481328"/>
-            <a:ext cx="1298448" cy="640080"/>
-          </a:xfrm>
-          <a:prstGeom prst="roundRect">
-            <a:avLst/>
-          </a:prstGeom>
-          <a:solidFill>
-            <a:srgbClr val="D9D9D9"/>
-          </a:solidFill>
-          <a:ln w="12700">
-            <a:solidFill>
-              <a:srgbClr val="A5A5A5"/>
-            </a:solidFill>
-          </a:ln>
-          <a:effectLst/>
-        </p:spPr>
-        <p:style>
-          <a:lnRef idx="1">
-            <a:schemeClr val="accent1"/>
-          </a:lnRef>
-          <a:fillRef idx="3">
-            <a:schemeClr val="accent1"/>
-          </a:fillRef>
-          <a:effectRef idx="2">
-            <a:schemeClr val="accent1"/>
-          </a:effectRef>
-          <a:fontRef idx="minor">
-            <a:schemeClr val="lt1"/>
-          </a:fontRef>
-        </p:style>
-        <p:txBody>
-          <a:bodyPr rtlCol="0" anchor="ctr"/>
-          <a:lstStyle/>
-          <a:p>
-            <a:pPr algn="ctr"/>
-          </a:p>
-        </p:txBody>
-      </p:sp>
-      <p:sp>
-        <p:nvSpPr>
-          <p:cNvPr id="17" name="TextBox 16"/>
-          <p:cNvSpPr txBox="1"/>
-          <p:nvPr/>
-        </p:nvSpPr>
-        <p:spPr>
-          <a:xfrm>
-            <a:off x="2459736" y="1545336"/>
-            <a:ext cx="1133856" cy="530352"/>
-          </a:xfrm>
-          <a:prstGeom prst="rect">
-            <a:avLst/>
-          </a:prstGeom>
-          <a:noFill/>
-        </p:spPr>
-        <p:txBody>
-          <a:bodyPr wrap="square" lIns="0" rIns="0" tIns="0" bIns="0">
-            <a:spAutoFit/>
-          </a:bodyPr>
-          <a:lstStyle/>
-          <a:p>
-            <a:pPr algn="l">
-              <a:spcAft>
-                <a:spcPts val="100"/>
-              </a:spcAft>
-            </a:pPr>
-            <a:r>
-              <a:rPr sz="1250" b="0">
-                <a:solidFill>
-                  <a:srgbClr val="141414"/>
-                </a:solidFill>
-                <a:latin typeface="Arial"/>
-              </a:rPr>
-              <a:t>SMT / ICT</a:t>
-            </a:r>
-          </a:p>
-          <a:p>
-            <a:pPr algn="l">
-              <a:spcAft>
-                <a:spcPts val="100"/>
-              </a:spcAft>
-            </a:pPr>
-            <a:r>
-              <a:rPr sz="850" b="0">
-                <a:solidFill>
-                  <a:srgbClr val="6B6B6B"/>
-                </a:solidFill>
-                <a:latin typeface="Arial"/>
-              </a:rPr>
-              <a:t>HPB &amp; VBB &amp; PV1 &amp; PDB</a:t>
-            </a:r>
-          </a:p>
-        </p:txBody>
-      </p:sp>
-      <p:sp>
-        <p:nvSpPr>
-          <p:cNvPr id="18" name="Rounded Rectangle 17"/>
-          <p:cNvSpPr/>
-          <p:nvPr/>
-        </p:nvSpPr>
-        <p:spPr>
-          <a:xfrm>
-            <a:off x="2377440" y="4005072"/>
-            <a:ext cx="1298448" cy="640080"/>
-          </a:xfrm>
-          <a:prstGeom prst="roundRect">
-            <a:avLst/>
-          </a:prstGeom>
-          <a:solidFill>
-            <a:srgbClr val="E6D0DE"/>
-          </a:solidFill>
-          <a:ln w="12700">
-            <a:solidFill>
-              <a:srgbClr val="C29FB8"/>
-            </a:solidFill>
-          </a:ln>
-          <a:effectLst/>
-        </p:spPr>
-        <p:style>
-          <a:lnRef idx="1">
-            <a:schemeClr val="accent1"/>
-          </a:lnRef>
-          <a:fillRef idx="3">
-            <a:schemeClr val="accent1"/>
-          </a:fillRef>
-          <a:effectRef idx="2">
-            <a:schemeClr val="accent1"/>
-          </a:effectRef>
-          <a:fontRef idx="minor">
-            <a:schemeClr val="lt1"/>
-          </a:fontRef>
-        </p:style>
-        <p:txBody>
-          <a:bodyPr rtlCol="0" anchor="ctr"/>
-          <a:lstStyle/>
-          <a:p>
-            <a:pPr algn="ctr"/>
-          </a:p>
-        </p:txBody>
-      </p:sp>
-      <p:sp>
-        <p:nvSpPr>
-          <p:cNvPr id="19" name="TextBox 18"/>
-          <p:cNvSpPr txBox="1"/>
-          <p:nvPr/>
-        </p:nvSpPr>
-        <p:spPr>
-          <a:xfrm>
-            <a:off x="2459736" y="4069080"/>
-            <a:ext cx="1133856" cy="530352"/>
-          </a:xfrm>
-          <a:prstGeom prst="rect">
-            <a:avLst/>
-          </a:prstGeom>
-          <a:noFill/>
-        </p:spPr>
-        <p:txBody>
-          <a:bodyPr wrap="square" lIns="0" rIns="0" tIns="0" bIns="0">
-            <a:spAutoFit/>
-          </a:bodyPr>
-          <a:lstStyle/>
-          <a:p>
-            <a:pPr algn="l">
-              <a:spcAft>
-                <a:spcPts val="100"/>
-              </a:spcAft>
-            </a:pPr>
-            <a:r>
-              <a:rPr sz="1250" b="0">
-                <a:solidFill>
-                  <a:srgbClr val="141414"/>
-                </a:solidFill>
-                <a:latin typeface="Arial"/>
-              </a:rPr>
-              <a:t>Flash / BFT</a:t>
-            </a:r>
-          </a:p>
-          <a:p>
-            <a:pPr algn="l">
-              <a:spcAft>
-                <a:spcPts val="100"/>
-              </a:spcAft>
-            </a:pPr>
-            <a:r>
-              <a:rPr sz="850" b="0">
-                <a:solidFill>
-                  <a:srgbClr val="6B6B6B"/>
-                </a:solidFill>
-                <a:latin typeface="Arial"/>
-              </a:rPr>
-              <a:t>VBB — not in the yield view</a:t>
-            </a:r>
-          </a:p>
-        </p:txBody>
-      </p:sp>
-      <p:sp>
-        <p:nvSpPr>
-          <p:cNvPr id="20" name="Rounded Rectangle 19"/>
-          <p:cNvSpPr/>
-          <p:nvPr/>
-        </p:nvSpPr>
-        <p:spPr>
-          <a:xfrm>
-            <a:off x="3840480" y="1481328"/>
-            <a:ext cx="1298448" cy="640080"/>
-          </a:xfrm>
-          <a:prstGeom prst="roundRect">
-            <a:avLst/>
-          </a:prstGeom>
-          <a:solidFill>
-            <a:srgbClr val="D5E8D4"/>
-          </a:solidFill>
-          <a:ln w="12700">
-            <a:solidFill>
-              <a:srgbClr val="82B366"/>
-            </a:solidFill>
-          </a:ln>
-          <a:effectLst/>
-        </p:spPr>
-        <p:style>
-          <a:lnRef idx="1">
-            <a:schemeClr val="accent1"/>
-          </a:lnRef>
-          <a:fillRef idx="3">
-            <a:schemeClr val="accent1"/>
-          </a:fillRef>
-          <a:effectRef idx="2">
-            <a:schemeClr val="accent1"/>
-          </a:effectRef>
-          <a:fontRef idx="minor">
-            <a:schemeClr val="lt1"/>
-          </a:fontRef>
-        </p:style>
-        <p:txBody>
-          <a:bodyPr rtlCol="0" anchor="ctr"/>
-          <a:lstStyle/>
-          <a:p>
-            <a:pPr algn="ctr"/>
-          </a:p>
-        </p:txBody>
-      </p:sp>
-      <p:sp>
-        <p:nvSpPr>
-          <p:cNvPr id="21" name="TextBox 20"/>
-          <p:cNvSpPr txBox="1"/>
-          <p:nvPr/>
-        </p:nvSpPr>
-        <p:spPr>
-          <a:xfrm>
-            <a:off x="3922776" y="1545336"/>
-            <a:ext cx="1133856" cy="530352"/>
-          </a:xfrm>
-          <a:prstGeom prst="rect">
-            <a:avLst/>
-          </a:prstGeom>
-          <a:noFill/>
-        </p:spPr>
-        <p:txBody>
-          <a:bodyPr wrap="square" lIns="0" rIns="0" tIns="0" bIns="0">
-            <a:spAutoFit/>
-          </a:bodyPr>
-          <a:lstStyle/>
-          <a:p>
-            <a:pPr algn="l">
-              <a:spcAft>
-                <a:spcPts val="100"/>
-              </a:spcAft>
-            </a:pPr>
-            <a:r>
-              <a:rPr sz="1250" b="1">
-                <a:solidFill>
-                  <a:srgbClr val="141414"/>
-                </a:solidFill>
-                <a:latin typeface="Arial"/>
-              </a:rPr>
-              <a:t>HTT</a:t>
-            </a:r>
-          </a:p>
-          <a:p>
-            <a:pPr algn="l">
-              <a:spcAft>
-                <a:spcPts val="100"/>
-              </a:spcAft>
-            </a:pPr>
-            <a:r>
-              <a:rPr sz="1600" b="1">
-                <a:solidFill>
-                  <a:srgbClr val="B3281E"/>
-                </a:solidFill>
-                <a:latin typeface="Arial"/>
-              </a:rPr>
-              <a:t>54.3%</a:t>
-            </a:r>
-            <a:r>
-              <a:rPr sz="900" b="0">
-                <a:solidFill>
-                  <a:srgbClr val="6B6B6B"/>
-                </a:solidFill>
-                <a:latin typeface="Arial"/>
-              </a:rPr>
-              <a:t>  170u</a:t>
-            </a:r>
-          </a:p>
-        </p:txBody>
-      </p:sp>
-      <p:sp>
-        <p:nvSpPr>
-          <p:cNvPr id="22" name="Rounded Rectangle 21"/>
-          <p:cNvSpPr/>
-          <p:nvPr/>
-        </p:nvSpPr>
-        <p:spPr>
-          <a:xfrm>
-            <a:off x="3840480" y="2322576"/>
-            <a:ext cx="1298448" cy="640080"/>
-          </a:xfrm>
-          <a:prstGeom prst="roundRect">
-            <a:avLst/>
-          </a:prstGeom>
-          <a:solidFill>
-            <a:srgbClr val="D5E8D4"/>
-          </a:solidFill>
-          <a:ln w="12700">
-            <a:solidFill>
-              <a:srgbClr val="82B366"/>
-            </a:solidFill>
-          </a:ln>
-          <a:effectLst/>
-        </p:spPr>
-        <p:style>
-          <a:lnRef idx="1">
-            <a:schemeClr val="accent1"/>
-          </a:lnRef>
-          <a:fillRef idx="3">
-            <a:schemeClr val="accent1"/>
-          </a:fillRef>
-          <a:effectRef idx="2">
-            <a:schemeClr val="accent1"/>
-          </a:effectRef>
-          <a:fontRef idx="minor">
-            <a:schemeClr val="lt1"/>
-          </a:fontRef>
-        </p:style>
-        <p:txBody>
-          <a:bodyPr rtlCol="0" anchor="ctr"/>
-          <a:lstStyle/>
-          <a:p>
-            <a:pPr algn="ctr"/>
-          </a:p>
-        </p:txBody>
-      </p:sp>
-      <p:sp>
-        <p:nvSpPr>
-          <p:cNvPr id="23" name="TextBox 22"/>
-          <p:cNvSpPr txBox="1"/>
-          <p:nvPr/>
-        </p:nvSpPr>
-        <p:spPr>
-          <a:xfrm>
-            <a:off x="3922776" y="2386584"/>
-            <a:ext cx="1133856" cy="530352"/>
-          </a:xfrm>
-          <a:prstGeom prst="rect">
-            <a:avLst/>
-          </a:prstGeom>
-          <a:noFill/>
-        </p:spPr>
-        <p:txBody>
-          <a:bodyPr wrap="square" lIns="0" rIns="0" tIns="0" bIns="0">
-            <a:spAutoFit/>
-          </a:bodyPr>
-          <a:lstStyle/>
-          <a:p>
-            <a:pPr algn="l">
-              <a:spcAft>
-                <a:spcPts val="100"/>
-              </a:spcAft>
-            </a:pPr>
-            <a:r>
-              <a:rPr sz="1250" b="1">
-                <a:solidFill>
-                  <a:srgbClr val="141414"/>
-                </a:solidFill>
-                <a:latin typeface="Arial"/>
-              </a:rPr>
-              <a:t>MLT</a:t>
-            </a:r>
-          </a:p>
-          <a:p>
-            <a:pPr algn="l">
-              <a:spcAft>
-                <a:spcPts val="100"/>
-              </a:spcAft>
-            </a:pPr>
-            <a:r>
-              <a:rPr sz="1600" b="1">
-                <a:solidFill>
-                  <a:srgbClr val="B56B00"/>
-                </a:solidFill>
-                <a:latin typeface="Arial"/>
-              </a:rPr>
-              <a:t>65.5%</a:t>
-            </a:r>
-            <a:r>
-              <a:rPr sz="900" b="0">
-                <a:solidFill>
-                  <a:srgbClr val="6B6B6B"/>
-                </a:solidFill>
-                <a:latin typeface="Arial"/>
-              </a:rPr>
-              <a:t>  228u</a:t>
-            </a:r>
-          </a:p>
-        </p:txBody>
-      </p:sp>
-      <p:sp>
-        <p:nvSpPr>
-          <p:cNvPr id="24" name="Rounded Rectangle 23"/>
-          <p:cNvSpPr/>
-          <p:nvPr/>
-        </p:nvSpPr>
-        <p:spPr>
-          <a:xfrm>
-            <a:off x="3840480" y="3163824"/>
-            <a:ext cx="1298448" cy="640080"/>
-          </a:xfrm>
-          <a:prstGeom prst="roundRect">
-            <a:avLst/>
-          </a:prstGeom>
-          <a:solidFill>
-            <a:srgbClr val="D9D9D9"/>
-          </a:solidFill>
-          <a:ln w="12700">
-            <a:solidFill>
-              <a:srgbClr val="A5A5A5"/>
-            </a:solidFill>
-          </a:ln>
-          <a:effectLst/>
-        </p:spPr>
-        <p:style>
-          <a:lnRef idx="1">
-            <a:schemeClr val="accent1"/>
-          </a:lnRef>
-          <a:fillRef idx="3">
-            <a:schemeClr val="accent1"/>
-          </a:fillRef>
-          <a:effectRef idx="2">
-            <a:schemeClr val="accent1"/>
-          </a:effectRef>
-          <a:fontRef idx="minor">
-            <a:schemeClr val="lt1"/>
-          </a:fontRef>
-        </p:style>
-        <p:txBody>
-          <a:bodyPr rtlCol="0" anchor="ctr"/>
-          <a:lstStyle/>
-          <a:p>
-            <a:pPr algn="ctr"/>
-          </a:p>
-        </p:txBody>
-      </p:sp>
-      <p:sp>
-        <p:nvSpPr>
-          <p:cNvPr id="25" name="TextBox 24"/>
-          <p:cNvSpPr txBox="1"/>
-          <p:nvPr/>
-        </p:nvSpPr>
-        <p:spPr>
-          <a:xfrm>
-            <a:off x="3922776" y="3227832"/>
-            <a:ext cx="1133856" cy="530352"/>
-          </a:xfrm>
-          <a:prstGeom prst="rect">
-            <a:avLst/>
-          </a:prstGeom>
-          <a:noFill/>
-        </p:spPr>
-        <p:txBody>
-          <a:bodyPr wrap="square" lIns="0" rIns="0" tIns="0" bIns="0">
-            <a:spAutoFit/>
-          </a:bodyPr>
-          <a:lstStyle/>
-          <a:p>
-            <a:pPr algn="l">
-              <a:spcAft>
-                <a:spcPts val="100"/>
-              </a:spcAft>
-            </a:pPr>
-            <a:r>
-              <a:rPr sz="1250" b="0">
-                <a:solidFill>
-                  <a:srgbClr val="141414"/>
-                </a:solidFill>
-                <a:latin typeface="Arial"/>
-              </a:rPr>
-              <a:t>ASSY</a:t>
-            </a:r>
-          </a:p>
-        </p:txBody>
-      </p:sp>
-      <p:sp>
-        <p:nvSpPr>
-          <p:cNvPr id="26" name="TextBox 25"/>
-          <p:cNvSpPr txBox="1"/>
-          <p:nvPr/>
-        </p:nvSpPr>
-        <p:spPr>
-          <a:xfrm>
-            <a:off x="5358384" y="1188720"/>
-            <a:ext cx="2743200" cy="237744"/>
-          </a:xfrm>
-          <a:prstGeom prst="rect">
-            <a:avLst/>
-          </a:prstGeom>
-          <a:noFill/>
-        </p:spPr>
-        <p:txBody>
-          <a:bodyPr wrap="square" lIns="0" rIns="0" tIns="0" bIns="0">
-            <a:spAutoFit/>
-          </a:bodyPr>
-          <a:lstStyle/>
-          <a:p>
-            <a:pPr algn="l">
-              <a:spcAft>
-                <a:spcPts val="0"/>
-              </a:spcAft>
-            </a:pPr>
-            <a:r>
-              <a:rPr sz="1000" b="0">
-                <a:solidFill>
-                  <a:srgbClr val="6B6B6B"/>
-                </a:solidFill>
-                <a:latin typeface="Arial"/>
-              </a:rPr>
-              <a:t/>
-            </a:r>
-            <a:r>
-              <a:rPr sz="1250" b="1">
-                <a:solidFill>
-                  <a:srgbClr val="141414"/>
-                </a:solidFill>
-                <a:latin typeface="Arial"/>
-              </a:rPr>
-              <a:t>FATP L10 2U/4U</a:t>
-            </a:r>
-          </a:p>
-        </p:txBody>
-      </p:sp>
-      <p:cxnSp>
-        <p:nvCxnSpPr>
-          <p:cNvPr id="27" name="Connector 26"/>
-          <p:cNvCxnSpPr/>
-          <p:nvPr/>
-        </p:nvCxnSpPr>
-        <p:spPr>
-          <a:xfrm>
-            <a:off x="7059168" y="1133856"/>
-            <a:ext cx="0" cy="4672584"/>
-          </a:xfrm>
-          <a:prstGeom prst="line">
-            <a:avLst/>
-          </a:prstGeom>
-          <a:ln w="11430">
-            <a:solidFill>
-              <a:srgbClr val="B5B3AC"/>
-            </a:solidFill>
-            <a:prstDash val="dash"/>
-          </a:ln>
-        </p:spPr>
-        <p:style>
-          <a:lnRef idx="2">
-            <a:schemeClr val="accent1"/>
-          </a:lnRef>
-          <a:fillRef idx="0">
-            <a:schemeClr val="accent1"/>
-          </a:fillRef>
-          <a:effectRef idx="1">
-            <a:schemeClr val="accent1"/>
-          </a:effectRef>
-          <a:fontRef idx="minor">
-            <a:schemeClr val="tx1"/>
-          </a:fontRef>
-        </p:style>
-      </p:cxnSp>
-      <p:sp>
-        <p:nvSpPr>
-          <p:cNvPr id="28" name="Rounded Rectangle 27"/>
-          <p:cNvSpPr/>
-          <p:nvPr/>
-        </p:nvSpPr>
-        <p:spPr>
-          <a:xfrm>
-            <a:off x="5358384" y="1481328"/>
-            <a:ext cx="1078992" cy="640080"/>
-          </a:xfrm>
-          <a:prstGeom prst="roundRect">
-            <a:avLst/>
-          </a:prstGeom>
-          <a:solidFill>
-            <a:srgbClr val="D9D9D9"/>
-          </a:solidFill>
-          <a:ln w="12700">
-            <a:solidFill>
-              <a:srgbClr val="A5A5A5"/>
-            </a:solidFill>
-          </a:ln>
-          <a:effectLst/>
-        </p:spPr>
-        <p:style>
-          <a:lnRef idx="1">
-            <a:schemeClr val="accent1"/>
-          </a:lnRef>
-          <a:fillRef idx="3">
-            <a:schemeClr val="accent1"/>
-          </a:fillRef>
-          <a:effectRef idx="2">
-            <a:schemeClr val="accent1"/>
-          </a:effectRef>
-          <a:fontRef idx="minor">
-            <a:schemeClr val="lt1"/>
-          </a:fontRef>
-        </p:style>
-        <p:txBody>
-          <a:bodyPr rtlCol="0" anchor="ctr"/>
-          <a:lstStyle/>
-          <a:p>
-            <a:pPr algn="ctr"/>
-          </a:p>
-        </p:txBody>
-      </p:sp>
-      <p:sp>
-        <p:nvSpPr>
-          <p:cNvPr id="29" name="TextBox 28"/>
-          <p:cNvSpPr txBox="1"/>
-          <p:nvPr/>
-        </p:nvSpPr>
-        <p:spPr>
-          <a:xfrm>
-            <a:off x="5440680" y="1545336"/>
-            <a:ext cx="914400" cy="530352"/>
-          </a:xfrm>
-          <a:prstGeom prst="rect">
-            <a:avLst/>
-          </a:prstGeom>
-          <a:noFill/>
-        </p:spPr>
-        <p:txBody>
-          <a:bodyPr wrap="square" lIns="0" rIns="0" tIns="0" bIns="0">
-            <a:spAutoFit/>
-          </a:bodyPr>
-          <a:lstStyle/>
-          <a:p>
-            <a:pPr algn="l">
-              <a:spcAft>
-                <a:spcPts val="100"/>
-              </a:spcAft>
-            </a:pPr>
-            <a:r>
-              <a:rPr sz="1250" b="0">
-                <a:solidFill>
-                  <a:srgbClr val="141414"/>
-                </a:solidFill>
-                <a:latin typeface="Arial"/>
-              </a:rPr>
-              <a:t>ASSY</a:t>
-            </a:r>
-          </a:p>
-        </p:txBody>
-      </p:sp>
-      <p:sp>
-        <p:nvSpPr>
-          <p:cNvPr id="30" name="Rectangle 29"/>
-          <p:cNvSpPr/>
-          <p:nvPr/>
-        </p:nvSpPr>
-        <p:spPr>
-          <a:xfrm>
-            <a:off x="6492240" y="1517904"/>
-            <a:ext cx="384048" cy="228600"/>
-          </a:xfrm>
-          <a:prstGeom prst="rect">
-            <a:avLst/>
-          </a:prstGeom>
-          <a:solidFill>
-            <a:srgbClr val="CFE2F3"/>
-          </a:solidFill>
-          <a:ln w="7620">
-            <a:solidFill>
-              <a:srgbClr val="8A8882"/>
-            </a:solidFill>
-          </a:ln>
-          <a:effectLst/>
-        </p:spPr>
-        <p:style>
-          <a:lnRef idx="1">
-            <a:schemeClr val="accent1"/>
-          </a:lnRef>
-          <a:fillRef idx="3">
-            <a:schemeClr val="accent1"/>
-          </a:fillRef>
-          <a:effectRef idx="2">
-            <a:schemeClr val="accent1"/>
-          </a:effectRef>
-          <a:fontRef idx="minor">
-            <a:schemeClr val="lt1"/>
-          </a:fontRef>
-        </p:style>
-        <p:txBody>
-          <a:bodyPr rtlCol="0" anchor="ctr"/>
-          <a:lstStyle/>
-          <a:p>
-            <a:pPr algn="ctr"/>
-          </a:p>
-        </p:txBody>
-      </p:sp>
-      <p:sp>
-        <p:nvSpPr>
-          <p:cNvPr id="31" name="TextBox 30"/>
-          <p:cNvSpPr txBox="1"/>
-          <p:nvPr/>
-        </p:nvSpPr>
-        <p:spPr>
-          <a:xfrm>
-            <a:off x="6492240" y="1545336"/>
-            <a:ext cx="384048" cy="182880"/>
-          </a:xfrm>
-          <a:prstGeom prst="rect">
-            <a:avLst/>
-          </a:prstGeom>
-          <a:noFill/>
-        </p:spPr>
-        <p:txBody>
-          <a:bodyPr wrap="square" lIns="0" rIns="0" tIns="0" bIns="0">
-            <a:spAutoFit/>
-          </a:bodyPr>
-          <a:lstStyle/>
-          <a:p>
-            <a:pPr algn="ctr">
-              <a:spcAft>
-                <a:spcPts val="0"/>
-              </a:spcAft>
-            </a:pPr>
-            <a:r>
-              <a:rPr sz="900" b="1">
-                <a:solidFill>
-                  <a:srgbClr val="141414"/>
-                </a:solidFill>
-                <a:latin typeface="Arial"/>
-              </a:rPr>
-              <a:t>4U</a:t>
-            </a:r>
-          </a:p>
-        </p:txBody>
-      </p:sp>
-      <p:sp>
-        <p:nvSpPr>
-          <p:cNvPr id="32" name="Rectangle 31"/>
-          <p:cNvSpPr/>
-          <p:nvPr/>
-        </p:nvSpPr>
-        <p:spPr>
-          <a:xfrm>
-            <a:off x="6492240" y="1801368"/>
-            <a:ext cx="384048" cy="228600"/>
-          </a:xfrm>
-          <a:prstGeom prst="rect">
-            <a:avLst/>
-          </a:prstGeom>
-          <a:solidFill>
-            <a:srgbClr val="FFF2CC"/>
-          </a:solidFill>
-          <a:ln w="7620">
-            <a:solidFill>
-              <a:srgbClr val="8A8882"/>
-            </a:solidFill>
-          </a:ln>
-          <a:effectLst/>
-        </p:spPr>
-        <p:style>
-          <a:lnRef idx="1">
-            <a:schemeClr val="accent1"/>
-          </a:lnRef>
-          <a:fillRef idx="3">
-            <a:schemeClr val="accent1"/>
-          </a:fillRef>
-          <a:effectRef idx="2">
-            <a:schemeClr val="accent1"/>
-          </a:effectRef>
-          <a:fontRef idx="minor">
-            <a:schemeClr val="lt1"/>
-          </a:fontRef>
-        </p:style>
-        <p:txBody>
-          <a:bodyPr rtlCol="0" anchor="ctr"/>
-          <a:lstStyle/>
-          <a:p>
-            <a:pPr algn="ctr"/>
-          </a:p>
-        </p:txBody>
-      </p:sp>
-      <p:sp>
-        <p:nvSpPr>
-          <p:cNvPr id="33" name="TextBox 32"/>
-          <p:cNvSpPr txBox="1"/>
-          <p:nvPr/>
-        </p:nvSpPr>
-        <p:spPr>
-          <a:xfrm>
-            <a:off x="6492240" y="1828800"/>
-            <a:ext cx="384048" cy="182880"/>
-          </a:xfrm>
-          <a:prstGeom prst="rect">
-            <a:avLst/>
-          </a:prstGeom>
-          <a:noFill/>
-        </p:spPr>
-        <p:txBody>
-          <a:bodyPr wrap="square" lIns="0" rIns="0" tIns="0" bIns="0">
-            <a:spAutoFit/>
-          </a:bodyPr>
-          <a:lstStyle/>
-          <a:p>
-            <a:pPr algn="ctr">
-              <a:spcAft>
-                <a:spcPts val="0"/>
-              </a:spcAft>
-            </a:pPr>
-            <a:r>
-              <a:rPr sz="900" b="1">
-                <a:solidFill>
-                  <a:srgbClr val="141414"/>
-                </a:solidFill>
-                <a:latin typeface="Arial"/>
-              </a:rPr>
-              <a:t>2U</a:t>
-            </a:r>
-          </a:p>
-        </p:txBody>
-      </p:sp>
-      <p:sp>
-        <p:nvSpPr>
-          <p:cNvPr id="34" name="TextBox 33"/>
-          <p:cNvSpPr txBox="1"/>
-          <p:nvPr/>
-        </p:nvSpPr>
-        <p:spPr>
-          <a:xfrm>
-            <a:off x="7242048" y="1188720"/>
-            <a:ext cx="2743200" cy="237744"/>
-          </a:xfrm>
-          <a:prstGeom prst="rect">
-            <a:avLst/>
-          </a:prstGeom>
-          <a:noFill/>
-        </p:spPr>
-        <p:txBody>
-          <a:bodyPr wrap="square" lIns="0" rIns="0" tIns="0" bIns="0">
-            <a:spAutoFit/>
-          </a:bodyPr>
-          <a:lstStyle/>
-          <a:p>
-            <a:pPr algn="l">
-              <a:spcAft>
-                <a:spcPts val="0"/>
-              </a:spcAft>
-            </a:pPr>
-            <a:r>
-              <a:rPr sz="1000" b="0">
-                <a:solidFill>
-                  <a:srgbClr val="6B6B6B"/>
-                </a:solidFill>
-                <a:latin typeface="Arial"/>
-              </a:rPr>
-              <a:t/>
-            </a:r>
-            <a:r>
-              <a:rPr sz="1250" b="1">
-                <a:solidFill>
-                  <a:srgbClr val="141414"/>
-                </a:solidFill>
-                <a:latin typeface="Arial"/>
-              </a:rPr>
-              <a:t>FATP L10 6U</a:t>
-            </a:r>
-          </a:p>
-        </p:txBody>
-      </p:sp>
-      <p:cxnSp>
-        <p:nvCxnSpPr>
-          <p:cNvPr id="35" name="Connector 34"/>
-          <p:cNvCxnSpPr/>
-          <p:nvPr/>
-        </p:nvCxnSpPr>
-        <p:spPr>
-          <a:xfrm>
-            <a:off x="10204704" y="1133856"/>
-            <a:ext cx="0" cy="4672584"/>
-          </a:xfrm>
-          <a:prstGeom prst="line">
-            <a:avLst/>
-          </a:prstGeom>
-          <a:ln w="11430">
-            <a:solidFill>
-              <a:srgbClr val="B5B3AC"/>
-            </a:solidFill>
-            <a:prstDash val="dash"/>
-          </a:ln>
-        </p:spPr>
-        <p:style>
-          <a:lnRef idx="2">
-            <a:schemeClr val="accent1"/>
-          </a:lnRef>
-          <a:fillRef idx="0">
-            <a:schemeClr val="accent1"/>
-          </a:fillRef>
-          <a:effectRef idx="1">
-            <a:schemeClr val="accent1"/>
-          </a:effectRef>
-          <a:fontRef idx="minor">
-            <a:schemeClr val="tx1"/>
-          </a:fontRef>
-        </p:style>
-      </p:cxnSp>
-      <p:sp>
-        <p:nvSpPr>
-          <p:cNvPr id="36" name="Rounded Rectangle 35"/>
-          <p:cNvSpPr/>
-          <p:nvPr/>
-        </p:nvSpPr>
-        <p:spPr>
-          <a:xfrm>
-            <a:off x="7242048" y="2322576"/>
-            <a:ext cx="1389888" cy="640080"/>
-          </a:xfrm>
-          <a:prstGeom prst="roundRect">
-            <a:avLst/>
-          </a:prstGeom>
-          <a:solidFill>
-            <a:srgbClr val="F2ECD9"/>
-          </a:solidFill>
-          <a:ln w="12700">
-            <a:solidFill>
-              <a:srgbClr val="C9B46B"/>
-            </a:solidFill>
-          </a:ln>
-          <a:effectLst/>
-        </p:spPr>
-        <p:style>
-          <a:lnRef idx="1">
-            <a:schemeClr val="accent1"/>
-          </a:lnRef>
-          <a:fillRef idx="3">
-            <a:schemeClr val="accent1"/>
-          </a:fillRef>
-          <a:effectRef idx="2">
-            <a:schemeClr val="accent1"/>
-          </a:effectRef>
-          <a:fontRef idx="minor">
-            <a:schemeClr val="lt1"/>
-          </a:fontRef>
-        </p:style>
-        <p:txBody>
-          <a:bodyPr rtlCol="0" anchor="ctr"/>
-          <a:lstStyle/>
-          <a:p>
-            <a:pPr algn="ctr"/>
-          </a:p>
-        </p:txBody>
-      </p:sp>
-      <p:sp>
-        <p:nvSpPr>
-          <p:cNvPr id="37" name="TextBox 36"/>
-          <p:cNvSpPr txBox="1"/>
-          <p:nvPr/>
-        </p:nvSpPr>
-        <p:spPr>
-          <a:xfrm>
-            <a:off x="7324344" y="2386584"/>
-            <a:ext cx="1225296" cy="530352"/>
-          </a:xfrm>
-          <a:prstGeom prst="rect">
-            <a:avLst/>
-          </a:prstGeom>
-          <a:noFill/>
-        </p:spPr>
-        <p:txBody>
-          <a:bodyPr wrap="square" lIns="0" rIns="0" tIns="0" bIns="0">
-            <a:spAutoFit/>
-          </a:bodyPr>
-          <a:lstStyle/>
-          <a:p>
-            <a:pPr algn="l">
-              <a:spcAft>
-                <a:spcPts val="100"/>
-              </a:spcAft>
-            </a:pPr>
-            <a:r>
-              <a:rPr sz="1250" b="1">
-                <a:solidFill>
-                  <a:srgbClr val="141414"/>
-                </a:solidFill>
-                <a:latin typeface="Arial"/>
-              </a:rPr>
-              <a:t>FAT / SFT</a:t>
-            </a:r>
-          </a:p>
-          <a:p>
-            <a:pPr algn="l">
-              <a:spcAft>
-                <a:spcPts val="100"/>
-              </a:spcAft>
-            </a:pPr>
-            <a:r>
-              <a:rPr sz="1100" b="1">
-                <a:solidFill>
-                  <a:srgbClr val="141414"/>
-                </a:solidFill>
-                <a:latin typeface="Arial"/>
-              </a:rPr>
-              <a:t>FAT 2u · SFT 1u</a:t>
-            </a:r>
-          </a:p>
-          <a:p>
-            <a:pPr algn="l">
-              <a:spcAft>
-                <a:spcPts val="100"/>
-              </a:spcAft>
-            </a:pPr>
-            <a:r>
-              <a:rPr sz="800" b="0">
-                <a:solidFill>
-                  <a:srgbClr val="6B6B6B"/>
-                </a:solidFill>
-                <a:latin typeface="Arial"/>
-              </a:rPr>
-              <a:t>quantity only</a:t>
-            </a:r>
-          </a:p>
-        </p:txBody>
-      </p:sp>
-      <p:sp>
-        <p:nvSpPr>
-          <p:cNvPr id="38" name="Rounded Rectangle 37"/>
-          <p:cNvSpPr/>
-          <p:nvPr/>
-        </p:nvSpPr>
-        <p:spPr>
-          <a:xfrm>
-            <a:off x="7242048" y="3163824"/>
-            <a:ext cx="1389888" cy="640080"/>
-          </a:xfrm>
-          <a:prstGeom prst="roundRect">
-            <a:avLst/>
-          </a:prstGeom>
-          <a:solidFill>
-            <a:srgbClr val="F2ECD9"/>
-          </a:solidFill>
-          <a:ln w="12700">
-            <a:solidFill>
-              <a:srgbClr val="C9B46B"/>
-            </a:solidFill>
-          </a:ln>
-          <a:effectLst/>
-        </p:spPr>
-        <p:style>
-          <a:lnRef idx="1">
-            <a:schemeClr val="accent1"/>
-          </a:lnRef>
-          <a:fillRef idx="3">
-            <a:schemeClr val="accent1"/>
-          </a:fillRef>
-          <a:effectRef idx="2">
-            <a:schemeClr val="accent1"/>
-          </a:effectRef>
-          <a:fontRef idx="minor">
-            <a:schemeClr val="lt1"/>
-          </a:fontRef>
-        </p:style>
-        <p:txBody>
-          <a:bodyPr rtlCol="0" anchor="ctr"/>
-          <a:lstStyle/>
-          <a:p>
-            <a:pPr algn="ctr"/>
-          </a:p>
-        </p:txBody>
-      </p:sp>
-      <p:sp>
-        <p:nvSpPr>
-          <p:cNvPr id="39" name="TextBox 38"/>
-          <p:cNvSpPr txBox="1"/>
-          <p:nvPr/>
-        </p:nvSpPr>
-        <p:spPr>
-          <a:xfrm>
-            <a:off x="7324344" y="3227832"/>
-            <a:ext cx="1225296" cy="530352"/>
-          </a:xfrm>
-          <a:prstGeom prst="rect">
-            <a:avLst/>
-          </a:prstGeom>
-          <a:noFill/>
-        </p:spPr>
-        <p:txBody>
-          <a:bodyPr wrap="square" lIns="0" rIns="0" tIns="0" bIns="0">
-            <a:spAutoFit/>
-          </a:bodyPr>
-          <a:lstStyle/>
-          <a:p>
-            <a:pPr algn="l">
-              <a:spcAft>
-                <a:spcPts val="100"/>
-              </a:spcAft>
-            </a:pPr>
-            <a:r>
-              <a:rPr sz="1250" b="1">
-                <a:solidFill>
-                  <a:srgbClr val="141414"/>
-                </a:solidFill>
-                <a:latin typeface="Arial"/>
-              </a:rPr>
-              <a:t>2U</a:t>
-            </a:r>
-          </a:p>
-          <a:p>
-            <a:pPr algn="l">
-              <a:spcAft>
-                <a:spcPts val="100"/>
-              </a:spcAft>
-            </a:pPr>
-            <a:r>
-              <a:rPr sz="1300" b="1">
-                <a:solidFill>
-                  <a:srgbClr val="141414"/>
-                </a:solidFill>
-                <a:latin typeface="Arial"/>
-              </a:rPr>
-              <a:t>3 units</a:t>
-            </a:r>
-          </a:p>
-          <a:p>
-            <a:pPr algn="l">
-              <a:spcAft>
-                <a:spcPts val="100"/>
-              </a:spcAft>
-            </a:pPr>
-            <a:r>
-              <a:rPr sz="800" b="0">
-                <a:solidFill>
-                  <a:srgbClr val="6B6B6B"/>
-                </a:solidFill>
-                <a:latin typeface="Arial"/>
-              </a:rPr>
-              <a:t>quantity only</a:t>
-            </a:r>
-          </a:p>
-        </p:txBody>
-      </p:sp>
-      <p:sp>
-        <p:nvSpPr>
-          <p:cNvPr id="40" name="Rounded Rectangle 39"/>
-          <p:cNvSpPr/>
-          <p:nvPr/>
-        </p:nvSpPr>
-        <p:spPr>
-          <a:xfrm>
-            <a:off x="7242048" y="4005072"/>
-            <a:ext cx="1389888" cy="640080"/>
-          </a:xfrm>
-          <a:prstGeom prst="roundRect">
-            <a:avLst/>
-          </a:prstGeom>
-          <a:solidFill>
-            <a:srgbClr val="D9D9D9"/>
-          </a:solidFill>
-          <a:ln w="12700">
-            <a:solidFill>
-              <a:srgbClr val="A5A5A5"/>
-            </a:solidFill>
-          </a:ln>
-          <a:effectLst/>
-        </p:spPr>
-        <p:style>
-          <a:lnRef idx="1">
-            <a:schemeClr val="accent1"/>
-          </a:lnRef>
-          <a:fillRef idx="3">
-            <a:schemeClr val="accent1"/>
-          </a:fillRef>
-          <a:effectRef idx="2">
-            <a:schemeClr val="accent1"/>
-          </a:effectRef>
-          <a:fontRef idx="minor">
-            <a:schemeClr val="lt1"/>
-          </a:fontRef>
-        </p:style>
-        <p:txBody>
-          <a:bodyPr rtlCol="0" anchor="ctr"/>
-          <a:lstStyle/>
-          <a:p>
-            <a:pPr algn="ctr"/>
-          </a:p>
-        </p:txBody>
-      </p:sp>
-      <p:sp>
-        <p:nvSpPr>
-          <p:cNvPr id="41" name="TextBox 40"/>
-          <p:cNvSpPr txBox="1"/>
-          <p:nvPr/>
-        </p:nvSpPr>
-        <p:spPr>
-          <a:xfrm>
-            <a:off x="7324344" y="4069080"/>
-            <a:ext cx="1225296" cy="530352"/>
-          </a:xfrm>
-          <a:prstGeom prst="rect">
-            <a:avLst/>
-          </a:prstGeom>
-          <a:noFill/>
-        </p:spPr>
-        <p:txBody>
-          <a:bodyPr wrap="square" lIns="0" rIns="0" tIns="0" bIns="0">
-            <a:spAutoFit/>
-          </a:bodyPr>
-          <a:lstStyle/>
-          <a:p>
-            <a:pPr algn="l">
-              <a:spcAft>
-                <a:spcPts val="100"/>
-              </a:spcAft>
-            </a:pPr>
-            <a:r>
-              <a:rPr sz="1250" b="0">
-                <a:solidFill>
-                  <a:srgbClr val="141414"/>
-                </a:solidFill>
-                <a:latin typeface="Arial"/>
-              </a:rPr>
-              <a:t>ASSY</a:t>
-            </a:r>
-          </a:p>
-        </p:txBody>
-      </p:sp>
-      <p:sp>
-        <p:nvSpPr>
-          <p:cNvPr id="42" name="Rounded Rectangle 41"/>
-          <p:cNvSpPr/>
-          <p:nvPr/>
-        </p:nvSpPr>
-        <p:spPr>
-          <a:xfrm>
-            <a:off x="8741664" y="2322576"/>
-            <a:ext cx="1298448" cy="640080"/>
-          </a:xfrm>
-          <a:prstGeom prst="roundRect">
-            <a:avLst/>
-          </a:prstGeom>
-          <a:solidFill>
-            <a:srgbClr val="F2ECD9"/>
-          </a:solidFill>
-          <a:ln w="12700">
-            <a:solidFill>
-              <a:srgbClr val="C9B46B"/>
-            </a:solidFill>
-          </a:ln>
-          <a:effectLst/>
-        </p:spPr>
-        <p:style>
-          <a:lnRef idx="1">
-            <a:schemeClr val="accent1"/>
-          </a:lnRef>
-          <a:fillRef idx="3">
-            <a:schemeClr val="accent1"/>
-          </a:fillRef>
-          <a:effectRef idx="2">
-            <a:schemeClr val="accent1"/>
-          </a:effectRef>
-          <a:fontRef idx="minor">
-            <a:schemeClr val="lt1"/>
-          </a:fontRef>
-        </p:style>
-        <p:txBody>
-          <a:bodyPr rtlCol="0" anchor="ctr"/>
-          <a:lstStyle/>
-          <a:p>
-            <a:pPr algn="ctr"/>
-          </a:p>
-        </p:txBody>
-      </p:sp>
-      <p:sp>
-        <p:nvSpPr>
-          <p:cNvPr id="43" name="TextBox 42"/>
-          <p:cNvSpPr txBox="1"/>
-          <p:nvPr/>
-        </p:nvSpPr>
-        <p:spPr>
-          <a:xfrm>
-            <a:off x="8823960" y="2386584"/>
-            <a:ext cx="1133856" cy="530352"/>
-          </a:xfrm>
-          <a:prstGeom prst="rect">
-            <a:avLst/>
-          </a:prstGeom>
-          <a:noFill/>
-        </p:spPr>
-        <p:txBody>
-          <a:bodyPr wrap="square" lIns="0" rIns="0" tIns="0" bIns="0">
-            <a:spAutoFit/>
-          </a:bodyPr>
-          <a:lstStyle/>
-          <a:p>
-            <a:pPr algn="l">
-              <a:spcAft>
-                <a:spcPts val="100"/>
-              </a:spcAft>
-            </a:pPr>
-            <a:r>
-              <a:rPr sz="1250" b="1">
-                <a:solidFill>
-                  <a:srgbClr val="141414"/>
-                </a:solidFill>
-                <a:latin typeface="Arial"/>
-              </a:rPr>
-              <a:t>Runin</a:t>
-            </a:r>
-          </a:p>
-          <a:p>
-            <a:pPr algn="l">
-              <a:spcAft>
-                <a:spcPts val="100"/>
-              </a:spcAft>
-            </a:pPr>
-            <a:r>
-              <a:rPr sz="1300" b="1">
-                <a:solidFill>
-                  <a:srgbClr val="141414"/>
-                </a:solidFill>
-                <a:latin typeface="Arial"/>
-              </a:rPr>
-              <a:t>1 unit</a:t>
-            </a:r>
-          </a:p>
-          <a:p>
-            <a:pPr algn="l">
-              <a:spcAft>
-                <a:spcPts val="100"/>
-              </a:spcAft>
-            </a:pPr>
-            <a:r>
-              <a:rPr sz="800" b="0">
-                <a:solidFill>
-                  <a:srgbClr val="6B6B6B"/>
-                </a:solidFill>
-                <a:latin typeface="Arial"/>
-              </a:rPr>
-              <a:t>quantity only</a:t>
-            </a:r>
-          </a:p>
-        </p:txBody>
-      </p:sp>
-      <p:sp>
-        <p:nvSpPr>
-          <p:cNvPr id="44" name="TextBox 43"/>
-          <p:cNvSpPr txBox="1"/>
-          <p:nvPr/>
-        </p:nvSpPr>
-        <p:spPr>
-          <a:xfrm>
-            <a:off x="10369296" y="1188720"/>
-            <a:ext cx="1655064" cy="237744"/>
-          </a:xfrm>
-          <a:prstGeom prst="rect">
-            <a:avLst/>
-          </a:prstGeom>
-          <a:noFill/>
-        </p:spPr>
-        <p:txBody>
-          <a:bodyPr wrap="square" lIns="0" rIns="0" tIns="0" bIns="0">
-            <a:spAutoFit/>
-          </a:bodyPr>
-          <a:lstStyle/>
-          <a:p>
-            <a:pPr algn="l">
-              <a:spcAft>
-                <a:spcPts val="0"/>
-              </a:spcAft>
-            </a:pPr>
-            <a:r>
-              <a:rPr sz="1000" b="0">
-                <a:solidFill>
-                  <a:srgbClr val="6B6B6B"/>
-                </a:solidFill>
-                <a:latin typeface="Arial"/>
-              </a:rPr>
-              <a:t/>
-            </a:r>
-            <a:r>
-              <a:rPr sz="1250" b="1">
-                <a:solidFill>
-                  <a:srgbClr val="141414"/>
-                </a:solidFill>
-                <a:latin typeface="Arial"/>
-              </a:rPr>
-              <a:t>Rack L11</a:t>
-            </a:r>
-          </a:p>
-        </p:txBody>
-      </p:sp>
-      <p:sp>
-        <p:nvSpPr>
-          <p:cNvPr id="45" name="Rounded Rectangle 44"/>
-          <p:cNvSpPr/>
-          <p:nvPr/>
-        </p:nvSpPr>
-        <p:spPr>
-          <a:xfrm>
-            <a:off x="10369296" y="2322576"/>
-            <a:ext cx="1389888" cy="640080"/>
-          </a:xfrm>
-          <a:prstGeom prst="roundRect">
-            <a:avLst/>
-          </a:prstGeom>
-          <a:solidFill>
-            <a:srgbClr val="D9D9D9"/>
-          </a:solidFill>
-          <a:ln w="12700">
-            <a:solidFill>
-              <a:srgbClr val="A5A5A5"/>
-            </a:solidFill>
-          </a:ln>
-          <a:effectLst/>
-        </p:spPr>
-        <p:style>
-          <a:lnRef idx="1">
-            <a:schemeClr val="accent1"/>
-          </a:lnRef>
-          <a:fillRef idx="3">
-            <a:schemeClr val="accent1"/>
-          </a:fillRef>
-          <a:effectRef idx="2">
-            <a:schemeClr val="accent1"/>
-          </a:effectRef>
-          <a:fontRef idx="minor">
-            <a:schemeClr val="lt1"/>
-          </a:fontRef>
-        </p:style>
-        <p:txBody>
-          <a:bodyPr rtlCol="0" anchor="ctr"/>
-          <a:lstStyle/>
-          <a:p>
-            <a:pPr algn="ctr"/>
-          </a:p>
-        </p:txBody>
-      </p:sp>
-      <p:sp>
-        <p:nvSpPr>
-          <p:cNvPr id="46" name="TextBox 45"/>
-          <p:cNvSpPr txBox="1"/>
-          <p:nvPr/>
-        </p:nvSpPr>
-        <p:spPr>
-          <a:xfrm>
-            <a:off x="10451592" y="2386584"/>
-            <a:ext cx="1225296" cy="530352"/>
-          </a:xfrm>
-          <a:prstGeom prst="rect">
-            <a:avLst/>
-          </a:prstGeom>
-          <a:noFill/>
-        </p:spPr>
-        <p:txBody>
-          <a:bodyPr wrap="square" lIns="0" rIns="0" tIns="0" bIns="0">
-            <a:spAutoFit/>
-          </a:bodyPr>
-          <a:lstStyle/>
-          <a:p>
-            <a:pPr algn="l">
-              <a:spcAft>
-                <a:spcPts val="100"/>
-              </a:spcAft>
-            </a:pPr>
-            <a:r>
-              <a:rPr sz="1250" b="0">
-                <a:solidFill>
-                  <a:srgbClr val="141414"/>
-                </a:solidFill>
-                <a:latin typeface="Arial"/>
-              </a:rPr>
-              <a:t>ASSY</a:t>
-            </a:r>
-          </a:p>
-        </p:txBody>
-      </p:sp>
-      <p:sp>
-        <p:nvSpPr>
-          <p:cNvPr id="47" name="Rounded Rectangle 46"/>
-          <p:cNvSpPr/>
-          <p:nvPr/>
-        </p:nvSpPr>
-        <p:spPr>
-          <a:xfrm>
-            <a:off x="10369296" y="3163824"/>
-            <a:ext cx="1389888" cy="640080"/>
-          </a:xfrm>
-          <a:prstGeom prst="roundRect">
-            <a:avLst/>
-          </a:prstGeom>
-          <a:solidFill>
-            <a:srgbClr val="F2ECD9"/>
-          </a:solidFill>
-          <a:ln w="12700">
-            <a:solidFill>
-              <a:srgbClr val="C9B46B"/>
-            </a:solidFill>
-          </a:ln>
-          <a:effectLst/>
-        </p:spPr>
-        <p:style>
-          <a:lnRef idx="1">
-            <a:schemeClr val="accent1"/>
-          </a:lnRef>
-          <a:fillRef idx="3">
-            <a:schemeClr val="accent1"/>
-          </a:fillRef>
-          <a:effectRef idx="2">
-            <a:schemeClr val="accent1"/>
-          </a:effectRef>
-          <a:fontRef idx="minor">
-            <a:schemeClr val="lt1"/>
-          </a:fontRef>
-        </p:style>
-        <p:txBody>
-          <a:bodyPr rtlCol="0" anchor="ctr"/>
-          <a:lstStyle/>
-          <a:p>
-            <a:pPr algn="ctr"/>
-          </a:p>
-        </p:txBody>
-      </p:sp>
-      <p:sp>
-        <p:nvSpPr>
-          <p:cNvPr id="48" name="TextBox 47"/>
-          <p:cNvSpPr txBox="1"/>
-          <p:nvPr/>
-        </p:nvSpPr>
-        <p:spPr>
-          <a:xfrm>
-            <a:off x="10451592" y="3227832"/>
-            <a:ext cx="1225296" cy="530352"/>
-          </a:xfrm>
-          <a:prstGeom prst="rect">
-            <a:avLst/>
-          </a:prstGeom>
-          <a:noFill/>
-        </p:spPr>
-        <p:txBody>
-          <a:bodyPr wrap="square" lIns="0" rIns="0" tIns="0" bIns="0">
-            <a:spAutoFit/>
-          </a:bodyPr>
-          <a:lstStyle/>
-          <a:p>
-            <a:pPr algn="l">
-              <a:spcAft>
-                <a:spcPts val="100"/>
-              </a:spcAft>
-            </a:pPr>
-            <a:r>
-              <a:rPr sz="1250" b="1">
-                <a:solidFill>
-                  <a:srgbClr val="141414"/>
-                </a:solidFill>
-                <a:latin typeface="Arial"/>
-              </a:rPr>
-              <a:t>FAT / SFT</a:t>
-            </a:r>
-          </a:p>
-          <a:p>
-            <a:pPr algn="l">
-              <a:spcAft>
-                <a:spcPts val="100"/>
-              </a:spcAft>
-            </a:pPr>
-            <a:r>
-              <a:rPr sz="1300" b="1">
-                <a:solidFill>
-                  <a:srgbClr val="141414"/>
-                </a:solidFill>
-                <a:latin typeface="Arial"/>
-              </a:rPr>
-              <a:t>2 units</a:t>
-            </a:r>
-          </a:p>
-          <a:p>
-            <a:pPr algn="l">
-              <a:spcAft>
-                <a:spcPts val="100"/>
-              </a:spcAft>
-            </a:pPr>
-            <a:r>
-              <a:rPr sz="800" b="0">
-                <a:solidFill>
-                  <a:srgbClr val="6B6B6B"/>
-                </a:solidFill>
-                <a:latin typeface="Arial"/>
-              </a:rPr>
-              <a:t>quantity only</a:t>
-            </a:r>
-          </a:p>
-        </p:txBody>
-      </p:sp>
-      <p:sp>
-        <p:nvSpPr>
-          <p:cNvPr id="49" name="Rounded Rectangle 48"/>
-          <p:cNvSpPr/>
-          <p:nvPr/>
-        </p:nvSpPr>
-        <p:spPr>
-          <a:xfrm>
-            <a:off x="10369296" y="4005072"/>
-            <a:ext cx="1389888" cy="640080"/>
-          </a:xfrm>
-          <a:prstGeom prst="roundRect">
-            <a:avLst/>
-          </a:prstGeom>
-          <a:solidFill>
-            <a:srgbClr val="D9D9D9"/>
-          </a:solidFill>
-          <a:ln w="12700">
-            <a:solidFill>
-              <a:srgbClr val="A5A5A5"/>
-            </a:solidFill>
-          </a:ln>
-          <a:effectLst/>
-        </p:spPr>
-        <p:style>
-          <a:lnRef idx="1">
-            <a:schemeClr val="accent1"/>
-          </a:lnRef>
-          <a:fillRef idx="3">
-            <a:schemeClr val="accent1"/>
-          </a:fillRef>
-          <a:effectRef idx="2">
-            <a:schemeClr val="accent1"/>
-          </a:effectRef>
-          <a:fontRef idx="minor">
-            <a:schemeClr val="lt1"/>
-          </a:fontRef>
-        </p:style>
-        <p:txBody>
-          <a:bodyPr rtlCol="0" anchor="ctr"/>
-          <a:lstStyle/>
-          <a:p>
-            <a:pPr algn="ctr"/>
-          </a:p>
-        </p:txBody>
-      </p:sp>
-      <p:sp>
-        <p:nvSpPr>
-          <p:cNvPr id="50" name="TextBox 49"/>
-          <p:cNvSpPr txBox="1"/>
-          <p:nvPr/>
-        </p:nvSpPr>
-        <p:spPr>
-          <a:xfrm>
-            <a:off x="10451592" y="4069080"/>
-            <a:ext cx="1225296" cy="530352"/>
-          </a:xfrm>
-          <a:prstGeom prst="rect">
-            <a:avLst/>
-          </a:prstGeom>
-          <a:noFill/>
-        </p:spPr>
-        <p:txBody>
-          <a:bodyPr wrap="square" lIns="0" rIns="0" tIns="0" bIns="0">
-            <a:spAutoFit/>
-          </a:bodyPr>
-          <a:lstStyle/>
-          <a:p>
-            <a:pPr algn="l">
-              <a:spcAft>
-                <a:spcPts val="100"/>
-              </a:spcAft>
-            </a:pPr>
-            <a:r>
-              <a:rPr sz="1250" b="1">
-                <a:solidFill>
-                  <a:srgbClr val="141414"/>
-                </a:solidFill>
-                <a:latin typeface="Arial"/>
-              </a:rPr>
-              <a:t>Runin</a:t>
-            </a:r>
-          </a:p>
-          <a:p>
-            <a:pPr algn="l">
-              <a:spcAft>
-                <a:spcPts val="100"/>
-              </a:spcAft>
-            </a:pPr>
-            <a:r>
-              <a:rPr sz="850" b="0">
-                <a:solidFill>
-                  <a:srgbClr val="6B6B6B"/>
-                </a:solidFill>
-                <a:latin typeface="Arial"/>
-              </a:rPr>
-              <a:t>counted with FAT / SFT</a:t>
-            </a:r>
-          </a:p>
-        </p:txBody>
-      </p:sp>
-      <p:sp>
-        <p:nvSpPr>
-          <p:cNvPr id="51" name="Rounded Rectangle 50"/>
-          <p:cNvSpPr/>
-          <p:nvPr/>
-        </p:nvSpPr>
-        <p:spPr>
-          <a:xfrm>
-            <a:off x="10369296" y="4846320"/>
-            <a:ext cx="1389888" cy="640080"/>
-          </a:xfrm>
-          <a:prstGeom prst="roundRect">
-            <a:avLst/>
-          </a:prstGeom>
-          <a:solidFill>
-            <a:srgbClr val="DAE8FC"/>
-          </a:solidFill>
-          <a:ln w="12700">
-            <a:solidFill>
-              <a:srgbClr val="7EA6D9"/>
-            </a:solidFill>
-          </a:ln>
-          <a:effectLst/>
-        </p:spPr>
-        <p:style>
-          <a:lnRef idx="1">
-            <a:schemeClr val="accent1"/>
-          </a:lnRef>
-          <a:fillRef idx="3">
-            <a:schemeClr val="accent1"/>
-          </a:fillRef>
-          <a:effectRef idx="2">
-            <a:schemeClr val="accent1"/>
-          </a:effectRef>
-          <a:fontRef idx="minor">
-            <a:schemeClr val="lt1"/>
-          </a:fontRef>
-        </p:style>
-        <p:txBody>
-          <a:bodyPr rtlCol="0" anchor="ctr"/>
-          <a:lstStyle/>
-          <a:p>
-            <a:pPr algn="ctr"/>
-          </a:p>
-        </p:txBody>
-      </p:sp>
-      <p:sp>
-        <p:nvSpPr>
-          <p:cNvPr id="52" name="TextBox 51"/>
-          <p:cNvSpPr txBox="1"/>
-          <p:nvPr/>
-        </p:nvSpPr>
-        <p:spPr>
-          <a:xfrm>
-            <a:off x="10451592" y="4910328"/>
-            <a:ext cx="1225296" cy="530352"/>
-          </a:xfrm>
-          <a:prstGeom prst="rect">
-            <a:avLst/>
-          </a:prstGeom>
-          <a:noFill/>
-        </p:spPr>
-        <p:txBody>
-          <a:bodyPr wrap="square" lIns="0" rIns="0" tIns="0" bIns="0">
-            <a:spAutoFit/>
-          </a:bodyPr>
-          <a:lstStyle/>
-          <a:p>
-            <a:pPr algn="l">
-              <a:spcAft>
-                <a:spcPts val="100"/>
-              </a:spcAft>
-            </a:pPr>
-            <a:r>
-              <a:rPr sz="1250" b="0">
-                <a:solidFill>
-                  <a:srgbClr val="141414"/>
-                </a:solidFill>
-                <a:latin typeface="Arial"/>
-              </a:rPr>
-              <a:t>Pack</a:t>
-            </a:r>
-          </a:p>
-        </p:txBody>
-      </p:sp>
-      <p:cxnSp>
-        <p:nvCxnSpPr>
-          <p:cNvPr id="53" name="Connector 52"/>
-          <p:cNvCxnSpPr/>
-          <p:nvPr/>
-        </p:nvCxnSpPr>
-        <p:spPr>
-          <a:xfrm>
-            <a:off x="1307592" y="2121408"/>
-            <a:ext cx="0" cy="201168"/>
-          </a:xfrm>
-          <a:prstGeom prst="line">
-            <a:avLst/>
-          </a:prstGeom>
-          <a:ln w="13970">
-            <a:solidFill>
-              <a:srgbClr val="8A8882"/>
-            </a:solidFill>
-            <a:tailEnd type="triangle" w="sm" len="sm"/>
-          </a:ln>
-        </p:spPr>
-        <p:style>
-          <a:lnRef idx="2">
-            <a:schemeClr val="accent1"/>
-          </a:lnRef>
-          <a:fillRef idx="0">
-            <a:schemeClr val="accent1"/>
-          </a:fillRef>
-          <a:effectRef idx="1">
-            <a:schemeClr val="accent1"/>
-          </a:effectRef>
-          <a:fontRef idx="minor">
-            <a:schemeClr val="tx1"/>
-          </a:fontRef>
-        </p:style>
-      </p:cxnSp>
-      <p:cxnSp>
-        <p:nvCxnSpPr>
-          <p:cNvPr id="54" name="Connector 53"/>
-          <p:cNvCxnSpPr/>
-          <p:nvPr/>
-        </p:nvCxnSpPr>
-        <p:spPr>
-          <a:xfrm>
-            <a:off x="1307592" y="2962656"/>
-            <a:ext cx="0" cy="201168"/>
-          </a:xfrm>
-          <a:prstGeom prst="line">
-            <a:avLst/>
-          </a:prstGeom>
-          <a:ln w="13970">
-            <a:solidFill>
-              <a:srgbClr val="8A8882"/>
-            </a:solidFill>
-            <a:tailEnd type="triangle" w="sm" len="sm"/>
-          </a:ln>
-        </p:spPr>
-        <p:style>
-          <a:lnRef idx="2">
-            <a:schemeClr val="accent1"/>
-          </a:lnRef>
-          <a:fillRef idx="0">
-            <a:schemeClr val="accent1"/>
-          </a:fillRef>
-          <a:effectRef idx="1">
-            <a:schemeClr val="accent1"/>
-          </a:effectRef>
-          <a:fontRef idx="minor">
-            <a:schemeClr val="tx1"/>
-          </a:fontRef>
-        </p:style>
-      </p:cxnSp>
-      <p:cxnSp>
-        <p:nvCxnSpPr>
-          <p:cNvPr id="55" name="Connector 54"/>
-          <p:cNvCxnSpPr/>
-          <p:nvPr/>
-        </p:nvCxnSpPr>
-        <p:spPr>
-          <a:xfrm>
-            <a:off x="1307592" y="3803904"/>
-            <a:ext cx="0" cy="201168"/>
-          </a:xfrm>
-          <a:prstGeom prst="line">
-            <a:avLst/>
-          </a:prstGeom>
-          <a:ln w="13970">
-            <a:solidFill>
-              <a:srgbClr val="8A8882"/>
-            </a:solidFill>
-            <a:tailEnd type="triangle" w="sm" len="sm"/>
-          </a:ln>
-        </p:spPr>
-        <p:style>
-          <a:lnRef idx="2">
-            <a:schemeClr val="accent1"/>
-          </a:lnRef>
-          <a:fillRef idx="0">
-            <a:schemeClr val="accent1"/>
-          </a:fillRef>
-          <a:effectRef idx="1">
-            <a:schemeClr val="accent1"/>
-          </a:effectRef>
-          <a:fontRef idx="minor">
-            <a:schemeClr val="tx1"/>
-          </a:fontRef>
-        </p:style>
-      </p:cxnSp>
-      <p:cxnSp>
-        <p:nvCxnSpPr>
-          <p:cNvPr id="56" name="Connector 55"/>
-          <p:cNvCxnSpPr/>
-          <p:nvPr/>
-        </p:nvCxnSpPr>
-        <p:spPr>
-          <a:xfrm>
-            <a:off x="1956815" y="3483864"/>
-            <a:ext cx="1069849" cy="0"/>
-          </a:xfrm>
-          <a:prstGeom prst="line">
-            <a:avLst/>
-          </a:prstGeom>
-          <a:ln w="13970">
-            <a:solidFill>
-              <a:srgbClr val="8A8882"/>
-            </a:solidFill>
-          </a:ln>
-        </p:spPr>
-        <p:style>
-          <a:lnRef idx="2">
-            <a:schemeClr val="accent1"/>
-          </a:lnRef>
-          <a:fillRef idx="0">
-            <a:schemeClr val="accent1"/>
-          </a:fillRef>
-          <a:effectRef idx="1">
-            <a:schemeClr val="accent1"/>
-          </a:effectRef>
-          <a:fontRef idx="minor">
-            <a:schemeClr val="tx1"/>
-          </a:fontRef>
-        </p:style>
-      </p:cxnSp>
-      <p:cxnSp>
-        <p:nvCxnSpPr>
-          <p:cNvPr id="57" name="Connector 56"/>
-          <p:cNvCxnSpPr/>
-          <p:nvPr/>
-        </p:nvCxnSpPr>
-        <p:spPr>
-          <a:xfrm flipV="1">
-            <a:off x="3026664" y="2121408"/>
-            <a:ext cx="0" cy="1362456"/>
-          </a:xfrm>
-          <a:prstGeom prst="line">
-            <a:avLst/>
-          </a:prstGeom>
-          <a:ln w="13970">
-            <a:solidFill>
-              <a:srgbClr val="8A8882"/>
-            </a:solidFill>
-            <a:tailEnd type="triangle" w="sm" len="sm"/>
-          </a:ln>
-        </p:spPr>
-        <p:style>
-          <a:lnRef idx="2">
-            <a:schemeClr val="accent1"/>
-          </a:lnRef>
-          <a:fillRef idx="0">
-            <a:schemeClr val="accent1"/>
-          </a:fillRef>
-          <a:effectRef idx="1">
-            <a:schemeClr val="accent1"/>
-          </a:effectRef>
-          <a:fontRef idx="minor">
-            <a:schemeClr val="tx1"/>
-          </a:fontRef>
-        </p:style>
-      </p:cxnSp>
-      <p:cxnSp>
-        <p:nvCxnSpPr>
-          <p:cNvPr id="58" name="Connector 57"/>
-          <p:cNvCxnSpPr/>
-          <p:nvPr/>
-        </p:nvCxnSpPr>
-        <p:spPr>
-          <a:xfrm>
-            <a:off x="3026664" y="2121408"/>
-            <a:ext cx="0" cy="1883664"/>
-          </a:xfrm>
-          <a:prstGeom prst="line">
-            <a:avLst/>
-          </a:prstGeom>
-          <a:ln w="13970">
-            <a:solidFill>
-              <a:srgbClr val="8A8882"/>
-            </a:solidFill>
-            <a:tailEnd type="triangle" w="sm" len="sm"/>
-          </a:ln>
-        </p:spPr>
-        <p:style>
-          <a:lnRef idx="2">
-            <a:schemeClr val="accent1"/>
-          </a:lnRef>
-          <a:fillRef idx="0">
-            <a:schemeClr val="accent1"/>
-          </a:fillRef>
-          <a:effectRef idx="1">
-            <a:schemeClr val="accent1"/>
-          </a:effectRef>
-          <a:fontRef idx="minor">
-            <a:schemeClr val="tx1"/>
-          </a:fontRef>
-        </p:style>
-      </p:cxnSp>
-      <p:sp>
-        <p:nvSpPr>
-          <p:cNvPr id="59" name="TextBox 58"/>
-          <p:cNvSpPr txBox="1"/>
-          <p:nvPr/>
-        </p:nvSpPr>
-        <p:spPr>
-          <a:xfrm>
-            <a:off x="3072384" y="3822192"/>
-            <a:ext cx="822960" cy="182880"/>
-          </a:xfrm>
-          <a:prstGeom prst="rect">
-            <a:avLst/>
-          </a:prstGeom>
-          <a:noFill/>
-        </p:spPr>
-        <p:txBody>
-          <a:bodyPr wrap="square" lIns="0" rIns="0" tIns="0" bIns="0">
-            <a:spAutoFit/>
-          </a:bodyPr>
-          <a:lstStyle/>
-          <a:p>
-            <a:pPr algn="l">
-              <a:spcAft>
-                <a:spcPts val="0"/>
-              </a:spcAft>
-            </a:pPr>
-            <a:r>
-              <a:rPr sz="850" b="0">
-                <a:solidFill>
-                  <a:srgbClr val="6B6B6B"/>
-                </a:solidFill>
-                <a:latin typeface="Arial"/>
-              </a:rPr>
-              <a:t>VBB</a:t>
-            </a:r>
-          </a:p>
-        </p:txBody>
-      </p:sp>
-      <p:cxnSp>
-        <p:nvCxnSpPr>
-          <p:cNvPr id="60" name="Connector 59"/>
-          <p:cNvCxnSpPr/>
-          <p:nvPr/>
-        </p:nvCxnSpPr>
-        <p:spPr>
-          <a:xfrm>
-            <a:off x="3675887" y="4325112"/>
-            <a:ext cx="813817" cy="0"/>
-          </a:xfrm>
-          <a:prstGeom prst="line">
-            <a:avLst/>
-          </a:prstGeom>
-          <a:ln w="13970">
-            <a:solidFill>
-              <a:srgbClr val="8A8882"/>
-            </a:solidFill>
-          </a:ln>
-        </p:spPr>
-        <p:style>
-          <a:lnRef idx="2">
-            <a:schemeClr val="accent1"/>
-          </a:lnRef>
-          <a:fillRef idx="0">
-            <a:schemeClr val="accent1"/>
-          </a:fillRef>
-          <a:effectRef idx="1">
-            <a:schemeClr val="accent1"/>
-          </a:effectRef>
-          <a:fontRef idx="minor">
-            <a:schemeClr val="tx1"/>
-          </a:fontRef>
-        </p:style>
-      </p:cxnSp>
-      <p:cxnSp>
-        <p:nvCxnSpPr>
-          <p:cNvPr id="61" name="Connector 60"/>
-          <p:cNvCxnSpPr/>
-          <p:nvPr/>
-        </p:nvCxnSpPr>
-        <p:spPr>
-          <a:xfrm flipV="1">
-            <a:off x="4489704" y="3803904"/>
-            <a:ext cx="0" cy="521208"/>
-          </a:xfrm>
-          <a:prstGeom prst="line">
-            <a:avLst/>
-          </a:prstGeom>
-          <a:ln w="13970">
-            <a:solidFill>
-              <a:srgbClr val="8A8882"/>
-            </a:solidFill>
-            <a:tailEnd type="triangle" w="sm" len="sm"/>
-          </a:ln>
-        </p:spPr>
-        <p:style>
-          <a:lnRef idx="2">
-            <a:schemeClr val="accent1"/>
-          </a:lnRef>
-          <a:fillRef idx="0">
-            <a:schemeClr val="accent1"/>
-          </a:fillRef>
-          <a:effectRef idx="1">
-            <a:schemeClr val="accent1"/>
-          </a:effectRef>
-          <a:fontRef idx="minor">
-            <a:schemeClr val="tx1"/>
-          </a:fontRef>
-        </p:style>
-      </p:cxnSp>
-      <p:cxnSp>
-        <p:nvCxnSpPr>
-          <p:cNvPr id="62" name="Connector 61"/>
-          <p:cNvCxnSpPr/>
-          <p:nvPr/>
-        </p:nvCxnSpPr>
-        <p:spPr>
-          <a:xfrm flipV="1">
-            <a:off x="4489704" y="2962656"/>
-            <a:ext cx="0" cy="201168"/>
-          </a:xfrm>
-          <a:prstGeom prst="line">
-            <a:avLst/>
-          </a:prstGeom>
-          <a:ln w="13970">
-            <a:solidFill>
-              <a:srgbClr val="8A8882"/>
-            </a:solidFill>
-            <a:tailEnd type="triangle" w="sm" len="sm"/>
-          </a:ln>
-        </p:spPr>
-        <p:style>
-          <a:lnRef idx="2">
-            <a:schemeClr val="accent1"/>
-          </a:lnRef>
-          <a:fillRef idx="0">
-            <a:schemeClr val="accent1"/>
-          </a:fillRef>
-          <a:effectRef idx="1">
-            <a:schemeClr val="accent1"/>
-          </a:effectRef>
-          <a:fontRef idx="minor">
-            <a:schemeClr val="tx1"/>
-          </a:fontRef>
-        </p:style>
-      </p:cxnSp>
-      <p:cxnSp>
-        <p:nvCxnSpPr>
-          <p:cNvPr id="63" name="Connector 62"/>
-          <p:cNvCxnSpPr/>
-          <p:nvPr/>
-        </p:nvCxnSpPr>
-        <p:spPr>
-          <a:xfrm flipV="1">
-            <a:off x="4489704" y="2121408"/>
-            <a:ext cx="0" cy="201168"/>
-          </a:xfrm>
-          <a:prstGeom prst="line">
-            <a:avLst/>
-          </a:prstGeom>
-          <a:ln w="13970">
-            <a:solidFill>
-              <a:srgbClr val="8A8882"/>
-            </a:solidFill>
-            <a:tailEnd type="triangle" w="sm" len="sm"/>
-          </a:ln>
-        </p:spPr>
-        <p:style>
-          <a:lnRef idx="2">
-            <a:schemeClr val="accent1"/>
-          </a:lnRef>
-          <a:fillRef idx="0">
-            <a:schemeClr val="accent1"/>
-          </a:fillRef>
-          <a:effectRef idx="1">
-            <a:schemeClr val="accent1"/>
-          </a:effectRef>
-          <a:fontRef idx="minor">
-            <a:schemeClr val="tx1"/>
-          </a:fontRef>
-        </p:style>
-      </p:cxnSp>
-      <p:cxnSp>
-        <p:nvCxnSpPr>
-          <p:cNvPr id="64" name="Connector 63"/>
-          <p:cNvCxnSpPr/>
-          <p:nvPr/>
-        </p:nvCxnSpPr>
-        <p:spPr>
-          <a:xfrm>
-            <a:off x="5138928" y="1801368"/>
-            <a:ext cx="219456" cy="0"/>
-          </a:xfrm>
-          <a:prstGeom prst="line">
-            <a:avLst/>
-          </a:prstGeom>
-          <a:ln w="13970">
-            <a:solidFill>
-              <a:srgbClr val="8A8882"/>
-            </a:solidFill>
-            <a:tailEnd type="triangle" w="sm" len="sm"/>
-          </a:ln>
-        </p:spPr>
-        <p:style>
-          <a:lnRef idx="2">
-            <a:schemeClr val="accent1"/>
-          </a:lnRef>
-          <a:fillRef idx="0">
-            <a:schemeClr val="accent1"/>
-          </a:fillRef>
-          <a:effectRef idx="1">
-            <a:schemeClr val="accent1"/>
-          </a:effectRef>
-          <a:fontRef idx="minor">
-            <a:schemeClr val="tx1"/>
-          </a:fontRef>
-        </p:style>
-      </p:cxnSp>
-      <p:cxnSp>
-        <p:nvCxnSpPr>
-          <p:cNvPr id="65" name="Connector 64"/>
-          <p:cNvCxnSpPr/>
-          <p:nvPr/>
-        </p:nvCxnSpPr>
-        <p:spPr>
-          <a:xfrm>
-            <a:off x="6437376" y="1801368"/>
-            <a:ext cx="1499616" cy="0"/>
-          </a:xfrm>
-          <a:prstGeom prst="line">
-            <a:avLst/>
-          </a:prstGeom>
-          <a:ln w="13970">
-            <a:solidFill>
-              <a:srgbClr val="8A8882"/>
-            </a:solidFill>
-          </a:ln>
-        </p:spPr>
-        <p:style>
-          <a:lnRef idx="2">
-            <a:schemeClr val="accent1"/>
-          </a:lnRef>
-          <a:fillRef idx="0">
-            <a:schemeClr val="accent1"/>
-          </a:fillRef>
-          <a:effectRef idx="1">
-            <a:schemeClr val="accent1"/>
-          </a:effectRef>
-          <a:fontRef idx="minor">
-            <a:schemeClr val="tx1"/>
-          </a:fontRef>
-        </p:style>
-      </p:cxnSp>
-      <p:cxnSp>
-        <p:nvCxnSpPr>
-          <p:cNvPr id="66" name="Connector 65"/>
-          <p:cNvCxnSpPr/>
-          <p:nvPr/>
-        </p:nvCxnSpPr>
-        <p:spPr>
-          <a:xfrm>
-            <a:off x="7936992" y="1801368"/>
-            <a:ext cx="0" cy="521208"/>
-          </a:xfrm>
-          <a:prstGeom prst="line">
-            <a:avLst/>
-          </a:prstGeom>
-          <a:ln w="13970">
-            <a:solidFill>
-              <a:srgbClr val="8A8882"/>
-            </a:solidFill>
-            <a:tailEnd type="triangle" w="sm" len="sm"/>
-          </a:ln>
-        </p:spPr>
-        <p:style>
-          <a:lnRef idx="2">
-            <a:schemeClr val="accent1"/>
-          </a:lnRef>
-          <a:fillRef idx="0">
-            <a:schemeClr val="accent1"/>
-          </a:fillRef>
-          <a:effectRef idx="1">
-            <a:schemeClr val="accent1"/>
-          </a:effectRef>
-          <a:fontRef idx="minor">
-            <a:schemeClr val="tx1"/>
-          </a:fontRef>
-        </p:style>
-      </p:cxnSp>
-      <p:cxnSp>
-        <p:nvCxnSpPr>
-          <p:cNvPr id="67" name="Connector 66"/>
-          <p:cNvCxnSpPr/>
-          <p:nvPr/>
-        </p:nvCxnSpPr>
-        <p:spPr>
-          <a:xfrm>
-            <a:off x="5897880" y="2121408"/>
-            <a:ext cx="0" cy="2203704"/>
-          </a:xfrm>
-          <a:prstGeom prst="line">
-            <a:avLst/>
-          </a:prstGeom>
-          <a:ln w="13970">
-            <a:solidFill>
-              <a:srgbClr val="8A8882"/>
-            </a:solidFill>
-          </a:ln>
-        </p:spPr>
-        <p:style>
-          <a:lnRef idx="2">
-            <a:schemeClr val="accent1"/>
-          </a:lnRef>
-          <a:fillRef idx="0">
-            <a:schemeClr val="accent1"/>
-          </a:fillRef>
-          <a:effectRef idx="1">
-            <a:schemeClr val="accent1"/>
-          </a:effectRef>
-          <a:fontRef idx="minor">
-            <a:schemeClr val="tx1"/>
-          </a:fontRef>
-        </p:style>
-      </p:cxnSp>
-      <p:cxnSp>
-        <p:nvCxnSpPr>
-          <p:cNvPr id="68" name="Connector 67"/>
-          <p:cNvCxnSpPr/>
-          <p:nvPr/>
-        </p:nvCxnSpPr>
-        <p:spPr>
-          <a:xfrm>
-            <a:off x="5897880" y="4325112"/>
-            <a:ext cx="1344168" cy="0"/>
-          </a:xfrm>
-          <a:prstGeom prst="line">
-            <a:avLst/>
-          </a:prstGeom>
-          <a:ln w="13970">
-            <a:solidFill>
-              <a:srgbClr val="8A8882"/>
-            </a:solidFill>
-            <a:tailEnd type="triangle" w="sm" len="sm"/>
-          </a:ln>
-        </p:spPr>
-        <p:style>
-          <a:lnRef idx="2">
-            <a:schemeClr val="accent1"/>
-          </a:lnRef>
-          <a:fillRef idx="0">
-            <a:schemeClr val="accent1"/>
-          </a:fillRef>
-          <a:effectRef idx="1">
-            <a:schemeClr val="accent1"/>
-          </a:effectRef>
-          <a:fontRef idx="minor">
-            <a:schemeClr val="tx1"/>
-          </a:fontRef>
-        </p:style>
-      </p:cxnSp>
-      <p:cxnSp>
-        <p:nvCxnSpPr>
-          <p:cNvPr id="69" name="Connector 68"/>
-          <p:cNvCxnSpPr/>
-          <p:nvPr/>
-        </p:nvCxnSpPr>
-        <p:spPr>
-          <a:xfrm flipV="1">
-            <a:off x="7936992" y="3803904"/>
-            <a:ext cx="0" cy="201168"/>
-          </a:xfrm>
-          <a:prstGeom prst="line">
-            <a:avLst/>
-          </a:prstGeom>
-          <a:ln w="13970">
-            <a:solidFill>
-              <a:srgbClr val="8A8882"/>
-            </a:solidFill>
-            <a:tailEnd type="triangle" w="sm" len="sm"/>
-          </a:ln>
-        </p:spPr>
-        <p:style>
-          <a:lnRef idx="2">
-            <a:schemeClr val="accent1"/>
-          </a:lnRef>
-          <a:fillRef idx="0">
-            <a:schemeClr val="accent1"/>
-          </a:fillRef>
-          <a:effectRef idx="1">
-            <a:schemeClr val="accent1"/>
-          </a:effectRef>
-          <a:fontRef idx="minor">
-            <a:schemeClr val="tx1"/>
-          </a:fontRef>
-        </p:style>
-      </p:cxnSp>
-      <p:cxnSp>
-        <p:nvCxnSpPr>
-          <p:cNvPr id="70" name="Connector 69"/>
-          <p:cNvCxnSpPr/>
-          <p:nvPr/>
-        </p:nvCxnSpPr>
-        <p:spPr>
-          <a:xfrm flipV="1">
-            <a:off x="7936992" y="2962656"/>
-            <a:ext cx="0" cy="201168"/>
-          </a:xfrm>
-          <a:prstGeom prst="line">
-            <a:avLst/>
-          </a:prstGeom>
-          <a:ln w="13970">
-            <a:solidFill>
-              <a:srgbClr val="8A8882"/>
-            </a:solidFill>
-            <a:tailEnd type="triangle" w="sm" len="sm"/>
-          </a:ln>
-        </p:spPr>
-        <p:style>
-          <a:lnRef idx="2">
-            <a:schemeClr val="accent1"/>
-          </a:lnRef>
-          <a:fillRef idx="0">
-            <a:schemeClr val="accent1"/>
-          </a:fillRef>
-          <a:effectRef idx="1">
-            <a:schemeClr val="accent1"/>
-          </a:effectRef>
-          <a:fontRef idx="minor">
-            <a:schemeClr val="tx1"/>
-          </a:fontRef>
-        </p:style>
-      </p:cxnSp>
-      <p:cxnSp>
-        <p:nvCxnSpPr>
-          <p:cNvPr id="71" name="Connector 70"/>
-          <p:cNvCxnSpPr/>
-          <p:nvPr/>
-        </p:nvCxnSpPr>
-        <p:spPr>
-          <a:xfrm>
-            <a:off x="8631936" y="2642616"/>
-            <a:ext cx="109728" cy="0"/>
-          </a:xfrm>
-          <a:prstGeom prst="line">
-            <a:avLst/>
-          </a:prstGeom>
-          <a:ln w="13970">
-            <a:solidFill>
-              <a:srgbClr val="8A8882"/>
-            </a:solidFill>
-            <a:tailEnd type="triangle" w="sm" len="sm"/>
-          </a:ln>
-        </p:spPr>
-        <p:style>
-          <a:lnRef idx="2">
-            <a:schemeClr val="accent1"/>
-          </a:lnRef>
-          <a:fillRef idx="0">
-            <a:schemeClr val="accent1"/>
-          </a:fillRef>
-          <a:effectRef idx="1">
-            <a:schemeClr val="accent1"/>
-          </a:effectRef>
-          <a:fontRef idx="minor">
-            <a:schemeClr val="tx1"/>
-          </a:fontRef>
-        </p:style>
-      </p:cxnSp>
-      <p:cxnSp>
-        <p:nvCxnSpPr>
-          <p:cNvPr id="72" name="Connector 71"/>
-          <p:cNvCxnSpPr/>
-          <p:nvPr/>
-        </p:nvCxnSpPr>
-        <p:spPr>
-          <a:xfrm>
-            <a:off x="10040112" y="2642616"/>
-            <a:ext cx="329184" cy="0"/>
-          </a:xfrm>
-          <a:prstGeom prst="line">
-            <a:avLst/>
-          </a:prstGeom>
-          <a:ln w="13970">
-            <a:solidFill>
-              <a:srgbClr val="8A8882"/>
-            </a:solidFill>
-            <a:tailEnd type="triangle" w="sm" len="sm"/>
-          </a:ln>
-        </p:spPr>
-        <p:style>
-          <a:lnRef idx="2">
-            <a:schemeClr val="accent1"/>
-          </a:lnRef>
-          <a:fillRef idx="0">
-            <a:schemeClr val="accent1"/>
-          </a:fillRef>
-          <a:effectRef idx="1">
-            <a:schemeClr val="accent1"/>
-          </a:effectRef>
-          <a:fontRef idx="minor">
-            <a:schemeClr val="tx1"/>
-          </a:fontRef>
-        </p:style>
-      </p:cxnSp>
-      <p:cxnSp>
-        <p:nvCxnSpPr>
-          <p:cNvPr id="73" name="Connector 72"/>
-          <p:cNvCxnSpPr/>
-          <p:nvPr/>
-        </p:nvCxnSpPr>
-        <p:spPr>
-          <a:xfrm>
-            <a:off x="11064240" y="2962656"/>
-            <a:ext cx="0" cy="201168"/>
-          </a:xfrm>
-          <a:prstGeom prst="line">
-            <a:avLst/>
-          </a:prstGeom>
-          <a:ln w="13970">
-            <a:solidFill>
-              <a:srgbClr val="8A8882"/>
-            </a:solidFill>
-            <a:tailEnd type="triangle" w="sm" len="sm"/>
-          </a:ln>
-        </p:spPr>
-        <p:style>
-          <a:lnRef idx="2">
-            <a:schemeClr val="accent1"/>
-          </a:lnRef>
-          <a:fillRef idx="0">
-            <a:schemeClr val="accent1"/>
-          </a:fillRef>
-          <a:effectRef idx="1">
-            <a:schemeClr val="accent1"/>
-          </a:effectRef>
-          <a:fontRef idx="minor">
-            <a:schemeClr val="tx1"/>
-          </a:fontRef>
-        </p:style>
-      </p:cxnSp>
-      <p:cxnSp>
-        <p:nvCxnSpPr>
-          <p:cNvPr id="74" name="Connector 73"/>
-          <p:cNvCxnSpPr/>
-          <p:nvPr/>
-        </p:nvCxnSpPr>
-        <p:spPr>
-          <a:xfrm>
-            <a:off x="11064240" y="3803904"/>
-            <a:ext cx="0" cy="201168"/>
-          </a:xfrm>
-          <a:prstGeom prst="line">
-            <a:avLst/>
-          </a:prstGeom>
-          <a:ln w="13970">
-            <a:solidFill>
-              <a:srgbClr val="8A8882"/>
-            </a:solidFill>
-            <a:tailEnd type="triangle" w="sm" len="sm"/>
-          </a:ln>
-        </p:spPr>
-        <p:style>
-          <a:lnRef idx="2">
-            <a:schemeClr val="accent1"/>
-          </a:lnRef>
-          <a:fillRef idx="0">
-            <a:schemeClr val="accent1"/>
-          </a:fillRef>
-          <a:effectRef idx="1">
-            <a:schemeClr val="accent1"/>
-          </a:effectRef>
-          <a:fontRef idx="minor">
-            <a:schemeClr val="tx1"/>
-          </a:fontRef>
-        </p:style>
-      </p:cxnSp>
-      <p:cxnSp>
-        <p:nvCxnSpPr>
-          <p:cNvPr id="75" name="Connector 74"/>
-          <p:cNvCxnSpPr/>
-          <p:nvPr/>
-        </p:nvCxnSpPr>
-        <p:spPr>
-          <a:xfrm>
-            <a:off x="11064240" y="4645152"/>
-            <a:ext cx="0" cy="201168"/>
-          </a:xfrm>
-          <a:prstGeom prst="line">
-            <a:avLst/>
-          </a:prstGeom>
-          <a:ln w="13970">
-            <a:solidFill>
-              <a:srgbClr val="8A8882"/>
-            </a:solidFill>
-            <a:tailEnd type="triangle" w="sm" len="sm"/>
-          </a:ln>
-        </p:spPr>
-        <p:style>
-          <a:lnRef idx="2">
-            <a:schemeClr val="accent1"/>
-          </a:lnRef>
-          <a:fillRef idx="0">
-            <a:schemeClr val="accent1"/>
-          </a:fillRef>
-          <a:effectRef idx="1">
-            <a:schemeClr val="accent1"/>
-          </a:effectRef>
-          <a:fontRef idx="minor">
-            <a:schemeClr val="tx1"/>
-          </a:fontRef>
-        </p:style>
-      </p:cxnSp>
-      <p:sp>
-        <p:nvSpPr>
-          <p:cNvPr id="76" name="TextBox 75"/>
-          <p:cNvSpPr txBox="1"/>
-          <p:nvPr/>
-        </p:nvSpPr>
-        <p:spPr>
-          <a:xfrm>
-            <a:off x="658368" y="5989320"/>
-            <a:ext cx="10911535" cy="731520"/>
-          </a:xfrm>
-          <a:prstGeom prst="rect">
-            <a:avLst/>
-          </a:prstGeom>
-          <a:noFill/>
-        </p:spPr>
-        <p:txBody>
-          <a:bodyPr wrap="square" lIns="0" rIns="0" tIns="0" bIns="0">
-            <a:spAutoFit/>
-          </a:bodyPr>
-          <a:lstStyle/>
-          <a:p>
-            <a:pPr algn="l">
-              <a:spcAft>
-                <a:spcPts val="100"/>
-              </a:spcAft>
-            </a:pPr>
-            <a:r>
-              <a:rPr sz="950" b="1">
-                <a:solidFill>
-                  <a:srgbClr val="6B6B6B"/>
-                </a:solidFill>
-                <a:latin typeface="Arial"/>
-              </a:rPr>
-              <a:t>Green</a:t>
-            </a:r>
-            <a:r>
-              <a:rPr sz="950" b="0">
-                <a:solidFill>
-                  <a:srgbClr val="6B6B6B"/>
-                </a:solidFill>
-                <a:latin typeface="Arial"/>
-              </a:rPr>
-              <a:t> = yields, and we measure it.   </a:t>
-            </a:r>
-            <a:r>
-              <a:rPr sz="950" b="1">
-                <a:solidFill>
-                  <a:srgbClr val="6B6B6B"/>
-                </a:solidFill>
-                <a:latin typeface="Arial"/>
-              </a:rPr>
-              <a:t>Amber</a:t>
-            </a:r>
-            <a:r>
-              <a:rPr sz="950" b="0">
-                <a:solidFill>
-                  <a:srgbClr val="6B6B6B"/>
-                </a:solidFill>
-                <a:latin typeface="Arial"/>
-              </a:rPr>
-              <a:t> = quantity only, no yield reported.   </a:t>
-            </a:r>
-            <a:r>
-              <a:rPr sz="950" b="1">
-                <a:solidFill>
-                  <a:srgbClr val="6B6B6B"/>
-                </a:solidFill>
-                <a:latin typeface="Arial"/>
-              </a:rPr>
-              <a:t>Grey</a:t>
-            </a:r>
-            <a:r>
-              <a:rPr sz="950" b="0">
-                <a:solidFill>
-                  <a:srgbClr val="6B6B6B"/>
-                </a:solidFill>
-                <a:latin typeface="Arial"/>
-              </a:rPr>
-              <a:t> = builds, moves, or measured elsewhere.</a:t>
-            </a:r>
-          </a:p>
-          <a:p>
-            <a:pPr algn="l">
-              <a:spcAft>
-                <a:spcPts val="100"/>
-              </a:spcAft>
-            </a:pPr>
-            <a:r>
-              <a:rPr sz="850" b="0">
-                <a:solidFill>
-                  <a:srgbClr val="6B6B6B"/>
-                </a:solidFill>
-                <a:latin typeface="Arial"/>
-              </a:rPr>
-              <a:t>Quantity only: L10 FAT, L10 SFT, L10 RIN, L10 2U, L11 Test. L10 and L11 are chassis and rack level and in bring-up — a percentage over three chassis swings 33 points on one unit, so the counts are published and the yields are not.</a:t>
-            </a:r>
-          </a:p>
-          <a:p>
-            <a:pPr algn="l">
-              <a:spcAft>
-                <a:spcPts val="100"/>
-              </a:spcAft>
-            </a:pPr>
-            <a:r>
-              <a:rPr sz="850" b="0">
-                <a:solidFill>
-                  <a:srgbClr val="6B6B6B"/>
-                </a:solidFill>
-                <a:latin typeface="Arial"/>
-              </a:rPr>
-              <a:t>Source: pega2 – pega5 (ESVM), one row per unit. WST and FT reported by Sigurd. VBB provisioning drawn for the flow but left out of the yield view.</a:t>
+              <a:t>a line ships at the rate of its worst step, not its average — so the only useful version of these three numbers is one per step, in the order a unit travels.</a:t>
             </a:r>
           </a:p>
         </p:txBody>
@@ -6559,7 +3760,7 @@
                 </a:solidFill>
                 <a:latin typeface="Arial"/>
               </a:rPr>
-              <a:t>Every step, with the retest rate</a:t>
+              <a:t>Production test flow — yield and quantity</a:t>
             </a:r>
           </a:p>
           <a:p>
@@ -6575,7 +3776,7 @@
                 </a:solidFill>
                 <a:latin typeface="Arial"/>
               </a:rPr>
-              <a:t>2026-W33 · retest rate is the share of units that had to be run again</a:t>
+              <a:t>2026-W33 · 2026-08-10 to 2026-08-16, week still running · UTC · first-pass yield and units, in the box</a:t>
             </a:r>
           </a:p>
         </p:txBody>
@@ -6632,6 +3833,3442 @@
         </p:nvSpPr>
         <p:spPr>
           <a:xfrm>
+            <a:off x="658368" y="1188720"/>
+            <a:ext cx="2743200" cy="237744"/>
+          </a:xfrm>
+          <a:prstGeom prst="rect">
+            <a:avLst/>
+          </a:prstGeom>
+          <a:noFill/>
+        </p:spPr>
+        <p:txBody>
+          <a:bodyPr wrap="square" lIns="0" rIns="0" tIns="0" bIns="0">
+            <a:spAutoFit/>
+          </a:bodyPr>
+          <a:lstStyle/>
+          <a:p>
+            <a:pPr algn="l">
+              <a:spcAft>
+                <a:spcPts val="0"/>
+              </a:spcAft>
+            </a:pPr>
+            <a:r>
+              <a:rPr sz="1000" b="0">
+                <a:solidFill>
+                  <a:srgbClr val="6B6B6B"/>
+                </a:solidFill>
+                <a:latin typeface="Arial"/>
+              </a:rPr>
+              <a:t>@Sigurd   </a:t>
+            </a:r>
+            <a:r>
+              <a:rPr sz="1250" b="1">
+                <a:solidFill>
+                  <a:srgbClr val="141414"/>
+                </a:solidFill>
+                <a:latin typeface="Arial"/>
+              </a:rPr>
+              <a:t>ASIC</a:t>
+            </a:r>
+          </a:p>
+        </p:txBody>
+      </p:sp>
+      <p:cxnSp>
+        <p:nvCxnSpPr>
+          <p:cNvPr id="5" name="Connector 4"/>
+          <p:cNvCxnSpPr/>
+          <p:nvPr/>
+        </p:nvCxnSpPr>
+        <p:spPr>
+          <a:xfrm>
+            <a:off x="2212848" y="1133856"/>
+            <a:ext cx="0" cy="4672584"/>
+          </a:xfrm>
+          <a:prstGeom prst="line">
+            <a:avLst/>
+          </a:prstGeom>
+          <a:ln w="11430">
+            <a:solidFill>
+              <a:srgbClr val="B5B3AC"/>
+            </a:solidFill>
+            <a:prstDash val="dash"/>
+          </a:ln>
+        </p:spPr>
+        <p:style>
+          <a:lnRef idx="2">
+            <a:schemeClr val="accent1"/>
+          </a:lnRef>
+          <a:fillRef idx="0">
+            <a:schemeClr val="accent1"/>
+          </a:fillRef>
+          <a:effectRef idx="1">
+            <a:schemeClr val="accent1"/>
+          </a:effectRef>
+          <a:fontRef idx="minor">
+            <a:schemeClr val="tx1"/>
+          </a:fontRef>
+        </p:style>
+      </p:cxnSp>
+      <p:sp>
+        <p:nvSpPr>
+          <p:cNvPr id="6" name="Rounded Rectangle 5"/>
+          <p:cNvSpPr/>
+          <p:nvPr/>
+        </p:nvSpPr>
+        <p:spPr>
+          <a:xfrm>
+            <a:off x="658368" y="1481328"/>
+            <a:ext cx="1298448" cy="640080"/>
+          </a:xfrm>
+          <a:prstGeom prst="roundRect">
+            <a:avLst/>
+          </a:prstGeom>
+          <a:solidFill>
+            <a:srgbClr val="D9D9D9"/>
+          </a:solidFill>
+          <a:ln w="12700">
+            <a:solidFill>
+              <a:srgbClr val="A5A5A5"/>
+            </a:solidFill>
+          </a:ln>
+          <a:effectLst/>
+        </p:spPr>
+        <p:style>
+          <a:lnRef idx="1">
+            <a:schemeClr val="accent1"/>
+          </a:lnRef>
+          <a:fillRef idx="3">
+            <a:schemeClr val="accent1"/>
+          </a:fillRef>
+          <a:effectRef idx="2">
+            <a:schemeClr val="accent1"/>
+          </a:effectRef>
+          <a:fontRef idx="minor">
+            <a:schemeClr val="lt1"/>
+          </a:fontRef>
+        </p:style>
+        <p:txBody>
+          <a:bodyPr rtlCol="0" anchor="ctr"/>
+          <a:lstStyle/>
+          <a:p>
+            <a:pPr algn="ctr"/>
+          </a:p>
+        </p:txBody>
+      </p:sp>
+      <p:sp>
+        <p:nvSpPr>
+          <p:cNvPr id="7" name="TextBox 6"/>
+          <p:cNvSpPr txBox="1"/>
+          <p:nvPr/>
+        </p:nvSpPr>
+        <p:spPr>
+          <a:xfrm>
+            <a:off x="740664" y="1545336"/>
+            <a:ext cx="1133856" cy="530352"/>
+          </a:xfrm>
+          <a:prstGeom prst="rect">
+            <a:avLst/>
+          </a:prstGeom>
+          <a:noFill/>
+        </p:spPr>
+        <p:txBody>
+          <a:bodyPr wrap="square" lIns="0" rIns="0" tIns="0" bIns="0">
+            <a:spAutoFit/>
+          </a:bodyPr>
+          <a:lstStyle/>
+          <a:p>
+            <a:pPr algn="l">
+              <a:spcAft>
+                <a:spcPts val="100"/>
+              </a:spcAft>
+            </a:pPr>
+            <a:r>
+              <a:rPr sz="1250" b="0">
+                <a:solidFill>
+                  <a:srgbClr val="141414"/>
+                </a:solidFill>
+                <a:latin typeface="Arial"/>
+              </a:rPr>
+              <a:t>ASIC</a:t>
+            </a:r>
+          </a:p>
+        </p:txBody>
+      </p:sp>
+      <p:sp>
+        <p:nvSpPr>
+          <p:cNvPr id="8" name="Rounded Rectangle 7"/>
+          <p:cNvSpPr/>
+          <p:nvPr/>
+        </p:nvSpPr>
+        <p:spPr>
+          <a:xfrm>
+            <a:off x="658368" y="2322576"/>
+            <a:ext cx="1298448" cy="640080"/>
+          </a:xfrm>
+          <a:prstGeom prst="roundRect">
+            <a:avLst/>
+          </a:prstGeom>
+          <a:solidFill>
+            <a:srgbClr val="D5E8D4"/>
+          </a:solidFill>
+          <a:ln w="12700">
+            <a:solidFill>
+              <a:srgbClr val="82B366"/>
+            </a:solidFill>
+          </a:ln>
+          <a:effectLst/>
+        </p:spPr>
+        <p:style>
+          <a:lnRef idx="1">
+            <a:schemeClr val="accent1"/>
+          </a:lnRef>
+          <a:fillRef idx="3">
+            <a:schemeClr val="accent1"/>
+          </a:fillRef>
+          <a:effectRef idx="2">
+            <a:schemeClr val="accent1"/>
+          </a:effectRef>
+          <a:fontRef idx="minor">
+            <a:schemeClr val="lt1"/>
+          </a:fontRef>
+        </p:style>
+        <p:txBody>
+          <a:bodyPr rtlCol="0" anchor="ctr"/>
+          <a:lstStyle/>
+          <a:p>
+            <a:pPr algn="ctr"/>
+          </a:p>
+        </p:txBody>
+      </p:sp>
+      <p:sp>
+        <p:nvSpPr>
+          <p:cNvPr id="9" name="TextBox 8"/>
+          <p:cNvSpPr txBox="1"/>
+          <p:nvPr/>
+        </p:nvSpPr>
+        <p:spPr>
+          <a:xfrm>
+            <a:off x="740664" y="2386584"/>
+            <a:ext cx="1133856" cy="530352"/>
+          </a:xfrm>
+          <a:prstGeom prst="rect">
+            <a:avLst/>
+          </a:prstGeom>
+          <a:noFill/>
+        </p:spPr>
+        <p:txBody>
+          <a:bodyPr wrap="square" lIns="0" rIns="0" tIns="0" bIns="0">
+            <a:spAutoFit/>
+          </a:bodyPr>
+          <a:lstStyle/>
+          <a:p>
+            <a:pPr algn="l">
+              <a:spcAft>
+                <a:spcPts val="100"/>
+              </a:spcAft>
+            </a:pPr>
+            <a:r>
+              <a:rPr sz="1250" b="1">
+                <a:solidFill>
+                  <a:srgbClr val="141414"/>
+                </a:solidFill>
+                <a:latin typeface="Arial"/>
+              </a:rPr>
+              <a:t>WST</a:t>
+            </a:r>
+          </a:p>
+          <a:p>
+            <a:pPr algn="l">
+              <a:spcAft>
+                <a:spcPts val="100"/>
+              </a:spcAft>
+            </a:pPr>
+            <a:r>
+              <a:rPr sz="1500" b="1">
+                <a:solidFill>
+                  <a:srgbClr val="B3281E"/>
+                </a:solidFill>
+                <a:latin typeface="Arial"/>
+              </a:rPr>
+              <a:t>35.3%</a:t>
+            </a:r>
+            <a:r>
+              <a:rPr sz="800" b="0">
+                <a:solidFill>
+                  <a:srgbClr val="6B6B6B"/>
+                </a:solidFill>
+                <a:latin typeface="Arial"/>
+              </a:rPr>
+              <a:t>  reported</a:t>
+            </a:r>
+          </a:p>
+        </p:txBody>
+      </p:sp>
+      <p:sp>
+        <p:nvSpPr>
+          <p:cNvPr id="10" name="Rounded Rectangle 9"/>
+          <p:cNvSpPr/>
+          <p:nvPr/>
+        </p:nvSpPr>
+        <p:spPr>
+          <a:xfrm>
+            <a:off x="658368" y="3163824"/>
+            <a:ext cx="1298448" cy="640080"/>
+          </a:xfrm>
+          <a:prstGeom prst="roundRect">
+            <a:avLst/>
+          </a:prstGeom>
+          <a:solidFill>
+            <a:srgbClr val="D5E8D4"/>
+          </a:solidFill>
+          <a:ln w="12700">
+            <a:solidFill>
+              <a:srgbClr val="82B366"/>
+            </a:solidFill>
+          </a:ln>
+          <a:effectLst/>
+        </p:spPr>
+        <p:style>
+          <a:lnRef idx="1">
+            <a:schemeClr val="accent1"/>
+          </a:lnRef>
+          <a:fillRef idx="3">
+            <a:schemeClr val="accent1"/>
+          </a:fillRef>
+          <a:effectRef idx="2">
+            <a:schemeClr val="accent1"/>
+          </a:effectRef>
+          <a:fontRef idx="minor">
+            <a:schemeClr val="lt1"/>
+          </a:fontRef>
+        </p:style>
+        <p:txBody>
+          <a:bodyPr rtlCol="0" anchor="ctr"/>
+          <a:lstStyle/>
+          <a:p>
+            <a:pPr algn="ctr"/>
+          </a:p>
+        </p:txBody>
+      </p:sp>
+      <p:sp>
+        <p:nvSpPr>
+          <p:cNvPr id="11" name="TextBox 10"/>
+          <p:cNvSpPr txBox="1"/>
+          <p:nvPr/>
+        </p:nvSpPr>
+        <p:spPr>
+          <a:xfrm>
+            <a:off x="740664" y="3227832"/>
+            <a:ext cx="1133856" cy="530352"/>
+          </a:xfrm>
+          <a:prstGeom prst="rect">
+            <a:avLst/>
+          </a:prstGeom>
+          <a:noFill/>
+        </p:spPr>
+        <p:txBody>
+          <a:bodyPr wrap="square" lIns="0" rIns="0" tIns="0" bIns="0">
+            <a:spAutoFit/>
+          </a:bodyPr>
+          <a:lstStyle/>
+          <a:p>
+            <a:pPr algn="l">
+              <a:spcAft>
+                <a:spcPts val="100"/>
+              </a:spcAft>
+            </a:pPr>
+            <a:r>
+              <a:rPr sz="1250" b="1">
+                <a:solidFill>
+                  <a:srgbClr val="141414"/>
+                </a:solidFill>
+                <a:latin typeface="Arial"/>
+              </a:rPr>
+              <a:t>FT</a:t>
+            </a:r>
+          </a:p>
+          <a:p>
+            <a:pPr algn="l">
+              <a:spcAft>
+                <a:spcPts val="100"/>
+              </a:spcAft>
+            </a:pPr>
+            <a:r>
+              <a:rPr sz="1500" b="1">
+                <a:solidFill>
+                  <a:srgbClr val="B56B00"/>
+                </a:solidFill>
+                <a:latin typeface="Arial"/>
+              </a:rPr>
+              <a:t>84.3%</a:t>
+            </a:r>
+            <a:r>
+              <a:rPr sz="800" b="0">
+                <a:solidFill>
+                  <a:srgbClr val="6B6B6B"/>
+                </a:solidFill>
+                <a:latin typeface="Arial"/>
+              </a:rPr>
+              <a:t>  reported</a:t>
+            </a:r>
+          </a:p>
+        </p:txBody>
+      </p:sp>
+      <p:sp>
+        <p:nvSpPr>
+          <p:cNvPr id="12" name="Rounded Rectangle 11"/>
+          <p:cNvSpPr/>
+          <p:nvPr/>
+        </p:nvSpPr>
+        <p:spPr>
+          <a:xfrm>
+            <a:off x="658368" y="4005072"/>
+            <a:ext cx="1298448" cy="640080"/>
+          </a:xfrm>
+          <a:prstGeom prst="roundRect">
+            <a:avLst/>
+          </a:prstGeom>
+          <a:solidFill>
+            <a:srgbClr val="D9D9D9"/>
+          </a:solidFill>
+          <a:ln w="12700">
+            <a:solidFill>
+              <a:srgbClr val="A5A5A5"/>
+            </a:solidFill>
+          </a:ln>
+          <a:effectLst/>
+        </p:spPr>
+        <p:style>
+          <a:lnRef idx="1">
+            <a:schemeClr val="accent1"/>
+          </a:lnRef>
+          <a:fillRef idx="3">
+            <a:schemeClr val="accent1"/>
+          </a:fillRef>
+          <a:effectRef idx="2">
+            <a:schemeClr val="accent1"/>
+          </a:effectRef>
+          <a:fontRef idx="minor">
+            <a:schemeClr val="lt1"/>
+          </a:fontRef>
+        </p:style>
+        <p:txBody>
+          <a:bodyPr rtlCol="0" anchor="ctr"/>
+          <a:lstStyle/>
+          <a:p>
+            <a:pPr algn="ctr"/>
+          </a:p>
+        </p:txBody>
+      </p:sp>
+      <p:sp>
+        <p:nvSpPr>
+          <p:cNvPr id="13" name="TextBox 12"/>
+          <p:cNvSpPr txBox="1"/>
+          <p:nvPr/>
+        </p:nvSpPr>
+        <p:spPr>
+          <a:xfrm>
+            <a:off x="740664" y="4069080"/>
+            <a:ext cx="1133856" cy="530352"/>
+          </a:xfrm>
+          <a:prstGeom prst="rect">
+            <a:avLst/>
+          </a:prstGeom>
+          <a:noFill/>
+        </p:spPr>
+        <p:txBody>
+          <a:bodyPr wrap="square" lIns="0" rIns="0" tIns="0" bIns="0">
+            <a:spAutoFit/>
+          </a:bodyPr>
+          <a:lstStyle/>
+          <a:p>
+            <a:pPr algn="l">
+              <a:spcAft>
+                <a:spcPts val="100"/>
+              </a:spcAft>
+            </a:pPr>
+            <a:r>
+              <a:rPr sz="1250" b="1">
+                <a:solidFill>
+                  <a:srgbClr val="141414"/>
+                </a:solidFill>
+                <a:latin typeface="Arial"/>
+              </a:rPr>
+              <a:t>SLT</a:t>
+            </a:r>
+          </a:p>
+          <a:p>
+            <a:pPr algn="l">
+              <a:spcAft>
+                <a:spcPts val="100"/>
+              </a:spcAft>
+            </a:pPr>
+            <a:r>
+              <a:rPr sz="850" b="0">
+                <a:solidFill>
+                  <a:srgbClr val="6B6B6B"/>
+                </a:solidFill>
+                <a:latin typeface="Arial"/>
+              </a:rPr>
+              <a:t>at Sigurd</a:t>
+            </a:r>
+          </a:p>
+        </p:txBody>
+      </p:sp>
+      <p:sp>
+        <p:nvSpPr>
+          <p:cNvPr id="14" name="TextBox 13"/>
+          <p:cNvSpPr txBox="1"/>
+          <p:nvPr/>
+        </p:nvSpPr>
+        <p:spPr>
+          <a:xfrm>
+            <a:off x="2377440" y="1188720"/>
+            <a:ext cx="2743200" cy="237744"/>
+          </a:xfrm>
+          <a:prstGeom prst="rect">
+            <a:avLst/>
+          </a:prstGeom>
+          <a:noFill/>
+        </p:spPr>
+        <p:txBody>
+          <a:bodyPr wrap="square" lIns="0" rIns="0" tIns="0" bIns="0">
+            <a:spAutoFit/>
+          </a:bodyPr>
+          <a:lstStyle/>
+          <a:p>
+            <a:pPr algn="l">
+              <a:spcAft>
+                <a:spcPts val="0"/>
+              </a:spcAft>
+            </a:pPr>
+            <a:r>
+              <a:rPr sz="1000" b="0">
+                <a:solidFill>
+                  <a:srgbClr val="6B6B6B"/>
+                </a:solidFill>
+                <a:latin typeface="Arial"/>
+              </a:rPr>
+              <a:t>@Pega   </a:t>
+            </a:r>
+            <a:r>
+              <a:rPr sz="1250" b="1">
+                <a:solidFill>
+                  <a:srgbClr val="141414"/>
+                </a:solidFill>
+                <a:latin typeface="Arial"/>
+              </a:rPr>
+              <a:t>PCBA L6</a:t>
+            </a:r>
+          </a:p>
+        </p:txBody>
+      </p:sp>
+      <p:cxnSp>
+        <p:nvCxnSpPr>
+          <p:cNvPr id="15" name="Connector 14"/>
+          <p:cNvCxnSpPr/>
+          <p:nvPr/>
+        </p:nvCxnSpPr>
+        <p:spPr>
+          <a:xfrm>
+            <a:off x="5285232" y="1133856"/>
+            <a:ext cx="0" cy="4672584"/>
+          </a:xfrm>
+          <a:prstGeom prst="line">
+            <a:avLst/>
+          </a:prstGeom>
+          <a:ln w="11430">
+            <a:solidFill>
+              <a:srgbClr val="B5B3AC"/>
+            </a:solidFill>
+            <a:prstDash val="dash"/>
+          </a:ln>
+        </p:spPr>
+        <p:style>
+          <a:lnRef idx="2">
+            <a:schemeClr val="accent1"/>
+          </a:lnRef>
+          <a:fillRef idx="0">
+            <a:schemeClr val="accent1"/>
+          </a:fillRef>
+          <a:effectRef idx="1">
+            <a:schemeClr val="accent1"/>
+          </a:effectRef>
+          <a:fontRef idx="minor">
+            <a:schemeClr val="tx1"/>
+          </a:fontRef>
+        </p:style>
+      </p:cxnSp>
+      <p:sp>
+        <p:nvSpPr>
+          <p:cNvPr id="16" name="Rounded Rectangle 15"/>
+          <p:cNvSpPr/>
+          <p:nvPr/>
+        </p:nvSpPr>
+        <p:spPr>
+          <a:xfrm>
+            <a:off x="2377440" y="1481328"/>
+            <a:ext cx="1298448" cy="640080"/>
+          </a:xfrm>
+          <a:prstGeom prst="roundRect">
+            <a:avLst/>
+          </a:prstGeom>
+          <a:solidFill>
+            <a:srgbClr val="D9D9D9"/>
+          </a:solidFill>
+          <a:ln w="12700">
+            <a:solidFill>
+              <a:srgbClr val="A5A5A5"/>
+            </a:solidFill>
+          </a:ln>
+          <a:effectLst/>
+        </p:spPr>
+        <p:style>
+          <a:lnRef idx="1">
+            <a:schemeClr val="accent1"/>
+          </a:lnRef>
+          <a:fillRef idx="3">
+            <a:schemeClr val="accent1"/>
+          </a:fillRef>
+          <a:effectRef idx="2">
+            <a:schemeClr val="accent1"/>
+          </a:effectRef>
+          <a:fontRef idx="minor">
+            <a:schemeClr val="lt1"/>
+          </a:fontRef>
+        </p:style>
+        <p:txBody>
+          <a:bodyPr rtlCol="0" anchor="ctr"/>
+          <a:lstStyle/>
+          <a:p>
+            <a:pPr algn="ctr"/>
+          </a:p>
+        </p:txBody>
+      </p:sp>
+      <p:sp>
+        <p:nvSpPr>
+          <p:cNvPr id="17" name="TextBox 16"/>
+          <p:cNvSpPr txBox="1"/>
+          <p:nvPr/>
+        </p:nvSpPr>
+        <p:spPr>
+          <a:xfrm>
+            <a:off x="2459736" y="1545336"/>
+            <a:ext cx="1133856" cy="530352"/>
+          </a:xfrm>
+          <a:prstGeom prst="rect">
+            <a:avLst/>
+          </a:prstGeom>
+          <a:noFill/>
+        </p:spPr>
+        <p:txBody>
+          <a:bodyPr wrap="square" lIns="0" rIns="0" tIns="0" bIns="0">
+            <a:spAutoFit/>
+          </a:bodyPr>
+          <a:lstStyle/>
+          <a:p>
+            <a:pPr algn="l">
+              <a:spcAft>
+                <a:spcPts val="100"/>
+              </a:spcAft>
+            </a:pPr>
+            <a:r>
+              <a:rPr sz="1250" b="0">
+                <a:solidFill>
+                  <a:srgbClr val="141414"/>
+                </a:solidFill>
+                <a:latin typeface="Arial"/>
+              </a:rPr>
+              <a:t>SMT / ICT</a:t>
+            </a:r>
+          </a:p>
+          <a:p>
+            <a:pPr algn="l">
+              <a:spcAft>
+                <a:spcPts val="100"/>
+              </a:spcAft>
+            </a:pPr>
+            <a:r>
+              <a:rPr sz="850" b="0">
+                <a:solidFill>
+                  <a:srgbClr val="6B6B6B"/>
+                </a:solidFill>
+                <a:latin typeface="Arial"/>
+              </a:rPr>
+              <a:t>HPB &amp; VBB &amp; PV1 &amp; PDB</a:t>
+            </a:r>
+          </a:p>
+        </p:txBody>
+      </p:sp>
+      <p:sp>
+        <p:nvSpPr>
+          <p:cNvPr id="18" name="Rounded Rectangle 17"/>
+          <p:cNvSpPr/>
+          <p:nvPr/>
+        </p:nvSpPr>
+        <p:spPr>
+          <a:xfrm>
+            <a:off x="2377440" y="4005072"/>
+            <a:ext cx="1298448" cy="640080"/>
+          </a:xfrm>
+          <a:prstGeom prst="roundRect">
+            <a:avLst/>
+          </a:prstGeom>
+          <a:solidFill>
+            <a:srgbClr val="E6D0DE"/>
+          </a:solidFill>
+          <a:ln w="12700">
+            <a:solidFill>
+              <a:srgbClr val="C29FB8"/>
+            </a:solidFill>
+          </a:ln>
+          <a:effectLst/>
+        </p:spPr>
+        <p:style>
+          <a:lnRef idx="1">
+            <a:schemeClr val="accent1"/>
+          </a:lnRef>
+          <a:fillRef idx="3">
+            <a:schemeClr val="accent1"/>
+          </a:fillRef>
+          <a:effectRef idx="2">
+            <a:schemeClr val="accent1"/>
+          </a:effectRef>
+          <a:fontRef idx="minor">
+            <a:schemeClr val="lt1"/>
+          </a:fontRef>
+        </p:style>
+        <p:txBody>
+          <a:bodyPr rtlCol="0" anchor="ctr"/>
+          <a:lstStyle/>
+          <a:p>
+            <a:pPr algn="ctr"/>
+          </a:p>
+        </p:txBody>
+      </p:sp>
+      <p:sp>
+        <p:nvSpPr>
+          <p:cNvPr id="19" name="TextBox 18"/>
+          <p:cNvSpPr txBox="1"/>
+          <p:nvPr/>
+        </p:nvSpPr>
+        <p:spPr>
+          <a:xfrm>
+            <a:off x="2459736" y="4069080"/>
+            <a:ext cx="1133856" cy="530352"/>
+          </a:xfrm>
+          <a:prstGeom prst="rect">
+            <a:avLst/>
+          </a:prstGeom>
+          <a:noFill/>
+        </p:spPr>
+        <p:txBody>
+          <a:bodyPr wrap="square" lIns="0" rIns="0" tIns="0" bIns="0">
+            <a:spAutoFit/>
+          </a:bodyPr>
+          <a:lstStyle/>
+          <a:p>
+            <a:pPr algn="l">
+              <a:spcAft>
+                <a:spcPts val="100"/>
+              </a:spcAft>
+            </a:pPr>
+            <a:r>
+              <a:rPr sz="1250" b="0">
+                <a:solidFill>
+                  <a:srgbClr val="141414"/>
+                </a:solidFill>
+                <a:latin typeface="Arial"/>
+              </a:rPr>
+              <a:t>Flash / BFT</a:t>
+            </a:r>
+          </a:p>
+          <a:p>
+            <a:pPr algn="l">
+              <a:spcAft>
+                <a:spcPts val="100"/>
+              </a:spcAft>
+            </a:pPr>
+            <a:r>
+              <a:rPr sz="850" b="0">
+                <a:solidFill>
+                  <a:srgbClr val="6B6B6B"/>
+                </a:solidFill>
+                <a:latin typeface="Arial"/>
+              </a:rPr>
+              <a:t>VBB — not in the yield view</a:t>
+            </a:r>
+          </a:p>
+        </p:txBody>
+      </p:sp>
+      <p:sp>
+        <p:nvSpPr>
+          <p:cNvPr id="20" name="Rounded Rectangle 19"/>
+          <p:cNvSpPr/>
+          <p:nvPr/>
+        </p:nvSpPr>
+        <p:spPr>
+          <a:xfrm>
+            <a:off x="3840480" y="1481328"/>
+            <a:ext cx="1298448" cy="640080"/>
+          </a:xfrm>
+          <a:prstGeom prst="roundRect">
+            <a:avLst/>
+          </a:prstGeom>
+          <a:solidFill>
+            <a:srgbClr val="D5E8D4"/>
+          </a:solidFill>
+          <a:ln w="12700">
+            <a:solidFill>
+              <a:srgbClr val="82B366"/>
+            </a:solidFill>
+          </a:ln>
+          <a:effectLst/>
+        </p:spPr>
+        <p:style>
+          <a:lnRef idx="1">
+            <a:schemeClr val="accent1"/>
+          </a:lnRef>
+          <a:fillRef idx="3">
+            <a:schemeClr val="accent1"/>
+          </a:fillRef>
+          <a:effectRef idx="2">
+            <a:schemeClr val="accent1"/>
+          </a:effectRef>
+          <a:fontRef idx="minor">
+            <a:schemeClr val="lt1"/>
+          </a:fontRef>
+        </p:style>
+        <p:txBody>
+          <a:bodyPr rtlCol="0" anchor="ctr"/>
+          <a:lstStyle/>
+          <a:p>
+            <a:pPr algn="ctr"/>
+          </a:p>
+        </p:txBody>
+      </p:sp>
+      <p:sp>
+        <p:nvSpPr>
+          <p:cNvPr id="21" name="TextBox 20"/>
+          <p:cNvSpPr txBox="1"/>
+          <p:nvPr/>
+        </p:nvSpPr>
+        <p:spPr>
+          <a:xfrm>
+            <a:off x="3922776" y="1545336"/>
+            <a:ext cx="1133856" cy="530352"/>
+          </a:xfrm>
+          <a:prstGeom prst="rect">
+            <a:avLst/>
+          </a:prstGeom>
+          <a:noFill/>
+        </p:spPr>
+        <p:txBody>
+          <a:bodyPr wrap="square" lIns="0" rIns="0" tIns="0" bIns="0">
+            <a:spAutoFit/>
+          </a:bodyPr>
+          <a:lstStyle/>
+          <a:p>
+            <a:pPr algn="l">
+              <a:spcAft>
+                <a:spcPts val="100"/>
+              </a:spcAft>
+            </a:pPr>
+            <a:r>
+              <a:rPr sz="1250" b="1">
+                <a:solidFill>
+                  <a:srgbClr val="141414"/>
+                </a:solidFill>
+                <a:latin typeface="Arial"/>
+              </a:rPr>
+              <a:t>HTT</a:t>
+            </a:r>
+          </a:p>
+          <a:p>
+            <a:pPr algn="l">
+              <a:spcAft>
+                <a:spcPts val="100"/>
+              </a:spcAft>
+            </a:pPr>
+            <a:r>
+              <a:rPr sz="1600" b="1">
+                <a:solidFill>
+                  <a:srgbClr val="B3281E"/>
+                </a:solidFill>
+                <a:latin typeface="Arial"/>
+              </a:rPr>
+              <a:t>54.3%</a:t>
+            </a:r>
+            <a:r>
+              <a:rPr sz="900" b="0">
+                <a:solidFill>
+                  <a:srgbClr val="6B6B6B"/>
+                </a:solidFill>
+                <a:latin typeface="Arial"/>
+              </a:rPr>
+              <a:t>  170u</a:t>
+            </a:r>
+          </a:p>
+        </p:txBody>
+      </p:sp>
+      <p:sp>
+        <p:nvSpPr>
+          <p:cNvPr id="22" name="Rounded Rectangle 21"/>
+          <p:cNvSpPr/>
+          <p:nvPr/>
+        </p:nvSpPr>
+        <p:spPr>
+          <a:xfrm>
+            <a:off x="3840480" y="2322576"/>
+            <a:ext cx="1298448" cy="640080"/>
+          </a:xfrm>
+          <a:prstGeom prst="roundRect">
+            <a:avLst/>
+          </a:prstGeom>
+          <a:solidFill>
+            <a:srgbClr val="D5E8D4"/>
+          </a:solidFill>
+          <a:ln w="12700">
+            <a:solidFill>
+              <a:srgbClr val="82B366"/>
+            </a:solidFill>
+          </a:ln>
+          <a:effectLst/>
+        </p:spPr>
+        <p:style>
+          <a:lnRef idx="1">
+            <a:schemeClr val="accent1"/>
+          </a:lnRef>
+          <a:fillRef idx="3">
+            <a:schemeClr val="accent1"/>
+          </a:fillRef>
+          <a:effectRef idx="2">
+            <a:schemeClr val="accent1"/>
+          </a:effectRef>
+          <a:fontRef idx="minor">
+            <a:schemeClr val="lt1"/>
+          </a:fontRef>
+        </p:style>
+        <p:txBody>
+          <a:bodyPr rtlCol="0" anchor="ctr"/>
+          <a:lstStyle/>
+          <a:p>
+            <a:pPr algn="ctr"/>
+          </a:p>
+        </p:txBody>
+      </p:sp>
+      <p:sp>
+        <p:nvSpPr>
+          <p:cNvPr id="23" name="TextBox 22"/>
+          <p:cNvSpPr txBox="1"/>
+          <p:nvPr/>
+        </p:nvSpPr>
+        <p:spPr>
+          <a:xfrm>
+            <a:off x="3922776" y="2386584"/>
+            <a:ext cx="1133856" cy="530352"/>
+          </a:xfrm>
+          <a:prstGeom prst="rect">
+            <a:avLst/>
+          </a:prstGeom>
+          <a:noFill/>
+        </p:spPr>
+        <p:txBody>
+          <a:bodyPr wrap="square" lIns="0" rIns="0" tIns="0" bIns="0">
+            <a:spAutoFit/>
+          </a:bodyPr>
+          <a:lstStyle/>
+          <a:p>
+            <a:pPr algn="l">
+              <a:spcAft>
+                <a:spcPts val="100"/>
+              </a:spcAft>
+            </a:pPr>
+            <a:r>
+              <a:rPr sz="1250" b="1">
+                <a:solidFill>
+                  <a:srgbClr val="141414"/>
+                </a:solidFill>
+                <a:latin typeface="Arial"/>
+              </a:rPr>
+              <a:t>MLT</a:t>
+            </a:r>
+          </a:p>
+          <a:p>
+            <a:pPr algn="l">
+              <a:spcAft>
+                <a:spcPts val="100"/>
+              </a:spcAft>
+            </a:pPr>
+            <a:r>
+              <a:rPr sz="1600" b="1">
+                <a:solidFill>
+                  <a:srgbClr val="B56B00"/>
+                </a:solidFill>
+                <a:latin typeface="Arial"/>
+              </a:rPr>
+              <a:t>65.5%</a:t>
+            </a:r>
+            <a:r>
+              <a:rPr sz="900" b="0">
+                <a:solidFill>
+                  <a:srgbClr val="6B6B6B"/>
+                </a:solidFill>
+                <a:latin typeface="Arial"/>
+              </a:rPr>
+              <a:t>  228u</a:t>
+            </a:r>
+          </a:p>
+        </p:txBody>
+      </p:sp>
+      <p:sp>
+        <p:nvSpPr>
+          <p:cNvPr id="24" name="Rounded Rectangle 23"/>
+          <p:cNvSpPr/>
+          <p:nvPr/>
+        </p:nvSpPr>
+        <p:spPr>
+          <a:xfrm>
+            <a:off x="3840480" y="3163824"/>
+            <a:ext cx="1298448" cy="640080"/>
+          </a:xfrm>
+          <a:prstGeom prst="roundRect">
+            <a:avLst/>
+          </a:prstGeom>
+          <a:solidFill>
+            <a:srgbClr val="D9D9D9"/>
+          </a:solidFill>
+          <a:ln w="12700">
+            <a:solidFill>
+              <a:srgbClr val="A5A5A5"/>
+            </a:solidFill>
+          </a:ln>
+          <a:effectLst/>
+        </p:spPr>
+        <p:style>
+          <a:lnRef idx="1">
+            <a:schemeClr val="accent1"/>
+          </a:lnRef>
+          <a:fillRef idx="3">
+            <a:schemeClr val="accent1"/>
+          </a:fillRef>
+          <a:effectRef idx="2">
+            <a:schemeClr val="accent1"/>
+          </a:effectRef>
+          <a:fontRef idx="minor">
+            <a:schemeClr val="lt1"/>
+          </a:fontRef>
+        </p:style>
+        <p:txBody>
+          <a:bodyPr rtlCol="0" anchor="ctr"/>
+          <a:lstStyle/>
+          <a:p>
+            <a:pPr algn="ctr"/>
+          </a:p>
+        </p:txBody>
+      </p:sp>
+      <p:sp>
+        <p:nvSpPr>
+          <p:cNvPr id="25" name="TextBox 24"/>
+          <p:cNvSpPr txBox="1"/>
+          <p:nvPr/>
+        </p:nvSpPr>
+        <p:spPr>
+          <a:xfrm>
+            <a:off x="3922776" y="3227832"/>
+            <a:ext cx="1133856" cy="530352"/>
+          </a:xfrm>
+          <a:prstGeom prst="rect">
+            <a:avLst/>
+          </a:prstGeom>
+          <a:noFill/>
+        </p:spPr>
+        <p:txBody>
+          <a:bodyPr wrap="square" lIns="0" rIns="0" tIns="0" bIns="0">
+            <a:spAutoFit/>
+          </a:bodyPr>
+          <a:lstStyle/>
+          <a:p>
+            <a:pPr algn="l">
+              <a:spcAft>
+                <a:spcPts val="100"/>
+              </a:spcAft>
+            </a:pPr>
+            <a:r>
+              <a:rPr sz="1250" b="0">
+                <a:solidFill>
+                  <a:srgbClr val="141414"/>
+                </a:solidFill>
+                <a:latin typeface="Arial"/>
+              </a:rPr>
+              <a:t>ASSY</a:t>
+            </a:r>
+          </a:p>
+        </p:txBody>
+      </p:sp>
+      <p:sp>
+        <p:nvSpPr>
+          <p:cNvPr id="26" name="TextBox 25"/>
+          <p:cNvSpPr txBox="1"/>
+          <p:nvPr/>
+        </p:nvSpPr>
+        <p:spPr>
+          <a:xfrm>
+            <a:off x="5358384" y="1188720"/>
+            <a:ext cx="2743200" cy="237744"/>
+          </a:xfrm>
+          <a:prstGeom prst="rect">
+            <a:avLst/>
+          </a:prstGeom>
+          <a:noFill/>
+        </p:spPr>
+        <p:txBody>
+          <a:bodyPr wrap="square" lIns="0" rIns="0" tIns="0" bIns="0">
+            <a:spAutoFit/>
+          </a:bodyPr>
+          <a:lstStyle/>
+          <a:p>
+            <a:pPr algn="l">
+              <a:spcAft>
+                <a:spcPts val="0"/>
+              </a:spcAft>
+            </a:pPr>
+            <a:r>
+              <a:rPr sz="1000" b="0">
+                <a:solidFill>
+                  <a:srgbClr val="6B6B6B"/>
+                </a:solidFill>
+                <a:latin typeface="Arial"/>
+              </a:rPr>
+              <a:t/>
+            </a:r>
+            <a:r>
+              <a:rPr sz="1250" b="1">
+                <a:solidFill>
+                  <a:srgbClr val="141414"/>
+                </a:solidFill>
+                <a:latin typeface="Arial"/>
+              </a:rPr>
+              <a:t>FATP L10 2U/4U</a:t>
+            </a:r>
+          </a:p>
+        </p:txBody>
+      </p:sp>
+      <p:cxnSp>
+        <p:nvCxnSpPr>
+          <p:cNvPr id="27" name="Connector 26"/>
+          <p:cNvCxnSpPr/>
+          <p:nvPr/>
+        </p:nvCxnSpPr>
+        <p:spPr>
+          <a:xfrm>
+            <a:off x="7059168" y="1133856"/>
+            <a:ext cx="0" cy="4672584"/>
+          </a:xfrm>
+          <a:prstGeom prst="line">
+            <a:avLst/>
+          </a:prstGeom>
+          <a:ln w="11430">
+            <a:solidFill>
+              <a:srgbClr val="B5B3AC"/>
+            </a:solidFill>
+            <a:prstDash val="dash"/>
+          </a:ln>
+        </p:spPr>
+        <p:style>
+          <a:lnRef idx="2">
+            <a:schemeClr val="accent1"/>
+          </a:lnRef>
+          <a:fillRef idx="0">
+            <a:schemeClr val="accent1"/>
+          </a:fillRef>
+          <a:effectRef idx="1">
+            <a:schemeClr val="accent1"/>
+          </a:effectRef>
+          <a:fontRef idx="minor">
+            <a:schemeClr val="tx1"/>
+          </a:fontRef>
+        </p:style>
+      </p:cxnSp>
+      <p:sp>
+        <p:nvSpPr>
+          <p:cNvPr id="28" name="Rounded Rectangle 27"/>
+          <p:cNvSpPr/>
+          <p:nvPr/>
+        </p:nvSpPr>
+        <p:spPr>
+          <a:xfrm>
+            <a:off x="5358384" y="1481328"/>
+            <a:ext cx="1078992" cy="640080"/>
+          </a:xfrm>
+          <a:prstGeom prst="roundRect">
+            <a:avLst/>
+          </a:prstGeom>
+          <a:solidFill>
+            <a:srgbClr val="D9D9D9"/>
+          </a:solidFill>
+          <a:ln w="12700">
+            <a:solidFill>
+              <a:srgbClr val="A5A5A5"/>
+            </a:solidFill>
+          </a:ln>
+          <a:effectLst/>
+        </p:spPr>
+        <p:style>
+          <a:lnRef idx="1">
+            <a:schemeClr val="accent1"/>
+          </a:lnRef>
+          <a:fillRef idx="3">
+            <a:schemeClr val="accent1"/>
+          </a:fillRef>
+          <a:effectRef idx="2">
+            <a:schemeClr val="accent1"/>
+          </a:effectRef>
+          <a:fontRef idx="minor">
+            <a:schemeClr val="lt1"/>
+          </a:fontRef>
+        </p:style>
+        <p:txBody>
+          <a:bodyPr rtlCol="0" anchor="ctr"/>
+          <a:lstStyle/>
+          <a:p>
+            <a:pPr algn="ctr"/>
+          </a:p>
+        </p:txBody>
+      </p:sp>
+      <p:sp>
+        <p:nvSpPr>
+          <p:cNvPr id="29" name="TextBox 28"/>
+          <p:cNvSpPr txBox="1"/>
+          <p:nvPr/>
+        </p:nvSpPr>
+        <p:spPr>
+          <a:xfrm>
+            <a:off x="5440680" y="1545336"/>
+            <a:ext cx="914400" cy="530352"/>
+          </a:xfrm>
+          <a:prstGeom prst="rect">
+            <a:avLst/>
+          </a:prstGeom>
+          <a:noFill/>
+        </p:spPr>
+        <p:txBody>
+          <a:bodyPr wrap="square" lIns="0" rIns="0" tIns="0" bIns="0">
+            <a:spAutoFit/>
+          </a:bodyPr>
+          <a:lstStyle/>
+          <a:p>
+            <a:pPr algn="l">
+              <a:spcAft>
+                <a:spcPts val="100"/>
+              </a:spcAft>
+            </a:pPr>
+            <a:r>
+              <a:rPr sz="1250" b="0">
+                <a:solidFill>
+                  <a:srgbClr val="141414"/>
+                </a:solidFill>
+                <a:latin typeface="Arial"/>
+              </a:rPr>
+              <a:t>ASSY</a:t>
+            </a:r>
+          </a:p>
+        </p:txBody>
+      </p:sp>
+      <p:sp>
+        <p:nvSpPr>
+          <p:cNvPr id="30" name="Rectangle 29"/>
+          <p:cNvSpPr/>
+          <p:nvPr/>
+        </p:nvSpPr>
+        <p:spPr>
+          <a:xfrm>
+            <a:off x="6492240" y="1517904"/>
+            <a:ext cx="384048" cy="228600"/>
+          </a:xfrm>
+          <a:prstGeom prst="rect">
+            <a:avLst/>
+          </a:prstGeom>
+          <a:solidFill>
+            <a:srgbClr val="CFE2F3"/>
+          </a:solidFill>
+          <a:ln w="7620">
+            <a:solidFill>
+              <a:srgbClr val="8A8882"/>
+            </a:solidFill>
+          </a:ln>
+          <a:effectLst/>
+        </p:spPr>
+        <p:style>
+          <a:lnRef idx="1">
+            <a:schemeClr val="accent1"/>
+          </a:lnRef>
+          <a:fillRef idx="3">
+            <a:schemeClr val="accent1"/>
+          </a:fillRef>
+          <a:effectRef idx="2">
+            <a:schemeClr val="accent1"/>
+          </a:effectRef>
+          <a:fontRef idx="minor">
+            <a:schemeClr val="lt1"/>
+          </a:fontRef>
+        </p:style>
+        <p:txBody>
+          <a:bodyPr rtlCol="0" anchor="ctr"/>
+          <a:lstStyle/>
+          <a:p>
+            <a:pPr algn="ctr"/>
+          </a:p>
+        </p:txBody>
+      </p:sp>
+      <p:sp>
+        <p:nvSpPr>
+          <p:cNvPr id="31" name="TextBox 30"/>
+          <p:cNvSpPr txBox="1"/>
+          <p:nvPr/>
+        </p:nvSpPr>
+        <p:spPr>
+          <a:xfrm>
+            <a:off x="6492240" y="1545336"/>
+            <a:ext cx="384048" cy="182880"/>
+          </a:xfrm>
+          <a:prstGeom prst="rect">
+            <a:avLst/>
+          </a:prstGeom>
+          <a:noFill/>
+        </p:spPr>
+        <p:txBody>
+          <a:bodyPr wrap="square" lIns="0" rIns="0" tIns="0" bIns="0">
+            <a:spAutoFit/>
+          </a:bodyPr>
+          <a:lstStyle/>
+          <a:p>
+            <a:pPr algn="ctr">
+              <a:spcAft>
+                <a:spcPts val="0"/>
+              </a:spcAft>
+            </a:pPr>
+            <a:r>
+              <a:rPr sz="900" b="1">
+                <a:solidFill>
+                  <a:srgbClr val="141414"/>
+                </a:solidFill>
+                <a:latin typeface="Arial"/>
+              </a:rPr>
+              <a:t>4U</a:t>
+            </a:r>
+          </a:p>
+        </p:txBody>
+      </p:sp>
+      <p:sp>
+        <p:nvSpPr>
+          <p:cNvPr id="32" name="Rectangle 31"/>
+          <p:cNvSpPr/>
+          <p:nvPr/>
+        </p:nvSpPr>
+        <p:spPr>
+          <a:xfrm>
+            <a:off x="6492240" y="1801368"/>
+            <a:ext cx="384048" cy="228600"/>
+          </a:xfrm>
+          <a:prstGeom prst="rect">
+            <a:avLst/>
+          </a:prstGeom>
+          <a:solidFill>
+            <a:srgbClr val="FFF2CC"/>
+          </a:solidFill>
+          <a:ln w="7620">
+            <a:solidFill>
+              <a:srgbClr val="8A8882"/>
+            </a:solidFill>
+          </a:ln>
+          <a:effectLst/>
+        </p:spPr>
+        <p:style>
+          <a:lnRef idx="1">
+            <a:schemeClr val="accent1"/>
+          </a:lnRef>
+          <a:fillRef idx="3">
+            <a:schemeClr val="accent1"/>
+          </a:fillRef>
+          <a:effectRef idx="2">
+            <a:schemeClr val="accent1"/>
+          </a:effectRef>
+          <a:fontRef idx="minor">
+            <a:schemeClr val="lt1"/>
+          </a:fontRef>
+        </p:style>
+        <p:txBody>
+          <a:bodyPr rtlCol="0" anchor="ctr"/>
+          <a:lstStyle/>
+          <a:p>
+            <a:pPr algn="ctr"/>
+          </a:p>
+        </p:txBody>
+      </p:sp>
+      <p:sp>
+        <p:nvSpPr>
+          <p:cNvPr id="33" name="TextBox 32"/>
+          <p:cNvSpPr txBox="1"/>
+          <p:nvPr/>
+        </p:nvSpPr>
+        <p:spPr>
+          <a:xfrm>
+            <a:off x="6492240" y="1828800"/>
+            <a:ext cx="384048" cy="182880"/>
+          </a:xfrm>
+          <a:prstGeom prst="rect">
+            <a:avLst/>
+          </a:prstGeom>
+          <a:noFill/>
+        </p:spPr>
+        <p:txBody>
+          <a:bodyPr wrap="square" lIns="0" rIns="0" tIns="0" bIns="0">
+            <a:spAutoFit/>
+          </a:bodyPr>
+          <a:lstStyle/>
+          <a:p>
+            <a:pPr algn="ctr">
+              <a:spcAft>
+                <a:spcPts val="0"/>
+              </a:spcAft>
+            </a:pPr>
+            <a:r>
+              <a:rPr sz="900" b="1">
+                <a:solidFill>
+                  <a:srgbClr val="141414"/>
+                </a:solidFill>
+                <a:latin typeface="Arial"/>
+              </a:rPr>
+              <a:t>2U</a:t>
+            </a:r>
+          </a:p>
+        </p:txBody>
+      </p:sp>
+      <p:sp>
+        <p:nvSpPr>
+          <p:cNvPr id="34" name="TextBox 33"/>
+          <p:cNvSpPr txBox="1"/>
+          <p:nvPr/>
+        </p:nvSpPr>
+        <p:spPr>
+          <a:xfrm>
+            <a:off x="7242048" y="1188720"/>
+            <a:ext cx="2743200" cy="237744"/>
+          </a:xfrm>
+          <a:prstGeom prst="rect">
+            <a:avLst/>
+          </a:prstGeom>
+          <a:noFill/>
+        </p:spPr>
+        <p:txBody>
+          <a:bodyPr wrap="square" lIns="0" rIns="0" tIns="0" bIns="0">
+            <a:spAutoFit/>
+          </a:bodyPr>
+          <a:lstStyle/>
+          <a:p>
+            <a:pPr algn="l">
+              <a:spcAft>
+                <a:spcPts val="0"/>
+              </a:spcAft>
+            </a:pPr>
+            <a:r>
+              <a:rPr sz="1000" b="0">
+                <a:solidFill>
+                  <a:srgbClr val="6B6B6B"/>
+                </a:solidFill>
+                <a:latin typeface="Arial"/>
+              </a:rPr>
+              <a:t/>
+            </a:r>
+            <a:r>
+              <a:rPr sz="1250" b="1">
+                <a:solidFill>
+                  <a:srgbClr val="141414"/>
+                </a:solidFill>
+                <a:latin typeface="Arial"/>
+              </a:rPr>
+              <a:t>FATP L10 6U</a:t>
+            </a:r>
+          </a:p>
+        </p:txBody>
+      </p:sp>
+      <p:cxnSp>
+        <p:nvCxnSpPr>
+          <p:cNvPr id="35" name="Connector 34"/>
+          <p:cNvCxnSpPr/>
+          <p:nvPr/>
+        </p:nvCxnSpPr>
+        <p:spPr>
+          <a:xfrm>
+            <a:off x="10204704" y="1133856"/>
+            <a:ext cx="0" cy="4672584"/>
+          </a:xfrm>
+          <a:prstGeom prst="line">
+            <a:avLst/>
+          </a:prstGeom>
+          <a:ln w="11430">
+            <a:solidFill>
+              <a:srgbClr val="B5B3AC"/>
+            </a:solidFill>
+            <a:prstDash val="dash"/>
+          </a:ln>
+        </p:spPr>
+        <p:style>
+          <a:lnRef idx="2">
+            <a:schemeClr val="accent1"/>
+          </a:lnRef>
+          <a:fillRef idx="0">
+            <a:schemeClr val="accent1"/>
+          </a:fillRef>
+          <a:effectRef idx="1">
+            <a:schemeClr val="accent1"/>
+          </a:effectRef>
+          <a:fontRef idx="minor">
+            <a:schemeClr val="tx1"/>
+          </a:fontRef>
+        </p:style>
+      </p:cxnSp>
+      <p:sp>
+        <p:nvSpPr>
+          <p:cNvPr id="36" name="Rounded Rectangle 35"/>
+          <p:cNvSpPr/>
+          <p:nvPr/>
+        </p:nvSpPr>
+        <p:spPr>
+          <a:xfrm>
+            <a:off x="7242048" y="2322576"/>
+            <a:ext cx="1389888" cy="640080"/>
+          </a:xfrm>
+          <a:prstGeom prst="roundRect">
+            <a:avLst/>
+          </a:prstGeom>
+          <a:solidFill>
+            <a:srgbClr val="F2ECD9"/>
+          </a:solidFill>
+          <a:ln w="12700">
+            <a:solidFill>
+              <a:srgbClr val="C9B46B"/>
+            </a:solidFill>
+          </a:ln>
+          <a:effectLst/>
+        </p:spPr>
+        <p:style>
+          <a:lnRef idx="1">
+            <a:schemeClr val="accent1"/>
+          </a:lnRef>
+          <a:fillRef idx="3">
+            <a:schemeClr val="accent1"/>
+          </a:fillRef>
+          <a:effectRef idx="2">
+            <a:schemeClr val="accent1"/>
+          </a:effectRef>
+          <a:fontRef idx="minor">
+            <a:schemeClr val="lt1"/>
+          </a:fontRef>
+        </p:style>
+        <p:txBody>
+          <a:bodyPr rtlCol="0" anchor="ctr"/>
+          <a:lstStyle/>
+          <a:p>
+            <a:pPr algn="ctr"/>
+          </a:p>
+        </p:txBody>
+      </p:sp>
+      <p:sp>
+        <p:nvSpPr>
+          <p:cNvPr id="37" name="TextBox 36"/>
+          <p:cNvSpPr txBox="1"/>
+          <p:nvPr/>
+        </p:nvSpPr>
+        <p:spPr>
+          <a:xfrm>
+            <a:off x="7324344" y="2386584"/>
+            <a:ext cx="1225296" cy="530352"/>
+          </a:xfrm>
+          <a:prstGeom prst="rect">
+            <a:avLst/>
+          </a:prstGeom>
+          <a:noFill/>
+        </p:spPr>
+        <p:txBody>
+          <a:bodyPr wrap="square" lIns="0" rIns="0" tIns="0" bIns="0">
+            <a:spAutoFit/>
+          </a:bodyPr>
+          <a:lstStyle/>
+          <a:p>
+            <a:pPr algn="l">
+              <a:spcAft>
+                <a:spcPts val="100"/>
+              </a:spcAft>
+            </a:pPr>
+            <a:r>
+              <a:rPr sz="1250" b="1">
+                <a:solidFill>
+                  <a:srgbClr val="141414"/>
+                </a:solidFill>
+                <a:latin typeface="Arial"/>
+              </a:rPr>
+              <a:t>FAT / SFT</a:t>
+            </a:r>
+          </a:p>
+          <a:p>
+            <a:pPr algn="l">
+              <a:spcAft>
+                <a:spcPts val="100"/>
+              </a:spcAft>
+            </a:pPr>
+            <a:r>
+              <a:rPr sz="1100" b="1">
+                <a:solidFill>
+                  <a:srgbClr val="141414"/>
+                </a:solidFill>
+                <a:latin typeface="Arial"/>
+              </a:rPr>
+              <a:t>FAT 2u · SFT 1u</a:t>
+            </a:r>
+          </a:p>
+          <a:p>
+            <a:pPr algn="l">
+              <a:spcAft>
+                <a:spcPts val="100"/>
+              </a:spcAft>
+            </a:pPr>
+            <a:r>
+              <a:rPr sz="800" b="0">
+                <a:solidFill>
+                  <a:srgbClr val="6B6B6B"/>
+                </a:solidFill>
+                <a:latin typeface="Arial"/>
+              </a:rPr>
+              <a:t>quantity only</a:t>
+            </a:r>
+          </a:p>
+        </p:txBody>
+      </p:sp>
+      <p:sp>
+        <p:nvSpPr>
+          <p:cNvPr id="38" name="Rounded Rectangle 37"/>
+          <p:cNvSpPr/>
+          <p:nvPr/>
+        </p:nvSpPr>
+        <p:spPr>
+          <a:xfrm>
+            <a:off x="7242048" y="3163824"/>
+            <a:ext cx="1389888" cy="640080"/>
+          </a:xfrm>
+          <a:prstGeom prst="roundRect">
+            <a:avLst/>
+          </a:prstGeom>
+          <a:solidFill>
+            <a:srgbClr val="F2ECD9"/>
+          </a:solidFill>
+          <a:ln w="12700">
+            <a:solidFill>
+              <a:srgbClr val="C9B46B"/>
+            </a:solidFill>
+          </a:ln>
+          <a:effectLst/>
+        </p:spPr>
+        <p:style>
+          <a:lnRef idx="1">
+            <a:schemeClr val="accent1"/>
+          </a:lnRef>
+          <a:fillRef idx="3">
+            <a:schemeClr val="accent1"/>
+          </a:fillRef>
+          <a:effectRef idx="2">
+            <a:schemeClr val="accent1"/>
+          </a:effectRef>
+          <a:fontRef idx="minor">
+            <a:schemeClr val="lt1"/>
+          </a:fontRef>
+        </p:style>
+        <p:txBody>
+          <a:bodyPr rtlCol="0" anchor="ctr"/>
+          <a:lstStyle/>
+          <a:p>
+            <a:pPr algn="ctr"/>
+          </a:p>
+        </p:txBody>
+      </p:sp>
+      <p:sp>
+        <p:nvSpPr>
+          <p:cNvPr id="39" name="TextBox 38"/>
+          <p:cNvSpPr txBox="1"/>
+          <p:nvPr/>
+        </p:nvSpPr>
+        <p:spPr>
+          <a:xfrm>
+            <a:off x="7324344" y="3227832"/>
+            <a:ext cx="1225296" cy="530352"/>
+          </a:xfrm>
+          <a:prstGeom prst="rect">
+            <a:avLst/>
+          </a:prstGeom>
+          <a:noFill/>
+        </p:spPr>
+        <p:txBody>
+          <a:bodyPr wrap="square" lIns="0" rIns="0" tIns="0" bIns="0">
+            <a:spAutoFit/>
+          </a:bodyPr>
+          <a:lstStyle/>
+          <a:p>
+            <a:pPr algn="l">
+              <a:spcAft>
+                <a:spcPts val="100"/>
+              </a:spcAft>
+            </a:pPr>
+            <a:r>
+              <a:rPr sz="1250" b="1">
+                <a:solidFill>
+                  <a:srgbClr val="141414"/>
+                </a:solidFill>
+                <a:latin typeface="Arial"/>
+              </a:rPr>
+              <a:t>2U</a:t>
+            </a:r>
+          </a:p>
+          <a:p>
+            <a:pPr algn="l">
+              <a:spcAft>
+                <a:spcPts val="100"/>
+              </a:spcAft>
+            </a:pPr>
+            <a:r>
+              <a:rPr sz="1300" b="1">
+                <a:solidFill>
+                  <a:srgbClr val="141414"/>
+                </a:solidFill>
+                <a:latin typeface="Arial"/>
+              </a:rPr>
+              <a:t>3 units</a:t>
+            </a:r>
+          </a:p>
+          <a:p>
+            <a:pPr algn="l">
+              <a:spcAft>
+                <a:spcPts val="100"/>
+              </a:spcAft>
+            </a:pPr>
+            <a:r>
+              <a:rPr sz="800" b="0">
+                <a:solidFill>
+                  <a:srgbClr val="6B6B6B"/>
+                </a:solidFill>
+                <a:latin typeface="Arial"/>
+              </a:rPr>
+              <a:t>quantity only</a:t>
+            </a:r>
+          </a:p>
+        </p:txBody>
+      </p:sp>
+      <p:sp>
+        <p:nvSpPr>
+          <p:cNvPr id="40" name="Rounded Rectangle 39"/>
+          <p:cNvSpPr/>
+          <p:nvPr/>
+        </p:nvSpPr>
+        <p:spPr>
+          <a:xfrm>
+            <a:off x="7242048" y="4005072"/>
+            <a:ext cx="1389888" cy="640080"/>
+          </a:xfrm>
+          <a:prstGeom prst="roundRect">
+            <a:avLst/>
+          </a:prstGeom>
+          <a:solidFill>
+            <a:srgbClr val="D9D9D9"/>
+          </a:solidFill>
+          <a:ln w="12700">
+            <a:solidFill>
+              <a:srgbClr val="A5A5A5"/>
+            </a:solidFill>
+          </a:ln>
+          <a:effectLst/>
+        </p:spPr>
+        <p:style>
+          <a:lnRef idx="1">
+            <a:schemeClr val="accent1"/>
+          </a:lnRef>
+          <a:fillRef idx="3">
+            <a:schemeClr val="accent1"/>
+          </a:fillRef>
+          <a:effectRef idx="2">
+            <a:schemeClr val="accent1"/>
+          </a:effectRef>
+          <a:fontRef idx="minor">
+            <a:schemeClr val="lt1"/>
+          </a:fontRef>
+        </p:style>
+        <p:txBody>
+          <a:bodyPr rtlCol="0" anchor="ctr"/>
+          <a:lstStyle/>
+          <a:p>
+            <a:pPr algn="ctr"/>
+          </a:p>
+        </p:txBody>
+      </p:sp>
+      <p:sp>
+        <p:nvSpPr>
+          <p:cNvPr id="41" name="TextBox 40"/>
+          <p:cNvSpPr txBox="1"/>
+          <p:nvPr/>
+        </p:nvSpPr>
+        <p:spPr>
+          <a:xfrm>
+            <a:off x="7324344" y="4069080"/>
+            <a:ext cx="1225296" cy="530352"/>
+          </a:xfrm>
+          <a:prstGeom prst="rect">
+            <a:avLst/>
+          </a:prstGeom>
+          <a:noFill/>
+        </p:spPr>
+        <p:txBody>
+          <a:bodyPr wrap="square" lIns="0" rIns="0" tIns="0" bIns="0">
+            <a:spAutoFit/>
+          </a:bodyPr>
+          <a:lstStyle/>
+          <a:p>
+            <a:pPr algn="l">
+              <a:spcAft>
+                <a:spcPts val="100"/>
+              </a:spcAft>
+            </a:pPr>
+            <a:r>
+              <a:rPr sz="1250" b="0">
+                <a:solidFill>
+                  <a:srgbClr val="141414"/>
+                </a:solidFill>
+                <a:latin typeface="Arial"/>
+              </a:rPr>
+              <a:t>ASSY</a:t>
+            </a:r>
+          </a:p>
+        </p:txBody>
+      </p:sp>
+      <p:sp>
+        <p:nvSpPr>
+          <p:cNvPr id="42" name="Rounded Rectangle 41"/>
+          <p:cNvSpPr/>
+          <p:nvPr/>
+        </p:nvSpPr>
+        <p:spPr>
+          <a:xfrm>
+            <a:off x="8741664" y="2322576"/>
+            <a:ext cx="1298448" cy="640080"/>
+          </a:xfrm>
+          <a:prstGeom prst="roundRect">
+            <a:avLst/>
+          </a:prstGeom>
+          <a:solidFill>
+            <a:srgbClr val="F2ECD9"/>
+          </a:solidFill>
+          <a:ln w="12700">
+            <a:solidFill>
+              <a:srgbClr val="C9B46B"/>
+            </a:solidFill>
+          </a:ln>
+          <a:effectLst/>
+        </p:spPr>
+        <p:style>
+          <a:lnRef idx="1">
+            <a:schemeClr val="accent1"/>
+          </a:lnRef>
+          <a:fillRef idx="3">
+            <a:schemeClr val="accent1"/>
+          </a:fillRef>
+          <a:effectRef idx="2">
+            <a:schemeClr val="accent1"/>
+          </a:effectRef>
+          <a:fontRef idx="minor">
+            <a:schemeClr val="lt1"/>
+          </a:fontRef>
+        </p:style>
+        <p:txBody>
+          <a:bodyPr rtlCol="0" anchor="ctr"/>
+          <a:lstStyle/>
+          <a:p>
+            <a:pPr algn="ctr"/>
+          </a:p>
+        </p:txBody>
+      </p:sp>
+      <p:sp>
+        <p:nvSpPr>
+          <p:cNvPr id="43" name="TextBox 42"/>
+          <p:cNvSpPr txBox="1"/>
+          <p:nvPr/>
+        </p:nvSpPr>
+        <p:spPr>
+          <a:xfrm>
+            <a:off x="8823960" y="2386584"/>
+            <a:ext cx="1133856" cy="530352"/>
+          </a:xfrm>
+          <a:prstGeom prst="rect">
+            <a:avLst/>
+          </a:prstGeom>
+          <a:noFill/>
+        </p:spPr>
+        <p:txBody>
+          <a:bodyPr wrap="square" lIns="0" rIns="0" tIns="0" bIns="0">
+            <a:spAutoFit/>
+          </a:bodyPr>
+          <a:lstStyle/>
+          <a:p>
+            <a:pPr algn="l">
+              <a:spcAft>
+                <a:spcPts val="100"/>
+              </a:spcAft>
+            </a:pPr>
+            <a:r>
+              <a:rPr sz="1250" b="1">
+                <a:solidFill>
+                  <a:srgbClr val="141414"/>
+                </a:solidFill>
+                <a:latin typeface="Arial"/>
+              </a:rPr>
+              <a:t>Runin</a:t>
+            </a:r>
+          </a:p>
+          <a:p>
+            <a:pPr algn="l">
+              <a:spcAft>
+                <a:spcPts val="100"/>
+              </a:spcAft>
+            </a:pPr>
+            <a:r>
+              <a:rPr sz="1300" b="1">
+                <a:solidFill>
+                  <a:srgbClr val="141414"/>
+                </a:solidFill>
+                <a:latin typeface="Arial"/>
+              </a:rPr>
+              <a:t>1 unit</a:t>
+            </a:r>
+          </a:p>
+          <a:p>
+            <a:pPr algn="l">
+              <a:spcAft>
+                <a:spcPts val="100"/>
+              </a:spcAft>
+            </a:pPr>
+            <a:r>
+              <a:rPr sz="800" b="0">
+                <a:solidFill>
+                  <a:srgbClr val="6B6B6B"/>
+                </a:solidFill>
+                <a:latin typeface="Arial"/>
+              </a:rPr>
+              <a:t>quantity only</a:t>
+            </a:r>
+          </a:p>
+        </p:txBody>
+      </p:sp>
+      <p:sp>
+        <p:nvSpPr>
+          <p:cNvPr id="44" name="TextBox 43"/>
+          <p:cNvSpPr txBox="1"/>
+          <p:nvPr/>
+        </p:nvSpPr>
+        <p:spPr>
+          <a:xfrm>
+            <a:off x="10369296" y="1188720"/>
+            <a:ext cx="1655064" cy="237744"/>
+          </a:xfrm>
+          <a:prstGeom prst="rect">
+            <a:avLst/>
+          </a:prstGeom>
+          <a:noFill/>
+        </p:spPr>
+        <p:txBody>
+          <a:bodyPr wrap="square" lIns="0" rIns="0" tIns="0" bIns="0">
+            <a:spAutoFit/>
+          </a:bodyPr>
+          <a:lstStyle/>
+          <a:p>
+            <a:pPr algn="l">
+              <a:spcAft>
+                <a:spcPts val="0"/>
+              </a:spcAft>
+            </a:pPr>
+            <a:r>
+              <a:rPr sz="1000" b="0">
+                <a:solidFill>
+                  <a:srgbClr val="6B6B6B"/>
+                </a:solidFill>
+                <a:latin typeface="Arial"/>
+              </a:rPr>
+              <a:t/>
+            </a:r>
+            <a:r>
+              <a:rPr sz="1250" b="1">
+                <a:solidFill>
+                  <a:srgbClr val="141414"/>
+                </a:solidFill>
+                <a:latin typeface="Arial"/>
+              </a:rPr>
+              <a:t>Rack L11</a:t>
+            </a:r>
+          </a:p>
+        </p:txBody>
+      </p:sp>
+      <p:sp>
+        <p:nvSpPr>
+          <p:cNvPr id="45" name="Rounded Rectangle 44"/>
+          <p:cNvSpPr/>
+          <p:nvPr/>
+        </p:nvSpPr>
+        <p:spPr>
+          <a:xfrm>
+            <a:off x="10369296" y="2322576"/>
+            <a:ext cx="1389888" cy="640080"/>
+          </a:xfrm>
+          <a:prstGeom prst="roundRect">
+            <a:avLst/>
+          </a:prstGeom>
+          <a:solidFill>
+            <a:srgbClr val="D9D9D9"/>
+          </a:solidFill>
+          <a:ln w="12700">
+            <a:solidFill>
+              <a:srgbClr val="A5A5A5"/>
+            </a:solidFill>
+          </a:ln>
+          <a:effectLst/>
+        </p:spPr>
+        <p:style>
+          <a:lnRef idx="1">
+            <a:schemeClr val="accent1"/>
+          </a:lnRef>
+          <a:fillRef idx="3">
+            <a:schemeClr val="accent1"/>
+          </a:fillRef>
+          <a:effectRef idx="2">
+            <a:schemeClr val="accent1"/>
+          </a:effectRef>
+          <a:fontRef idx="minor">
+            <a:schemeClr val="lt1"/>
+          </a:fontRef>
+        </p:style>
+        <p:txBody>
+          <a:bodyPr rtlCol="0" anchor="ctr"/>
+          <a:lstStyle/>
+          <a:p>
+            <a:pPr algn="ctr"/>
+          </a:p>
+        </p:txBody>
+      </p:sp>
+      <p:sp>
+        <p:nvSpPr>
+          <p:cNvPr id="46" name="TextBox 45"/>
+          <p:cNvSpPr txBox="1"/>
+          <p:nvPr/>
+        </p:nvSpPr>
+        <p:spPr>
+          <a:xfrm>
+            <a:off x="10451592" y="2386584"/>
+            <a:ext cx="1225296" cy="530352"/>
+          </a:xfrm>
+          <a:prstGeom prst="rect">
+            <a:avLst/>
+          </a:prstGeom>
+          <a:noFill/>
+        </p:spPr>
+        <p:txBody>
+          <a:bodyPr wrap="square" lIns="0" rIns="0" tIns="0" bIns="0">
+            <a:spAutoFit/>
+          </a:bodyPr>
+          <a:lstStyle/>
+          <a:p>
+            <a:pPr algn="l">
+              <a:spcAft>
+                <a:spcPts val="100"/>
+              </a:spcAft>
+            </a:pPr>
+            <a:r>
+              <a:rPr sz="1250" b="0">
+                <a:solidFill>
+                  <a:srgbClr val="141414"/>
+                </a:solidFill>
+                <a:latin typeface="Arial"/>
+              </a:rPr>
+              <a:t>ASSY</a:t>
+            </a:r>
+          </a:p>
+        </p:txBody>
+      </p:sp>
+      <p:sp>
+        <p:nvSpPr>
+          <p:cNvPr id="47" name="Rounded Rectangle 46"/>
+          <p:cNvSpPr/>
+          <p:nvPr/>
+        </p:nvSpPr>
+        <p:spPr>
+          <a:xfrm>
+            <a:off x="10369296" y="3163824"/>
+            <a:ext cx="1389888" cy="640080"/>
+          </a:xfrm>
+          <a:prstGeom prst="roundRect">
+            <a:avLst/>
+          </a:prstGeom>
+          <a:solidFill>
+            <a:srgbClr val="F2ECD9"/>
+          </a:solidFill>
+          <a:ln w="12700">
+            <a:solidFill>
+              <a:srgbClr val="C9B46B"/>
+            </a:solidFill>
+          </a:ln>
+          <a:effectLst/>
+        </p:spPr>
+        <p:style>
+          <a:lnRef idx="1">
+            <a:schemeClr val="accent1"/>
+          </a:lnRef>
+          <a:fillRef idx="3">
+            <a:schemeClr val="accent1"/>
+          </a:fillRef>
+          <a:effectRef idx="2">
+            <a:schemeClr val="accent1"/>
+          </a:effectRef>
+          <a:fontRef idx="minor">
+            <a:schemeClr val="lt1"/>
+          </a:fontRef>
+        </p:style>
+        <p:txBody>
+          <a:bodyPr rtlCol="0" anchor="ctr"/>
+          <a:lstStyle/>
+          <a:p>
+            <a:pPr algn="ctr"/>
+          </a:p>
+        </p:txBody>
+      </p:sp>
+      <p:sp>
+        <p:nvSpPr>
+          <p:cNvPr id="48" name="TextBox 47"/>
+          <p:cNvSpPr txBox="1"/>
+          <p:nvPr/>
+        </p:nvSpPr>
+        <p:spPr>
+          <a:xfrm>
+            <a:off x="10451592" y="3227832"/>
+            <a:ext cx="1225296" cy="530352"/>
+          </a:xfrm>
+          <a:prstGeom prst="rect">
+            <a:avLst/>
+          </a:prstGeom>
+          <a:noFill/>
+        </p:spPr>
+        <p:txBody>
+          <a:bodyPr wrap="square" lIns="0" rIns="0" tIns="0" bIns="0">
+            <a:spAutoFit/>
+          </a:bodyPr>
+          <a:lstStyle/>
+          <a:p>
+            <a:pPr algn="l">
+              <a:spcAft>
+                <a:spcPts val="100"/>
+              </a:spcAft>
+            </a:pPr>
+            <a:r>
+              <a:rPr sz="1250" b="1">
+                <a:solidFill>
+                  <a:srgbClr val="141414"/>
+                </a:solidFill>
+                <a:latin typeface="Arial"/>
+              </a:rPr>
+              <a:t>FAT / SFT</a:t>
+            </a:r>
+          </a:p>
+          <a:p>
+            <a:pPr algn="l">
+              <a:spcAft>
+                <a:spcPts val="100"/>
+              </a:spcAft>
+            </a:pPr>
+            <a:r>
+              <a:rPr sz="1300" b="1">
+                <a:solidFill>
+                  <a:srgbClr val="141414"/>
+                </a:solidFill>
+                <a:latin typeface="Arial"/>
+              </a:rPr>
+              <a:t>2 units</a:t>
+            </a:r>
+          </a:p>
+          <a:p>
+            <a:pPr algn="l">
+              <a:spcAft>
+                <a:spcPts val="100"/>
+              </a:spcAft>
+            </a:pPr>
+            <a:r>
+              <a:rPr sz="800" b="0">
+                <a:solidFill>
+                  <a:srgbClr val="6B6B6B"/>
+                </a:solidFill>
+                <a:latin typeface="Arial"/>
+              </a:rPr>
+              <a:t>quantity only</a:t>
+            </a:r>
+          </a:p>
+        </p:txBody>
+      </p:sp>
+      <p:sp>
+        <p:nvSpPr>
+          <p:cNvPr id="49" name="Rounded Rectangle 48"/>
+          <p:cNvSpPr/>
+          <p:nvPr/>
+        </p:nvSpPr>
+        <p:spPr>
+          <a:xfrm>
+            <a:off x="10369296" y="4005072"/>
+            <a:ext cx="1389888" cy="640080"/>
+          </a:xfrm>
+          <a:prstGeom prst="roundRect">
+            <a:avLst/>
+          </a:prstGeom>
+          <a:solidFill>
+            <a:srgbClr val="D9D9D9"/>
+          </a:solidFill>
+          <a:ln w="12700">
+            <a:solidFill>
+              <a:srgbClr val="A5A5A5"/>
+            </a:solidFill>
+          </a:ln>
+          <a:effectLst/>
+        </p:spPr>
+        <p:style>
+          <a:lnRef idx="1">
+            <a:schemeClr val="accent1"/>
+          </a:lnRef>
+          <a:fillRef idx="3">
+            <a:schemeClr val="accent1"/>
+          </a:fillRef>
+          <a:effectRef idx="2">
+            <a:schemeClr val="accent1"/>
+          </a:effectRef>
+          <a:fontRef idx="minor">
+            <a:schemeClr val="lt1"/>
+          </a:fontRef>
+        </p:style>
+        <p:txBody>
+          <a:bodyPr rtlCol="0" anchor="ctr"/>
+          <a:lstStyle/>
+          <a:p>
+            <a:pPr algn="ctr"/>
+          </a:p>
+        </p:txBody>
+      </p:sp>
+      <p:sp>
+        <p:nvSpPr>
+          <p:cNvPr id="50" name="TextBox 49"/>
+          <p:cNvSpPr txBox="1"/>
+          <p:nvPr/>
+        </p:nvSpPr>
+        <p:spPr>
+          <a:xfrm>
+            <a:off x="10451592" y="4069080"/>
+            <a:ext cx="1225296" cy="530352"/>
+          </a:xfrm>
+          <a:prstGeom prst="rect">
+            <a:avLst/>
+          </a:prstGeom>
+          <a:noFill/>
+        </p:spPr>
+        <p:txBody>
+          <a:bodyPr wrap="square" lIns="0" rIns="0" tIns="0" bIns="0">
+            <a:spAutoFit/>
+          </a:bodyPr>
+          <a:lstStyle/>
+          <a:p>
+            <a:pPr algn="l">
+              <a:spcAft>
+                <a:spcPts val="100"/>
+              </a:spcAft>
+            </a:pPr>
+            <a:r>
+              <a:rPr sz="1250" b="1">
+                <a:solidFill>
+                  <a:srgbClr val="141414"/>
+                </a:solidFill>
+                <a:latin typeface="Arial"/>
+              </a:rPr>
+              <a:t>Runin</a:t>
+            </a:r>
+          </a:p>
+          <a:p>
+            <a:pPr algn="l">
+              <a:spcAft>
+                <a:spcPts val="100"/>
+              </a:spcAft>
+            </a:pPr>
+            <a:r>
+              <a:rPr sz="850" b="0">
+                <a:solidFill>
+                  <a:srgbClr val="6B6B6B"/>
+                </a:solidFill>
+                <a:latin typeface="Arial"/>
+              </a:rPr>
+              <a:t>counted with FAT / SFT</a:t>
+            </a:r>
+          </a:p>
+        </p:txBody>
+      </p:sp>
+      <p:sp>
+        <p:nvSpPr>
+          <p:cNvPr id="51" name="Rounded Rectangle 50"/>
+          <p:cNvSpPr/>
+          <p:nvPr/>
+        </p:nvSpPr>
+        <p:spPr>
+          <a:xfrm>
+            <a:off x="10369296" y="4846320"/>
+            <a:ext cx="1389888" cy="640080"/>
+          </a:xfrm>
+          <a:prstGeom prst="roundRect">
+            <a:avLst/>
+          </a:prstGeom>
+          <a:solidFill>
+            <a:srgbClr val="DAE8FC"/>
+          </a:solidFill>
+          <a:ln w="12700">
+            <a:solidFill>
+              <a:srgbClr val="7EA6D9"/>
+            </a:solidFill>
+          </a:ln>
+          <a:effectLst/>
+        </p:spPr>
+        <p:style>
+          <a:lnRef idx="1">
+            <a:schemeClr val="accent1"/>
+          </a:lnRef>
+          <a:fillRef idx="3">
+            <a:schemeClr val="accent1"/>
+          </a:fillRef>
+          <a:effectRef idx="2">
+            <a:schemeClr val="accent1"/>
+          </a:effectRef>
+          <a:fontRef idx="minor">
+            <a:schemeClr val="lt1"/>
+          </a:fontRef>
+        </p:style>
+        <p:txBody>
+          <a:bodyPr rtlCol="0" anchor="ctr"/>
+          <a:lstStyle/>
+          <a:p>
+            <a:pPr algn="ctr"/>
+          </a:p>
+        </p:txBody>
+      </p:sp>
+      <p:sp>
+        <p:nvSpPr>
+          <p:cNvPr id="52" name="TextBox 51"/>
+          <p:cNvSpPr txBox="1"/>
+          <p:nvPr/>
+        </p:nvSpPr>
+        <p:spPr>
+          <a:xfrm>
+            <a:off x="10451592" y="4910328"/>
+            <a:ext cx="1225296" cy="530352"/>
+          </a:xfrm>
+          <a:prstGeom prst="rect">
+            <a:avLst/>
+          </a:prstGeom>
+          <a:noFill/>
+        </p:spPr>
+        <p:txBody>
+          <a:bodyPr wrap="square" lIns="0" rIns="0" tIns="0" bIns="0">
+            <a:spAutoFit/>
+          </a:bodyPr>
+          <a:lstStyle/>
+          <a:p>
+            <a:pPr algn="l">
+              <a:spcAft>
+                <a:spcPts val="100"/>
+              </a:spcAft>
+            </a:pPr>
+            <a:r>
+              <a:rPr sz="1250" b="0">
+                <a:solidFill>
+                  <a:srgbClr val="141414"/>
+                </a:solidFill>
+                <a:latin typeface="Arial"/>
+              </a:rPr>
+              <a:t>Pack</a:t>
+            </a:r>
+          </a:p>
+        </p:txBody>
+      </p:sp>
+      <p:cxnSp>
+        <p:nvCxnSpPr>
+          <p:cNvPr id="53" name="Connector 52"/>
+          <p:cNvCxnSpPr/>
+          <p:nvPr/>
+        </p:nvCxnSpPr>
+        <p:spPr>
+          <a:xfrm>
+            <a:off x="1307592" y="2121408"/>
+            <a:ext cx="0" cy="201168"/>
+          </a:xfrm>
+          <a:prstGeom prst="line">
+            <a:avLst/>
+          </a:prstGeom>
+          <a:ln w="13970">
+            <a:solidFill>
+              <a:srgbClr val="8A8882"/>
+            </a:solidFill>
+            <a:tailEnd type="triangle" w="sm" len="sm"/>
+          </a:ln>
+        </p:spPr>
+        <p:style>
+          <a:lnRef idx="2">
+            <a:schemeClr val="accent1"/>
+          </a:lnRef>
+          <a:fillRef idx="0">
+            <a:schemeClr val="accent1"/>
+          </a:fillRef>
+          <a:effectRef idx="1">
+            <a:schemeClr val="accent1"/>
+          </a:effectRef>
+          <a:fontRef idx="minor">
+            <a:schemeClr val="tx1"/>
+          </a:fontRef>
+        </p:style>
+      </p:cxnSp>
+      <p:cxnSp>
+        <p:nvCxnSpPr>
+          <p:cNvPr id="54" name="Connector 53"/>
+          <p:cNvCxnSpPr/>
+          <p:nvPr/>
+        </p:nvCxnSpPr>
+        <p:spPr>
+          <a:xfrm>
+            <a:off x="1307592" y="2962656"/>
+            <a:ext cx="0" cy="201168"/>
+          </a:xfrm>
+          <a:prstGeom prst="line">
+            <a:avLst/>
+          </a:prstGeom>
+          <a:ln w="13970">
+            <a:solidFill>
+              <a:srgbClr val="8A8882"/>
+            </a:solidFill>
+            <a:tailEnd type="triangle" w="sm" len="sm"/>
+          </a:ln>
+        </p:spPr>
+        <p:style>
+          <a:lnRef idx="2">
+            <a:schemeClr val="accent1"/>
+          </a:lnRef>
+          <a:fillRef idx="0">
+            <a:schemeClr val="accent1"/>
+          </a:fillRef>
+          <a:effectRef idx="1">
+            <a:schemeClr val="accent1"/>
+          </a:effectRef>
+          <a:fontRef idx="minor">
+            <a:schemeClr val="tx1"/>
+          </a:fontRef>
+        </p:style>
+      </p:cxnSp>
+      <p:cxnSp>
+        <p:nvCxnSpPr>
+          <p:cNvPr id="55" name="Connector 54"/>
+          <p:cNvCxnSpPr/>
+          <p:nvPr/>
+        </p:nvCxnSpPr>
+        <p:spPr>
+          <a:xfrm>
+            <a:off x="1307592" y="3803904"/>
+            <a:ext cx="0" cy="201168"/>
+          </a:xfrm>
+          <a:prstGeom prst="line">
+            <a:avLst/>
+          </a:prstGeom>
+          <a:ln w="13970">
+            <a:solidFill>
+              <a:srgbClr val="8A8882"/>
+            </a:solidFill>
+            <a:tailEnd type="triangle" w="sm" len="sm"/>
+          </a:ln>
+        </p:spPr>
+        <p:style>
+          <a:lnRef idx="2">
+            <a:schemeClr val="accent1"/>
+          </a:lnRef>
+          <a:fillRef idx="0">
+            <a:schemeClr val="accent1"/>
+          </a:fillRef>
+          <a:effectRef idx="1">
+            <a:schemeClr val="accent1"/>
+          </a:effectRef>
+          <a:fontRef idx="minor">
+            <a:schemeClr val="tx1"/>
+          </a:fontRef>
+        </p:style>
+      </p:cxnSp>
+      <p:cxnSp>
+        <p:nvCxnSpPr>
+          <p:cNvPr id="56" name="Connector 55"/>
+          <p:cNvCxnSpPr/>
+          <p:nvPr/>
+        </p:nvCxnSpPr>
+        <p:spPr>
+          <a:xfrm>
+            <a:off x="1956815" y="3483864"/>
+            <a:ext cx="1069849" cy="0"/>
+          </a:xfrm>
+          <a:prstGeom prst="line">
+            <a:avLst/>
+          </a:prstGeom>
+          <a:ln w="13970">
+            <a:solidFill>
+              <a:srgbClr val="8A8882"/>
+            </a:solidFill>
+          </a:ln>
+        </p:spPr>
+        <p:style>
+          <a:lnRef idx="2">
+            <a:schemeClr val="accent1"/>
+          </a:lnRef>
+          <a:fillRef idx="0">
+            <a:schemeClr val="accent1"/>
+          </a:fillRef>
+          <a:effectRef idx="1">
+            <a:schemeClr val="accent1"/>
+          </a:effectRef>
+          <a:fontRef idx="minor">
+            <a:schemeClr val="tx1"/>
+          </a:fontRef>
+        </p:style>
+      </p:cxnSp>
+      <p:cxnSp>
+        <p:nvCxnSpPr>
+          <p:cNvPr id="57" name="Connector 56"/>
+          <p:cNvCxnSpPr/>
+          <p:nvPr/>
+        </p:nvCxnSpPr>
+        <p:spPr>
+          <a:xfrm flipV="1">
+            <a:off x="3026664" y="2121408"/>
+            <a:ext cx="0" cy="1362456"/>
+          </a:xfrm>
+          <a:prstGeom prst="line">
+            <a:avLst/>
+          </a:prstGeom>
+          <a:ln w="13970">
+            <a:solidFill>
+              <a:srgbClr val="8A8882"/>
+            </a:solidFill>
+            <a:tailEnd type="triangle" w="sm" len="sm"/>
+          </a:ln>
+        </p:spPr>
+        <p:style>
+          <a:lnRef idx="2">
+            <a:schemeClr val="accent1"/>
+          </a:lnRef>
+          <a:fillRef idx="0">
+            <a:schemeClr val="accent1"/>
+          </a:fillRef>
+          <a:effectRef idx="1">
+            <a:schemeClr val="accent1"/>
+          </a:effectRef>
+          <a:fontRef idx="minor">
+            <a:schemeClr val="tx1"/>
+          </a:fontRef>
+        </p:style>
+      </p:cxnSp>
+      <p:cxnSp>
+        <p:nvCxnSpPr>
+          <p:cNvPr id="58" name="Connector 57"/>
+          <p:cNvCxnSpPr/>
+          <p:nvPr/>
+        </p:nvCxnSpPr>
+        <p:spPr>
+          <a:xfrm>
+            <a:off x="3026664" y="2121408"/>
+            <a:ext cx="0" cy="1883664"/>
+          </a:xfrm>
+          <a:prstGeom prst="line">
+            <a:avLst/>
+          </a:prstGeom>
+          <a:ln w="13970">
+            <a:solidFill>
+              <a:srgbClr val="8A8882"/>
+            </a:solidFill>
+            <a:tailEnd type="triangle" w="sm" len="sm"/>
+          </a:ln>
+        </p:spPr>
+        <p:style>
+          <a:lnRef idx="2">
+            <a:schemeClr val="accent1"/>
+          </a:lnRef>
+          <a:fillRef idx="0">
+            <a:schemeClr val="accent1"/>
+          </a:fillRef>
+          <a:effectRef idx="1">
+            <a:schemeClr val="accent1"/>
+          </a:effectRef>
+          <a:fontRef idx="minor">
+            <a:schemeClr val="tx1"/>
+          </a:fontRef>
+        </p:style>
+      </p:cxnSp>
+      <p:sp>
+        <p:nvSpPr>
+          <p:cNvPr id="59" name="TextBox 58"/>
+          <p:cNvSpPr txBox="1"/>
+          <p:nvPr/>
+        </p:nvSpPr>
+        <p:spPr>
+          <a:xfrm>
+            <a:off x="3072384" y="3822192"/>
+            <a:ext cx="822960" cy="182880"/>
+          </a:xfrm>
+          <a:prstGeom prst="rect">
+            <a:avLst/>
+          </a:prstGeom>
+          <a:noFill/>
+        </p:spPr>
+        <p:txBody>
+          <a:bodyPr wrap="square" lIns="0" rIns="0" tIns="0" bIns="0">
+            <a:spAutoFit/>
+          </a:bodyPr>
+          <a:lstStyle/>
+          <a:p>
+            <a:pPr algn="l">
+              <a:spcAft>
+                <a:spcPts val="0"/>
+              </a:spcAft>
+            </a:pPr>
+            <a:r>
+              <a:rPr sz="850" b="0">
+                <a:solidFill>
+                  <a:srgbClr val="6B6B6B"/>
+                </a:solidFill>
+                <a:latin typeface="Arial"/>
+              </a:rPr>
+              <a:t>VBB</a:t>
+            </a:r>
+          </a:p>
+        </p:txBody>
+      </p:sp>
+      <p:cxnSp>
+        <p:nvCxnSpPr>
+          <p:cNvPr id="60" name="Connector 59"/>
+          <p:cNvCxnSpPr/>
+          <p:nvPr/>
+        </p:nvCxnSpPr>
+        <p:spPr>
+          <a:xfrm>
+            <a:off x="3675887" y="4325112"/>
+            <a:ext cx="813817" cy="0"/>
+          </a:xfrm>
+          <a:prstGeom prst="line">
+            <a:avLst/>
+          </a:prstGeom>
+          <a:ln w="13970">
+            <a:solidFill>
+              <a:srgbClr val="8A8882"/>
+            </a:solidFill>
+          </a:ln>
+        </p:spPr>
+        <p:style>
+          <a:lnRef idx="2">
+            <a:schemeClr val="accent1"/>
+          </a:lnRef>
+          <a:fillRef idx="0">
+            <a:schemeClr val="accent1"/>
+          </a:fillRef>
+          <a:effectRef idx="1">
+            <a:schemeClr val="accent1"/>
+          </a:effectRef>
+          <a:fontRef idx="minor">
+            <a:schemeClr val="tx1"/>
+          </a:fontRef>
+        </p:style>
+      </p:cxnSp>
+      <p:cxnSp>
+        <p:nvCxnSpPr>
+          <p:cNvPr id="61" name="Connector 60"/>
+          <p:cNvCxnSpPr/>
+          <p:nvPr/>
+        </p:nvCxnSpPr>
+        <p:spPr>
+          <a:xfrm flipV="1">
+            <a:off x="4489704" y="3803904"/>
+            <a:ext cx="0" cy="521208"/>
+          </a:xfrm>
+          <a:prstGeom prst="line">
+            <a:avLst/>
+          </a:prstGeom>
+          <a:ln w="13970">
+            <a:solidFill>
+              <a:srgbClr val="8A8882"/>
+            </a:solidFill>
+            <a:tailEnd type="triangle" w="sm" len="sm"/>
+          </a:ln>
+        </p:spPr>
+        <p:style>
+          <a:lnRef idx="2">
+            <a:schemeClr val="accent1"/>
+          </a:lnRef>
+          <a:fillRef idx="0">
+            <a:schemeClr val="accent1"/>
+          </a:fillRef>
+          <a:effectRef idx="1">
+            <a:schemeClr val="accent1"/>
+          </a:effectRef>
+          <a:fontRef idx="minor">
+            <a:schemeClr val="tx1"/>
+          </a:fontRef>
+        </p:style>
+      </p:cxnSp>
+      <p:cxnSp>
+        <p:nvCxnSpPr>
+          <p:cNvPr id="62" name="Connector 61"/>
+          <p:cNvCxnSpPr/>
+          <p:nvPr/>
+        </p:nvCxnSpPr>
+        <p:spPr>
+          <a:xfrm flipV="1">
+            <a:off x="4489704" y="2962656"/>
+            <a:ext cx="0" cy="201168"/>
+          </a:xfrm>
+          <a:prstGeom prst="line">
+            <a:avLst/>
+          </a:prstGeom>
+          <a:ln w="13970">
+            <a:solidFill>
+              <a:srgbClr val="8A8882"/>
+            </a:solidFill>
+            <a:tailEnd type="triangle" w="sm" len="sm"/>
+          </a:ln>
+        </p:spPr>
+        <p:style>
+          <a:lnRef idx="2">
+            <a:schemeClr val="accent1"/>
+          </a:lnRef>
+          <a:fillRef idx="0">
+            <a:schemeClr val="accent1"/>
+          </a:fillRef>
+          <a:effectRef idx="1">
+            <a:schemeClr val="accent1"/>
+          </a:effectRef>
+          <a:fontRef idx="minor">
+            <a:schemeClr val="tx1"/>
+          </a:fontRef>
+        </p:style>
+      </p:cxnSp>
+      <p:cxnSp>
+        <p:nvCxnSpPr>
+          <p:cNvPr id="63" name="Connector 62"/>
+          <p:cNvCxnSpPr/>
+          <p:nvPr/>
+        </p:nvCxnSpPr>
+        <p:spPr>
+          <a:xfrm flipV="1">
+            <a:off x="4489704" y="2121408"/>
+            <a:ext cx="0" cy="201168"/>
+          </a:xfrm>
+          <a:prstGeom prst="line">
+            <a:avLst/>
+          </a:prstGeom>
+          <a:ln w="13970">
+            <a:solidFill>
+              <a:srgbClr val="8A8882"/>
+            </a:solidFill>
+            <a:tailEnd type="triangle" w="sm" len="sm"/>
+          </a:ln>
+        </p:spPr>
+        <p:style>
+          <a:lnRef idx="2">
+            <a:schemeClr val="accent1"/>
+          </a:lnRef>
+          <a:fillRef idx="0">
+            <a:schemeClr val="accent1"/>
+          </a:fillRef>
+          <a:effectRef idx="1">
+            <a:schemeClr val="accent1"/>
+          </a:effectRef>
+          <a:fontRef idx="minor">
+            <a:schemeClr val="tx1"/>
+          </a:fontRef>
+        </p:style>
+      </p:cxnSp>
+      <p:cxnSp>
+        <p:nvCxnSpPr>
+          <p:cNvPr id="64" name="Connector 63"/>
+          <p:cNvCxnSpPr/>
+          <p:nvPr/>
+        </p:nvCxnSpPr>
+        <p:spPr>
+          <a:xfrm>
+            <a:off x="5138928" y="1801368"/>
+            <a:ext cx="219456" cy="0"/>
+          </a:xfrm>
+          <a:prstGeom prst="line">
+            <a:avLst/>
+          </a:prstGeom>
+          <a:ln w="13970">
+            <a:solidFill>
+              <a:srgbClr val="8A8882"/>
+            </a:solidFill>
+            <a:tailEnd type="triangle" w="sm" len="sm"/>
+          </a:ln>
+        </p:spPr>
+        <p:style>
+          <a:lnRef idx="2">
+            <a:schemeClr val="accent1"/>
+          </a:lnRef>
+          <a:fillRef idx="0">
+            <a:schemeClr val="accent1"/>
+          </a:fillRef>
+          <a:effectRef idx="1">
+            <a:schemeClr val="accent1"/>
+          </a:effectRef>
+          <a:fontRef idx="minor">
+            <a:schemeClr val="tx1"/>
+          </a:fontRef>
+        </p:style>
+      </p:cxnSp>
+      <p:cxnSp>
+        <p:nvCxnSpPr>
+          <p:cNvPr id="65" name="Connector 64"/>
+          <p:cNvCxnSpPr/>
+          <p:nvPr/>
+        </p:nvCxnSpPr>
+        <p:spPr>
+          <a:xfrm>
+            <a:off x="6437376" y="1801368"/>
+            <a:ext cx="1499616" cy="0"/>
+          </a:xfrm>
+          <a:prstGeom prst="line">
+            <a:avLst/>
+          </a:prstGeom>
+          <a:ln w="13970">
+            <a:solidFill>
+              <a:srgbClr val="8A8882"/>
+            </a:solidFill>
+          </a:ln>
+        </p:spPr>
+        <p:style>
+          <a:lnRef idx="2">
+            <a:schemeClr val="accent1"/>
+          </a:lnRef>
+          <a:fillRef idx="0">
+            <a:schemeClr val="accent1"/>
+          </a:fillRef>
+          <a:effectRef idx="1">
+            <a:schemeClr val="accent1"/>
+          </a:effectRef>
+          <a:fontRef idx="minor">
+            <a:schemeClr val="tx1"/>
+          </a:fontRef>
+        </p:style>
+      </p:cxnSp>
+      <p:cxnSp>
+        <p:nvCxnSpPr>
+          <p:cNvPr id="66" name="Connector 65"/>
+          <p:cNvCxnSpPr/>
+          <p:nvPr/>
+        </p:nvCxnSpPr>
+        <p:spPr>
+          <a:xfrm>
+            <a:off x="7936992" y="1801368"/>
+            <a:ext cx="0" cy="521208"/>
+          </a:xfrm>
+          <a:prstGeom prst="line">
+            <a:avLst/>
+          </a:prstGeom>
+          <a:ln w="13970">
+            <a:solidFill>
+              <a:srgbClr val="8A8882"/>
+            </a:solidFill>
+            <a:tailEnd type="triangle" w="sm" len="sm"/>
+          </a:ln>
+        </p:spPr>
+        <p:style>
+          <a:lnRef idx="2">
+            <a:schemeClr val="accent1"/>
+          </a:lnRef>
+          <a:fillRef idx="0">
+            <a:schemeClr val="accent1"/>
+          </a:fillRef>
+          <a:effectRef idx="1">
+            <a:schemeClr val="accent1"/>
+          </a:effectRef>
+          <a:fontRef idx="minor">
+            <a:schemeClr val="tx1"/>
+          </a:fontRef>
+        </p:style>
+      </p:cxnSp>
+      <p:cxnSp>
+        <p:nvCxnSpPr>
+          <p:cNvPr id="67" name="Connector 66"/>
+          <p:cNvCxnSpPr/>
+          <p:nvPr/>
+        </p:nvCxnSpPr>
+        <p:spPr>
+          <a:xfrm>
+            <a:off x="5897880" y="2121408"/>
+            <a:ext cx="0" cy="2203704"/>
+          </a:xfrm>
+          <a:prstGeom prst="line">
+            <a:avLst/>
+          </a:prstGeom>
+          <a:ln w="13970">
+            <a:solidFill>
+              <a:srgbClr val="8A8882"/>
+            </a:solidFill>
+          </a:ln>
+        </p:spPr>
+        <p:style>
+          <a:lnRef idx="2">
+            <a:schemeClr val="accent1"/>
+          </a:lnRef>
+          <a:fillRef idx="0">
+            <a:schemeClr val="accent1"/>
+          </a:fillRef>
+          <a:effectRef idx="1">
+            <a:schemeClr val="accent1"/>
+          </a:effectRef>
+          <a:fontRef idx="minor">
+            <a:schemeClr val="tx1"/>
+          </a:fontRef>
+        </p:style>
+      </p:cxnSp>
+      <p:cxnSp>
+        <p:nvCxnSpPr>
+          <p:cNvPr id="68" name="Connector 67"/>
+          <p:cNvCxnSpPr/>
+          <p:nvPr/>
+        </p:nvCxnSpPr>
+        <p:spPr>
+          <a:xfrm>
+            <a:off x="5897880" y="4325112"/>
+            <a:ext cx="1344168" cy="0"/>
+          </a:xfrm>
+          <a:prstGeom prst="line">
+            <a:avLst/>
+          </a:prstGeom>
+          <a:ln w="13970">
+            <a:solidFill>
+              <a:srgbClr val="8A8882"/>
+            </a:solidFill>
+            <a:tailEnd type="triangle" w="sm" len="sm"/>
+          </a:ln>
+        </p:spPr>
+        <p:style>
+          <a:lnRef idx="2">
+            <a:schemeClr val="accent1"/>
+          </a:lnRef>
+          <a:fillRef idx="0">
+            <a:schemeClr val="accent1"/>
+          </a:fillRef>
+          <a:effectRef idx="1">
+            <a:schemeClr val="accent1"/>
+          </a:effectRef>
+          <a:fontRef idx="minor">
+            <a:schemeClr val="tx1"/>
+          </a:fontRef>
+        </p:style>
+      </p:cxnSp>
+      <p:cxnSp>
+        <p:nvCxnSpPr>
+          <p:cNvPr id="69" name="Connector 68"/>
+          <p:cNvCxnSpPr/>
+          <p:nvPr/>
+        </p:nvCxnSpPr>
+        <p:spPr>
+          <a:xfrm flipV="1">
+            <a:off x="7936992" y="3803904"/>
+            <a:ext cx="0" cy="201168"/>
+          </a:xfrm>
+          <a:prstGeom prst="line">
+            <a:avLst/>
+          </a:prstGeom>
+          <a:ln w="13970">
+            <a:solidFill>
+              <a:srgbClr val="8A8882"/>
+            </a:solidFill>
+            <a:tailEnd type="triangle" w="sm" len="sm"/>
+          </a:ln>
+        </p:spPr>
+        <p:style>
+          <a:lnRef idx="2">
+            <a:schemeClr val="accent1"/>
+          </a:lnRef>
+          <a:fillRef idx="0">
+            <a:schemeClr val="accent1"/>
+          </a:fillRef>
+          <a:effectRef idx="1">
+            <a:schemeClr val="accent1"/>
+          </a:effectRef>
+          <a:fontRef idx="minor">
+            <a:schemeClr val="tx1"/>
+          </a:fontRef>
+        </p:style>
+      </p:cxnSp>
+      <p:cxnSp>
+        <p:nvCxnSpPr>
+          <p:cNvPr id="70" name="Connector 69"/>
+          <p:cNvCxnSpPr/>
+          <p:nvPr/>
+        </p:nvCxnSpPr>
+        <p:spPr>
+          <a:xfrm flipV="1">
+            <a:off x="7936992" y="2962656"/>
+            <a:ext cx="0" cy="201168"/>
+          </a:xfrm>
+          <a:prstGeom prst="line">
+            <a:avLst/>
+          </a:prstGeom>
+          <a:ln w="13970">
+            <a:solidFill>
+              <a:srgbClr val="8A8882"/>
+            </a:solidFill>
+            <a:tailEnd type="triangle" w="sm" len="sm"/>
+          </a:ln>
+        </p:spPr>
+        <p:style>
+          <a:lnRef idx="2">
+            <a:schemeClr val="accent1"/>
+          </a:lnRef>
+          <a:fillRef idx="0">
+            <a:schemeClr val="accent1"/>
+          </a:fillRef>
+          <a:effectRef idx="1">
+            <a:schemeClr val="accent1"/>
+          </a:effectRef>
+          <a:fontRef idx="minor">
+            <a:schemeClr val="tx1"/>
+          </a:fontRef>
+        </p:style>
+      </p:cxnSp>
+      <p:cxnSp>
+        <p:nvCxnSpPr>
+          <p:cNvPr id="71" name="Connector 70"/>
+          <p:cNvCxnSpPr/>
+          <p:nvPr/>
+        </p:nvCxnSpPr>
+        <p:spPr>
+          <a:xfrm>
+            <a:off x="8631936" y="2642616"/>
+            <a:ext cx="109728" cy="0"/>
+          </a:xfrm>
+          <a:prstGeom prst="line">
+            <a:avLst/>
+          </a:prstGeom>
+          <a:ln w="13970">
+            <a:solidFill>
+              <a:srgbClr val="8A8882"/>
+            </a:solidFill>
+            <a:tailEnd type="triangle" w="sm" len="sm"/>
+          </a:ln>
+        </p:spPr>
+        <p:style>
+          <a:lnRef idx="2">
+            <a:schemeClr val="accent1"/>
+          </a:lnRef>
+          <a:fillRef idx="0">
+            <a:schemeClr val="accent1"/>
+          </a:fillRef>
+          <a:effectRef idx="1">
+            <a:schemeClr val="accent1"/>
+          </a:effectRef>
+          <a:fontRef idx="minor">
+            <a:schemeClr val="tx1"/>
+          </a:fontRef>
+        </p:style>
+      </p:cxnSp>
+      <p:cxnSp>
+        <p:nvCxnSpPr>
+          <p:cNvPr id="72" name="Connector 71"/>
+          <p:cNvCxnSpPr/>
+          <p:nvPr/>
+        </p:nvCxnSpPr>
+        <p:spPr>
+          <a:xfrm>
+            <a:off x="10040112" y="2642616"/>
+            <a:ext cx="329184" cy="0"/>
+          </a:xfrm>
+          <a:prstGeom prst="line">
+            <a:avLst/>
+          </a:prstGeom>
+          <a:ln w="13970">
+            <a:solidFill>
+              <a:srgbClr val="8A8882"/>
+            </a:solidFill>
+            <a:tailEnd type="triangle" w="sm" len="sm"/>
+          </a:ln>
+        </p:spPr>
+        <p:style>
+          <a:lnRef idx="2">
+            <a:schemeClr val="accent1"/>
+          </a:lnRef>
+          <a:fillRef idx="0">
+            <a:schemeClr val="accent1"/>
+          </a:fillRef>
+          <a:effectRef idx="1">
+            <a:schemeClr val="accent1"/>
+          </a:effectRef>
+          <a:fontRef idx="minor">
+            <a:schemeClr val="tx1"/>
+          </a:fontRef>
+        </p:style>
+      </p:cxnSp>
+      <p:cxnSp>
+        <p:nvCxnSpPr>
+          <p:cNvPr id="73" name="Connector 72"/>
+          <p:cNvCxnSpPr/>
+          <p:nvPr/>
+        </p:nvCxnSpPr>
+        <p:spPr>
+          <a:xfrm>
+            <a:off x="11064240" y="2962656"/>
+            <a:ext cx="0" cy="201168"/>
+          </a:xfrm>
+          <a:prstGeom prst="line">
+            <a:avLst/>
+          </a:prstGeom>
+          <a:ln w="13970">
+            <a:solidFill>
+              <a:srgbClr val="8A8882"/>
+            </a:solidFill>
+            <a:tailEnd type="triangle" w="sm" len="sm"/>
+          </a:ln>
+        </p:spPr>
+        <p:style>
+          <a:lnRef idx="2">
+            <a:schemeClr val="accent1"/>
+          </a:lnRef>
+          <a:fillRef idx="0">
+            <a:schemeClr val="accent1"/>
+          </a:fillRef>
+          <a:effectRef idx="1">
+            <a:schemeClr val="accent1"/>
+          </a:effectRef>
+          <a:fontRef idx="minor">
+            <a:schemeClr val="tx1"/>
+          </a:fontRef>
+        </p:style>
+      </p:cxnSp>
+      <p:cxnSp>
+        <p:nvCxnSpPr>
+          <p:cNvPr id="74" name="Connector 73"/>
+          <p:cNvCxnSpPr/>
+          <p:nvPr/>
+        </p:nvCxnSpPr>
+        <p:spPr>
+          <a:xfrm>
+            <a:off x="11064240" y="3803904"/>
+            <a:ext cx="0" cy="201168"/>
+          </a:xfrm>
+          <a:prstGeom prst="line">
+            <a:avLst/>
+          </a:prstGeom>
+          <a:ln w="13970">
+            <a:solidFill>
+              <a:srgbClr val="8A8882"/>
+            </a:solidFill>
+            <a:tailEnd type="triangle" w="sm" len="sm"/>
+          </a:ln>
+        </p:spPr>
+        <p:style>
+          <a:lnRef idx="2">
+            <a:schemeClr val="accent1"/>
+          </a:lnRef>
+          <a:fillRef idx="0">
+            <a:schemeClr val="accent1"/>
+          </a:fillRef>
+          <a:effectRef idx="1">
+            <a:schemeClr val="accent1"/>
+          </a:effectRef>
+          <a:fontRef idx="minor">
+            <a:schemeClr val="tx1"/>
+          </a:fontRef>
+        </p:style>
+      </p:cxnSp>
+      <p:cxnSp>
+        <p:nvCxnSpPr>
+          <p:cNvPr id="75" name="Connector 74"/>
+          <p:cNvCxnSpPr/>
+          <p:nvPr/>
+        </p:nvCxnSpPr>
+        <p:spPr>
+          <a:xfrm>
+            <a:off x="11064240" y="4645152"/>
+            <a:ext cx="0" cy="201168"/>
+          </a:xfrm>
+          <a:prstGeom prst="line">
+            <a:avLst/>
+          </a:prstGeom>
+          <a:ln w="13970">
+            <a:solidFill>
+              <a:srgbClr val="8A8882"/>
+            </a:solidFill>
+            <a:tailEnd type="triangle" w="sm" len="sm"/>
+          </a:ln>
+        </p:spPr>
+        <p:style>
+          <a:lnRef idx="2">
+            <a:schemeClr val="accent1"/>
+          </a:lnRef>
+          <a:fillRef idx="0">
+            <a:schemeClr val="accent1"/>
+          </a:fillRef>
+          <a:effectRef idx="1">
+            <a:schemeClr val="accent1"/>
+          </a:effectRef>
+          <a:fontRef idx="minor">
+            <a:schemeClr val="tx1"/>
+          </a:fontRef>
+        </p:style>
+      </p:cxnSp>
+      <p:sp>
+        <p:nvSpPr>
+          <p:cNvPr id="76" name="TextBox 75"/>
+          <p:cNvSpPr txBox="1"/>
+          <p:nvPr/>
+        </p:nvSpPr>
+        <p:spPr>
+          <a:xfrm>
+            <a:off x="658368" y="5989320"/>
+            <a:ext cx="10911535" cy="731520"/>
+          </a:xfrm>
+          <a:prstGeom prst="rect">
+            <a:avLst/>
+          </a:prstGeom>
+          <a:noFill/>
+        </p:spPr>
+        <p:txBody>
+          <a:bodyPr wrap="square" lIns="0" rIns="0" tIns="0" bIns="0">
+            <a:spAutoFit/>
+          </a:bodyPr>
+          <a:lstStyle/>
+          <a:p>
+            <a:pPr algn="l">
+              <a:spcAft>
+                <a:spcPts val="100"/>
+              </a:spcAft>
+            </a:pPr>
+            <a:r>
+              <a:rPr sz="950" b="1">
+                <a:solidFill>
+                  <a:srgbClr val="6B6B6B"/>
+                </a:solidFill>
+                <a:latin typeface="Arial"/>
+              </a:rPr>
+              <a:t>Green</a:t>
+            </a:r>
+            <a:r>
+              <a:rPr sz="950" b="0">
+                <a:solidFill>
+                  <a:srgbClr val="6B6B6B"/>
+                </a:solidFill>
+                <a:latin typeface="Arial"/>
+              </a:rPr>
+              <a:t> = yields, and we measure it.   </a:t>
+            </a:r>
+            <a:r>
+              <a:rPr sz="950" b="1">
+                <a:solidFill>
+                  <a:srgbClr val="6B6B6B"/>
+                </a:solidFill>
+                <a:latin typeface="Arial"/>
+              </a:rPr>
+              <a:t>Amber</a:t>
+            </a:r>
+            <a:r>
+              <a:rPr sz="950" b="0">
+                <a:solidFill>
+                  <a:srgbClr val="6B6B6B"/>
+                </a:solidFill>
+                <a:latin typeface="Arial"/>
+              </a:rPr>
+              <a:t> = quantity only, no yield reported.   </a:t>
+            </a:r>
+            <a:r>
+              <a:rPr sz="950" b="1">
+                <a:solidFill>
+                  <a:srgbClr val="6B6B6B"/>
+                </a:solidFill>
+                <a:latin typeface="Arial"/>
+              </a:rPr>
+              <a:t>Grey</a:t>
+            </a:r>
+            <a:r>
+              <a:rPr sz="950" b="0">
+                <a:solidFill>
+                  <a:srgbClr val="6B6B6B"/>
+                </a:solidFill>
+                <a:latin typeface="Arial"/>
+              </a:rPr>
+              <a:t> = builds, moves, or measured elsewhere.</a:t>
+            </a:r>
+          </a:p>
+          <a:p>
+            <a:pPr algn="l">
+              <a:spcAft>
+                <a:spcPts val="100"/>
+              </a:spcAft>
+            </a:pPr>
+            <a:r>
+              <a:rPr sz="850" b="0">
+                <a:solidFill>
+                  <a:srgbClr val="6B6B6B"/>
+                </a:solidFill>
+                <a:latin typeface="Arial"/>
+              </a:rPr>
+              <a:t>Quantity only: L10 FAT, L10 SFT, L10 RIN, L10 2U, L11 Test. L10 and L11 are chassis and rack level and in bring-up — a percentage over three chassis swings 33 points on one unit, so the counts are published and the yields are not.</a:t>
+            </a:r>
+          </a:p>
+          <a:p>
+            <a:pPr algn="l">
+              <a:spcAft>
+                <a:spcPts val="100"/>
+              </a:spcAft>
+            </a:pPr>
+            <a:r>
+              <a:rPr sz="850" b="0">
+                <a:solidFill>
+                  <a:srgbClr val="6B6B6B"/>
+                </a:solidFill>
+                <a:latin typeface="Arial"/>
+              </a:rPr>
+              <a:t>Source: pega2 – pega5 (ESVM), one row per unit. WST and FT reported by Sigurd. VBB provisioning drawn for the flow but left out of the yield view.</a:t>
+            </a:r>
+          </a:p>
+        </p:txBody>
+      </p:sp>
+    </p:spTree>
+  </p:cSld>
+  <p:clrMapOvr>
+    <a:masterClrMapping/>
+  </p:clrMapOvr>
+</p:sld>
+</file>
+
+<file path=ppt/slides/slide3.xml><?xml version="1.0" encoding="utf-8"?>
+<p:sld xmlns:a="http://schemas.openxmlformats.org/drawingml/2006/main" xmlns:p="http://schemas.openxmlformats.org/presentationml/2006/main" xmlns:r="http://schemas.openxmlformats.org/officeDocument/2006/relationships">
+  <p:cSld>
+    <p:spTree>
+      <p:nvGrpSpPr>
+        <p:cNvPr id="1" name=""/>
+        <p:cNvGrpSpPr/>
+        <p:nvPr/>
+      </p:nvGrpSpPr>
+      <p:grpSpPr/>
+      <p:sp>
+        <p:nvSpPr>
+          <p:cNvPr id="2" name="TextBox 1"/>
+          <p:cNvSpPr txBox="1"/>
+          <p:nvPr/>
+        </p:nvSpPr>
+        <p:spPr>
+          <a:xfrm>
+            <a:off x="502920" y="310896"/>
+            <a:ext cx="11185855" cy="731520"/>
+          </a:xfrm>
+          <a:prstGeom prst="rect">
+            <a:avLst/>
+          </a:prstGeom>
+          <a:noFill/>
+        </p:spPr>
+        <p:txBody>
+          <a:bodyPr wrap="square" lIns="0" rIns="0" tIns="0" bIns="0">
+            <a:spAutoFit/>
+          </a:bodyPr>
+          <a:lstStyle/>
+          <a:p>
+            <a:pPr algn="l">
+              <a:spcAft>
+                <a:spcPts val="100"/>
+              </a:spcAft>
+            </a:pPr>
+            <a:r>
+              <a:rPr sz="2700" b="1">
+                <a:solidFill>
+                  <a:srgbClr val="141414"/>
+                </a:solidFill>
+                <a:latin typeface="Arial"/>
+              </a:rPr>
+              <a:t>Every step, with the retest rate</a:t>
+            </a:r>
+          </a:p>
+          <a:p>
+            <a:pPr algn="l">
+              <a:spcAft>
+                <a:spcPts val="100"/>
+              </a:spcAft>
+            </a:pPr>
+            <a:r>
+              <a:rPr sz="1250" b="0">
+                <a:solidFill>
+                  <a:srgbClr val="6B6B6B"/>
+                </a:solidFill>
+                <a:latin typeface="Arial"/>
+              </a:rPr>
+              <a:t>2026-W33 · retest rate is the share of units that had to be run again</a:t>
+            </a:r>
+          </a:p>
+        </p:txBody>
+      </p:sp>
+      <p:sp>
+        <p:nvSpPr>
+          <p:cNvPr id="3" name="Rectangle 2"/>
+          <p:cNvSpPr/>
+          <p:nvPr/>
+        </p:nvSpPr>
+        <p:spPr>
+          <a:xfrm>
+            <a:off x="502920" y="1170432"/>
+            <a:ext cx="11185855" cy="13970"/>
+          </a:xfrm>
+          <a:prstGeom prst="rect">
+            <a:avLst/>
+          </a:prstGeom>
+          <a:solidFill>
+            <a:srgbClr val="D8D6CF"/>
+          </a:solidFill>
+          <a:ln>
+            <a:noFill/>
+          </a:ln>
+          <a:effectLst/>
+        </p:spPr>
+        <p:style>
+          <a:lnRef idx="1">
+            <a:schemeClr val="accent1"/>
+          </a:lnRef>
+          <a:fillRef idx="3">
+            <a:schemeClr val="accent1"/>
+          </a:fillRef>
+          <a:effectRef idx="2">
+            <a:schemeClr val="accent1"/>
+          </a:effectRef>
+          <a:fontRef idx="minor">
+            <a:schemeClr val="lt1"/>
+          </a:fontRef>
+        </p:style>
+        <p:txBody>
+          <a:bodyPr rtlCol="0" anchor="ctr"/>
+          <a:lstStyle/>
+          <a:p>
+            <a:pPr algn="ctr"/>
+          </a:p>
+        </p:txBody>
+      </p:sp>
+      <p:sp>
+        <p:nvSpPr>
+          <p:cNvPr id="4" name="TextBox 3"/>
+          <p:cNvSpPr txBox="1"/>
+          <p:nvPr/>
+        </p:nvSpPr>
+        <p:spPr>
+          <a:xfrm>
             <a:off x="502920" y="1417320"/>
             <a:ext cx="2194560" cy="274320"/>
           </a:xfrm>
@@ -9295,6 +9932,1215 @@
                 <a:latin typeface="Arial"/>
               </a:rPr>
               <a:t>Steps under 20 first-time units report counts only. Full unit-level source data, every serial and release with a link to its run: 32x-production.i.etched.com/week.html#week=2026-W33</a:t>
+            </a:r>
+          </a:p>
+        </p:txBody>
+      </p:sp>
+    </p:spTree>
+  </p:cSld>
+  <p:clrMapOvr>
+    <a:masterClrMapping/>
+  </p:clrMapOvr>
+</p:sld>
+</file>
+
+<file path=ppt/slides/slide4.xml><?xml version="1.0" encoding="utf-8"?>
+<p:sld xmlns:a="http://schemas.openxmlformats.org/drawingml/2006/main" xmlns:p="http://schemas.openxmlformats.org/presentationml/2006/main" xmlns:r="http://schemas.openxmlformats.org/officeDocument/2006/relationships">
+  <p:cSld>
+    <p:spTree>
+      <p:nvGrpSpPr>
+        <p:cNvPr id="1" name=""/>
+        <p:cNvGrpSpPr/>
+        <p:nvPr/>
+      </p:nvGrpSpPr>
+      <p:grpSpPr/>
+      <p:sp>
+        <p:nvSpPr>
+          <p:cNvPr id="2" name="TextBox 1"/>
+          <p:cNvSpPr txBox="1"/>
+          <p:nvPr/>
+        </p:nvSpPr>
+        <p:spPr>
+          <a:xfrm>
+            <a:off x="502920" y="310896"/>
+            <a:ext cx="11185855" cy="731520"/>
+          </a:xfrm>
+          <a:prstGeom prst="rect">
+            <a:avLst/>
+          </a:prstGeom>
+          <a:noFill/>
+        </p:spPr>
+        <p:txBody>
+          <a:bodyPr wrap="square" lIns="0" rIns="0" tIns="0" bIns="0">
+            <a:spAutoFit/>
+          </a:bodyPr>
+          <a:lstStyle/>
+          <a:p>
+            <a:pPr algn="l">
+              <a:spcAft>
+                <a:spcPts val="100"/>
+              </a:spcAft>
+            </a:pPr>
+            <a:r>
+              <a:rPr sz="2700" b="1">
+                <a:solidFill>
+                  <a:srgbClr val="141414"/>
+                </a:solidFill>
+                <a:latin typeface="Arial"/>
+              </a:rPr>
+              <a:t>Appendix — where the data comes from</a:t>
+            </a:r>
+          </a:p>
+          <a:p>
+            <a:pPr algn="l">
+              <a:spcAft>
+                <a:spcPts val="100"/>
+              </a:spcAft>
+            </a:pPr>
+            <a:r>
+              <a:rPr sz="1250" b="0">
+                <a:solidFill>
+                  <a:srgbClr val="6B6B6B"/>
+                </a:solidFill>
+                <a:latin typeface="Arial"/>
+              </a:rPr>
+              <a:t>every figure on this deck traces to one of these; the first one lists the units behind it</a:t>
+            </a:r>
+          </a:p>
+        </p:txBody>
+      </p:sp>
+      <p:sp>
+        <p:nvSpPr>
+          <p:cNvPr id="3" name="Rectangle 2"/>
+          <p:cNvSpPr/>
+          <p:nvPr/>
+        </p:nvSpPr>
+        <p:spPr>
+          <a:xfrm>
+            <a:off x="502920" y="1170432"/>
+            <a:ext cx="11185855" cy="13970"/>
+          </a:xfrm>
+          <a:prstGeom prst="rect">
+            <a:avLst/>
+          </a:prstGeom>
+          <a:solidFill>
+            <a:srgbClr val="D8D6CF"/>
+          </a:solidFill>
+          <a:ln>
+            <a:noFill/>
+          </a:ln>
+          <a:effectLst/>
+        </p:spPr>
+        <p:style>
+          <a:lnRef idx="1">
+            <a:schemeClr val="accent1"/>
+          </a:lnRef>
+          <a:fillRef idx="3">
+            <a:schemeClr val="accent1"/>
+          </a:fillRef>
+          <a:effectRef idx="2">
+            <a:schemeClr val="accent1"/>
+          </a:effectRef>
+          <a:fontRef idx="minor">
+            <a:schemeClr val="lt1"/>
+          </a:fontRef>
+        </p:style>
+        <p:txBody>
+          <a:bodyPr rtlCol="0" anchor="ctr"/>
+          <a:lstStyle/>
+          <a:p>
+            <a:pPr algn="ctr"/>
+          </a:p>
+        </p:txBody>
+      </p:sp>
+      <p:sp>
+        <p:nvSpPr>
+          <p:cNvPr id="4" name="TextBox 3"/>
+          <p:cNvSpPr txBox="1"/>
+          <p:nvPr/>
+        </p:nvSpPr>
+        <p:spPr>
+          <a:xfrm>
+            <a:off x="566928" y="1417320"/>
+            <a:ext cx="5486400" cy="237744"/>
+          </a:xfrm>
+          <a:prstGeom prst="rect">
+            <a:avLst/>
+          </a:prstGeom>
+          <a:noFill/>
+        </p:spPr>
+        <p:txBody>
+          <a:bodyPr wrap="square" lIns="0" rIns="0" tIns="0" bIns="0">
+            <a:spAutoFit/>
+          </a:bodyPr>
+          <a:lstStyle/>
+          <a:p>
+            <a:pPr algn="l">
+              <a:spcAft>
+                <a:spcPts val="0"/>
+              </a:spcAft>
+            </a:pPr>
+            <a:r>
+              <a:rPr sz="1200" b="1">
+                <a:solidFill>
+                  <a:srgbClr val="1C62B8"/>
+                </a:solidFill>
+                <a:latin typeface="Arial"/>
+              </a:rPr>
+              <a:t>This week, unit by unit</a:t>
+            </a:r>
+          </a:p>
+        </p:txBody>
+      </p:sp>
+      <p:sp>
+        <p:nvSpPr>
+          <p:cNvPr id="5" name="TextBox 4"/>
+          <p:cNvSpPr txBox="1"/>
+          <p:nvPr/>
+        </p:nvSpPr>
+        <p:spPr>
+          <a:xfrm>
+            <a:off x="731520" y="1709928"/>
+            <a:ext cx="6035040" cy="237744"/>
+          </a:xfrm>
+          <a:prstGeom prst="rect">
+            <a:avLst/>
+          </a:prstGeom>
+          <a:noFill/>
+        </p:spPr>
+        <p:txBody>
+          <a:bodyPr wrap="square" lIns="0" rIns="0" tIns="0" bIns="0">
+            <a:spAutoFit/>
+          </a:bodyPr>
+          <a:lstStyle/>
+          <a:p>
+            <a:pPr algn="l">
+              <a:spcAft>
+                <a:spcPts val="0"/>
+              </a:spcAft>
+            </a:pPr>
+            <a:r>
+              <a:rPr sz="1100" b="0">
+                <a:solidFill>
+                  <a:srgbClr val="141414"/>
+                </a:solidFill>
+                <a:latin typeface="Arial"/>
+              </a:rPr>
+              <a:t>Source data for 2026-W33 — every DUT serial, software release, verdict and a link to its run</a:t>
+            </a:r>
+          </a:p>
+        </p:txBody>
+      </p:sp>
+      <p:sp>
+        <p:nvSpPr>
+          <p:cNvPr id="6" name="TextBox 5"/>
+          <p:cNvSpPr txBox="1"/>
+          <p:nvPr/>
+        </p:nvSpPr>
+        <p:spPr>
+          <a:xfrm>
+            <a:off x="6858000" y="1709928"/>
+            <a:ext cx="4846320" cy="237744"/>
+          </a:xfrm>
+          <a:prstGeom prst="rect">
+            <a:avLst/>
+          </a:prstGeom>
+          <a:noFill/>
+        </p:spPr>
+        <p:txBody>
+          <a:bodyPr wrap="square" lIns="0" rIns="0" tIns="0" bIns="0">
+            <a:spAutoFit/>
+          </a:bodyPr>
+          <a:lstStyle/>
+          <a:p>
+            <a:pPr algn="l">
+              <a:spcAft>
+                <a:spcPts val="0"/>
+              </a:spcAft>
+            </a:pPr>
+            <a:r>
+              <a:rPr sz="1050" b="0">
+                <a:solidFill>
+                  <a:srgbClr val="6B6B6B"/>
+                </a:solidFill>
+                <a:latin typeface="Courier New"/>
+              </a:rPr>
+              <a:t>32x-production.i.etched.com/week.html#week=2026-W33</a:t>
+            </a:r>
+          </a:p>
+        </p:txBody>
+      </p:sp>
+      <p:sp>
+        <p:nvSpPr>
+          <p:cNvPr id="7" name="TextBox 6"/>
+          <p:cNvSpPr txBox="1"/>
+          <p:nvPr/>
+        </p:nvSpPr>
+        <p:spPr>
+          <a:xfrm>
+            <a:off x="731520" y="1984248"/>
+            <a:ext cx="6035040" cy="237744"/>
+          </a:xfrm>
+          <a:prstGeom prst="rect">
+            <a:avLst/>
+          </a:prstGeom>
+          <a:noFill/>
+        </p:spPr>
+        <p:txBody>
+          <a:bodyPr wrap="square" lIns="0" rIns="0" tIns="0" bIns="0">
+            <a:spAutoFit/>
+          </a:bodyPr>
+          <a:lstStyle/>
+          <a:p>
+            <a:pPr algn="l">
+              <a:spcAft>
+                <a:spcPts val="0"/>
+              </a:spcAft>
+            </a:pPr>
+            <a:r>
+              <a:rPr sz="1100" b="0">
+                <a:solidFill>
+                  <a:srgbClr val="141414"/>
+                </a:solidFill>
+                <a:latin typeface="Arial"/>
+              </a:rPr>
+              <a:t>Every week since collection began, one row each</a:t>
+            </a:r>
+          </a:p>
+        </p:txBody>
+      </p:sp>
+      <p:sp>
+        <p:nvSpPr>
+          <p:cNvPr id="8" name="TextBox 7"/>
+          <p:cNvSpPr txBox="1"/>
+          <p:nvPr/>
+        </p:nvSpPr>
+        <p:spPr>
+          <a:xfrm>
+            <a:off x="6858000" y="1984248"/>
+            <a:ext cx="4846320" cy="237744"/>
+          </a:xfrm>
+          <a:prstGeom prst="rect">
+            <a:avLst/>
+          </a:prstGeom>
+          <a:noFill/>
+        </p:spPr>
+        <p:txBody>
+          <a:bodyPr wrap="square" lIns="0" rIns="0" tIns="0" bIns="0">
+            <a:spAutoFit/>
+          </a:bodyPr>
+          <a:lstStyle/>
+          <a:p>
+            <a:pPr algn="l">
+              <a:spcAft>
+                <a:spcPts val="0"/>
+              </a:spcAft>
+            </a:pPr>
+            <a:r>
+              <a:rPr sz="1050" b="0">
+                <a:solidFill>
+                  <a:srgbClr val="6B6B6B"/>
+                </a:solidFill>
+                <a:latin typeface="Courier New"/>
+              </a:rPr>
+              <a:t>32x-production.i.etched.com/weekly.html</a:t>
+            </a:r>
+          </a:p>
+        </p:txBody>
+      </p:sp>
+      <p:sp>
+        <p:nvSpPr>
+          <p:cNvPr id="9" name="TextBox 8"/>
+          <p:cNvSpPr txBox="1"/>
+          <p:nvPr/>
+        </p:nvSpPr>
+        <p:spPr>
+          <a:xfrm>
+            <a:off x="566928" y="2386584"/>
+            <a:ext cx="5486400" cy="237744"/>
+          </a:xfrm>
+          <a:prstGeom prst="rect">
+            <a:avLst/>
+          </a:prstGeom>
+          <a:noFill/>
+        </p:spPr>
+        <p:txBody>
+          <a:bodyPr wrap="square" lIns="0" rIns="0" tIns="0" bIns="0">
+            <a:spAutoFit/>
+          </a:bodyPr>
+          <a:lstStyle/>
+          <a:p>
+            <a:pPr algn="l">
+              <a:spcAft>
+                <a:spcPts val="0"/>
+              </a:spcAft>
+            </a:pPr>
+            <a:r>
+              <a:rPr sz="1200" b="1">
+                <a:solidFill>
+                  <a:srgbClr val="1C62B8"/>
+                </a:solidFill>
+                <a:latin typeface="Arial"/>
+              </a:rPr>
+              <a:t>The rest of the dashboard</a:t>
+            </a:r>
+          </a:p>
+        </p:txBody>
+      </p:sp>
+      <p:sp>
+        <p:nvSpPr>
+          <p:cNvPr id="10" name="TextBox 9"/>
+          <p:cNvSpPr txBox="1"/>
+          <p:nvPr/>
+        </p:nvSpPr>
+        <p:spPr>
+          <a:xfrm>
+            <a:off x="731520" y="2679192"/>
+            <a:ext cx="6035040" cy="237744"/>
+          </a:xfrm>
+          <a:prstGeom prst="rect">
+            <a:avLst/>
+          </a:prstGeom>
+          <a:noFill/>
+        </p:spPr>
+        <p:txBody>
+          <a:bodyPr wrap="square" lIns="0" rIns="0" tIns="0" bIns="0">
+            <a:spAutoFit/>
+          </a:bodyPr>
+          <a:lstStyle/>
+          <a:p>
+            <a:pPr algn="l">
+              <a:spcAft>
+                <a:spcPts val="0"/>
+              </a:spcAft>
+            </a:pPr>
+            <a:r>
+              <a:rPr sz="1100" b="0">
+                <a:solidFill>
+                  <a:srgbClr val="141414"/>
+                </a:solidFill>
+                <a:latin typeface="Arial"/>
+              </a:rPr>
+              <a:t>Daily tracker — the line's own MLT/HTT tabs, rebuilt from pega3</a:t>
+            </a:r>
+          </a:p>
+        </p:txBody>
+      </p:sp>
+      <p:sp>
+        <p:nvSpPr>
+          <p:cNvPr id="11" name="TextBox 10"/>
+          <p:cNvSpPr txBox="1"/>
+          <p:nvPr/>
+        </p:nvSpPr>
+        <p:spPr>
+          <a:xfrm>
+            <a:off x="6858000" y="2679192"/>
+            <a:ext cx="4846320" cy="237744"/>
+          </a:xfrm>
+          <a:prstGeom prst="rect">
+            <a:avLst/>
+          </a:prstGeom>
+          <a:noFill/>
+        </p:spPr>
+        <p:txBody>
+          <a:bodyPr wrap="square" lIns="0" rIns="0" tIns="0" bIns="0">
+            <a:spAutoFit/>
+          </a:bodyPr>
+          <a:lstStyle/>
+          <a:p>
+            <a:pPr algn="l">
+              <a:spcAft>
+                <a:spcPts val="0"/>
+              </a:spcAft>
+            </a:pPr>
+            <a:r>
+              <a:rPr sz="1050" b="0">
+                <a:solidFill>
+                  <a:srgbClr val="6B6B6B"/>
+                </a:solidFill>
+                <a:latin typeface="Courier New"/>
+              </a:rPr>
+              <a:t>32x-production.i.etched.com/dailyexcel.html</a:t>
+            </a:r>
+          </a:p>
+        </p:txBody>
+      </p:sp>
+      <p:sp>
+        <p:nvSpPr>
+          <p:cNvPr id="12" name="TextBox 11"/>
+          <p:cNvSpPr txBox="1"/>
+          <p:nvPr/>
+        </p:nvSpPr>
+        <p:spPr>
+          <a:xfrm>
+            <a:off x="731520" y="2953512"/>
+            <a:ext cx="6035040" cy="237744"/>
+          </a:xfrm>
+          <a:prstGeom prst="rect">
+            <a:avLst/>
+          </a:prstGeom>
+          <a:noFill/>
+        </p:spPr>
+        <p:txBody>
+          <a:bodyPr wrap="square" lIns="0" rIns="0" tIns="0" bIns="0">
+            <a:spAutoFit/>
+          </a:bodyPr>
+          <a:lstStyle/>
+          <a:p>
+            <a:pPr algn="l">
+              <a:spcAft>
+                <a:spcPts val="0"/>
+              </a:spcAft>
+            </a:pPr>
+            <a:r>
+              <a:rPr sz="1100" b="0">
+                <a:solidFill>
+                  <a:srgbClr val="141414"/>
+                </a:solidFill>
+                <a:latin typeface="Arial"/>
+              </a:rPr>
+              <a:t>L10 daily tracker — FAT, SFT, RIN, 2U from pega4</a:t>
+            </a:r>
+          </a:p>
+        </p:txBody>
+      </p:sp>
+      <p:sp>
+        <p:nvSpPr>
+          <p:cNvPr id="13" name="TextBox 12"/>
+          <p:cNvSpPr txBox="1"/>
+          <p:nvPr/>
+        </p:nvSpPr>
+        <p:spPr>
+          <a:xfrm>
+            <a:off x="6858000" y="2953512"/>
+            <a:ext cx="4846320" cy="237744"/>
+          </a:xfrm>
+          <a:prstGeom prst="rect">
+            <a:avLst/>
+          </a:prstGeom>
+          <a:noFill/>
+        </p:spPr>
+        <p:txBody>
+          <a:bodyPr wrap="square" lIns="0" rIns="0" tIns="0" bIns="0">
+            <a:spAutoFit/>
+          </a:bodyPr>
+          <a:lstStyle/>
+          <a:p>
+            <a:pPr algn="l">
+              <a:spcAft>
+                <a:spcPts val="0"/>
+              </a:spcAft>
+            </a:pPr>
+            <a:r>
+              <a:rPr sz="1050" b="0">
+                <a:solidFill>
+                  <a:srgbClr val="6B6B6B"/>
+                </a:solidFill>
+                <a:latin typeface="Courier New"/>
+              </a:rPr>
+              <a:t>32x-production.i.etched.com/l10.html</a:t>
+            </a:r>
+          </a:p>
+        </p:txBody>
+      </p:sp>
+      <p:sp>
+        <p:nvSpPr>
+          <p:cNvPr id="14" name="TextBox 13"/>
+          <p:cNvSpPr txBox="1"/>
+          <p:nvPr/>
+        </p:nvSpPr>
+        <p:spPr>
+          <a:xfrm>
+            <a:off x="731520" y="3227832"/>
+            <a:ext cx="6035040" cy="237744"/>
+          </a:xfrm>
+          <a:prstGeom prst="rect">
+            <a:avLst/>
+          </a:prstGeom>
+          <a:noFill/>
+        </p:spPr>
+        <p:txBody>
+          <a:bodyPr wrap="square" lIns="0" rIns="0" tIns="0" bIns="0">
+            <a:spAutoFit/>
+          </a:bodyPr>
+          <a:lstStyle/>
+          <a:p>
+            <a:pPr algn="l">
+              <a:spcAft>
+                <a:spcPts val="0"/>
+              </a:spcAft>
+            </a:pPr>
+            <a:r>
+              <a:rPr sz="1100" b="0">
+                <a:solidFill>
+                  <a:srgbClr val="141414"/>
+                </a:solidFill>
+                <a:latin typeface="Arial"/>
+              </a:rPr>
+              <a:t>Station yield, from the controllers</a:t>
+            </a:r>
+          </a:p>
+        </p:txBody>
+      </p:sp>
+      <p:sp>
+        <p:nvSpPr>
+          <p:cNvPr id="15" name="TextBox 14"/>
+          <p:cNvSpPr txBox="1"/>
+          <p:nvPr/>
+        </p:nvSpPr>
+        <p:spPr>
+          <a:xfrm>
+            <a:off x="6858000" y="3227832"/>
+            <a:ext cx="4846320" cy="237744"/>
+          </a:xfrm>
+          <a:prstGeom prst="rect">
+            <a:avLst/>
+          </a:prstGeom>
+          <a:noFill/>
+        </p:spPr>
+        <p:txBody>
+          <a:bodyPr wrap="square" lIns="0" rIns="0" tIns="0" bIns="0">
+            <a:spAutoFit/>
+          </a:bodyPr>
+          <a:lstStyle/>
+          <a:p>
+            <a:pPr algn="l">
+              <a:spcAft>
+                <a:spcPts val="0"/>
+              </a:spcAft>
+            </a:pPr>
+            <a:r>
+              <a:rPr sz="1050" b="0">
+                <a:solidFill>
+                  <a:srgbClr val="6B6B6B"/>
+                </a:solidFill>
+                <a:latin typeface="Courier New"/>
+              </a:rPr>
+              <a:t>32x-production.i.etched.com/direct.html</a:t>
+            </a:r>
+          </a:p>
+        </p:txBody>
+      </p:sp>
+      <p:sp>
+        <p:nvSpPr>
+          <p:cNvPr id="16" name="TextBox 15"/>
+          <p:cNvSpPr txBox="1"/>
+          <p:nvPr/>
+        </p:nvSpPr>
+        <p:spPr>
+          <a:xfrm>
+            <a:off x="731520" y="3502152"/>
+            <a:ext cx="6035040" cy="237744"/>
+          </a:xfrm>
+          <a:prstGeom prst="rect">
+            <a:avLst/>
+          </a:prstGeom>
+          <a:noFill/>
+        </p:spPr>
+        <p:txBody>
+          <a:bodyPr wrap="square" lIns="0" rIns="0" tIns="0" bIns="0">
+            <a:spAutoFit/>
+          </a:bodyPr>
+          <a:lstStyle/>
+          <a:p>
+            <a:pPr algn="l">
+              <a:spcAft>
+                <a:spcPts val="0"/>
+              </a:spcAft>
+            </a:pPr>
+            <a:r>
+              <a:rPr sz="1100" b="0">
+                <a:solidFill>
+                  <a:srgbClr val="141414"/>
+                </a:solidFill>
+                <a:latin typeface="Arial"/>
+              </a:rPr>
+              <a:t>Station yield, from OCP Logs — and the measured gap between them</a:t>
+            </a:r>
+          </a:p>
+        </p:txBody>
+      </p:sp>
+      <p:sp>
+        <p:nvSpPr>
+          <p:cNvPr id="17" name="TextBox 16"/>
+          <p:cNvSpPr txBox="1"/>
+          <p:nvPr/>
+        </p:nvSpPr>
+        <p:spPr>
+          <a:xfrm>
+            <a:off x="6858000" y="3502152"/>
+            <a:ext cx="4846320" cy="237744"/>
+          </a:xfrm>
+          <a:prstGeom prst="rect">
+            <a:avLst/>
+          </a:prstGeom>
+          <a:noFill/>
+        </p:spPr>
+        <p:txBody>
+          <a:bodyPr wrap="square" lIns="0" rIns="0" tIns="0" bIns="0">
+            <a:spAutoFit/>
+          </a:bodyPr>
+          <a:lstStyle/>
+          <a:p>
+            <a:pPr algn="l">
+              <a:spcAft>
+                <a:spcPts val="0"/>
+              </a:spcAft>
+            </a:pPr>
+            <a:r>
+              <a:rPr sz="1050" b="0">
+                <a:solidFill>
+                  <a:srgbClr val="6B6B6B"/>
+                </a:solidFill>
+                <a:latin typeface="Courier New"/>
+              </a:rPr>
+              <a:t>32x-production.i.etched.com/index.html</a:t>
+            </a:r>
+          </a:p>
+        </p:txBody>
+      </p:sp>
+      <p:sp>
+        <p:nvSpPr>
+          <p:cNvPr id="18" name="TextBox 17"/>
+          <p:cNvSpPr txBox="1"/>
+          <p:nvPr/>
+        </p:nvSpPr>
+        <p:spPr>
+          <a:xfrm>
+            <a:off x="731520" y="3776472"/>
+            <a:ext cx="6035040" cy="237744"/>
+          </a:xfrm>
+          <a:prstGeom prst="rect">
+            <a:avLst/>
+          </a:prstGeom>
+          <a:noFill/>
+        </p:spPr>
+        <p:txBody>
+          <a:bodyPr wrap="square" lIns="0" rIns="0" tIns="0" bIns="0">
+            <a:spAutoFit/>
+          </a:bodyPr>
+          <a:lstStyle/>
+          <a:p>
+            <a:pPr algn="l">
+              <a:spcAft>
+                <a:spcPts val="0"/>
+              </a:spcAft>
+            </a:pPr>
+            <a:r>
+              <a:rPr sz="1100" b="0">
+                <a:solidFill>
+                  <a:srgbClr val="141414"/>
+                </a:solidFill>
+                <a:latin typeface="Arial"/>
+              </a:rPr>
+              <a:t>Run drill-down, any serial or test name</a:t>
+            </a:r>
+          </a:p>
+        </p:txBody>
+      </p:sp>
+      <p:sp>
+        <p:nvSpPr>
+          <p:cNvPr id="19" name="TextBox 18"/>
+          <p:cNvSpPr txBox="1"/>
+          <p:nvPr/>
+        </p:nvSpPr>
+        <p:spPr>
+          <a:xfrm>
+            <a:off x="6858000" y="3776472"/>
+            <a:ext cx="4846320" cy="237744"/>
+          </a:xfrm>
+          <a:prstGeom prst="rect">
+            <a:avLst/>
+          </a:prstGeom>
+          <a:noFill/>
+        </p:spPr>
+        <p:txBody>
+          <a:bodyPr wrap="square" lIns="0" rIns="0" tIns="0" bIns="0">
+            <a:spAutoFit/>
+          </a:bodyPr>
+          <a:lstStyle/>
+          <a:p>
+            <a:pPr algn="l">
+              <a:spcAft>
+                <a:spcPts val="0"/>
+              </a:spcAft>
+            </a:pPr>
+            <a:r>
+              <a:rPr sz="1050" b="0">
+                <a:solidFill>
+                  <a:srgbClr val="6B6B6B"/>
+                </a:solidFill>
+                <a:latin typeface="Courier New"/>
+              </a:rPr>
+              <a:t>32x-production.i.etched.com/runs.html</a:t>
+            </a:r>
+          </a:p>
+        </p:txBody>
+      </p:sp>
+      <p:sp>
+        <p:nvSpPr>
+          <p:cNvPr id="20" name="TextBox 19"/>
+          <p:cNvSpPr txBox="1"/>
+          <p:nvPr/>
+        </p:nvSpPr>
+        <p:spPr>
+          <a:xfrm>
+            <a:off x="731520" y="4050792"/>
+            <a:ext cx="6035040" cy="237744"/>
+          </a:xfrm>
+          <a:prstGeom prst="rect">
+            <a:avLst/>
+          </a:prstGeom>
+          <a:noFill/>
+        </p:spPr>
+        <p:txBody>
+          <a:bodyPr wrap="square" lIns="0" rIns="0" tIns="0" bIns="0">
+            <a:spAutoFit/>
+          </a:bodyPr>
+          <a:lstStyle/>
+          <a:p>
+            <a:pPr algn="l">
+              <a:spcAft>
+                <a:spcPts val="0"/>
+              </a:spcAft>
+            </a:pPr>
+            <a:r>
+              <a:rPr sz="1100" b="0">
+                <a:solidFill>
+                  <a:srgbClr val="141414"/>
+                </a:solidFill>
+                <a:latin typeface="Arial"/>
+              </a:rPr>
+              <a:t>Production test flow, with coverage</a:t>
+            </a:r>
+          </a:p>
+        </p:txBody>
+      </p:sp>
+      <p:sp>
+        <p:nvSpPr>
+          <p:cNvPr id="21" name="TextBox 20"/>
+          <p:cNvSpPr txBox="1"/>
+          <p:nvPr/>
+        </p:nvSpPr>
+        <p:spPr>
+          <a:xfrm>
+            <a:off x="6858000" y="4050792"/>
+            <a:ext cx="4846320" cy="237744"/>
+          </a:xfrm>
+          <a:prstGeom prst="rect">
+            <a:avLst/>
+          </a:prstGeom>
+          <a:noFill/>
+        </p:spPr>
+        <p:txBody>
+          <a:bodyPr wrap="square" lIns="0" rIns="0" tIns="0" bIns="0">
+            <a:spAutoFit/>
+          </a:bodyPr>
+          <a:lstStyle/>
+          <a:p>
+            <a:pPr algn="l">
+              <a:spcAft>
+                <a:spcPts val="0"/>
+              </a:spcAft>
+            </a:pPr>
+            <a:r>
+              <a:rPr sz="1050" b="0">
+                <a:solidFill>
+                  <a:srgbClr val="6B6B6B"/>
+                </a:solidFill>
+                <a:latin typeface="Courier New"/>
+              </a:rPr>
+              <a:t>32x-production.i.etched.com/flow.html</a:t>
+            </a:r>
+          </a:p>
+        </p:txBody>
+      </p:sp>
+      <p:sp>
+        <p:nvSpPr>
+          <p:cNvPr id="22" name="TextBox 21"/>
+          <p:cNvSpPr txBox="1"/>
+          <p:nvPr/>
+        </p:nvSpPr>
+        <p:spPr>
+          <a:xfrm>
+            <a:off x="566928" y="4453128"/>
+            <a:ext cx="5486400" cy="237744"/>
+          </a:xfrm>
+          <a:prstGeom prst="rect">
+            <a:avLst/>
+          </a:prstGeom>
+          <a:noFill/>
+        </p:spPr>
+        <p:txBody>
+          <a:bodyPr wrap="square" lIns="0" rIns="0" tIns="0" bIns="0">
+            <a:spAutoFit/>
+          </a:bodyPr>
+          <a:lstStyle/>
+          <a:p>
+            <a:pPr algn="l">
+              <a:spcAft>
+                <a:spcPts val="0"/>
+              </a:spcAft>
+            </a:pPr>
+            <a:r>
+              <a:rPr sz="1200" b="1">
+                <a:solidFill>
+                  <a:srgbClr val="1C62B8"/>
+                </a:solidFill>
+                <a:latin typeface="Arial"/>
+              </a:rPr>
+              <a:t>Upstream of the dashboard</a:t>
+            </a:r>
+          </a:p>
+        </p:txBody>
+      </p:sp>
+      <p:sp>
+        <p:nvSpPr>
+          <p:cNvPr id="23" name="TextBox 22"/>
+          <p:cNvSpPr txBox="1"/>
+          <p:nvPr/>
+        </p:nvSpPr>
+        <p:spPr>
+          <a:xfrm>
+            <a:off x="731520" y="4745736"/>
+            <a:ext cx="6035040" cy="237744"/>
+          </a:xfrm>
+          <a:prstGeom prst="rect">
+            <a:avLst/>
+          </a:prstGeom>
+          <a:noFill/>
+        </p:spPr>
+        <p:txBody>
+          <a:bodyPr wrap="square" lIns="0" rIns="0" tIns="0" bIns="0">
+            <a:spAutoFit/>
+          </a:bodyPr>
+          <a:lstStyle/>
+          <a:p>
+            <a:pPr algn="l">
+              <a:spcAft>
+                <a:spcPts val="0"/>
+              </a:spcAft>
+            </a:pPr>
+            <a:r>
+              <a:rPr sz="1100" b="0">
+                <a:solidFill>
+                  <a:srgbClr val="141414"/>
+                </a:solidFill>
+                <a:latin typeface="Arial"/>
+              </a:rPr>
+              <a:t>The controllers themselves — ESVM login admin / admin</a:t>
+            </a:r>
+          </a:p>
+        </p:txBody>
+      </p:sp>
+      <p:sp>
+        <p:nvSpPr>
+          <p:cNvPr id="24" name="TextBox 23"/>
+          <p:cNvSpPr txBox="1"/>
+          <p:nvPr/>
+        </p:nvSpPr>
+        <p:spPr>
+          <a:xfrm>
+            <a:off x="6858000" y="4745736"/>
+            <a:ext cx="4846320" cy="237744"/>
+          </a:xfrm>
+          <a:prstGeom prst="rect">
+            <a:avLst/>
+          </a:prstGeom>
+          <a:noFill/>
+        </p:spPr>
+        <p:txBody>
+          <a:bodyPr wrap="square" lIns="0" rIns="0" tIns="0" bIns="0">
+            <a:spAutoFit/>
+          </a:bodyPr>
+          <a:lstStyle/>
+          <a:p>
+            <a:pPr algn="l">
+              <a:spcAft>
+                <a:spcPts val="0"/>
+              </a:spcAft>
+            </a:pPr>
+            <a:r>
+              <a:rPr sz="1050" b="0">
+                <a:solidFill>
+                  <a:srgbClr val="6B6B6B"/>
+                </a:solidFill>
+                <a:latin typeface="Courier New"/>
+              </a:rPr>
+              <a:t>pega2:3000 · pega3:3000 · pega4:3000 · pega5:3000</a:t>
+            </a:r>
+          </a:p>
+        </p:txBody>
+      </p:sp>
+      <p:sp>
+        <p:nvSpPr>
+          <p:cNvPr id="25" name="TextBox 24"/>
+          <p:cNvSpPr txBox="1"/>
+          <p:nvPr/>
+        </p:nvSpPr>
+        <p:spPr>
+          <a:xfrm>
+            <a:off x="731520" y="5020056"/>
+            <a:ext cx="6035040" cy="237744"/>
+          </a:xfrm>
+          <a:prstGeom prst="rect">
+            <a:avLst/>
+          </a:prstGeom>
+          <a:noFill/>
+        </p:spPr>
+        <p:txBody>
+          <a:bodyPr wrap="square" lIns="0" rIns="0" tIns="0" bIns="0">
+            <a:spAutoFit/>
+          </a:bodyPr>
+          <a:lstStyle/>
+          <a:p>
+            <a:pPr algn="l">
+              <a:spcAft>
+                <a:spcPts val="0"/>
+              </a:spcAft>
+            </a:pPr>
+            <a:r>
+              <a:rPr sz="1100" b="0">
+                <a:solidFill>
+                  <a:srgbClr val="141414"/>
+                </a:solidFill>
+                <a:latin typeface="Arial"/>
+              </a:rPr>
+              <a:t>OCP Logs / EOS, the other side of the discrepancy</a:t>
+            </a:r>
+          </a:p>
+        </p:txBody>
+      </p:sp>
+      <p:sp>
+        <p:nvSpPr>
+          <p:cNvPr id="26" name="TextBox 25"/>
+          <p:cNvSpPr txBox="1"/>
+          <p:nvPr/>
+        </p:nvSpPr>
+        <p:spPr>
+          <a:xfrm>
+            <a:off x="6858000" y="5020056"/>
+            <a:ext cx="4846320" cy="237744"/>
+          </a:xfrm>
+          <a:prstGeom prst="rect">
+            <a:avLst/>
+          </a:prstGeom>
+          <a:noFill/>
+        </p:spPr>
+        <p:txBody>
+          <a:bodyPr wrap="square" lIns="0" rIns="0" tIns="0" bIns="0">
+            <a:spAutoFit/>
+          </a:bodyPr>
+          <a:lstStyle/>
+          <a:p>
+            <a:pPr algn="l">
+              <a:spcAft>
+                <a:spcPts val="0"/>
+              </a:spcAft>
+            </a:pPr>
+            <a:r>
+              <a:rPr sz="1050" b="0">
+                <a:solidFill>
+                  <a:srgbClr val="6B6B6B"/>
+                </a:solidFill>
+                <a:latin typeface="Courier New"/>
+              </a:rPr>
+              <a:t>ocplogs.core.etched.com</a:t>
+            </a:r>
+          </a:p>
+        </p:txBody>
+      </p:sp>
+      <p:sp>
+        <p:nvSpPr>
+          <p:cNvPr id="27" name="TextBox 26"/>
+          <p:cNvSpPr txBox="1"/>
+          <p:nvPr/>
+        </p:nvSpPr>
+        <p:spPr>
+          <a:xfrm>
+            <a:off x="731520" y="5294376"/>
+            <a:ext cx="6035040" cy="237744"/>
+          </a:xfrm>
+          <a:prstGeom prst="rect">
+            <a:avLst/>
+          </a:prstGeom>
+          <a:noFill/>
+        </p:spPr>
+        <p:txBody>
+          <a:bodyPr wrap="square" lIns="0" rIns="0" tIns="0" bIns="0">
+            <a:spAutoFit/>
+          </a:bodyPr>
+          <a:lstStyle/>
+          <a:p>
+            <a:pPr algn="l">
+              <a:spcAft>
+                <a:spcPts val="0"/>
+              </a:spcAft>
+            </a:pPr>
+            <a:r>
+              <a:rPr sz="1100" b="0">
+                <a:solidFill>
+                  <a:srgbClr val="141414"/>
+                </a:solidFill>
+                <a:latin typeface="Arial"/>
+              </a:rPr>
+              <a:t>WST and FT — Sigurd's STDF and SPLM, asked for weekly in #production-test-eng</a:t>
+            </a:r>
+          </a:p>
+        </p:txBody>
+      </p:sp>
+      <p:sp>
+        <p:nvSpPr>
+          <p:cNvPr id="28" name="TextBox 27"/>
+          <p:cNvSpPr txBox="1"/>
+          <p:nvPr/>
+        </p:nvSpPr>
+        <p:spPr>
+          <a:xfrm>
+            <a:off x="6858000" y="5294376"/>
+            <a:ext cx="4846320" cy="237744"/>
+          </a:xfrm>
+          <a:prstGeom prst="rect">
+            <a:avLst/>
+          </a:prstGeom>
+          <a:noFill/>
+        </p:spPr>
+        <p:txBody>
+          <a:bodyPr wrap="square" lIns="0" rIns="0" tIns="0" bIns="0">
+            <a:spAutoFit/>
+          </a:bodyPr>
+          <a:lstStyle/>
+          <a:p>
+            <a:pPr algn="l">
+              <a:spcAft>
+                <a:spcPts val="0"/>
+              </a:spcAft>
+            </a:pPr>
+            <a:r>
+              <a:rPr sz="1050" b="0">
+                <a:solidFill>
+                  <a:srgbClr val="6B6B6B"/>
+                </a:solidFill>
+                <a:latin typeface="Courier New"/>
+              </a:rPr>
+              <a:t>strata6.sv9.i.etched.com:8235 · splm.i.etched.com</a:t>
+            </a:r>
+          </a:p>
+        </p:txBody>
+      </p:sp>
+      <p:sp>
+        <p:nvSpPr>
+          <p:cNvPr id="29" name="TextBox 28"/>
+          <p:cNvSpPr txBox="1"/>
+          <p:nvPr/>
+        </p:nvSpPr>
+        <p:spPr>
+          <a:xfrm>
+            <a:off x="731520" y="5568696"/>
+            <a:ext cx="6035040" cy="237744"/>
+          </a:xfrm>
+          <a:prstGeom prst="rect">
+            <a:avLst/>
+          </a:prstGeom>
+          <a:noFill/>
+        </p:spPr>
+        <p:txBody>
+          <a:bodyPr wrap="square" lIns="0" rIns="0" tIns="0" bIns="0">
+            <a:spAutoFit/>
+          </a:bodyPr>
+          <a:lstStyle/>
+          <a:p>
+            <a:pPr algn="l">
+              <a:spcAft>
+                <a:spcPts val="0"/>
+              </a:spcAft>
+            </a:pPr>
+            <a:r>
+              <a:rPr sz="1100" b="0">
+                <a:solidFill>
+                  <a:srgbClr val="141414"/>
+                </a:solidFill>
+                <a:latin typeface="Arial"/>
+              </a:rPr>
+              <a:t>This deck, the pipeline that built it, and every archived week</a:t>
+            </a:r>
+          </a:p>
+        </p:txBody>
+      </p:sp>
+      <p:sp>
+        <p:nvSpPr>
+          <p:cNvPr id="30" name="TextBox 29"/>
+          <p:cNvSpPr txBox="1"/>
+          <p:nvPr/>
+        </p:nvSpPr>
+        <p:spPr>
+          <a:xfrm>
+            <a:off x="6858000" y="5568696"/>
+            <a:ext cx="4846320" cy="237744"/>
+          </a:xfrm>
+          <a:prstGeom prst="rect">
+            <a:avLst/>
+          </a:prstGeom>
+          <a:noFill/>
+        </p:spPr>
+        <p:txBody>
+          <a:bodyPr wrap="square" lIns="0" rIns="0" tIns="0" bIns="0">
+            <a:spAutoFit/>
+          </a:bodyPr>
+          <a:lstStyle/>
+          <a:p>
+            <a:pPr algn="l">
+              <a:spcAft>
+                <a:spcPts val="0"/>
+              </a:spcAft>
+            </a:pPr>
+            <a:r>
+              <a:rPr sz="1050" b="0">
+                <a:solidFill>
+                  <a:srgbClr val="6B6B6B"/>
+                </a:solidFill>
+                <a:latin typeface="Courier New"/>
+              </a:rPr>
+              <a:t>github.com/etched-ai/factory_data_analysis · weekly/2026-W33/</a:t>
+            </a:r>
+          </a:p>
+        </p:txBody>
+      </p:sp>
+      <p:sp>
+        <p:nvSpPr>
+          <p:cNvPr id="31" name="TextBox 30"/>
+          <p:cNvSpPr txBox="1"/>
+          <p:nvPr/>
+        </p:nvSpPr>
+        <p:spPr>
+          <a:xfrm>
+            <a:off x="566928" y="6327648"/>
+            <a:ext cx="11057839" cy="365760"/>
+          </a:xfrm>
+          <a:prstGeom prst="rect">
+            <a:avLst/>
+          </a:prstGeom>
+          <a:noFill/>
+        </p:spPr>
+        <p:txBody>
+          <a:bodyPr wrap="square" lIns="0" rIns="0" tIns="0" bIns="0">
+            <a:spAutoFit/>
+          </a:bodyPr>
+          <a:lstStyle/>
+          <a:p>
+            <a:pPr algn="l">
+              <a:spcAft>
+                <a:spcPts val="0"/>
+              </a:spcAft>
+            </a:pPr>
+            <a:r>
+              <a:rPr sz="950" b="0">
+                <a:solidFill>
+                  <a:srgbClr val="6B6B6B"/>
+                </a:solidFill>
+                <a:latin typeface="Arial"/>
+              </a:rPr>
+              <a:t>All addresses are on the factory network. The dashboard rebuilds hourly; the archived copy of 2026-W33 under weekly/ does not change.</a:t>
             </a:r>
           </a:p>
         </p:txBody>

--- a/weekly/2026-W33/weekly-2026-W33.pptx
+++ b/weekly/2026-W33/weekly-2026-W33.pptx
@@ -9,6 +9,7 @@
     <p:sldId id="257" r:id="rId8"/>
     <p:sldId id="258" r:id="rId9"/>
     <p:sldId id="259" r:id="rId10"/>
+    <p:sldId id="260" r:id="rId11"/>
   </p:sldIdLst>
   <p:sldSz cx="12191695" cy="6858000" type="screen4x3"/>
   <p:notesSz cx="6858000" cy="9144000"/>
@@ -3833,7 +3834,7 @@
         </p:nvSpPr>
         <p:spPr>
           <a:xfrm>
-            <a:off x="658368" y="1188720"/>
+            <a:off x="658368" y="1097280"/>
             <a:ext cx="2743200" cy="237744"/>
           </a:xfrm>
           <a:prstGeom prst="rect">
@@ -4323,7 +4324,7 @@
         </p:nvSpPr>
         <p:spPr>
           <a:xfrm>
-            <a:off x="2377440" y="1188720"/>
+            <a:off x="2377440" y="1097280"/>
             <a:ext cx="2743200" cy="237744"/>
           </a:xfrm>
           <a:prstGeom prst="rect">
@@ -4914,7 +4915,7 @@
         </p:nvSpPr>
         <p:spPr>
           <a:xfrm>
-            <a:off x="5358384" y="1188720"/>
+            <a:off x="5358384" y="1097280"/>
             <a:ext cx="2743200" cy="237744"/>
           </a:xfrm>
           <a:prstGeom prst="rect">
@@ -5253,7 +5254,7 @@
         </p:nvSpPr>
         <p:spPr>
           <a:xfrm>
-            <a:off x="7242048" y="1188720"/>
+            <a:off x="7242048" y="1097280"/>
             <a:ext cx="2743200" cy="237744"/>
           </a:xfrm>
           <a:prstGeom prst="rect">
@@ -5773,7 +5774,7 @@
         </p:nvSpPr>
         <p:spPr>
           <a:xfrm>
-            <a:off x="10369296" y="1188720"/>
+            <a:off x="10369296" y="1097280"/>
             <a:ext cx="1655064" cy="237744"/>
           </a:xfrm>
           <a:prstGeom prst="rect">
@@ -6388,8 +6389,8 @@
         </p:nvCxnSpPr>
         <p:spPr>
           <a:xfrm>
-            <a:off x="3026664" y="2121408"/>
-            <a:ext cx="0" cy="1883664"/>
+            <a:off x="2752344" y="2121408"/>
+            <a:ext cx="274320" cy="1883664"/>
           </a:xfrm>
           <a:prstGeom prst="line">
             <a:avLst/>
@@ -6425,7 +6426,7 @@
         <p:spPr>
           <a:xfrm>
             <a:off x="3072384" y="3822192"/>
-            <a:ext cx="822960" cy="182880"/>
+            <a:ext cx="1005840" cy="182880"/>
           </a:xfrm>
           <a:prstGeom prst="rect">
             <a:avLst/>
@@ -6463,8 +6464,8 @@
         </p:nvCxnSpPr>
         <p:spPr>
           <a:xfrm>
-            <a:off x="3675887" y="4325112"/>
-            <a:ext cx="813817" cy="0"/>
+            <a:off x="3337560" y="2121408"/>
+            <a:ext cx="0" cy="1362456"/>
           </a:xfrm>
           <a:prstGeom prst="line">
             <a:avLst/>
@@ -6497,9 +6498,9 @@
           <p:nvPr/>
         </p:nvCxnSpPr>
         <p:spPr>
-          <a:xfrm flipV="1">
-            <a:off x="4489704" y="3803904"/>
-            <a:ext cx="0" cy="521208"/>
+          <a:xfrm>
+            <a:off x="3337560" y="3483864"/>
+            <a:ext cx="502920" cy="0"/>
           </a:xfrm>
           <a:prstGeom prst="line">
             <a:avLst/>
@@ -6526,16 +6527,55 @@
           </a:fontRef>
         </p:style>
       </p:cxnSp>
+      <p:sp>
+        <p:nvSpPr>
+          <p:cNvPr id="62" name="TextBox 61"/>
+          <p:cNvSpPr txBox="1"/>
+          <p:nvPr/>
+        </p:nvSpPr>
+        <p:spPr>
+          <a:xfrm>
+            <a:off x="3383279" y="3300984"/>
+            <a:ext cx="1005840" cy="182880"/>
+          </a:xfrm>
+          <a:prstGeom prst="rect">
+            <a:avLst/>
+          </a:prstGeom>
+          <a:noFill/>
+        </p:spPr>
+        <p:txBody>
+          <a:bodyPr wrap="square" lIns="0" rIns="0" tIns="0" bIns="0">
+            <a:spAutoFit/>
+          </a:bodyPr>
+          <a:lstStyle/>
+          <a:p>
+            <a:pPr algn="l">
+              <a:spcAft>
+                <a:spcPts val="0"/>
+              </a:spcAft>
+            </a:pPr>
+            <a:r>
+              <a:rPr sz="850" b="0">
+                <a:solidFill>
+                  <a:srgbClr val="6B6B6B"/>
+                </a:solidFill>
+                <a:latin typeface="Arial"/>
+              </a:rPr>
+              <a:t>PV1</a:t>
+            </a:r>
+          </a:p>
+        </p:txBody>
+      </p:sp>
       <p:cxnSp>
         <p:nvCxnSpPr>
-          <p:cNvPr id="62" name="Connector 61"/>
+          <p:cNvPr id="63" name="Connector 62"/>
           <p:cNvCxnSpPr/>
           <p:nvPr/>
         </p:nvCxnSpPr>
         <p:spPr>
           <a:xfrm flipV="1">
-            <a:off x="4489704" y="2962656"/>
-            <a:ext cx="0" cy="201168"/>
+            <a:off x="3026664" y="1389888"/>
+            <a:ext cx="0" cy="91440"/>
           </a:xfrm>
           <a:prstGeom prst="line">
             <a:avLst/>
@@ -6544,43 +6584,6 @@
             <a:solidFill>
               <a:srgbClr val="8A8882"/>
             </a:solidFill>
-            <a:tailEnd type="triangle" w="sm" len="sm"/>
-          </a:ln>
-        </p:spPr>
-        <p:style>
-          <a:lnRef idx="2">
-            <a:schemeClr val="accent1"/>
-          </a:lnRef>
-          <a:fillRef idx="0">
-            <a:schemeClr val="accent1"/>
-          </a:fillRef>
-          <a:effectRef idx="1">
-            <a:schemeClr val="accent1"/>
-          </a:effectRef>
-          <a:fontRef idx="minor">
-            <a:schemeClr val="tx1"/>
-          </a:fontRef>
-        </p:style>
-      </p:cxnSp>
-      <p:cxnSp>
-        <p:nvCxnSpPr>
-          <p:cNvPr id="63" name="Connector 62"/>
-          <p:cNvCxnSpPr/>
-          <p:nvPr/>
-        </p:nvCxnSpPr>
-        <p:spPr>
-          <a:xfrm flipV="1">
-            <a:off x="4489704" y="2121408"/>
-            <a:ext cx="0" cy="201168"/>
-          </a:xfrm>
-          <a:prstGeom prst="line">
-            <a:avLst/>
-          </a:prstGeom>
-          <a:ln w="13970">
-            <a:solidFill>
-              <a:srgbClr val="8A8882"/>
-            </a:solidFill>
-            <a:tailEnd type="triangle" w="sm" len="sm"/>
           </a:ln>
         </p:spPr>
         <p:style>
@@ -6606,8 +6609,8 @@
         </p:nvCxnSpPr>
         <p:spPr>
           <a:xfrm>
-            <a:off x="5138928" y="1801368"/>
-            <a:ext cx="219456" cy="0"/>
+            <a:off x="3026664" y="1389888"/>
+            <a:ext cx="2871216" cy="0"/>
           </a:xfrm>
           <a:prstGeom prst="line">
             <a:avLst/>
@@ -6616,7 +6619,6 @@
             <a:solidFill>
               <a:srgbClr val="8A8882"/>
             </a:solidFill>
-            <a:tailEnd type="triangle" w="sm" len="sm"/>
           </a:ln>
         </p:spPr>
         <p:style>
@@ -6642,8 +6644,8 @@
         </p:nvCxnSpPr>
         <p:spPr>
           <a:xfrm>
-            <a:off x="6437376" y="1801368"/>
-            <a:ext cx="1499616" cy="0"/>
+            <a:off x="5897880" y="1389888"/>
+            <a:ext cx="0" cy="91440"/>
           </a:xfrm>
           <a:prstGeom prst="line">
             <a:avLst/>
@@ -6652,6 +6654,7 @@
             <a:solidFill>
               <a:srgbClr val="8A8882"/>
             </a:solidFill>
+            <a:tailEnd type="triangle" w="sm" len="sm"/>
           </a:ln>
         </p:spPr>
         <p:style>
@@ -6669,42 +6672,45 @@
           </a:fontRef>
         </p:style>
       </p:cxnSp>
-      <p:cxnSp>
-        <p:nvCxnSpPr>
-          <p:cNvPr id="66" name="Connector 65"/>
-          <p:cNvCxnSpPr/>
-          <p:nvPr/>
-        </p:nvCxnSpPr>
-        <p:spPr>
-          <a:xfrm>
-            <a:off x="7936992" y="1801368"/>
-            <a:ext cx="0" cy="521208"/>
-          </a:xfrm>
-          <a:prstGeom prst="line">
-            <a:avLst/>
-          </a:prstGeom>
-          <a:ln w="13970">
-            <a:solidFill>
-              <a:srgbClr val="8A8882"/>
-            </a:solidFill>
-            <a:tailEnd type="triangle" w="sm" len="sm"/>
-          </a:ln>
-        </p:spPr>
-        <p:style>
-          <a:lnRef idx="2">
-            <a:schemeClr val="accent1"/>
-          </a:lnRef>
-          <a:fillRef idx="0">
-            <a:schemeClr val="accent1"/>
-          </a:fillRef>
-          <a:effectRef idx="1">
-            <a:schemeClr val="accent1"/>
-          </a:effectRef>
-          <a:fontRef idx="minor">
-            <a:schemeClr val="tx1"/>
-          </a:fontRef>
-        </p:style>
-      </p:cxnSp>
+      <p:sp>
+        <p:nvSpPr>
+          <p:cNvPr id="66" name="TextBox 65"/>
+          <p:cNvSpPr txBox="1"/>
+          <p:nvPr/>
+        </p:nvSpPr>
+        <p:spPr>
+          <a:xfrm>
+            <a:off x="4142232" y="1216152"/>
+            <a:ext cx="1005840" cy="182880"/>
+          </a:xfrm>
+          <a:prstGeom prst="rect">
+            <a:avLst/>
+          </a:prstGeom>
+          <a:noFill/>
+        </p:spPr>
+        <p:txBody>
+          <a:bodyPr wrap="square" lIns="0" rIns="0" tIns="0" bIns="0">
+            <a:spAutoFit/>
+          </a:bodyPr>
+          <a:lstStyle/>
+          <a:p>
+            <a:pPr algn="l">
+              <a:spcAft>
+                <a:spcPts val="0"/>
+              </a:spcAft>
+            </a:pPr>
+            <a:r>
+              <a:rPr sz="850" b="0">
+                <a:solidFill>
+                  <a:srgbClr val="6B6B6B"/>
+                </a:solidFill>
+                <a:latin typeface="Arial"/>
+              </a:rPr>
+              <a:t>HPB &amp; PDB</a:t>
+            </a:r>
+          </a:p>
+        </p:txBody>
+      </p:sp>
       <p:cxnSp>
         <p:nvCxnSpPr>
           <p:cNvPr id="67" name="Connector 66"/>
@@ -6713,8 +6719,8 @@
         </p:nvCxnSpPr>
         <p:spPr>
           <a:xfrm>
-            <a:off x="5897880" y="2121408"/>
-            <a:ext cx="0" cy="2203704"/>
+            <a:off x="3675887" y="4325112"/>
+            <a:ext cx="2221993" cy="0"/>
           </a:xfrm>
           <a:prstGeom prst="line">
             <a:avLst/>
@@ -6747,9 +6753,9 @@
           <p:nvPr/>
         </p:nvCxnSpPr>
         <p:spPr>
-          <a:xfrm>
-            <a:off x="5897880" y="4325112"/>
-            <a:ext cx="1344168" cy="0"/>
+          <a:xfrm flipV="1">
+            <a:off x="5897880" y="2121408"/>
+            <a:ext cx="0" cy="2203704"/>
           </a:xfrm>
           <a:prstGeom prst="line">
             <a:avLst/>
@@ -6784,7 +6790,7 @@
         </p:nvCxnSpPr>
         <p:spPr>
           <a:xfrm flipV="1">
-            <a:off x="7936992" y="3803904"/>
+            <a:off x="4489704" y="2962656"/>
             <a:ext cx="0" cy="201168"/>
           </a:xfrm>
           <a:prstGeom prst="line">
@@ -6820,7 +6826,7 @@
         </p:nvCxnSpPr>
         <p:spPr>
           <a:xfrm flipV="1">
-            <a:off x="7936992" y="2962656"/>
+            <a:off x="4489704" y="2121408"/>
             <a:ext cx="0" cy="201168"/>
           </a:xfrm>
           <a:prstGeom prst="line">
@@ -6856,8 +6862,8 @@
         </p:nvCxnSpPr>
         <p:spPr>
           <a:xfrm>
-            <a:off x="8631936" y="2642616"/>
-            <a:ext cx="109728" cy="0"/>
+            <a:off x="5138928" y="1801368"/>
+            <a:ext cx="219456" cy="0"/>
           </a:xfrm>
           <a:prstGeom prst="line">
             <a:avLst/>
@@ -6892,8 +6898,8 @@
         </p:nvCxnSpPr>
         <p:spPr>
           <a:xfrm>
-            <a:off x="10040112" y="2642616"/>
-            <a:ext cx="329184" cy="0"/>
+            <a:off x="6437376" y="1801368"/>
+            <a:ext cx="1499616" cy="0"/>
           </a:xfrm>
           <a:prstGeom prst="line">
             <a:avLst/>
@@ -6902,7 +6908,6 @@
             <a:solidFill>
               <a:srgbClr val="8A8882"/>
             </a:solidFill>
-            <a:tailEnd type="triangle" w="sm" len="sm"/>
           </a:ln>
         </p:spPr>
         <p:style>
@@ -6928,8 +6933,8 @@
         </p:nvCxnSpPr>
         <p:spPr>
           <a:xfrm>
-            <a:off x="11064240" y="2962656"/>
-            <a:ext cx="0" cy="201168"/>
+            <a:off x="7936992" y="1801368"/>
+            <a:ext cx="0" cy="521208"/>
           </a:xfrm>
           <a:prstGeom prst="line">
             <a:avLst/>
@@ -6964,8 +6969,8 @@
         </p:nvCxnSpPr>
         <p:spPr>
           <a:xfrm>
-            <a:off x="11064240" y="3803904"/>
-            <a:ext cx="0" cy="201168"/>
+            <a:off x="5897880" y="2121408"/>
+            <a:ext cx="0" cy="2203704"/>
           </a:xfrm>
           <a:prstGeom prst="line">
             <a:avLst/>
@@ -6974,7 +6979,6 @@
             <a:solidFill>
               <a:srgbClr val="8A8882"/>
             </a:solidFill>
-            <a:tailEnd type="triangle" w="sm" len="sm"/>
           </a:ln>
         </p:spPr>
         <p:style>
@@ -7000,8 +7004,8 @@
         </p:nvCxnSpPr>
         <p:spPr>
           <a:xfrm>
-            <a:off x="11064240" y="4645152"/>
-            <a:ext cx="0" cy="201168"/>
+            <a:off x="5897880" y="4325112"/>
+            <a:ext cx="1344168" cy="0"/>
           </a:xfrm>
           <a:prstGeom prst="line">
             <a:avLst/>
@@ -7028,9 +7032,261 @@
           </a:fontRef>
         </p:style>
       </p:cxnSp>
-      <p:sp>
-        <p:nvSpPr>
-          <p:cNvPr id="76" name="TextBox 75"/>
+      <p:cxnSp>
+        <p:nvCxnSpPr>
+          <p:cNvPr id="76" name="Connector 75"/>
+          <p:cNvCxnSpPr/>
+          <p:nvPr/>
+        </p:nvCxnSpPr>
+        <p:spPr>
+          <a:xfrm flipV="1">
+            <a:off x="7936992" y="3803904"/>
+            <a:ext cx="0" cy="201168"/>
+          </a:xfrm>
+          <a:prstGeom prst="line">
+            <a:avLst/>
+          </a:prstGeom>
+          <a:ln w="13970">
+            <a:solidFill>
+              <a:srgbClr val="8A8882"/>
+            </a:solidFill>
+            <a:tailEnd type="triangle" w="sm" len="sm"/>
+          </a:ln>
+        </p:spPr>
+        <p:style>
+          <a:lnRef idx="2">
+            <a:schemeClr val="accent1"/>
+          </a:lnRef>
+          <a:fillRef idx="0">
+            <a:schemeClr val="accent1"/>
+          </a:fillRef>
+          <a:effectRef idx="1">
+            <a:schemeClr val="accent1"/>
+          </a:effectRef>
+          <a:fontRef idx="minor">
+            <a:schemeClr val="tx1"/>
+          </a:fontRef>
+        </p:style>
+      </p:cxnSp>
+      <p:cxnSp>
+        <p:nvCxnSpPr>
+          <p:cNvPr id="77" name="Connector 76"/>
+          <p:cNvCxnSpPr/>
+          <p:nvPr/>
+        </p:nvCxnSpPr>
+        <p:spPr>
+          <a:xfrm flipV="1">
+            <a:off x="7936992" y="2962656"/>
+            <a:ext cx="0" cy="201168"/>
+          </a:xfrm>
+          <a:prstGeom prst="line">
+            <a:avLst/>
+          </a:prstGeom>
+          <a:ln w="13970">
+            <a:solidFill>
+              <a:srgbClr val="8A8882"/>
+            </a:solidFill>
+            <a:tailEnd type="triangle" w="sm" len="sm"/>
+          </a:ln>
+        </p:spPr>
+        <p:style>
+          <a:lnRef idx="2">
+            <a:schemeClr val="accent1"/>
+          </a:lnRef>
+          <a:fillRef idx="0">
+            <a:schemeClr val="accent1"/>
+          </a:fillRef>
+          <a:effectRef idx="1">
+            <a:schemeClr val="accent1"/>
+          </a:effectRef>
+          <a:fontRef idx="minor">
+            <a:schemeClr val="tx1"/>
+          </a:fontRef>
+        </p:style>
+      </p:cxnSp>
+      <p:cxnSp>
+        <p:nvCxnSpPr>
+          <p:cNvPr id="78" name="Connector 77"/>
+          <p:cNvCxnSpPr/>
+          <p:nvPr/>
+        </p:nvCxnSpPr>
+        <p:spPr>
+          <a:xfrm>
+            <a:off x="8631936" y="2642616"/>
+            <a:ext cx="109728" cy="0"/>
+          </a:xfrm>
+          <a:prstGeom prst="line">
+            <a:avLst/>
+          </a:prstGeom>
+          <a:ln w="13970">
+            <a:solidFill>
+              <a:srgbClr val="8A8882"/>
+            </a:solidFill>
+            <a:tailEnd type="triangle" w="sm" len="sm"/>
+          </a:ln>
+        </p:spPr>
+        <p:style>
+          <a:lnRef idx="2">
+            <a:schemeClr val="accent1"/>
+          </a:lnRef>
+          <a:fillRef idx="0">
+            <a:schemeClr val="accent1"/>
+          </a:fillRef>
+          <a:effectRef idx="1">
+            <a:schemeClr val="accent1"/>
+          </a:effectRef>
+          <a:fontRef idx="minor">
+            <a:schemeClr val="tx1"/>
+          </a:fontRef>
+        </p:style>
+      </p:cxnSp>
+      <p:cxnSp>
+        <p:nvCxnSpPr>
+          <p:cNvPr id="79" name="Connector 78"/>
+          <p:cNvCxnSpPr/>
+          <p:nvPr/>
+        </p:nvCxnSpPr>
+        <p:spPr>
+          <a:xfrm>
+            <a:off x="10040112" y="2642616"/>
+            <a:ext cx="329184" cy="0"/>
+          </a:xfrm>
+          <a:prstGeom prst="line">
+            <a:avLst/>
+          </a:prstGeom>
+          <a:ln w="13970">
+            <a:solidFill>
+              <a:srgbClr val="8A8882"/>
+            </a:solidFill>
+            <a:tailEnd type="triangle" w="sm" len="sm"/>
+          </a:ln>
+        </p:spPr>
+        <p:style>
+          <a:lnRef idx="2">
+            <a:schemeClr val="accent1"/>
+          </a:lnRef>
+          <a:fillRef idx="0">
+            <a:schemeClr val="accent1"/>
+          </a:fillRef>
+          <a:effectRef idx="1">
+            <a:schemeClr val="accent1"/>
+          </a:effectRef>
+          <a:fontRef idx="minor">
+            <a:schemeClr val="tx1"/>
+          </a:fontRef>
+        </p:style>
+      </p:cxnSp>
+      <p:cxnSp>
+        <p:nvCxnSpPr>
+          <p:cNvPr id="80" name="Connector 79"/>
+          <p:cNvCxnSpPr/>
+          <p:nvPr/>
+        </p:nvCxnSpPr>
+        <p:spPr>
+          <a:xfrm>
+            <a:off x="11064240" y="2962656"/>
+            <a:ext cx="0" cy="201168"/>
+          </a:xfrm>
+          <a:prstGeom prst="line">
+            <a:avLst/>
+          </a:prstGeom>
+          <a:ln w="13970">
+            <a:solidFill>
+              <a:srgbClr val="8A8882"/>
+            </a:solidFill>
+            <a:tailEnd type="triangle" w="sm" len="sm"/>
+          </a:ln>
+        </p:spPr>
+        <p:style>
+          <a:lnRef idx="2">
+            <a:schemeClr val="accent1"/>
+          </a:lnRef>
+          <a:fillRef idx="0">
+            <a:schemeClr val="accent1"/>
+          </a:fillRef>
+          <a:effectRef idx="1">
+            <a:schemeClr val="accent1"/>
+          </a:effectRef>
+          <a:fontRef idx="minor">
+            <a:schemeClr val="tx1"/>
+          </a:fontRef>
+        </p:style>
+      </p:cxnSp>
+      <p:cxnSp>
+        <p:nvCxnSpPr>
+          <p:cNvPr id="81" name="Connector 80"/>
+          <p:cNvCxnSpPr/>
+          <p:nvPr/>
+        </p:nvCxnSpPr>
+        <p:spPr>
+          <a:xfrm>
+            <a:off x="11064240" y="3803904"/>
+            <a:ext cx="0" cy="201168"/>
+          </a:xfrm>
+          <a:prstGeom prst="line">
+            <a:avLst/>
+          </a:prstGeom>
+          <a:ln w="13970">
+            <a:solidFill>
+              <a:srgbClr val="8A8882"/>
+            </a:solidFill>
+            <a:tailEnd type="triangle" w="sm" len="sm"/>
+          </a:ln>
+        </p:spPr>
+        <p:style>
+          <a:lnRef idx="2">
+            <a:schemeClr val="accent1"/>
+          </a:lnRef>
+          <a:fillRef idx="0">
+            <a:schemeClr val="accent1"/>
+          </a:fillRef>
+          <a:effectRef idx="1">
+            <a:schemeClr val="accent1"/>
+          </a:effectRef>
+          <a:fontRef idx="minor">
+            <a:schemeClr val="tx1"/>
+          </a:fontRef>
+        </p:style>
+      </p:cxnSp>
+      <p:cxnSp>
+        <p:nvCxnSpPr>
+          <p:cNvPr id="82" name="Connector 81"/>
+          <p:cNvCxnSpPr/>
+          <p:nvPr/>
+        </p:nvCxnSpPr>
+        <p:spPr>
+          <a:xfrm>
+            <a:off x="11064240" y="4645152"/>
+            <a:ext cx="0" cy="201168"/>
+          </a:xfrm>
+          <a:prstGeom prst="line">
+            <a:avLst/>
+          </a:prstGeom>
+          <a:ln w="13970">
+            <a:solidFill>
+              <a:srgbClr val="8A8882"/>
+            </a:solidFill>
+            <a:tailEnd type="triangle" w="sm" len="sm"/>
+          </a:ln>
+        </p:spPr>
+        <p:style>
+          <a:lnRef idx="2">
+            <a:schemeClr val="accent1"/>
+          </a:lnRef>
+          <a:fillRef idx="0">
+            <a:schemeClr val="accent1"/>
+          </a:fillRef>
+          <a:effectRef idx="1">
+            <a:schemeClr val="accent1"/>
+          </a:effectRef>
+          <a:fontRef idx="minor">
+            <a:schemeClr val="tx1"/>
+          </a:fontRef>
+        </p:style>
+      </p:cxnSp>
+      <p:sp>
+        <p:nvSpPr>
+          <p:cNvPr id="83" name="TextBox 82"/>
           <p:cNvSpPr txBox="1"/>
           <p:nvPr/>
         </p:nvSpPr>
@@ -9945,6 +10201,751 @@
 </file>
 
 <file path=ppt/slides/slide4.xml><?xml version="1.0" encoding="utf-8"?>
+<p:sld xmlns:a="http://schemas.openxmlformats.org/drawingml/2006/main" xmlns:p="http://schemas.openxmlformats.org/presentationml/2006/main" xmlns:r="http://schemas.openxmlformats.org/officeDocument/2006/relationships">
+  <p:cSld>
+    <p:spTree>
+      <p:nvGrpSpPr>
+        <p:cNvPr id="1" name=""/>
+        <p:cNvGrpSpPr/>
+        <p:nvPr/>
+      </p:nvGrpSpPr>
+      <p:grpSpPr/>
+      <p:sp>
+        <p:nvSpPr>
+          <p:cNvPr id="2" name="TextBox 1"/>
+          <p:cNvSpPr txBox="1"/>
+          <p:nvPr/>
+        </p:nvSpPr>
+        <p:spPr>
+          <a:xfrm>
+            <a:off x="502920" y="310896"/>
+            <a:ext cx="11185855" cy="731520"/>
+          </a:xfrm>
+          <a:prstGeom prst="rect">
+            <a:avLst/>
+          </a:prstGeom>
+          <a:noFill/>
+        </p:spPr>
+        <p:txBody>
+          <a:bodyPr wrap="square" lIns="0" rIns="0" tIns="0" bIns="0">
+            <a:spAutoFit/>
+          </a:bodyPr>
+          <a:lstStyle/>
+          <a:p>
+            <a:pPr algn="l">
+              <a:spcAft>
+                <a:spcPts val="100"/>
+              </a:spcAft>
+            </a:pPr>
+            <a:r>
+              <a:rPr sz="2700" b="1">
+                <a:solidFill>
+                  <a:srgbClr val="141414"/>
+                </a:solidFill>
+                <a:latin typeface="Arial"/>
+              </a:rPr>
+              <a:t>What's next</a:t>
+            </a:r>
+          </a:p>
+          <a:p>
+            <a:pPr algn="l">
+              <a:spcAft>
+                <a:spcPts val="100"/>
+              </a:spcAft>
+            </a:pPr>
+            <a:r>
+              <a:rPr sz="1250" b="0">
+                <a:solidFill>
+                  <a:srgbClr val="6B6B6B"/>
+                </a:solidFill>
+                <a:latin typeface="Arial"/>
+              </a:rPr>
+              <a:t>against the programme's own gates — coverage, then stability, then efficiency; a station clears one before the next is worth measuring</a:t>
+            </a:r>
+          </a:p>
+        </p:txBody>
+      </p:sp>
+      <p:sp>
+        <p:nvSpPr>
+          <p:cNvPr id="3" name="Rectangle 2"/>
+          <p:cNvSpPr/>
+          <p:nvPr/>
+        </p:nvSpPr>
+        <p:spPr>
+          <a:xfrm>
+            <a:off x="502920" y="1170432"/>
+            <a:ext cx="11185855" cy="13970"/>
+          </a:xfrm>
+          <a:prstGeom prst="rect">
+            <a:avLst/>
+          </a:prstGeom>
+          <a:solidFill>
+            <a:srgbClr val="D8D6CF"/>
+          </a:solidFill>
+          <a:ln>
+            <a:noFill/>
+          </a:ln>
+          <a:effectLst/>
+        </p:spPr>
+        <p:style>
+          <a:lnRef idx="1">
+            <a:schemeClr val="accent1"/>
+          </a:lnRef>
+          <a:fillRef idx="3">
+            <a:schemeClr val="accent1"/>
+          </a:fillRef>
+          <a:effectRef idx="2">
+            <a:schemeClr val="accent1"/>
+          </a:effectRef>
+          <a:fontRef idx="minor">
+            <a:schemeClr val="lt1"/>
+          </a:fontRef>
+        </p:style>
+        <p:txBody>
+          <a:bodyPr rtlCol="0" anchor="ctr"/>
+          <a:lstStyle/>
+          <a:p>
+            <a:pPr algn="ctr"/>
+          </a:p>
+        </p:txBody>
+      </p:sp>
+      <p:sp>
+        <p:nvSpPr>
+          <p:cNvPr id="4" name="Oval 3"/>
+          <p:cNvSpPr/>
+          <p:nvPr/>
+        </p:nvSpPr>
+        <p:spPr>
+          <a:xfrm>
+            <a:off x="566928" y="1481328"/>
+            <a:ext cx="365760" cy="365760"/>
+          </a:xfrm>
+          <a:prstGeom prst="ellipse">
+            <a:avLst/>
+          </a:prstGeom>
+          <a:solidFill>
+            <a:srgbClr val="1C62B8"/>
+          </a:solidFill>
+          <a:ln>
+            <a:noFill/>
+          </a:ln>
+          <a:effectLst/>
+        </p:spPr>
+        <p:style>
+          <a:lnRef idx="1">
+            <a:schemeClr val="accent1"/>
+          </a:lnRef>
+          <a:fillRef idx="3">
+            <a:schemeClr val="accent1"/>
+          </a:fillRef>
+          <a:effectRef idx="2">
+            <a:schemeClr val="accent1"/>
+          </a:effectRef>
+          <a:fontRef idx="minor">
+            <a:schemeClr val="lt1"/>
+          </a:fontRef>
+        </p:style>
+        <p:txBody>
+          <a:bodyPr rtlCol="0" anchor="ctr"/>
+          <a:lstStyle/>
+          <a:p>
+            <a:pPr algn="ctr"/>
+          </a:p>
+        </p:txBody>
+      </p:sp>
+      <p:sp>
+        <p:nvSpPr>
+          <p:cNvPr id="5" name="TextBox 4"/>
+          <p:cNvSpPr txBox="1"/>
+          <p:nvPr/>
+        </p:nvSpPr>
+        <p:spPr>
+          <a:xfrm>
+            <a:off x="566928" y="1545336"/>
+            <a:ext cx="365760" cy="274320"/>
+          </a:xfrm>
+          <a:prstGeom prst="rect">
+            <a:avLst/>
+          </a:prstGeom>
+          <a:noFill/>
+        </p:spPr>
+        <p:txBody>
+          <a:bodyPr wrap="square" lIns="0" rIns="0" tIns="0" bIns="0">
+            <a:spAutoFit/>
+          </a:bodyPr>
+          <a:lstStyle/>
+          <a:p>
+            <a:pPr algn="ctr">
+              <a:spcAft>
+                <a:spcPts val="0"/>
+              </a:spcAft>
+            </a:pPr>
+            <a:r>
+              <a:rPr sz="1400" b="1">
+                <a:solidFill>
+                  <a:srgbClr val="FFFFFF"/>
+                </a:solidFill>
+                <a:latin typeface="Arial"/>
+              </a:rPr>
+              <a:t>a</a:t>
+            </a:r>
+          </a:p>
+        </p:txBody>
+      </p:sp>
+      <p:sp>
+        <p:nvSpPr>
+          <p:cNvPr id="6" name="TextBox 5"/>
+          <p:cNvSpPr txBox="1"/>
+          <p:nvPr/>
+        </p:nvSpPr>
+        <p:spPr>
+          <a:xfrm>
+            <a:off x="1078992" y="1481328"/>
+            <a:ext cx="5486400" cy="640080"/>
+          </a:xfrm>
+          <a:prstGeom prst="rect">
+            <a:avLst/>
+          </a:prstGeom>
+          <a:noFill/>
+        </p:spPr>
+        <p:txBody>
+          <a:bodyPr wrap="square" lIns="0" rIns="0" tIns="0" bIns="0">
+            <a:spAutoFit/>
+          </a:bodyPr>
+          <a:lstStyle/>
+          <a:p>
+            <a:pPr algn="l">
+              <a:spcAft>
+                <a:spcPts val="200"/>
+              </a:spcAft>
+            </a:pPr>
+            <a:r>
+              <a:rPr sz="1800" b="1">
+                <a:solidFill>
+                  <a:srgbClr val="141414"/>
+                </a:solidFill>
+                <a:latin typeface="Arial"/>
+              </a:rPr>
+              <a:t>Develop and maintain full coverage for L6</a:t>
+            </a:r>
+          </a:p>
+          <a:p>
+            <a:pPr algn="l">
+              <a:spcAft>
+                <a:spcPts val="200"/>
+              </a:spcAft>
+            </a:pPr>
+            <a:r>
+              <a:rPr sz="1100" b="0">
+                <a:solidFill>
+                  <a:srgbClr val="6B6B6B"/>
+                </a:solidFill>
+                <a:latin typeface="Arial"/>
+              </a:rPr>
+              <a:t>Gate: </a:t>
+            </a:r>
+            <a:r>
+              <a:rPr sz="1100" b="1">
+                <a:solidFill>
+                  <a:srgbClr val="1C62B8"/>
+                </a:solidFill>
+                <a:latin typeface="Arial"/>
+              </a:rPr>
+              <a:t>Coverage</a:t>
+            </a:r>
+          </a:p>
+        </p:txBody>
+      </p:sp>
+      <p:sp>
+        <p:nvSpPr>
+          <p:cNvPr id="7" name="TextBox 6"/>
+          <p:cNvSpPr txBox="1"/>
+          <p:nvPr/>
+        </p:nvSpPr>
+        <p:spPr>
+          <a:xfrm>
+            <a:off x="1078992" y="2194560"/>
+            <a:ext cx="5120640" cy="1280160"/>
+          </a:xfrm>
+          <a:prstGeom prst="rect">
+            <a:avLst/>
+          </a:prstGeom>
+          <a:noFill/>
+        </p:spPr>
+        <p:txBody>
+          <a:bodyPr wrap="square" lIns="0" rIns="0" tIns="0" bIns="0">
+            <a:spAutoFit/>
+          </a:bodyPr>
+          <a:lstStyle/>
+          <a:p>
+            <a:pPr algn="l">
+              <a:spcAft>
+                <a:spcPts val="0"/>
+              </a:spcAft>
+            </a:pPr>
+            <a:r>
+              <a:rPr sz="1150" b="1">
+                <a:solidFill>
+                  <a:srgbClr val="141414"/>
+                </a:solidFill>
+                <a:latin typeface="Arial"/>
+              </a:rPr>
+              <a:t>Why now.  </a:t>
+            </a:r>
+            <a:r>
+              <a:rPr sz="1150" b="0">
+                <a:solidFill>
+                  <a:srgbClr val="141414"/>
+                </a:solidFill>
+                <a:latin typeface="Arial"/>
+              </a:rPr>
+              <a:t>MLT and HTT are the only steps with enough volume to read, and they are where the line loses most of its units: first pass 65.5% and 54.3%, recovered to 74.6% and 68.8% by re-running 45 and 47 units.</a:t>
+            </a:r>
+          </a:p>
+        </p:txBody>
+      </p:sp>
+      <p:sp>
+        <p:nvSpPr>
+          <p:cNvPr id="8" name="TextBox 7"/>
+          <p:cNvSpPr txBox="1"/>
+          <p:nvPr/>
+        </p:nvSpPr>
+        <p:spPr>
+          <a:xfrm>
+            <a:off x="6492240" y="1499616"/>
+            <a:ext cx="5120640" cy="1371600"/>
+          </a:xfrm>
+          <a:prstGeom prst="rect">
+            <a:avLst/>
+          </a:prstGeom>
+          <a:noFill/>
+        </p:spPr>
+        <p:txBody>
+          <a:bodyPr wrap="square" lIns="0" rIns="0" tIns="0" bIns="0">
+            <a:spAutoFit/>
+          </a:bodyPr>
+          <a:lstStyle/>
+          <a:p>
+            <a:pPr algn="l">
+              <a:spcAft>
+                <a:spcPts val="600"/>
+              </a:spcAft>
+            </a:pPr>
+            <a:r>
+              <a:rPr sz="1150" b="1">
+                <a:solidFill>
+                  <a:srgbClr val="141414"/>
+                </a:solidFill>
+                <a:latin typeface="Arial"/>
+              </a:rPr>
+              <a:t>What good looks like.  </a:t>
+            </a:r>
+            <a:r>
+              <a:rPr sz="1150" b="0">
+                <a:solidFill>
+                  <a:srgbClr val="141414"/>
+                </a:solidFill>
+                <a:latin typeface="Arial"/>
+              </a:rPr>
+              <a:t>Full, maintained coverage at L6 — every board, every condition, and the suite kept in step as releases land. Coverage is the first gate and the only one L6 has the volume to be measured against today.</a:t>
+            </a:r>
+          </a:p>
+          <a:p>
+            <a:pPr algn="l">
+              <a:spcAft>
+                <a:spcPts val="600"/>
+              </a:spcAft>
+            </a:pPr>
+            <a:r>
+              <a:rPr sz="1050" b="1">
+                <a:solidFill>
+                  <a:srgbClr val="6B6B6B"/>
+                </a:solidFill>
+                <a:latin typeface="Arial"/>
+              </a:rPr>
+              <a:t>Owner.  </a:t>
+            </a:r>
+            <a:r>
+              <a:rPr sz="1050" b="0">
+                <a:solidFill>
+                  <a:srgbClr val="6B6B6B"/>
+                </a:solidFill>
+                <a:latin typeface="Arial"/>
+              </a:rPr>
+              <a:t>SW team leads define and execute the content; production involved.</a:t>
+            </a:r>
+          </a:p>
+        </p:txBody>
+      </p:sp>
+      <p:sp>
+        <p:nvSpPr>
+          <p:cNvPr id="9" name="Oval 8"/>
+          <p:cNvSpPr/>
+          <p:nvPr/>
+        </p:nvSpPr>
+        <p:spPr>
+          <a:xfrm>
+            <a:off x="566928" y="3630168"/>
+            <a:ext cx="365760" cy="365760"/>
+          </a:xfrm>
+          <a:prstGeom prst="ellipse">
+            <a:avLst/>
+          </a:prstGeom>
+          <a:solidFill>
+            <a:srgbClr val="1C62B8"/>
+          </a:solidFill>
+          <a:ln>
+            <a:noFill/>
+          </a:ln>
+          <a:effectLst/>
+        </p:spPr>
+        <p:style>
+          <a:lnRef idx="1">
+            <a:schemeClr val="accent1"/>
+          </a:lnRef>
+          <a:fillRef idx="3">
+            <a:schemeClr val="accent1"/>
+          </a:fillRef>
+          <a:effectRef idx="2">
+            <a:schemeClr val="accent1"/>
+          </a:effectRef>
+          <a:fontRef idx="minor">
+            <a:schemeClr val="lt1"/>
+          </a:fontRef>
+        </p:style>
+        <p:txBody>
+          <a:bodyPr rtlCol="0" anchor="ctr"/>
+          <a:lstStyle/>
+          <a:p>
+            <a:pPr algn="ctr"/>
+          </a:p>
+        </p:txBody>
+      </p:sp>
+      <p:sp>
+        <p:nvSpPr>
+          <p:cNvPr id="10" name="TextBox 9"/>
+          <p:cNvSpPr txBox="1"/>
+          <p:nvPr/>
+        </p:nvSpPr>
+        <p:spPr>
+          <a:xfrm>
+            <a:off x="566928" y="3694176"/>
+            <a:ext cx="365760" cy="274320"/>
+          </a:xfrm>
+          <a:prstGeom prst="rect">
+            <a:avLst/>
+          </a:prstGeom>
+          <a:noFill/>
+        </p:spPr>
+        <p:txBody>
+          <a:bodyPr wrap="square" lIns="0" rIns="0" tIns="0" bIns="0">
+            <a:spAutoFit/>
+          </a:bodyPr>
+          <a:lstStyle/>
+          <a:p>
+            <a:pPr algn="ctr">
+              <a:spcAft>
+                <a:spcPts val="0"/>
+              </a:spcAft>
+            </a:pPr>
+            <a:r>
+              <a:rPr sz="1400" b="1">
+                <a:solidFill>
+                  <a:srgbClr val="FFFFFF"/>
+                </a:solidFill>
+                <a:latin typeface="Arial"/>
+              </a:rPr>
+              <a:t>b</a:t>
+            </a:r>
+          </a:p>
+        </p:txBody>
+      </p:sp>
+      <p:sp>
+        <p:nvSpPr>
+          <p:cNvPr id="11" name="TextBox 10"/>
+          <p:cNvSpPr txBox="1"/>
+          <p:nvPr/>
+        </p:nvSpPr>
+        <p:spPr>
+          <a:xfrm>
+            <a:off x="1078992" y="3630168"/>
+            <a:ext cx="5486400" cy="640080"/>
+          </a:xfrm>
+          <a:prstGeom prst="rect">
+            <a:avLst/>
+          </a:prstGeom>
+          <a:noFill/>
+        </p:spPr>
+        <p:txBody>
+          <a:bodyPr wrap="square" lIns="0" rIns="0" tIns="0" bIns="0">
+            <a:spAutoFit/>
+          </a:bodyPr>
+          <a:lstStyle/>
+          <a:p>
+            <a:pPr algn="l">
+              <a:spcAft>
+                <a:spcPts val="200"/>
+              </a:spcAft>
+            </a:pPr>
+            <a:r>
+              <a:rPr sz="1800" b="1">
+                <a:solidFill>
+                  <a:srgbClr val="141414"/>
+                </a:solidFill>
+                <a:latin typeface="Arial"/>
+              </a:rPr>
+              <a:t>Speed up development of multiple L10 test units</a:t>
+            </a:r>
+          </a:p>
+          <a:p>
+            <a:pPr algn="l">
+              <a:spcAft>
+                <a:spcPts val="200"/>
+              </a:spcAft>
+            </a:pPr>
+            <a:r>
+              <a:rPr sz="1100" b="0">
+                <a:solidFill>
+                  <a:srgbClr val="6B6B6B"/>
+                </a:solidFill>
+                <a:latin typeface="Arial"/>
+              </a:rPr>
+              <a:t>Gate: </a:t>
+            </a:r>
+            <a:r>
+              <a:rPr sz="1100" b="1">
+                <a:solidFill>
+                  <a:srgbClr val="1C62B8"/>
+                </a:solidFill>
+                <a:latin typeface="Arial"/>
+              </a:rPr>
+              <a:t>Volume, before any gate</a:t>
+            </a:r>
+          </a:p>
+        </p:txBody>
+      </p:sp>
+      <p:sp>
+        <p:nvSpPr>
+          <p:cNvPr id="12" name="TextBox 11"/>
+          <p:cNvSpPr txBox="1"/>
+          <p:nvPr/>
+        </p:nvSpPr>
+        <p:spPr>
+          <a:xfrm>
+            <a:off x="1078992" y="4343400"/>
+            <a:ext cx="5120640" cy="1280160"/>
+          </a:xfrm>
+          <a:prstGeom prst="rect">
+            <a:avLst/>
+          </a:prstGeom>
+          <a:noFill/>
+        </p:spPr>
+        <p:txBody>
+          <a:bodyPr wrap="square" lIns="0" rIns="0" tIns="0" bIns="0">
+            <a:spAutoFit/>
+          </a:bodyPr>
+          <a:lstStyle/>
+          <a:p>
+            <a:pPr algn="l">
+              <a:spcAft>
+                <a:spcPts val="0"/>
+              </a:spcAft>
+            </a:pPr>
+            <a:r>
+              <a:rPr sz="1150" b="1">
+                <a:solidFill>
+                  <a:srgbClr val="141414"/>
+                </a:solidFill>
+                <a:latin typeface="Arial"/>
+              </a:rPr>
+              <a:t>Why now.  </a:t>
+            </a:r>
+            <a:r>
+              <a:rPr sz="1150" b="0">
+                <a:solidFill>
+                  <a:srgbClr val="141414"/>
+                </a:solidFill>
+                <a:latin typeface="Arial"/>
+              </a:rPr>
+              <a:t>L10 ran 7 units across its four steps all week — 2 at FAT, 1 at SFT, 1 at RIN, 3 at 2U. That is why every L10 box on this deck says quantity only: there is no yield to read, and no gate can be measured on single digits.</a:t>
+            </a:r>
+          </a:p>
+        </p:txBody>
+      </p:sp>
+      <p:sp>
+        <p:nvSpPr>
+          <p:cNvPr id="13" name="TextBox 12"/>
+          <p:cNvSpPr txBox="1"/>
+          <p:nvPr/>
+        </p:nvSpPr>
+        <p:spPr>
+          <a:xfrm>
+            <a:off x="6492240" y="3648456"/>
+            <a:ext cx="5120640" cy="1371600"/>
+          </a:xfrm>
+          <a:prstGeom prst="rect">
+            <a:avLst/>
+          </a:prstGeom>
+          <a:noFill/>
+        </p:spPr>
+        <p:txBody>
+          <a:bodyPr wrap="square" lIns="0" rIns="0" tIns="0" bIns="0">
+            <a:spAutoFit/>
+          </a:bodyPr>
+          <a:lstStyle/>
+          <a:p>
+            <a:pPr algn="l">
+              <a:spcAft>
+                <a:spcPts val="600"/>
+              </a:spcAft>
+            </a:pPr>
+            <a:r>
+              <a:rPr sz="1150" b="1">
+                <a:solidFill>
+                  <a:srgbClr val="141414"/>
+                </a:solidFill>
+                <a:latin typeface="Arial"/>
+              </a:rPr>
+              <a:t>What good looks like.  </a:t>
+            </a:r>
+            <a:r>
+              <a:rPr sz="1150" b="0">
+                <a:solidFill>
+                  <a:srgbClr val="141414"/>
+                </a:solidFill>
+                <a:latin typeface="Arial"/>
+              </a:rPr>
+              <a:t>More L10 units, sooner. Not to improve the yield — to make a yield exist. Until L10 is running tens of chassis a week, its coverage cannot be judged, its stability cannot be measured, and its efficiency is not yet a question.</a:t>
+            </a:r>
+          </a:p>
+          <a:p>
+            <a:pPr algn="l">
+              <a:spcAft>
+                <a:spcPts val="600"/>
+              </a:spcAft>
+            </a:pPr>
+            <a:r>
+              <a:rPr sz="1050" b="1">
+                <a:solidFill>
+                  <a:srgbClr val="6B6B6B"/>
+                </a:solidFill>
+                <a:latin typeface="Arial"/>
+              </a:rPr>
+              <a:t>Owner.  </a:t>
+            </a:r>
+            <a:r>
+              <a:rPr sz="1050" b="0">
+                <a:solidFill>
+                  <a:srgbClr val="6B6B6B"/>
+                </a:solidFill>
+                <a:latin typeface="Arial"/>
+              </a:rPr>
+              <a:t>Production, with the L10 station owners.</a:t>
+            </a:r>
+          </a:p>
+        </p:txBody>
+      </p:sp>
+      <p:sp>
+        <p:nvSpPr>
+          <p:cNvPr id="14" name="Rectangle 13"/>
+          <p:cNvSpPr/>
+          <p:nvPr/>
+        </p:nvSpPr>
+        <p:spPr>
+          <a:xfrm>
+            <a:off x="566928" y="5870448"/>
+            <a:ext cx="11057839" cy="12700"/>
+          </a:xfrm>
+          <a:prstGeom prst="rect">
+            <a:avLst/>
+          </a:prstGeom>
+          <a:solidFill>
+            <a:srgbClr val="D8D6CF"/>
+          </a:solidFill>
+          <a:ln>
+            <a:noFill/>
+          </a:ln>
+          <a:effectLst/>
+        </p:spPr>
+        <p:style>
+          <a:lnRef idx="1">
+            <a:schemeClr val="accent1"/>
+          </a:lnRef>
+          <a:fillRef idx="3">
+            <a:schemeClr val="accent1"/>
+          </a:fillRef>
+          <a:effectRef idx="2">
+            <a:schemeClr val="accent1"/>
+          </a:effectRef>
+          <a:fontRef idx="minor">
+            <a:schemeClr val="lt1"/>
+          </a:fontRef>
+        </p:style>
+        <p:txBody>
+          <a:bodyPr rtlCol="0" anchor="ctr"/>
+          <a:lstStyle/>
+          <a:p>
+            <a:pPr algn="ctr"/>
+          </a:p>
+        </p:txBody>
+      </p:sp>
+      <p:sp>
+        <p:nvSpPr>
+          <p:cNvPr id="15" name="TextBox 14"/>
+          <p:cNvSpPr txBox="1"/>
+          <p:nvPr/>
+        </p:nvSpPr>
+        <p:spPr>
+          <a:xfrm>
+            <a:off x="566928" y="6016752"/>
+            <a:ext cx="11057839" cy="548640"/>
+          </a:xfrm>
+          <a:prstGeom prst="rect">
+            <a:avLst/>
+          </a:prstGeom>
+          <a:noFill/>
+        </p:spPr>
+        <p:txBody>
+          <a:bodyPr wrap="square" lIns="0" rIns="0" tIns="0" bIns="0">
+            <a:spAutoFit/>
+          </a:bodyPr>
+          <a:lstStyle/>
+          <a:p>
+            <a:pPr algn="l">
+              <a:spcAft>
+                <a:spcPts val="0"/>
+              </a:spcAft>
+            </a:pPr>
+            <a:r>
+              <a:rPr sz="1200" b="1">
+                <a:solidFill>
+                  <a:srgbClr val="141414"/>
+                </a:solidFill>
+                <a:latin typeface="Arial"/>
+              </a:rPr>
+              <a:t>The ordering is the point.  </a:t>
+            </a:r>
+            <a:r>
+              <a:rPr sz="1200" b="0">
+                <a:solidFill>
+                  <a:srgbClr val="141414"/>
+                </a:solidFill>
+                <a:latin typeface="Arial"/>
+              </a:rPr>
+              <a:t>Measuring stability before coverage tells you a suite repeats — including repeating what it never tested; measuring efficiency before stability buys stations to fix flakiness. L6 is at the first gate with the volume to prove it; L10 is not yet at a gate at all.</a:t>
+            </a:r>
+          </a:p>
+        </p:txBody>
+      </p:sp>
+    </p:spTree>
+  </p:cSld>
+  <p:clrMapOvr>
+    <a:masterClrMapping/>
+  </p:clrMapOvr>
+</p:sld>
+</file>
+
+<file path=ppt/slides/slide5.xml><?xml version="1.0" encoding="utf-8"?>
 <p:sld xmlns:a="http://schemas.openxmlformats.org/drawingml/2006/main" xmlns:p="http://schemas.openxmlformats.org/presentationml/2006/main" xmlns:r="http://schemas.openxmlformats.org/officeDocument/2006/relationships">
   <p:cSld>
     <p:spTree>

--- a/weekly/2026-W33/weekly-2026-W33.pptx
+++ b/weekly/2026-W33/weekly-2026-W33.pptx
@@ -3777,7 +3777,7 @@
                 </a:solidFill>
                 <a:latin typeface="Arial"/>
               </a:rPr>
-              <a:t>2026-W33 · 2026-08-10 to 2026-08-16, week still running · UTC · first-pass yield and units, in the box</a:t>
+              <a:t>2026-W33 · 2026-08-10 to 2026-08-16, week still running · UTC · first-pass yield and units, under each step</a:t>
             </a:r>
           </a:p>
         </p:txBody>
@@ -3826,272 +3826,129 @@
           </a:p>
         </p:txBody>
       </p:sp>
-      <p:sp>
-        <p:nvSpPr>
-          <p:cNvPr id="4" name="TextBox 3"/>
-          <p:cNvSpPr txBox="1"/>
-          <p:nvPr/>
-        </p:nvSpPr>
-        <p:spPr>
-          <a:xfrm>
-            <a:off x="658368" y="1097280"/>
-            <a:ext cx="2743200" cy="237744"/>
-          </a:xfrm>
-          <a:prstGeom prst="rect">
-            <a:avLst/>
-          </a:prstGeom>
-          <a:noFill/>
-        </p:spPr>
-        <p:txBody>
-          <a:bodyPr wrap="square" lIns="0" rIns="0" tIns="0" bIns="0">
-            <a:spAutoFit/>
-          </a:bodyPr>
-          <a:lstStyle/>
-          <a:p>
-            <a:pPr algn="l">
-              <a:spcAft>
-                <a:spcPts val="0"/>
-              </a:spcAft>
-            </a:pPr>
-            <a:r>
-              <a:rPr sz="1000" b="0">
-                <a:solidFill>
-                  <a:srgbClr val="6B6B6B"/>
-                </a:solidFill>
-                <a:latin typeface="Arial"/>
-              </a:rPr>
-              <a:t>@Sigurd   </a:t>
-            </a:r>
-            <a:r>
-              <a:rPr sz="1250" b="1">
-                <a:solidFill>
-                  <a:srgbClr val="141414"/>
-                </a:solidFill>
-                <a:latin typeface="Arial"/>
-              </a:rPr>
-              <a:t>ASIC</a:t>
-            </a:r>
-          </a:p>
-        </p:txBody>
-      </p:sp>
-      <p:cxnSp>
-        <p:nvCxnSpPr>
-          <p:cNvPr id="5" name="Connector 4"/>
-          <p:cNvCxnSpPr/>
-          <p:nvPr/>
-        </p:nvCxnSpPr>
-        <p:spPr>
-          <a:xfrm>
-            <a:off x="2212848" y="1133856"/>
-            <a:ext cx="0" cy="4672584"/>
-          </a:xfrm>
-          <a:prstGeom prst="line">
-            <a:avLst/>
-          </a:prstGeom>
-          <a:ln w="11430">
+      <p:pic>
+        <p:nvPicPr>
+          <p:cNvPr id="4" name="Picture 3" descr="production-test-flow.png"/>
+          <p:cNvPicPr>
+            <a:picLocks noChangeAspect="1"/>
+          </p:cNvPicPr>
+          <p:nvPr/>
+        </p:nvPicPr>
+        <p:blipFill>
+          <a:blip r:embed="rId2"/>
+          <a:stretch>
+            <a:fillRect/>
+          </a:stretch>
+        </p:blipFill>
+        <p:spPr>
+          <a:xfrm>
+            <a:off x="274320" y="1188720"/>
+            <a:ext cx="9580924" cy="5303520"/>
+          </a:xfrm>
+          <a:prstGeom prst="rect">
+            <a:avLst/>
+          </a:prstGeom>
+        </p:spPr>
+      </p:pic>
+      <p:sp>
+        <p:nvSpPr>
+          <p:cNvPr id="5" name="TextBox 4"/>
+          <p:cNvSpPr txBox="1"/>
+          <p:nvPr/>
+        </p:nvSpPr>
+        <p:spPr>
+          <a:xfrm>
+            <a:off x="643459" y="3661774"/>
+            <a:ext cx="1141012" cy="219456"/>
+          </a:xfrm>
+          <a:prstGeom prst="rect">
+            <a:avLst/>
+          </a:prstGeom>
+          <a:solidFill>
+            <a:srgbClr val="FFFFFF"/>
+          </a:solidFill>
+          <a:ln w="7620">
             <a:solidFill>
-              <a:srgbClr val="B5B3AC"/>
-            </a:solidFill>
-            <a:prstDash val="dash"/>
-          </a:ln>
-        </p:spPr>
-        <p:style>
-          <a:lnRef idx="2">
-            <a:schemeClr val="accent1"/>
-          </a:lnRef>
-          <a:fillRef idx="0">
-            <a:schemeClr val="accent1"/>
-          </a:fillRef>
-          <a:effectRef idx="1">
-            <a:schemeClr val="accent1"/>
-          </a:effectRef>
-          <a:fontRef idx="minor">
-            <a:schemeClr val="tx1"/>
-          </a:fontRef>
-        </p:style>
-      </p:cxnSp>
-      <p:sp>
-        <p:nvSpPr>
-          <p:cNvPr id="6" name="Rounded Rectangle 5"/>
-          <p:cNvSpPr/>
-          <p:nvPr/>
-        </p:nvSpPr>
-        <p:spPr>
-          <a:xfrm>
-            <a:off x="658368" y="1481328"/>
-            <a:ext cx="1298448" cy="640080"/>
-          </a:xfrm>
-          <a:prstGeom prst="roundRect">
-            <a:avLst/>
-          </a:prstGeom>
-          <a:solidFill>
-            <a:srgbClr val="D9D9D9"/>
-          </a:solidFill>
-          <a:ln w="12700">
-            <a:solidFill>
-              <a:srgbClr val="A5A5A5"/>
+              <a:srgbClr val="C8C6C0"/>
             </a:solidFill>
           </a:ln>
           <a:effectLst/>
         </p:spPr>
-        <p:style>
-          <a:lnRef idx="1">
-            <a:schemeClr val="accent1"/>
-          </a:lnRef>
-          <a:fillRef idx="3">
-            <a:schemeClr val="accent1"/>
-          </a:fillRef>
-          <a:effectRef idx="2">
-            <a:schemeClr val="accent1"/>
-          </a:effectRef>
-          <a:fontRef idx="minor">
-            <a:schemeClr val="lt1"/>
-          </a:fontRef>
-        </p:style>
-        <p:txBody>
-          <a:bodyPr rtlCol="0" anchor="ctr"/>
-          <a:lstStyle/>
-          <a:p>
-            <a:pPr algn="ctr"/>
-          </a:p>
-        </p:txBody>
-      </p:sp>
-      <p:sp>
-        <p:nvSpPr>
-          <p:cNvPr id="7" name="TextBox 6"/>
-          <p:cNvSpPr txBox="1"/>
-          <p:nvPr/>
-        </p:nvSpPr>
-        <p:spPr>
-          <a:xfrm>
-            <a:off x="740664" y="1545336"/>
-            <a:ext cx="1133856" cy="530352"/>
-          </a:xfrm>
-          <a:prstGeom prst="rect">
-            <a:avLst/>
-          </a:prstGeom>
-          <a:noFill/>
-        </p:spPr>
-        <p:txBody>
-          <a:bodyPr wrap="square" lIns="0" rIns="0" tIns="0" bIns="0">
-            <a:spAutoFit/>
-          </a:bodyPr>
-          <a:lstStyle/>
-          <a:p>
-            <a:pPr algn="l">
-              <a:spcAft>
-                <a:spcPts val="100"/>
-              </a:spcAft>
-            </a:pPr>
-            <a:r>
-              <a:rPr sz="1250" b="0">
-                <a:solidFill>
-                  <a:srgbClr val="141414"/>
-                </a:solidFill>
-                <a:latin typeface="Arial"/>
-              </a:rPr>
-              <a:t>ASIC</a:t>
-            </a:r>
-          </a:p>
-        </p:txBody>
-      </p:sp>
-      <p:sp>
-        <p:nvSpPr>
-          <p:cNvPr id="8" name="Rounded Rectangle 7"/>
-          <p:cNvSpPr/>
-          <p:nvPr/>
-        </p:nvSpPr>
-        <p:spPr>
-          <a:xfrm>
-            <a:off x="658368" y="2322576"/>
-            <a:ext cx="1298448" cy="640080"/>
-          </a:xfrm>
-          <a:prstGeom prst="roundRect">
+        <p:txBody>
+          <a:bodyPr wrap="square" lIns="0" rIns="0" tIns="0" bIns="0">
+            <a:spAutoFit/>
+          </a:bodyPr>
+          <a:lstStyle/>
+          <a:p>
+            <a:pPr algn="ctr">
+              <a:spcAft>
+                <a:spcPts val="0"/>
+              </a:spcAft>
+            </a:pPr>
+            <a:r>
+              <a:rPr sz="1100" b="1">
+                <a:solidFill>
+                  <a:srgbClr val="B3281E"/>
+                </a:solidFill>
+                <a:latin typeface="Arial"/>
+              </a:rPr>
+              <a:t>35.3%</a:t>
+            </a:r>
+            <a:r>
+              <a:rPr sz="800" b="0">
+                <a:solidFill>
+                  <a:srgbClr val="6B6B6B"/>
+                </a:solidFill>
+                <a:latin typeface="Arial"/>
+              </a:rPr>
+              <a:t>  reported</a:t>
+            </a:r>
+          </a:p>
+        </p:txBody>
+      </p:sp>
+      <p:sp>
+        <p:nvSpPr>
+          <p:cNvPr id="6" name="TextBox 5"/>
+          <p:cNvSpPr txBox="1"/>
+          <p:nvPr/>
+        </p:nvSpPr>
+        <p:spPr>
+          <a:xfrm>
+            <a:off x="643459" y="4393890"/>
+            <a:ext cx="1141012" cy="219456"/>
+          </a:xfrm>
+          <a:prstGeom prst="rect">
             <a:avLst/>
           </a:prstGeom>
           <a:solidFill>
-            <a:srgbClr val="D5E8D4"/>
+            <a:srgbClr val="FFFFFF"/>
           </a:solidFill>
-          <a:ln w="12700">
+          <a:ln w="7620">
             <a:solidFill>
-              <a:srgbClr val="82B366"/>
+              <a:srgbClr val="C8C6C0"/>
             </a:solidFill>
           </a:ln>
           <a:effectLst/>
         </p:spPr>
-        <p:style>
-          <a:lnRef idx="1">
-            <a:schemeClr val="accent1"/>
-          </a:lnRef>
-          <a:fillRef idx="3">
-            <a:schemeClr val="accent1"/>
-          </a:fillRef>
-          <a:effectRef idx="2">
-            <a:schemeClr val="accent1"/>
-          </a:effectRef>
-          <a:fontRef idx="minor">
-            <a:schemeClr val="lt1"/>
-          </a:fontRef>
-        </p:style>
-        <p:txBody>
-          <a:bodyPr rtlCol="0" anchor="ctr"/>
-          <a:lstStyle/>
-          <a:p>
-            <a:pPr algn="ctr"/>
-          </a:p>
-        </p:txBody>
-      </p:sp>
-      <p:sp>
-        <p:nvSpPr>
-          <p:cNvPr id="9" name="TextBox 8"/>
-          <p:cNvSpPr txBox="1"/>
-          <p:nvPr/>
-        </p:nvSpPr>
-        <p:spPr>
-          <a:xfrm>
-            <a:off x="740664" y="2386584"/>
-            <a:ext cx="1133856" cy="530352"/>
-          </a:xfrm>
-          <a:prstGeom prst="rect">
-            <a:avLst/>
-          </a:prstGeom>
-          <a:noFill/>
-        </p:spPr>
-        <p:txBody>
-          <a:bodyPr wrap="square" lIns="0" rIns="0" tIns="0" bIns="0">
-            <a:spAutoFit/>
-          </a:bodyPr>
-          <a:lstStyle/>
-          <a:p>
-            <a:pPr algn="l">
-              <a:spcAft>
-                <a:spcPts val="100"/>
-              </a:spcAft>
-            </a:pPr>
-            <a:r>
-              <a:rPr sz="1250" b="1">
-                <a:solidFill>
-                  <a:srgbClr val="141414"/>
-                </a:solidFill>
-                <a:latin typeface="Arial"/>
-              </a:rPr>
-              <a:t>WST</a:t>
-            </a:r>
-          </a:p>
-          <a:p>
-            <a:pPr algn="l">
-              <a:spcAft>
-                <a:spcPts val="100"/>
-              </a:spcAft>
-            </a:pPr>
-            <a:r>
-              <a:rPr sz="1500" b="1">
-                <a:solidFill>
-                  <a:srgbClr val="B3281E"/>
-                </a:solidFill>
-                <a:latin typeface="Arial"/>
-              </a:rPr>
-              <a:t>35.3%</a:t>
+        <p:txBody>
+          <a:bodyPr wrap="square" lIns="0" rIns="0" tIns="0" bIns="0">
+            <a:spAutoFit/>
+          </a:bodyPr>
+          <a:lstStyle/>
+          <a:p>
+            <a:pPr algn="ctr">
+              <a:spcAft>
+                <a:spcPts val="0"/>
+              </a:spcAft>
+            </a:pPr>
+            <a:r>
+              <a:rPr sz="1100" b="1">
+                <a:solidFill>
+                  <a:srgbClr val="B56B00"/>
+                </a:solidFill>
+                <a:latin typeface="Arial"/>
+              </a:rPr>
+              <a:t>84.3%</a:t>
             </a:r>
             <a:r>
               <a:rPr sz="800" b="0">
@@ -4107,102 +3964,39 @@
       </p:sp>
       <p:sp>
         <p:nvSpPr>
-          <p:cNvPr id="10" name="Rounded Rectangle 9"/>
-          <p:cNvSpPr/>
-          <p:nvPr/>
-        </p:nvSpPr>
-        <p:spPr>
-          <a:xfrm>
-            <a:off x="658368" y="3163824"/>
-            <a:ext cx="1298448" cy="640080"/>
-          </a:xfrm>
-          <a:prstGeom prst="roundRect">
+          <p:cNvPr id="7" name="TextBox 6"/>
+          <p:cNvSpPr txBox="1"/>
+          <p:nvPr/>
+        </p:nvSpPr>
+        <p:spPr>
+          <a:xfrm>
+            <a:off x="626165" y="5120242"/>
+            <a:ext cx="1141012" cy="219456"/>
+          </a:xfrm>
+          <a:prstGeom prst="rect">
             <a:avLst/>
           </a:prstGeom>
           <a:solidFill>
-            <a:srgbClr val="D5E8D4"/>
+            <a:srgbClr val="FFFFFF"/>
           </a:solidFill>
-          <a:ln w="12700">
+          <a:ln w="7620">
             <a:solidFill>
-              <a:srgbClr val="82B366"/>
+              <a:srgbClr val="C8C6C0"/>
             </a:solidFill>
           </a:ln>
           <a:effectLst/>
         </p:spPr>
-        <p:style>
-          <a:lnRef idx="1">
-            <a:schemeClr val="accent1"/>
-          </a:lnRef>
-          <a:fillRef idx="3">
-            <a:schemeClr val="accent1"/>
-          </a:fillRef>
-          <a:effectRef idx="2">
-            <a:schemeClr val="accent1"/>
-          </a:effectRef>
-          <a:fontRef idx="minor">
-            <a:schemeClr val="lt1"/>
-          </a:fontRef>
-        </p:style>
-        <p:txBody>
-          <a:bodyPr rtlCol="0" anchor="ctr"/>
-          <a:lstStyle/>
-          <a:p>
-            <a:pPr algn="ctr"/>
-          </a:p>
-        </p:txBody>
-      </p:sp>
-      <p:sp>
-        <p:nvSpPr>
-          <p:cNvPr id="11" name="TextBox 10"/>
-          <p:cNvSpPr txBox="1"/>
-          <p:nvPr/>
-        </p:nvSpPr>
-        <p:spPr>
-          <a:xfrm>
-            <a:off x="740664" y="3227832"/>
-            <a:ext cx="1133856" cy="530352"/>
-          </a:xfrm>
-          <a:prstGeom prst="rect">
-            <a:avLst/>
-          </a:prstGeom>
-          <a:noFill/>
-        </p:spPr>
-        <p:txBody>
-          <a:bodyPr wrap="square" lIns="0" rIns="0" tIns="0" bIns="0">
-            <a:spAutoFit/>
-          </a:bodyPr>
-          <a:lstStyle/>
-          <a:p>
-            <a:pPr algn="l">
-              <a:spcAft>
-                <a:spcPts val="100"/>
-              </a:spcAft>
-            </a:pPr>
-            <a:r>
-              <a:rPr sz="1250" b="1">
-                <a:solidFill>
-                  <a:srgbClr val="141414"/>
-                </a:solidFill>
-                <a:latin typeface="Arial"/>
-              </a:rPr>
-              <a:t>FT</a:t>
-            </a:r>
-          </a:p>
-          <a:p>
-            <a:pPr algn="l">
-              <a:spcAft>
-                <a:spcPts val="100"/>
-              </a:spcAft>
-            </a:pPr>
-            <a:r>
-              <a:rPr sz="1500" b="1">
-                <a:solidFill>
-                  <a:srgbClr val="B56B00"/>
-                </a:solidFill>
-                <a:latin typeface="Arial"/>
-              </a:rPr>
-              <a:t>84.3%</a:t>
-            </a:r>
+        <p:txBody>
+          <a:bodyPr wrap="square" lIns="0" rIns="0" tIns="0" bIns="0">
+            <a:spAutoFit/>
+          </a:bodyPr>
+          <a:lstStyle/>
+          <a:p>
+            <a:pPr algn="ctr">
+              <a:spcAft>
+                <a:spcPts val="0"/>
+              </a:spcAft>
+            </a:pPr>
             <a:r>
               <a:rPr sz="800" b="0">
                 <a:solidFill>
@@ -4210,100 +4004,55 @@
                 </a:solidFill>
                 <a:latin typeface="Arial"/>
               </a:rPr>
-              <a:t>  reported</a:t>
-            </a:r>
-          </a:p>
-        </p:txBody>
-      </p:sp>
-      <p:sp>
-        <p:nvSpPr>
-          <p:cNvPr id="12" name="Rounded Rectangle 11"/>
-          <p:cNvSpPr/>
-          <p:nvPr/>
-        </p:nvSpPr>
-        <p:spPr>
-          <a:xfrm>
-            <a:off x="658368" y="4005072"/>
-            <a:ext cx="1298448" cy="640080"/>
-          </a:xfrm>
-          <a:prstGeom prst="roundRect">
+              <a:t>at Sigurd — not collected here</a:t>
+            </a:r>
+          </a:p>
+        </p:txBody>
+      </p:sp>
+      <p:sp>
+        <p:nvSpPr>
+          <p:cNvPr id="8" name="TextBox 7"/>
+          <p:cNvSpPr txBox="1"/>
+          <p:nvPr/>
+        </p:nvSpPr>
+        <p:spPr>
+          <a:xfrm>
+            <a:off x="2949337" y="4111420"/>
+            <a:ext cx="1141012" cy="219456"/>
+          </a:xfrm>
+          <a:prstGeom prst="rect">
             <a:avLst/>
           </a:prstGeom>
           <a:solidFill>
-            <a:srgbClr val="D9D9D9"/>
+            <a:srgbClr val="FFFFFF"/>
           </a:solidFill>
-          <a:ln w="12700">
+          <a:ln w="7620">
             <a:solidFill>
-              <a:srgbClr val="A5A5A5"/>
+              <a:srgbClr val="C8C6C0"/>
             </a:solidFill>
           </a:ln>
           <a:effectLst/>
         </p:spPr>
-        <p:style>
-          <a:lnRef idx="1">
-            <a:schemeClr val="accent1"/>
-          </a:lnRef>
-          <a:fillRef idx="3">
-            <a:schemeClr val="accent1"/>
-          </a:fillRef>
-          <a:effectRef idx="2">
-            <a:schemeClr val="accent1"/>
-          </a:effectRef>
-          <a:fontRef idx="minor">
-            <a:schemeClr val="lt1"/>
-          </a:fontRef>
-        </p:style>
-        <p:txBody>
-          <a:bodyPr rtlCol="0" anchor="ctr"/>
-          <a:lstStyle/>
-          <a:p>
-            <a:pPr algn="ctr"/>
-          </a:p>
-        </p:txBody>
-      </p:sp>
-      <p:sp>
-        <p:nvSpPr>
-          <p:cNvPr id="13" name="TextBox 12"/>
-          <p:cNvSpPr txBox="1"/>
-          <p:nvPr/>
-        </p:nvSpPr>
-        <p:spPr>
-          <a:xfrm>
-            <a:off x="740664" y="4069080"/>
-            <a:ext cx="1133856" cy="530352"/>
-          </a:xfrm>
-          <a:prstGeom prst="rect">
-            <a:avLst/>
-          </a:prstGeom>
-          <a:noFill/>
-        </p:spPr>
-        <p:txBody>
-          <a:bodyPr wrap="square" lIns="0" rIns="0" tIns="0" bIns="0">
-            <a:spAutoFit/>
-          </a:bodyPr>
-          <a:lstStyle/>
-          <a:p>
-            <a:pPr algn="l">
-              <a:spcAft>
-                <a:spcPts val="100"/>
-              </a:spcAft>
-            </a:pPr>
-            <a:r>
-              <a:rPr sz="1250" b="1">
-                <a:solidFill>
-                  <a:srgbClr val="141414"/>
-                </a:solidFill>
-                <a:latin typeface="Arial"/>
-              </a:rPr>
-              <a:t>SLT</a:t>
-            </a:r>
-          </a:p>
-          <a:p>
-            <a:pPr algn="l">
-              <a:spcAft>
-                <a:spcPts val="100"/>
-              </a:spcAft>
-            </a:pPr>
+        <p:txBody>
+          <a:bodyPr wrap="square" lIns="0" rIns="0" tIns="0" bIns="0">
+            <a:spAutoFit/>
+          </a:bodyPr>
+          <a:lstStyle/>
+          <a:p>
+            <a:pPr algn="ctr">
+              <a:spcAft>
+                <a:spcPts val="0"/>
+              </a:spcAft>
+            </a:pPr>
+            <a:r>
+              <a:rPr sz="1200" b="1">
+                <a:solidFill>
+                  <a:srgbClr val="B56B00"/>
+                </a:solidFill>
+                <a:latin typeface="Arial"/>
+              </a:rPr>
+              <a:t>65.5%</a:t>
+            </a:r>
             <a:r>
               <a:rPr sz="850" b="0">
                 <a:solidFill>
@@ -4311,184 +4060,55 @@
                 </a:solidFill>
                 <a:latin typeface="Arial"/>
               </a:rPr>
-              <a:t>at Sigurd</a:t>
-            </a:r>
-          </a:p>
-        </p:txBody>
-      </p:sp>
-      <p:sp>
-        <p:nvSpPr>
-          <p:cNvPr id="14" name="TextBox 13"/>
-          <p:cNvSpPr txBox="1"/>
-          <p:nvPr/>
-        </p:nvSpPr>
-        <p:spPr>
-          <a:xfrm>
-            <a:off x="2377440" y="1097280"/>
-            <a:ext cx="2743200" cy="237744"/>
-          </a:xfrm>
-          <a:prstGeom prst="rect">
-            <a:avLst/>
-          </a:prstGeom>
-          <a:noFill/>
-        </p:spPr>
-        <p:txBody>
-          <a:bodyPr wrap="square" lIns="0" rIns="0" tIns="0" bIns="0">
-            <a:spAutoFit/>
-          </a:bodyPr>
-          <a:lstStyle/>
-          <a:p>
-            <a:pPr algn="l">
-              <a:spcAft>
-                <a:spcPts val="0"/>
-              </a:spcAft>
-            </a:pPr>
-            <a:r>
-              <a:rPr sz="1000" b="0">
-                <a:solidFill>
-                  <a:srgbClr val="6B6B6B"/>
-                </a:solidFill>
-                <a:latin typeface="Arial"/>
-              </a:rPr>
-              <a:t>@Pega   </a:t>
-            </a:r>
-            <a:r>
-              <a:rPr sz="1250" b="1">
-                <a:solidFill>
-                  <a:srgbClr val="141414"/>
-                </a:solidFill>
-                <a:latin typeface="Arial"/>
-              </a:rPr>
-              <a:t>PCBA L6</a:t>
-            </a:r>
-          </a:p>
-        </p:txBody>
-      </p:sp>
-      <p:cxnSp>
-        <p:nvCxnSpPr>
-          <p:cNvPr id="15" name="Connector 14"/>
-          <p:cNvCxnSpPr/>
-          <p:nvPr/>
-        </p:nvCxnSpPr>
-        <p:spPr>
-          <a:xfrm>
-            <a:off x="5285232" y="1133856"/>
-            <a:ext cx="0" cy="4672584"/>
-          </a:xfrm>
-          <a:prstGeom prst="line">
-            <a:avLst/>
-          </a:prstGeom>
-          <a:ln w="11430">
+              <a:t>  228 units</a:t>
+            </a:r>
+          </a:p>
+        </p:txBody>
+      </p:sp>
+      <p:sp>
+        <p:nvSpPr>
+          <p:cNvPr id="9" name="TextBox 8"/>
+          <p:cNvSpPr txBox="1"/>
+          <p:nvPr/>
+        </p:nvSpPr>
+        <p:spPr>
+          <a:xfrm>
+            <a:off x="2949337" y="3385069"/>
+            <a:ext cx="1141012" cy="219456"/>
+          </a:xfrm>
+          <a:prstGeom prst="rect">
+            <a:avLst/>
+          </a:prstGeom>
+          <a:solidFill>
+            <a:srgbClr val="FFFFFF"/>
+          </a:solidFill>
+          <a:ln w="7620">
             <a:solidFill>
-              <a:srgbClr val="B5B3AC"/>
-            </a:solidFill>
-            <a:prstDash val="dash"/>
-          </a:ln>
-        </p:spPr>
-        <p:style>
-          <a:lnRef idx="2">
-            <a:schemeClr val="accent1"/>
-          </a:lnRef>
-          <a:fillRef idx="0">
-            <a:schemeClr val="accent1"/>
-          </a:fillRef>
-          <a:effectRef idx="1">
-            <a:schemeClr val="accent1"/>
-          </a:effectRef>
-          <a:fontRef idx="minor">
-            <a:schemeClr val="tx1"/>
-          </a:fontRef>
-        </p:style>
-      </p:cxnSp>
-      <p:sp>
-        <p:nvSpPr>
-          <p:cNvPr id="16" name="Rounded Rectangle 15"/>
-          <p:cNvSpPr/>
-          <p:nvPr/>
-        </p:nvSpPr>
-        <p:spPr>
-          <a:xfrm>
-            <a:off x="2377440" y="1481328"/>
-            <a:ext cx="1298448" cy="640080"/>
-          </a:xfrm>
-          <a:prstGeom prst="roundRect">
-            <a:avLst/>
-          </a:prstGeom>
-          <a:solidFill>
-            <a:srgbClr val="D9D9D9"/>
-          </a:solidFill>
-          <a:ln w="12700">
-            <a:solidFill>
-              <a:srgbClr val="A5A5A5"/>
+              <a:srgbClr val="C8C6C0"/>
             </a:solidFill>
           </a:ln>
           <a:effectLst/>
         </p:spPr>
-        <p:style>
-          <a:lnRef idx="1">
-            <a:schemeClr val="accent1"/>
-          </a:lnRef>
-          <a:fillRef idx="3">
-            <a:schemeClr val="accent1"/>
-          </a:fillRef>
-          <a:effectRef idx="2">
-            <a:schemeClr val="accent1"/>
-          </a:effectRef>
-          <a:fontRef idx="minor">
-            <a:schemeClr val="lt1"/>
-          </a:fontRef>
-        </p:style>
-        <p:txBody>
-          <a:bodyPr rtlCol="0" anchor="ctr"/>
-          <a:lstStyle/>
-          <a:p>
-            <a:pPr algn="ctr"/>
-          </a:p>
-        </p:txBody>
-      </p:sp>
-      <p:sp>
-        <p:nvSpPr>
-          <p:cNvPr id="17" name="TextBox 16"/>
-          <p:cNvSpPr txBox="1"/>
-          <p:nvPr/>
-        </p:nvSpPr>
-        <p:spPr>
-          <a:xfrm>
-            <a:off x="2459736" y="1545336"/>
-            <a:ext cx="1133856" cy="530352"/>
-          </a:xfrm>
-          <a:prstGeom prst="rect">
-            <a:avLst/>
-          </a:prstGeom>
-          <a:noFill/>
-        </p:spPr>
-        <p:txBody>
-          <a:bodyPr wrap="square" lIns="0" rIns="0" tIns="0" bIns="0">
-            <a:spAutoFit/>
-          </a:bodyPr>
-          <a:lstStyle/>
-          <a:p>
-            <a:pPr algn="l">
-              <a:spcAft>
-                <a:spcPts val="100"/>
-              </a:spcAft>
-            </a:pPr>
-            <a:r>
-              <a:rPr sz="1250" b="0">
-                <a:solidFill>
-                  <a:srgbClr val="141414"/>
-                </a:solidFill>
-                <a:latin typeface="Arial"/>
-              </a:rPr>
-              <a:t>SMT / ICT</a:t>
-            </a:r>
-          </a:p>
-          <a:p>
-            <a:pPr algn="l">
-              <a:spcAft>
-                <a:spcPts val="100"/>
-              </a:spcAft>
-            </a:pPr>
+        <p:txBody>
+          <a:bodyPr wrap="square" lIns="0" rIns="0" tIns="0" bIns="0">
+            <a:spAutoFit/>
+          </a:bodyPr>
+          <a:lstStyle/>
+          <a:p>
+            <a:pPr algn="ctr">
+              <a:spcAft>
+                <a:spcPts val="0"/>
+              </a:spcAft>
+            </a:pPr>
+            <a:r>
+              <a:rPr sz="1200" b="1">
+                <a:solidFill>
+                  <a:srgbClr val="B3281E"/>
+                </a:solidFill>
+                <a:latin typeface="Arial"/>
+              </a:rPr>
+              <a:t>54.3%</a:t>
+            </a:r>
             <a:r>
               <a:rPr sz="850" b="0">
                 <a:solidFill>
@@ -4496,648 +4116,306 @@
                 </a:solidFill>
                 <a:latin typeface="Arial"/>
               </a:rPr>
-              <a:t>HPB &amp; VBB &amp; PV1 &amp; PDB</a:t>
-            </a:r>
-          </a:p>
-        </p:txBody>
-      </p:sp>
-      <p:sp>
-        <p:nvSpPr>
-          <p:cNvPr id="18" name="Rounded Rectangle 17"/>
-          <p:cNvSpPr/>
-          <p:nvPr/>
-        </p:nvSpPr>
-        <p:spPr>
-          <a:xfrm>
-            <a:off x="2377440" y="4005072"/>
-            <a:ext cx="1298448" cy="640080"/>
-          </a:xfrm>
-          <a:prstGeom prst="roundRect">
+              <a:t>  170 units</a:t>
+            </a:r>
+          </a:p>
+        </p:txBody>
+      </p:sp>
+      <p:sp>
+        <p:nvSpPr>
+          <p:cNvPr id="10" name="TextBox 9"/>
+          <p:cNvSpPr txBox="1"/>
+          <p:nvPr/>
+        </p:nvSpPr>
+        <p:spPr>
+          <a:xfrm>
+            <a:off x="1980868" y="5391183"/>
+            <a:ext cx="973836" cy="219456"/>
+          </a:xfrm>
+          <a:prstGeom prst="rect">
             <a:avLst/>
           </a:prstGeom>
           <a:solidFill>
-            <a:srgbClr val="E6D0DE"/>
+            <a:srgbClr val="FFFFFF"/>
           </a:solidFill>
-          <a:ln w="12700">
+          <a:ln w="7620">
             <a:solidFill>
-              <a:srgbClr val="C29FB8"/>
+              <a:srgbClr val="C8C6C0"/>
             </a:solidFill>
           </a:ln>
           <a:effectLst/>
         </p:spPr>
-        <p:style>
-          <a:lnRef idx="1">
-            <a:schemeClr val="accent1"/>
-          </a:lnRef>
-          <a:fillRef idx="3">
-            <a:schemeClr val="accent1"/>
-          </a:fillRef>
-          <a:effectRef idx="2">
-            <a:schemeClr val="accent1"/>
-          </a:effectRef>
-          <a:fontRef idx="minor">
-            <a:schemeClr val="lt1"/>
-          </a:fontRef>
-        </p:style>
-        <p:txBody>
-          <a:bodyPr rtlCol="0" anchor="ctr"/>
-          <a:lstStyle/>
-          <a:p>
-            <a:pPr algn="ctr"/>
-          </a:p>
-        </p:txBody>
-      </p:sp>
-      <p:sp>
-        <p:nvSpPr>
-          <p:cNvPr id="19" name="TextBox 18"/>
-          <p:cNvSpPr txBox="1"/>
-          <p:nvPr/>
-        </p:nvSpPr>
-        <p:spPr>
-          <a:xfrm>
-            <a:off x="2459736" y="4069080"/>
-            <a:ext cx="1133856" cy="530352"/>
-          </a:xfrm>
-          <a:prstGeom prst="rect">
-            <a:avLst/>
-          </a:prstGeom>
-          <a:noFill/>
-        </p:spPr>
-        <p:txBody>
-          <a:bodyPr wrap="square" lIns="0" rIns="0" tIns="0" bIns="0">
-            <a:spAutoFit/>
-          </a:bodyPr>
-          <a:lstStyle/>
-          <a:p>
-            <a:pPr algn="l">
-              <a:spcAft>
-                <a:spcPts val="100"/>
-              </a:spcAft>
-            </a:pPr>
-            <a:r>
-              <a:rPr sz="1250" b="0">
-                <a:solidFill>
-                  <a:srgbClr val="141414"/>
-                </a:solidFill>
-                <a:latin typeface="Arial"/>
-              </a:rPr>
-              <a:t>Flash / BFT</a:t>
-            </a:r>
-          </a:p>
-          <a:p>
-            <a:pPr algn="l">
-              <a:spcAft>
-                <a:spcPts val="100"/>
-              </a:spcAft>
-            </a:pPr>
-            <a:r>
-              <a:rPr sz="850" b="0">
-                <a:solidFill>
-                  <a:srgbClr val="6B6B6B"/>
-                </a:solidFill>
-                <a:latin typeface="Arial"/>
-              </a:rPr>
-              <a:t>VBB — not in the yield view</a:t>
-            </a:r>
-          </a:p>
-        </p:txBody>
-      </p:sp>
-      <p:sp>
-        <p:nvSpPr>
-          <p:cNvPr id="20" name="Rounded Rectangle 19"/>
-          <p:cNvSpPr/>
-          <p:nvPr/>
-        </p:nvSpPr>
-        <p:spPr>
-          <a:xfrm>
-            <a:off x="3840480" y="1481328"/>
-            <a:ext cx="1298448" cy="640080"/>
-          </a:xfrm>
-          <a:prstGeom prst="roundRect">
+        <p:txBody>
+          <a:bodyPr wrap="square" lIns="0" rIns="0" tIns="0" bIns="0">
+            <a:spAutoFit/>
+          </a:bodyPr>
+          <a:lstStyle/>
+          <a:p>
+            <a:pPr algn="ctr">
+              <a:spcAft>
+                <a:spcPts val="0"/>
+              </a:spcAft>
+            </a:pPr>
+            <a:r>
+              <a:rPr sz="800" b="0">
+                <a:solidFill>
+                  <a:srgbClr val="6B6B6B"/>
+                </a:solidFill>
+                <a:latin typeface="Arial"/>
+              </a:rPr>
+              <a:t>VBB — outside the yield view</a:t>
+            </a:r>
+          </a:p>
+        </p:txBody>
+      </p:sp>
+      <p:sp>
+        <p:nvSpPr>
+          <p:cNvPr id="11" name="TextBox 10"/>
+          <p:cNvSpPr txBox="1"/>
+          <p:nvPr/>
+        </p:nvSpPr>
+        <p:spPr>
+          <a:xfrm>
+            <a:off x="6275566" y="3667539"/>
+            <a:ext cx="1141012" cy="219456"/>
+          </a:xfrm>
+          <a:prstGeom prst="rect">
             <a:avLst/>
           </a:prstGeom>
           <a:solidFill>
-            <a:srgbClr val="D5E8D4"/>
+            <a:srgbClr val="FFFFFF"/>
           </a:solidFill>
-          <a:ln w="12700">
+          <a:ln w="7620">
             <a:solidFill>
-              <a:srgbClr val="82B366"/>
+              <a:srgbClr val="C8C6C0"/>
             </a:solidFill>
           </a:ln>
           <a:effectLst/>
         </p:spPr>
-        <p:style>
-          <a:lnRef idx="1">
-            <a:schemeClr val="accent1"/>
-          </a:lnRef>
-          <a:fillRef idx="3">
-            <a:schemeClr val="accent1"/>
-          </a:fillRef>
-          <a:effectRef idx="2">
-            <a:schemeClr val="accent1"/>
-          </a:effectRef>
-          <a:fontRef idx="minor">
-            <a:schemeClr val="lt1"/>
-          </a:fontRef>
-        </p:style>
-        <p:txBody>
-          <a:bodyPr rtlCol="0" anchor="ctr"/>
-          <a:lstStyle/>
-          <a:p>
-            <a:pPr algn="ctr"/>
-          </a:p>
-        </p:txBody>
-      </p:sp>
-      <p:sp>
-        <p:nvSpPr>
-          <p:cNvPr id="21" name="TextBox 20"/>
-          <p:cNvSpPr txBox="1"/>
-          <p:nvPr/>
-        </p:nvSpPr>
-        <p:spPr>
-          <a:xfrm>
-            <a:off x="3922776" y="1545336"/>
-            <a:ext cx="1133856" cy="530352"/>
-          </a:xfrm>
-          <a:prstGeom prst="rect">
-            <a:avLst/>
-          </a:prstGeom>
-          <a:noFill/>
-        </p:spPr>
-        <p:txBody>
-          <a:bodyPr wrap="square" lIns="0" rIns="0" tIns="0" bIns="0">
-            <a:spAutoFit/>
-          </a:bodyPr>
-          <a:lstStyle/>
-          <a:p>
-            <a:pPr algn="l">
-              <a:spcAft>
-                <a:spcPts val="100"/>
-              </a:spcAft>
-            </a:pPr>
-            <a:r>
-              <a:rPr sz="1250" b="1">
+        <p:txBody>
+          <a:bodyPr wrap="square" lIns="0" rIns="0" tIns="0" bIns="0">
+            <a:spAutoFit/>
+          </a:bodyPr>
+          <a:lstStyle/>
+          <a:p>
+            <a:pPr algn="ctr">
+              <a:spcAft>
+                <a:spcPts val="0"/>
+              </a:spcAft>
+            </a:pPr>
+            <a:r>
+              <a:rPr sz="1000" b="1">
                 <a:solidFill>
                   <a:srgbClr val="141414"/>
                 </a:solidFill>
                 <a:latin typeface="Arial"/>
               </a:rPr>
-              <a:t>HTT</a:t>
-            </a:r>
-          </a:p>
-          <a:p>
-            <a:pPr algn="l">
-              <a:spcAft>
-                <a:spcPts val="100"/>
-              </a:spcAft>
-            </a:pPr>
-            <a:r>
-              <a:rPr sz="1600" b="1">
-                <a:solidFill>
-                  <a:srgbClr val="B3281E"/>
-                </a:solidFill>
-                <a:latin typeface="Arial"/>
-              </a:rPr>
-              <a:t>54.3%</a:t>
-            </a:r>
-            <a:r>
-              <a:rPr sz="900" b="0">
-                <a:solidFill>
-                  <a:srgbClr val="6B6B6B"/>
-                </a:solidFill>
-                <a:latin typeface="Arial"/>
-              </a:rPr>
-              <a:t>  170u</a:t>
-            </a:r>
-          </a:p>
-        </p:txBody>
-      </p:sp>
-      <p:sp>
-        <p:nvSpPr>
-          <p:cNvPr id="22" name="Rounded Rectangle 21"/>
-          <p:cNvSpPr/>
-          <p:nvPr/>
-        </p:nvSpPr>
-        <p:spPr>
-          <a:xfrm>
-            <a:off x="3840480" y="2322576"/>
-            <a:ext cx="1298448" cy="640080"/>
-          </a:xfrm>
-          <a:prstGeom prst="roundRect">
+              <a:t>FAT 2u · SFT 1u</a:t>
+            </a:r>
+            <a:r>
+              <a:rPr sz="800" b="0">
+                <a:solidFill>
+                  <a:srgbClr val="6B6B6B"/>
+                </a:solidFill>
+                <a:latin typeface="Arial"/>
+              </a:rPr>
+              <a:t>  quantity only</a:t>
+            </a:r>
+          </a:p>
+        </p:txBody>
+      </p:sp>
+      <p:sp>
+        <p:nvSpPr>
+          <p:cNvPr id="12" name="TextBox 11"/>
+          <p:cNvSpPr txBox="1"/>
+          <p:nvPr/>
+        </p:nvSpPr>
+        <p:spPr>
+          <a:xfrm>
+            <a:off x="6275566" y="4468831"/>
+            <a:ext cx="1141012" cy="219456"/>
+          </a:xfrm>
+          <a:prstGeom prst="rect">
             <a:avLst/>
           </a:prstGeom>
           <a:solidFill>
-            <a:srgbClr val="D5E8D4"/>
+            <a:srgbClr val="FFFFFF"/>
           </a:solidFill>
-          <a:ln w="12700">
+          <a:ln w="7620">
             <a:solidFill>
-              <a:srgbClr val="82B366"/>
+              <a:srgbClr val="C8C6C0"/>
             </a:solidFill>
           </a:ln>
           <a:effectLst/>
         </p:spPr>
-        <p:style>
-          <a:lnRef idx="1">
-            <a:schemeClr val="accent1"/>
-          </a:lnRef>
-          <a:fillRef idx="3">
-            <a:schemeClr val="accent1"/>
-          </a:fillRef>
-          <a:effectRef idx="2">
-            <a:schemeClr val="accent1"/>
-          </a:effectRef>
-          <a:fontRef idx="minor">
-            <a:schemeClr val="lt1"/>
-          </a:fontRef>
-        </p:style>
-        <p:txBody>
-          <a:bodyPr rtlCol="0" anchor="ctr"/>
-          <a:lstStyle/>
-          <a:p>
-            <a:pPr algn="ctr"/>
-          </a:p>
-        </p:txBody>
-      </p:sp>
-      <p:sp>
-        <p:nvSpPr>
-          <p:cNvPr id="23" name="TextBox 22"/>
-          <p:cNvSpPr txBox="1"/>
-          <p:nvPr/>
-        </p:nvSpPr>
-        <p:spPr>
-          <a:xfrm>
-            <a:off x="3922776" y="2386584"/>
-            <a:ext cx="1133856" cy="530352"/>
-          </a:xfrm>
-          <a:prstGeom prst="rect">
-            <a:avLst/>
-          </a:prstGeom>
-          <a:noFill/>
-        </p:spPr>
-        <p:txBody>
-          <a:bodyPr wrap="square" lIns="0" rIns="0" tIns="0" bIns="0">
-            <a:spAutoFit/>
-          </a:bodyPr>
-          <a:lstStyle/>
-          <a:p>
-            <a:pPr algn="l">
-              <a:spcAft>
-                <a:spcPts val="100"/>
-              </a:spcAft>
-            </a:pPr>
-            <a:r>
-              <a:rPr sz="1250" b="1">
+        <p:txBody>
+          <a:bodyPr wrap="square" lIns="0" rIns="0" tIns="0" bIns="0">
+            <a:spAutoFit/>
+          </a:bodyPr>
+          <a:lstStyle/>
+          <a:p>
+            <a:pPr algn="ctr">
+              <a:spcAft>
+                <a:spcPts val="0"/>
+              </a:spcAft>
+            </a:pPr>
+            <a:r>
+              <a:rPr sz="1000" b="1">
                 <a:solidFill>
                   <a:srgbClr val="141414"/>
                 </a:solidFill>
                 <a:latin typeface="Arial"/>
               </a:rPr>
-              <a:t>MLT</a:t>
-            </a:r>
-          </a:p>
-          <a:p>
-            <a:pPr algn="l">
-              <a:spcAft>
-                <a:spcPts val="100"/>
-              </a:spcAft>
-            </a:pPr>
-            <a:r>
-              <a:rPr sz="1600" b="1">
-                <a:solidFill>
-                  <a:srgbClr val="B56B00"/>
-                </a:solidFill>
-                <a:latin typeface="Arial"/>
-              </a:rPr>
-              <a:t>65.5%</a:t>
-            </a:r>
-            <a:r>
-              <a:rPr sz="900" b="0">
-                <a:solidFill>
-                  <a:srgbClr val="6B6B6B"/>
-                </a:solidFill>
-                <a:latin typeface="Arial"/>
-              </a:rPr>
-              <a:t>  228u</a:t>
-            </a:r>
-          </a:p>
-        </p:txBody>
-      </p:sp>
-      <p:sp>
-        <p:nvSpPr>
-          <p:cNvPr id="24" name="Rounded Rectangle 23"/>
-          <p:cNvSpPr/>
-          <p:nvPr/>
-        </p:nvSpPr>
-        <p:spPr>
-          <a:xfrm>
-            <a:off x="3840480" y="3163824"/>
-            <a:ext cx="1298448" cy="640080"/>
-          </a:xfrm>
-          <a:prstGeom prst="roundRect">
+              <a:t>3 units</a:t>
+            </a:r>
+            <a:r>
+              <a:rPr sz="800" b="0">
+                <a:solidFill>
+                  <a:srgbClr val="6B6B6B"/>
+                </a:solidFill>
+                <a:latin typeface="Arial"/>
+              </a:rPr>
+              <a:t>  quantity only</a:t>
+            </a:r>
+          </a:p>
+        </p:txBody>
+      </p:sp>
+      <p:sp>
+        <p:nvSpPr>
+          <p:cNvPr id="13" name="TextBox 12"/>
+          <p:cNvSpPr txBox="1"/>
+          <p:nvPr/>
+        </p:nvSpPr>
+        <p:spPr>
+          <a:xfrm>
+            <a:off x="7336270" y="3667539"/>
+            <a:ext cx="1141012" cy="219456"/>
+          </a:xfrm>
+          <a:prstGeom prst="rect">
             <a:avLst/>
           </a:prstGeom>
           <a:solidFill>
-            <a:srgbClr val="D9D9D9"/>
+            <a:srgbClr val="FFFFFF"/>
           </a:solidFill>
-          <a:ln w="12700">
+          <a:ln w="7620">
             <a:solidFill>
-              <a:srgbClr val="A5A5A5"/>
+              <a:srgbClr val="C8C6C0"/>
             </a:solidFill>
           </a:ln>
           <a:effectLst/>
         </p:spPr>
-        <p:style>
-          <a:lnRef idx="1">
-            <a:schemeClr val="accent1"/>
-          </a:lnRef>
-          <a:fillRef idx="3">
-            <a:schemeClr val="accent1"/>
-          </a:fillRef>
-          <a:effectRef idx="2">
-            <a:schemeClr val="accent1"/>
-          </a:effectRef>
-          <a:fontRef idx="minor">
-            <a:schemeClr val="lt1"/>
-          </a:fontRef>
-        </p:style>
-        <p:txBody>
-          <a:bodyPr rtlCol="0" anchor="ctr"/>
-          <a:lstStyle/>
-          <a:p>
-            <a:pPr algn="ctr"/>
-          </a:p>
-        </p:txBody>
-      </p:sp>
-      <p:sp>
-        <p:nvSpPr>
-          <p:cNvPr id="25" name="TextBox 24"/>
-          <p:cNvSpPr txBox="1"/>
-          <p:nvPr/>
-        </p:nvSpPr>
-        <p:spPr>
-          <a:xfrm>
-            <a:off x="3922776" y="3227832"/>
-            <a:ext cx="1133856" cy="530352"/>
-          </a:xfrm>
-          <a:prstGeom prst="rect">
-            <a:avLst/>
-          </a:prstGeom>
-          <a:noFill/>
-        </p:spPr>
-        <p:txBody>
-          <a:bodyPr wrap="square" lIns="0" rIns="0" tIns="0" bIns="0">
-            <a:spAutoFit/>
-          </a:bodyPr>
-          <a:lstStyle/>
-          <a:p>
-            <a:pPr algn="l">
-              <a:spcAft>
-                <a:spcPts val="100"/>
-              </a:spcAft>
-            </a:pPr>
-            <a:r>
-              <a:rPr sz="1250" b="0">
+        <p:txBody>
+          <a:bodyPr wrap="square" lIns="0" rIns="0" tIns="0" bIns="0">
+            <a:spAutoFit/>
+          </a:bodyPr>
+          <a:lstStyle/>
+          <a:p>
+            <a:pPr algn="ctr">
+              <a:spcAft>
+                <a:spcPts val="0"/>
+              </a:spcAft>
+            </a:pPr>
+            <a:r>
+              <a:rPr sz="1000" b="1">
                 <a:solidFill>
                   <a:srgbClr val="141414"/>
                 </a:solidFill>
                 <a:latin typeface="Arial"/>
               </a:rPr>
-              <a:t>ASSY</a:t>
-            </a:r>
-          </a:p>
-        </p:txBody>
-      </p:sp>
-      <p:sp>
-        <p:nvSpPr>
-          <p:cNvPr id="26" name="TextBox 25"/>
-          <p:cNvSpPr txBox="1"/>
-          <p:nvPr/>
-        </p:nvSpPr>
-        <p:spPr>
-          <a:xfrm>
-            <a:off x="5358384" y="1097280"/>
-            <a:ext cx="2743200" cy="237744"/>
-          </a:xfrm>
-          <a:prstGeom prst="rect">
-            <a:avLst/>
-          </a:prstGeom>
-          <a:noFill/>
-        </p:spPr>
-        <p:txBody>
-          <a:bodyPr wrap="square" lIns="0" rIns="0" tIns="0" bIns="0">
-            <a:spAutoFit/>
-          </a:bodyPr>
-          <a:lstStyle/>
-          <a:p>
-            <a:pPr algn="l">
-              <a:spcAft>
-                <a:spcPts val="0"/>
-              </a:spcAft>
-            </a:pPr>
-            <a:r>
-              <a:rPr sz="1000" b="0">
-                <a:solidFill>
-                  <a:srgbClr val="6B6B6B"/>
-                </a:solidFill>
-                <a:latin typeface="Arial"/>
-              </a:rPr>
-              <a:t/>
-            </a:r>
-            <a:r>
-              <a:rPr sz="1250" b="1">
-                <a:solidFill>
-                  <a:srgbClr val="141414"/>
-                </a:solidFill>
-                <a:latin typeface="Arial"/>
-              </a:rPr>
-              <a:t>FATP L10 2U/4U</a:t>
-            </a:r>
-          </a:p>
-        </p:txBody>
-      </p:sp>
-      <p:cxnSp>
-        <p:nvCxnSpPr>
-          <p:cNvPr id="27" name="Connector 26"/>
-          <p:cNvCxnSpPr/>
-          <p:nvPr/>
-        </p:nvCxnSpPr>
-        <p:spPr>
-          <a:xfrm>
-            <a:off x="7059168" y="1133856"/>
-            <a:ext cx="0" cy="4672584"/>
-          </a:xfrm>
-          <a:prstGeom prst="line">
-            <a:avLst/>
-          </a:prstGeom>
-          <a:ln w="11430">
+              <a:t>1 unit</a:t>
+            </a:r>
+            <a:r>
+              <a:rPr sz="800" b="0">
+                <a:solidFill>
+                  <a:srgbClr val="6B6B6B"/>
+                </a:solidFill>
+                <a:latin typeface="Arial"/>
+              </a:rPr>
+              <a:t>  quantity only</a:t>
+            </a:r>
+          </a:p>
+        </p:txBody>
+      </p:sp>
+      <p:sp>
+        <p:nvSpPr>
+          <p:cNvPr id="14" name="TextBox 13"/>
+          <p:cNvSpPr txBox="1"/>
+          <p:nvPr/>
+        </p:nvSpPr>
+        <p:spPr>
+          <a:xfrm>
+            <a:off x="8443092" y="4520714"/>
+            <a:ext cx="1141012" cy="219456"/>
+          </a:xfrm>
+          <a:prstGeom prst="rect">
+            <a:avLst/>
+          </a:prstGeom>
+          <a:solidFill>
+            <a:srgbClr val="FFFFFF"/>
+          </a:solidFill>
+          <a:ln w="7620">
             <a:solidFill>
-              <a:srgbClr val="B5B3AC"/>
-            </a:solidFill>
-            <a:prstDash val="dash"/>
-          </a:ln>
-        </p:spPr>
-        <p:style>
-          <a:lnRef idx="2">
-            <a:schemeClr val="accent1"/>
-          </a:lnRef>
-          <a:fillRef idx="0">
-            <a:schemeClr val="accent1"/>
-          </a:fillRef>
-          <a:effectRef idx="1">
-            <a:schemeClr val="accent1"/>
-          </a:effectRef>
-          <a:fontRef idx="minor">
-            <a:schemeClr val="tx1"/>
-          </a:fontRef>
-        </p:style>
-      </p:cxnSp>
-      <p:sp>
-        <p:nvSpPr>
-          <p:cNvPr id="28" name="Rounded Rectangle 27"/>
-          <p:cNvSpPr/>
-          <p:nvPr/>
-        </p:nvSpPr>
-        <p:spPr>
-          <a:xfrm>
-            <a:off x="5358384" y="1481328"/>
-            <a:ext cx="1078992" cy="640080"/>
-          </a:xfrm>
-          <a:prstGeom prst="roundRect">
-            <a:avLst/>
-          </a:prstGeom>
-          <a:solidFill>
-            <a:srgbClr val="D9D9D9"/>
-          </a:solidFill>
-          <a:ln w="12700">
-            <a:solidFill>
-              <a:srgbClr val="A5A5A5"/>
+              <a:srgbClr val="C8C6C0"/>
             </a:solidFill>
           </a:ln>
           <a:effectLst/>
         </p:spPr>
-        <p:style>
-          <a:lnRef idx="1">
-            <a:schemeClr val="accent1"/>
-          </a:lnRef>
-          <a:fillRef idx="3">
-            <a:schemeClr val="accent1"/>
-          </a:fillRef>
-          <a:effectRef idx="2">
-            <a:schemeClr val="accent1"/>
-          </a:effectRef>
-          <a:fontRef idx="minor">
-            <a:schemeClr val="lt1"/>
-          </a:fontRef>
-        </p:style>
-        <p:txBody>
-          <a:bodyPr rtlCol="0" anchor="ctr"/>
-          <a:lstStyle/>
-          <a:p>
-            <a:pPr algn="ctr"/>
-          </a:p>
-        </p:txBody>
-      </p:sp>
-      <p:sp>
-        <p:nvSpPr>
-          <p:cNvPr id="29" name="TextBox 28"/>
-          <p:cNvSpPr txBox="1"/>
-          <p:nvPr/>
-        </p:nvSpPr>
-        <p:spPr>
-          <a:xfrm>
-            <a:off x="5440680" y="1545336"/>
-            <a:ext cx="914400" cy="530352"/>
-          </a:xfrm>
-          <a:prstGeom prst="rect">
-            <a:avLst/>
-          </a:prstGeom>
-          <a:noFill/>
-        </p:spPr>
-        <p:txBody>
-          <a:bodyPr wrap="square" lIns="0" rIns="0" tIns="0" bIns="0">
-            <a:spAutoFit/>
-          </a:bodyPr>
-          <a:lstStyle/>
-          <a:p>
-            <a:pPr algn="l">
-              <a:spcAft>
-                <a:spcPts val="100"/>
-              </a:spcAft>
-            </a:pPr>
-            <a:r>
-              <a:rPr sz="1250" b="0">
+        <p:txBody>
+          <a:bodyPr wrap="square" lIns="0" rIns="0" tIns="0" bIns="0">
+            <a:spAutoFit/>
+          </a:bodyPr>
+          <a:lstStyle/>
+          <a:p>
+            <a:pPr algn="ctr">
+              <a:spcAft>
+                <a:spcPts val="0"/>
+              </a:spcAft>
+            </a:pPr>
+            <a:r>
+              <a:rPr sz="1000" b="1">
                 <a:solidFill>
                   <a:srgbClr val="141414"/>
                 </a:solidFill>
                 <a:latin typeface="Arial"/>
               </a:rPr>
-              <a:t>ASSY</a:t>
-            </a:r>
-          </a:p>
-        </p:txBody>
-      </p:sp>
-      <p:sp>
-        <p:nvSpPr>
-          <p:cNvPr id="30" name="Rectangle 29"/>
-          <p:cNvSpPr/>
-          <p:nvPr/>
-        </p:nvSpPr>
-        <p:spPr>
-          <a:xfrm>
-            <a:off x="6492240" y="1517904"/>
-            <a:ext cx="384048" cy="228600"/>
+              <a:t>2 units</a:t>
+            </a:r>
+            <a:r>
+              <a:rPr sz="800" b="0">
+                <a:solidFill>
+                  <a:srgbClr val="6B6B6B"/>
+                </a:solidFill>
+                <a:latin typeface="Arial"/>
+              </a:rPr>
+              <a:t>  quantity only</a:t>
+            </a:r>
+          </a:p>
+        </p:txBody>
+      </p:sp>
+      <p:sp>
+        <p:nvSpPr>
+          <p:cNvPr id="15" name="TextBox 14"/>
+          <p:cNvSpPr txBox="1"/>
+          <p:nvPr/>
+        </p:nvSpPr>
+        <p:spPr>
+          <a:xfrm>
+            <a:off x="8443092" y="5379653"/>
+            <a:ext cx="1141012" cy="219456"/>
           </a:xfrm>
           <a:prstGeom prst="rect">
             <a:avLst/>
           </a:prstGeom>
           <a:solidFill>
-            <a:srgbClr val="CFE2F3"/>
+            <a:srgbClr val="FFFFFF"/>
           </a:solidFill>
           <a:ln w="7620">
             <a:solidFill>
-              <a:srgbClr val="8A8882"/>
+              <a:srgbClr val="C8C6C0"/>
             </a:solidFill>
           </a:ln>
           <a:effectLst/>
         </p:spPr>
-        <p:style>
-          <a:lnRef idx="1">
-            <a:schemeClr val="accent1"/>
-          </a:lnRef>
-          <a:fillRef idx="3">
-            <a:schemeClr val="accent1"/>
-          </a:fillRef>
-          <a:effectRef idx="2">
-            <a:schemeClr val="accent1"/>
-          </a:effectRef>
-          <a:fontRef idx="minor">
-            <a:schemeClr val="lt1"/>
-          </a:fontRef>
-        </p:style>
-        <p:txBody>
-          <a:bodyPr rtlCol="0" anchor="ctr"/>
-          <a:lstStyle/>
-          <a:p>
-            <a:pPr algn="ctr"/>
-          </a:p>
-        </p:txBody>
-      </p:sp>
-      <p:sp>
-        <p:nvSpPr>
-          <p:cNvPr id="31" name="TextBox 30"/>
-          <p:cNvSpPr txBox="1"/>
-          <p:nvPr/>
-        </p:nvSpPr>
-        <p:spPr>
-          <a:xfrm>
-            <a:off x="6492240" y="1545336"/>
-            <a:ext cx="384048" cy="182880"/>
-          </a:xfrm>
-          <a:prstGeom prst="rect">
-            <a:avLst/>
-          </a:prstGeom>
-          <a:noFill/>
-        </p:spPr>
         <p:txBody>
           <a:bodyPr wrap="square" lIns="0" rIns="0" tIns="0" bIns="0">
             <a:spAutoFit/>
@@ -5150,289 +4428,248 @@
               </a:spcAft>
             </a:pPr>
             <a:r>
-              <a:rPr sz="900" b="1">
+              <a:rPr sz="800" b="0">
+                <a:solidFill>
+                  <a:srgbClr val="6B6B6B"/>
+                </a:solidFill>
+                <a:latin typeface="Arial"/>
+              </a:rPr>
+              <a:t>counted with FAT / SFT</a:t>
+            </a:r>
+          </a:p>
+        </p:txBody>
+      </p:sp>
+      <p:sp>
+        <p:nvSpPr>
+          <p:cNvPr id="16" name="TextBox 15"/>
+          <p:cNvSpPr txBox="1"/>
+          <p:nvPr/>
+        </p:nvSpPr>
+        <p:spPr>
+          <a:xfrm>
+            <a:off x="10001548" y="1298448"/>
+            <a:ext cx="2011680" cy="914400"/>
+          </a:xfrm>
+          <a:prstGeom prst="rect">
+            <a:avLst/>
+          </a:prstGeom>
+          <a:noFill/>
+        </p:spPr>
+        <p:txBody>
+          <a:bodyPr wrap="square" lIns="0" rIns="0" tIns="0" bIns="0">
+            <a:spAutoFit/>
+          </a:bodyPr>
+          <a:lstStyle/>
+          <a:p>
+            <a:pPr algn="l">
+              <a:spcAft>
+                <a:spcPts val="100"/>
+              </a:spcAft>
+            </a:pPr>
+            <a:r>
+              <a:rPr sz="1000" b="0">
+                <a:solidFill>
+                  <a:srgbClr val="6B6B6B"/>
+                </a:solidFill>
+                <a:latin typeface="Arial"/>
+              </a:rPr>
+              <a:t>Rolled first-pass</a:t>
+            </a:r>
+          </a:p>
+          <a:p>
+            <a:pPr algn="l">
+              <a:spcAft>
+                <a:spcPts val="100"/>
+              </a:spcAft>
+            </a:pPr>
+            <a:r>
+              <a:rPr sz="2600" b="1">
+                <a:solidFill>
+                  <a:srgbClr val="1C62B8"/>
+                </a:solidFill>
+                <a:latin typeface="Arial"/>
+              </a:rPr>
+              <a:t>35.6%</a:t>
+            </a:r>
+          </a:p>
+          <a:p>
+            <a:pPr algn="l">
+              <a:spcAft>
+                <a:spcPts val="100"/>
+              </a:spcAft>
+            </a:pPr>
+            <a:r>
+              <a:rPr sz="900" b="0">
+                <a:solidFill>
+                  <a:srgbClr val="6B6B6B"/>
+                </a:solidFill>
+                <a:latin typeface="Arial"/>
+              </a:rPr>
+              <a:t>MLT × HTT</a:t>
+            </a:r>
+          </a:p>
+        </p:txBody>
+      </p:sp>
+      <p:sp>
+        <p:nvSpPr>
+          <p:cNvPr id="17" name="TextBox 16"/>
+          <p:cNvSpPr txBox="1"/>
+          <p:nvPr/>
+        </p:nvSpPr>
+        <p:spPr>
+          <a:xfrm>
+            <a:off x="10001548" y="2487168"/>
+            <a:ext cx="2011680" cy="914400"/>
+          </a:xfrm>
+          <a:prstGeom prst="rect">
+            <a:avLst/>
+          </a:prstGeom>
+          <a:noFill/>
+        </p:spPr>
+        <p:txBody>
+          <a:bodyPr wrap="square" lIns="0" rIns="0" tIns="0" bIns="0">
+            <a:spAutoFit/>
+          </a:bodyPr>
+          <a:lstStyle/>
+          <a:p>
+            <a:pPr algn="l">
+              <a:spcAft>
+                <a:spcPts val="100"/>
+              </a:spcAft>
+            </a:pPr>
+            <a:r>
+              <a:rPr sz="1000" b="0">
+                <a:solidFill>
+                  <a:srgbClr val="6B6B6B"/>
+                </a:solidFill>
+                <a:latin typeface="Arial"/>
+              </a:rPr>
+              <a:t>Through the line</a:t>
+            </a:r>
+          </a:p>
+          <a:p>
+            <a:pPr algn="l">
+              <a:spcAft>
+                <a:spcPts val="100"/>
+              </a:spcAft>
+            </a:pPr>
+            <a:r>
+              <a:rPr sz="1800" b="1">
                 <a:solidFill>
                   <a:srgbClr val="141414"/>
                 </a:solidFill>
                 <a:latin typeface="Arial"/>
               </a:rPr>
-              <a:t>4U</a:t>
-            </a:r>
-          </a:p>
-        </p:txBody>
-      </p:sp>
-      <p:sp>
-        <p:nvSpPr>
-          <p:cNvPr id="32" name="Rectangle 31"/>
-          <p:cNvSpPr/>
-          <p:nvPr/>
-        </p:nvSpPr>
-        <p:spPr>
-          <a:xfrm>
-            <a:off x="6492240" y="1801368"/>
-            <a:ext cx="384048" cy="228600"/>
-          </a:xfrm>
-          <a:prstGeom prst="rect">
-            <a:avLst/>
-          </a:prstGeom>
-          <a:solidFill>
-            <a:srgbClr val="FFF2CC"/>
-          </a:solidFill>
-          <a:ln w="7620">
-            <a:solidFill>
-              <a:srgbClr val="8A8882"/>
-            </a:solidFill>
-          </a:ln>
-          <a:effectLst/>
-        </p:spPr>
-        <p:style>
-          <a:lnRef idx="1">
-            <a:schemeClr val="accent1"/>
-          </a:lnRef>
-          <a:fillRef idx="3">
-            <a:schemeClr val="accent1"/>
-          </a:fillRef>
-          <a:effectRef idx="2">
-            <a:schemeClr val="accent1"/>
-          </a:effectRef>
-          <a:fontRef idx="minor">
-            <a:schemeClr val="lt1"/>
-          </a:fontRef>
-        </p:style>
-        <p:txBody>
-          <a:bodyPr rtlCol="0" anchor="ctr"/>
-          <a:lstStyle/>
-          <a:p>
-            <a:pPr algn="ctr"/>
-          </a:p>
-        </p:txBody>
-      </p:sp>
-      <p:sp>
-        <p:nvSpPr>
-          <p:cNvPr id="33" name="TextBox 32"/>
-          <p:cNvSpPr txBox="1"/>
-          <p:nvPr/>
-        </p:nvSpPr>
-        <p:spPr>
-          <a:xfrm>
-            <a:off x="6492240" y="1828800"/>
-            <a:ext cx="384048" cy="182880"/>
-          </a:xfrm>
-          <a:prstGeom prst="rect">
-            <a:avLst/>
-          </a:prstGeom>
-          <a:noFill/>
-        </p:spPr>
-        <p:txBody>
-          <a:bodyPr wrap="square" lIns="0" rIns="0" tIns="0" bIns="0">
-            <a:spAutoFit/>
-          </a:bodyPr>
-          <a:lstStyle/>
-          <a:p>
-            <a:pPr algn="ctr">
-              <a:spcAft>
-                <a:spcPts val="0"/>
-              </a:spcAft>
-            </a:pPr>
-            <a:r>
-              <a:rPr sz="900" b="1">
+              <a:t>407 units</a:t>
+            </a:r>
+          </a:p>
+          <a:p>
+            <a:pPr algn="l">
+              <a:spcAft>
+                <a:spcPts val="100"/>
+              </a:spcAft>
+            </a:pPr>
+            <a:r>
+              <a:rPr sz="900" b="0">
+                <a:solidFill>
+                  <a:srgbClr val="6B6B6B"/>
+                </a:solidFill>
+                <a:latin typeface="Arial"/>
+              </a:rPr>
+              <a:t>573 runs across 7 steps</a:t>
+            </a:r>
+          </a:p>
+        </p:txBody>
+      </p:sp>
+      <p:sp>
+        <p:nvSpPr>
+          <p:cNvPr id="18" name="TextBox 17"/>
+          <p:cNvSpPr txBox="1"/>
+          <p:nvPr/>
+        </p:nvSpPr>
+        <p:spPr>
+          <a:xfrm>
+            <a:off x="10001548" y="3520440"/>
+            <a:ext cx="2011680" cy="2651760"/>
+          </a:xfrm>
+          <a:prstGeom prst="rect">
+            <a:avLst/>
+          </a:prstGeom>
+          <a:noFill/>
+        </p:spPr>
+        <p:txBody>
+          <a:bodyPr wrap="square" lIns="0" rIns="0" tIns="0" bIns="0">
+            <a:spAutoFit/>
+          </a:bodyPr>
+          <a:lstStyle/>
+          <a:p>
+            <a:pPr algn="l">
+              <a:spcAft>
+                <a:spcPts val="500"/>
+              </a:spcAft>
+            </a:pPr>
+            <a:r>
+              <a:rPr sz="1000" b="1">
+                <a:solidFill>
+                  <a:srgbClr val="6B6B6B"/>
+                </a:solidFill>
+                <a:latin typeface="Arial"/>
+              </a:rPr>
+              <a:t>Reading the numbers</a:t>
+            </a:r>
+          </a:p>
+          <a:p>
+            <a:pPr algn="l">
+              <a:spcAft>
+                <a:spcPts val="500"/>
+              </a:spcAft>
+            </a:pPr>
+            <a:r>
+              <a:rPr sz="850" b="0">
                 <a:solidFill>
                   <a:srgbClr val="141414"/>
                 </a:solidFill>
                 <a:latin typeface="Arial"/>
               </a:rPr>
-              <a:t>2U</a:t>
-            </a:r>
-          </a:p>
-        </p:txBody>
-      </p:sp>
-      <p:sp>
-        <p:nvSpPr>
-          <p:cNvPr id="34" name="TextBox 33"/>
-          <p:cNvSpPr txBox="1"/>
-          <p:nvPr/>
-        </p:nvSpPr>
-        <p:spPr>
-          <a:xfrm>
-            <a:off x="7242048" y="1097280"/>
-            <a:ext cx="2743200" cy="237744"/>
-          </a:xfrm>
-          <a:prstGeom prst="rect">
-            <a:avLst/>
-          </a:prstGeom>
-          <a:noFill/>
-        </p:spPr>
-        <p:txBody>
-          <a:bodyPr wrap="square" lIns="0" rIns="0" tIns="0" bIns="0">
-            <a:spAutoFit/>
-          </a:bodyPr>
-          <a:lstStyle/>
-          <a:p>
-            <a:pPr algn="l">
-              <a:spcAft>
-                <a:spcPts val="0"/>
-              </a:spcAft>
-            </a:pPr>
-            <a:r>
-              <a:rPr sz="1000" b="0">
-                <a:solidFill>
-                  <a:srgbClr val="6B6B6B"/>
-                </a:solidFill>
-                <a:latin typeface="Arial"/>
-              </a:rPr>
-              <a:t/>
-            </a:r>
-            <a:r>
-              <a:rPr sz="1250" b="1">
+              <a:t>A percentage is a first-pass yield: units that passed at their first attempt that week.</a:t>
+            </a:r>
+          </a:p>
+          <a:p>
+            <a:pPr algn="l">
+              <a:spcAft>
+                <a:spcPts val="500"/>
+              </a:spcAft>
+            </a:pPr>
+            <a:r>
+              <a:rPr sz="850" b="0">
                 <a:solidFill>
                   <a:srgbClr val="141414"/>
                 </a:solidFill>
                 <a:latin typeface="Arial"/>
               </a:rPr>
-              <a:t>FATP L10 6U</a:t>
-            </a:r>
-          </a:p>
-        </p:txBody>
-      </p:sp>
-      <p:cxnSp>
-        <p:nvCxnSpPr>
-          <p:cNvPr id="35" name="Connector 34"/>
-          <p:cNvCxnSpPr/>
-          <p:nvPr/>
-        </p:nvCxnSpPr>
-        <p:spPr>
-          <a:xfrm>
-            <a:off x="10204704" y="1133856"/>
-            <a:ext cx="0" cy="4672584"/>
-          </a:xfrm>
-          <a:prstGeom prst="line">
-            <a:avLst/>
-          </a:prstGeom>
-          <a:ln w="11430">
-            <a:solidFill>
-              <a:srgbClr val="B5B3AC"/>
-            </a:solidFill>
-            <a:prstDash val="dash"/>
-          </a:ln>
-        </p:spPr>
-        <p:style>
-          <a:lnRef idx="2">
-            <a:schemeClr val="accent1"/>
-          </a:lnRef>
-          <a:fillRef idx="0">
-            <a:schemeClr val="accent1"/>
-          </a:fillRef>
-          <a:effectRef idx="1">
-            <a:schemeClr val="accent1"/>
-          </a:effectRef>
-          <a:fontRef idx="minor">
-            <a:schemeClr val="tx1"/>
-          </a:fontRef>
-        </p:style>
-      </p:cxnSp>
-      <p:sp>
-        <p:nvSpPr>
-          <p:cNvPr id="36" name="Rounded Rectangle 35"/>
-          <p:cNvSpPr/>
-          <p:nvPr/>
-        </p:nvSpPr>
-        <p:spPr>
-          <a:xfrm>
-            <a:off x="7242048" y="2322576"/>
-            <a:ext cx="1389888" cy="640080"/>
-          </a:xfrm>
-          <a:prstGeom prst="roundRect">
-            <a:avLst/>
-          </a:prstGeom>
-          <a:solidFill>
-            <a:srgbClr val="F2ECD9"/>
-          </a:solidFill>
-          <a:ln w="12700">
-            <a:solidFill>
-              <a:srgbClr val="C9B46B"/>
-            </a:solidFill>
-          </a:ln>
-          <a:effectLst/>
-        </p:spPr>
-        <p:style>
-          <a:lnRef idx="1">
-            <a:schemeClr val="accent1"/>
-          </a:lnRef>
-          <a:fillRef idx="3">
-            <a:schemeClr val="accent1"/>
-          </a:fillRef>
-          <a:effectRef idx="2">
-            <a:schemeClr val="accent1"/>
-          </a:effectRef>
-          <a:fontRef idx="minor">
-            <a:schemeClr val="lt1"/>
-          </a:fontRef>
-        </p:style>
-        <p:txBody>
-          <a:bodyPr rtlCol="0" anchor="ctr"/>
-          <a:lstStyle/>
-          <a:p>
-            <a:pPr algn="ctr"/>
-          </a:p>
-        </p:txBody>
-      </p:sp>
-      <p:sp>
-        <p:nvSpPr>
-          <p:cNvPr id="37" name="TextBox 36"/>
-          <p:cNvSpPr txBox="1"/>
-          <p:nvPr/>
-        </p:nvSpPr>
-        <p:spPr>
-          <a:xfrm>
-            <a:off x="7324344" y="2386584"/>
-            <a:ext cx="1225296" cy="530352"/>
-          </a:xfrm>
-          <a:prstGeom prst="rect">
-            <a:avLst/>
-          </a:prstGeom>
-          <a:noFill/>
-        </p:spPr>
-        <p:txBody>
-          <a:bodyPr wrap="square" lIns="0" rIns="0" tIns="0" bIns="0">
-            <a:spAutoFit/>
-          </a:bodyPr>
-          <a:lstStyle/>
-          <a:p>
-            <a:pPr algn="l">
-              <a:spcAft>
-                <a:spcPts val="100"/>
-              </a:spcAft>
-            </a:pPr>
-            <a:r>
-              <a:rPr sz="1250" b="1">
+              <a:t>A count means no yield is reported. L10 FAT, L10 SFT, L10 RIN, L10 2U, L11 Test are chassis and rack level and in bring-up — a percentage over three units swings 33 points on one of them.</a:t>
+            </a:r>
+          </a:p>
+          <a:p>
+            <a:pPr algn="l">
+              <a:spcAft>
+                <a:spcPts val="500"/>
+              </a:spcAft>
+            </a:pPr>
+            <a:r>
+              <a:rPr sz="850" b="0">
                 <a:solidFill>
                   <a:srgbClr val="141414"/>
                 </a:solidFill>
                 <a:latin typeface="Arial"/>
               </a:rPr>
-              <a:t>FAT / SFT</a:t>
-            </a:r>
-          </a:p>
-          <a:p>
-            <a:pPr algn="l">
-              <a:spcAft>
-                <a:spcPts val="100"/>
-              </a:spcAft>
-            </a:pPr>
-            <a:r>
-              <a:rPr sz="1100" b="1">
-                <a:solidFill>
-                  <a:srgbClr val="141414"/>
-                </a:solidFill>
-                <a:latin typeface="Arial"/>
-              </a:rPr>
-              <a:t>FAT 2u · SFT 1u</a:t>
-            </a:r>
-          </a:p>
-          <a:p>
-            <a:pPr algn="l">
-              <a:spcAft>
-                <a:spcPts val="100"/>
+              <a:t>WST and FT are reported by Sigurd. VBB is drawn for the flow and left out of the yield view.</a:t>
+            </a:r>
+          </a:p>
+          <a:p>
+            <a:pPr algn="l">
+              <a:spcAft>
+                <a:spcPts val="500"/>
               </a:spcAft>
             </a:pPr>
             <a:r>
@@ -5442,1960 +4679,7 @@
                 </a:solidFill>
                 <a:latin typeface="Arial"/>
               </a:rPr>
-              <a:t>quantity only</a:t>
-            </a:r>
-          </a:p>
-        </p:txBody>
-      </p:sp>
-      <p:sp>
-        <p:nvSpPr>
-          <p:cNvPr id="38" name="Rounded Rectangle 37"/>
-          <p:cNvSpPr/>
-          <p:nvPr/>
-        </p:nvSpPr>
-        <p:spPr>
-          <a:xfrm>
-            <a:off x="7242048" y="3163824"/>
-            <a:ext cx="1389888" cy="640080"/>
-          </a:xfrm>
-          <a:prstGeom prst="roundRect">
-            <a:avLst/>
-          </a:prstGeom>
-          <a:solidFill>
-            <a:srgbClr val="F2ECD9"/>
-          </a:solidFill>
-          <a:ln w="12700">
-            <a:solidFill>
-              <a:srgbClr val="C9B46B"/>
-            </a:solidFill>
-          </a:ln>
-          <a:effectLst/>
-        </p:spPr>
-        <p:style>
-          <a:lnRef idx="1">
-            <a:schemeClr val="accent1"/>
-          </a:lnRef>
-          <a:fillRef idx="3">
-            <a:schemeClr val="accent1"/>
-          </a:fillRef>
-          <a:effectRef idx="2">
-            <a:schemeClr val="accent1"/>
-          </a:effectRef>
-          <a:fontRef idx="minor">
-            <a:schemeClr val="lt1"/>
-          </a:fontRef>
-        </p:style>
-        <p:txBody>
-          <a:bodyPr rtlCol="0" anchor="ctr"/>
-          <a:lstStyle/>
-          <a:p>
-            <a:pPr algn="ctr"/>
-          </a:p>
-        </p:txBody>
-      </p:sp>
-      <p:sp>
-        <p:nvSpPr>
-          <p:cNvPr id="39" name="TextBox 38"/>
-          <p:cNvSpPr txBox="1"/>
-          <p:nvPr/>
-        </p:nvSpPr>
-        <p:spPr>
-          <a:xfrm>
-            <a:off x="7324344" y="3227832"/>
-            <a:ext cx="1225296" cy="530352"/>
-          </a:xfrm>
-          <a:prstGeom prst="rect">
-            <a:avLst/>
-          </a:prstGeom>
-          <a:noFill/>
-        </p:spPr>
-        <p:txBody>
-          <a:bodyPr wrap="square" lIns="0" rIns="0" tIns="0" bIns="0">
-            <a:spAutoFit/>
-          </a:bodyPr>
-          <a:lstStyle/>
-          <a:p>
-            <a:pPr algn="l">
-              <a:spcAft>
-                <a:spcPts val="100"/>
-              </a:spcAft>
-            </a:pPr>
-            <a:r>
-              <a:rPr sz="1250" b="1">
-                <a:solidFill>
-                  <a:srgbClr val="141414"/>
-                </a:solidFill>
-                <a:latin typeface="Arial"/>
-              </a:rPr>
-              <a:t>2U</a:t>
-            </a:r>
-          </a:p>
-          <a:p>
-            <a:pPr algn="l">
-              <a:spcAft>
-                <a:spcPts val="100"/>
-              </a:spcAft>
-            </a:pPr>
-            <a:r>
-              <a:rPr sz="1300" b="1">
-                <a:solidFill>
-                  <a:srgbClr val="141414"/>
-                </a:solidFill>
-                <a:latin typeface="Arial"/>
-              </a:rPr>
-              <a:t>3 units</a:t>
-            </a:r>
-          </a:p>
-          <a:p>
-            <a:pPr algn="l">
-              <a:spcAft>
-                <a:spcPts val="100"/>
-              </a:spcAft>
-            </a:pPr>
-            <a:r>
-              <a:rPr sz="800" b="0">
-                <a:solidFill>
-                  <a:srgbClr val="6B6B6B"/>
-                </a:solidFill>
-                <a:latin typeface="Arial"/>
-              </a:rPr>
-              <a:t>quantity only</a:t>
-            </a:r>
-          </a:p>
-        </p:txBody>
-      </p:sp>
-      <p:sp>
-        <p:nvSpPr>
-          <p:cNvPr id="40" name="Rounded Rectangle 39"/>
-          <p:cNvSpPr/>
-          <p:nvPr/>
-        </p:nvSpPr>
-        <p:spPr>
-          <a:xfrm>
-            <a:off x="7242048" y="4005072"/>
-            <a:ext cx="1389888" cy="640080"/>
-          </a:xfrm>
-          <a:prstGeom prst="roundRect">
-            <a:avLst/>
-          </a:prstGeom>
-          <a:solidFill>
-            <a:srgbClr val="D9D9D9"/>
-          </a:solidFill>
-          <a:ln w="12700">
-            <a:solidFill>
-              <a:srgbClr val="A5A5A5"/>
-            </a:solidFill>
-          </a:ln>
-          <a:effectLst/>
-        </p:spPr>
-        <p:style>
-          <a:lnRef idx="1">
-            <a:schemeClr val="accent1"/>
-          </a:lnRef>
-          <a:fillRef idx="3">
-            <a:schemeClr val="accent1"/>
-          </a:fillRef>
-          <a:effectRef idx="2">
-            <a:schemeClr val="accent1"/>
-          </a:effectRef>
-          <a:fontRef idx="minor">
-            <a:schemeClr val="lt1"/>
-          </a:fontRef>
-        </p:style>
-        <p:txBody>
-          <a:bodyPr rtlCol="0" anchor="ctr"/>
-          <a:lstStyle/>
-          <a:p>
-            <a:pPr algn="ctr"/>
-          </a:p>
-        </p:txBody>
-      </p:sp>
-      <p:sp>
-        <p:nvSpPr>
-          <p:cNvPr id="41" name="TextBox 40"/>
-          <p:cNvSpPr txBox="1"/>
-          <p:nvPr/>
-        </p:nvSpPr>
-        <p:spPr>
-          <a:xfrm>
-            <a:off x="7324344" y="4069080"/>
-            <a:ext cx="1225296" cy="530352"/>
-          </a:xfrm>
-          <a:prstGeom prst="rect">
-            <a:avLst/>
-          </a:prstGeom>
-          <a:noFill/>
-        </p:spPr>
-        <p:txBody>
-          <a:bodyPr wrap="square" lIns="0" rIns="0" tIns="0" bIns="0">
-            <a:spAutoFit/>
-          </a:bodyPr>
-          <a:lstStyle/>
-          <a:p>
-            <a:pPr algn="l">
-              <a:spcAft>
-                <a:spcPts val="100"/>
-              </a:spcAft>
-            </a:pPr>
-            <a:r>
-              <a:rPr sz="1250" b="0">
-                <a:solidFill>
-                  <a:srgbClr val="141414"/>
-                </a:solidFill>
-                <a:latin typeface="Arial"/>
-              </a:rPr>
-              <a:t>ASSY</a:t>
-            </a:r>
-          </a:p>
-        </p:txBody>
-      </p:sp>
-      <p:sp>
-        <p:nvSpPr>
-          <p:cNvPr id="42" name="Rounded Rectangle 41"/>
-          <p:cNvSpPr/>
-          <p:nvPr/>
-        </p:nvSpPr>
-        <p:spPr>
-          <a:xfrm>
-            <a:off x="8741664" y="2322576"/>
-            <a:ext cx="1298448" cy="640080"/>
-          </a:xfrm>
-          <a:prstGeom prst="roundRect">
-            <a:avLst/>
-          </a:prstGeom>
-          <a:solidFill>
-            <a:srgbClr val="F2ECD9"/>
-          </a:solidFill>
-          <a:ln w="12700">
-            <a:solidFill>
-              <a:srgbClr val="C9B46B"/>
-            </a:solidFill>
-          </a:ln>
-          <a:effectLst/>
-        </p:spPr>
-        <p:style>
-          <a:lnRef idx="1">
-            <a:schemeClr val="accent1"/>
-          </a:lnRef>
-          <a:fillRef idx="3">
-            <a:schemeClr val="accent1"/>
-          </a:fillRef>
-          <a:effectRef idx="2">
-            <a:schemeClr val="accent1"/>
-          </a:effectRef>
-          <a:fontRef idx="minor">
-            <a:schemeClr val="lt1"/>
-          </a:fontRef>
-        </p:style>
-        <p:txBody>
-          <a:bodyPr rtlCol="0" anchor="ctr"/>
-          <a:lstStyle/>
-          <a:p>
-            <a:pPr algn="ctr"/>
-          </a:p>
-        </p:txBody>
-      </p:sp>
-      <p:sp>
-        <p:nvSpPr>
-          <p:cNvPr id="43" name="TextBox 42"/>
-          <p:cNvSpPr txBox="1"/>
-          <p:nvPr/>
-        </p:nvSpPr>
-        <p:spPr>
-          <a:xfrm>
-            <a:off x="8823960" y="2386584"/>
-            <a:ext cx="1133856" cy="530352"/>
-          </a:xfrm>
-          <a:prstGeom prst="rect">
-            <a:avLst/>
-          </a:prstGeom>
-          <a:noFill/>
-        </p:spPr>
-        <p:txBody>
-          <a:bodyPr wrap="square" lIns="0" rIns="0" tIns="0" bIns="0">
-            <a:spAutoFit/>
-          </a:bodyPr>
-          <a:lstStyle/>
-          <a:p>
-            <a:pPr algn="l">
-              <a:spcAft>
-                <a:spcPts val="100"/>
-              </a:spcAft>
-            </a:pPr>
-            <a:r>
-              <a:rPr sz="1250" b="1">
-                <a:solidFill>
-                  <a:srgbClr val="141414"/>
-                </a:solidFill>
-                <a:latin typeface="Arial"/>
-              </a:rPr>
-              <a:t>Runin</a:t>
-            </a:r>
-          </a:p>
-          <a:p>
-            <a:pPr algn="l">
-              <a:spcAft>
-                <a:spcPts val="100"/>
-              </a:spcAft>
-            </a:pPr>
-            <a:r>
-              <a:rPr sz="1300" b="1">
-                <a:solidFill>
-                  <a:srgbClr val="141414"/>
-                </a:solidFill>
-                <a:latin typeface="Arial"/>
-              </a:rPr>
-              <a:t>1 unit</a:t>
-            </a:r>
-          </a:p>
-          <a:p>
-            <a:pPr algn="l">
-              <a:spcAft>
-                <a:spcPts val="100"/>
-              </a:spcAft>
-            </a:pPr>
-            <a:r>
-              <a:rPr sz="800" b="0">
-                <a:solidFill>
-                  <a:srgbClr val="6B6B6B"/>
-                </a:solidFill>
-                <a:latin typeface="Arial"/>
-              </a:rPr>
-              <a:t>quantity only</a:t>
-            </a:r>
-          </a:p>
-        </p:txBody>
-      </p:sp>
-      <p:sp>
-        <p:nvSpPr>
-          <p:cNvPr id="44" name="TextBox 43"/>
-          <p:cNvSpPr txBox="1"/>
-          <p:nvPr/>
-        </p:nvSpPr>
-        <p:spPr>
-          <a:xfrm>
-            <a:off x="10369296" y="1097280"/>
-            <a:ext cx="1655064" cy="237744"/>
-          </a:xfrm>
-          <a:prstGeom prst="rect">
-            <a:avLst/>
-          </a:prstGeom>
-          <a:noFill/>
-        </p:spPr>
-        <p:txBody>
-          <a:bodyPr wrap="square" lIns="0" rIns="0" tIns="0" bIns="0">
-            <a:spAutoFit/>
-          </a:bodyPr>
-          <a:lstStyle/>
-          <a:p>
-            <a:pPr algn="l">
-              <a:spcAft>
-                <a:spcPts val="0"/>
-              </a:spcAft>
-            </a:pPr>
-            <a:r>
-              <a:rPr sz="1000" b="0">
-                <a:solidFill>
-                  <a:srgbClr val="6B6B6B"/>
-                </a:solidFill>
-                <a:latin typeface="Arial"/>
-              </a:rPr>
-              <a:t/>
-            </a:r>
-            <a:r>
-              <a:rPr sz="1250" b="1">
-                <a:solidFill>
-                  <a:srgbClr val="141414"/>
-                </a:solidFill>
-                <a:latin typeface="Arial"/>
-              </a:rPr>
-              <a:t>Rack L11</a:t>
-            </a:r>
-          </a:p>
-        </p:txBody>
-      </p:sp>
-      <p:sp>
-        <p:nvSpPr>
-          <p:cNvPr id="45" name="Rounded Rectangle 44"/>
-          <p:cNvSpPr/>
-          <p:nvPr/>
-        </p:nvSpPr>
-        <p:spPr>
-          <a:xfrm>
-            <a:off x="10369296" y="2322576"/>
-            <a:ext cx="1389888" cy="640080"/>
-          </a:xfrm>
-          <a:prstGeom prst="roundRect">
-            <a:avLst/>
-          </a:prstGeom>
-          <a:solidFill>
-            <a:srgbClr val="D9D9D9"/>
-          </a:solidFill>
-          <a:ln w="12700">
-            <a:solidFill>
-              <a:srgbClr val="A5A5A5"/>
-            </a:solidFill>
-          </a:ln>
-          <a:effectLst/>
-        </p:spPr>
-        <p:style>
-          <a:lnRef idx="1">
-            <a:schemeClr val="accent1"/>
-          </a:lnRef>
-          <a:fillRef idx="3">
-            <a:schemeClr val="accent1"/>
-          </a:fillRef>
-          <a:effectRef idx="2">
-            <a:schemeClr val="accent1"/>
-          </a:effectRef>
-          <a:fontRef idx="minor">
-            <a:schemeClr val="lt1"/>
-          </a:fontRef>
-        </p:style>
-        <p:txBody>
-          <a:bodyPr rtlCol="0" anchor="ctr"/>
-          <a:lstStyle/>
-          <a:p>
-            <a:pPr algn="ctr"/>
-          </a:p>
-        </p:txBody>
-      </p:sp>
-      <p:sp>
-        <p:nvSpPr>
-          <p:cNvPr id="46" name="TextBox 45"/>
-          <p:cNvSpPr txBox="1"/>
-          <p:nvPr/>
-        </p:nvSpPr>
-        <p:spPr>
-          <a:xfrm>
-            <a:off x="10451592" y="2386584"/>
-            <a:ext cx="1225296" cy="530352"/>
-          </a:xfrm>
-          <a:prstGeom prst="rect">
-            <a:avLst/>
-          </a:prstGeom>
-          <a:noFill/>
-        </p:spPr>
-        <p:txBody>
-          <a:bodyPr wrap="square" lIns="0" rIns="0" tIns="0" bIns="0">
-            <a:spAutoFit/>
-          </a:bodyPr>
-          <a:lstStyle/>
-          <a:p>
-            <a:pPr algn="l">
-              <a:spcAft>
-                <a:spcPts val="100"/>
-              </a:spcAft>
-            </a:pPr>
-            <a:r>
-              <a:rPr sz="1250" b="0">
-                <a:solidFill>
-                  <a:srgbClr val="141414"/>
-                </a:solidFill>
-                <a:latin typeface="Arial"/>
-              </a:rPr>
-              <a:t>ASSY</a:t>
-            </a:r>
-          </a:p>
-        </p:txBody>
-      </p:sp>
-      <p:sp>
-        <p:nvSpPr>
-          <p:cNvPr id="47" name="Rounded Rectangle 46"/>
-          <p:cNvSpPr/>
-          <p:nvPr/>
-        </p:nvSpPr>
-        <p:spPr>
-          <a:xfrm>
-            <a:off x="10369296" y="3163824"/>
-            <a:ext cx="1389888" cy="640080"/>
-          </a:xfrm>
-          <a:prstGeom prst="roundRect">
-            <a:avLst/>
-          </a:prstGeom>
-          <a:solidFill>
-            <a:srgbClr val="F2ECD9"/>
-          </a:solidFill>
-          <a:ln w="12700">
-            <a:solidFill>
-              <a:srgbClr val="C9B46B"/>
-            </a:solidFill>
-          </a:ln>
-          <a:effectLst/>
-        </p:spPr>
-        <p:style>
-          <a:lnRef idx="1">
-            <a:schemeClr val="accent1"/>
-          </a:lnRef>
-          <a:fillRef idx="3">
-            <a:schemeClr val="accent1"/>
-          </a:fillRef>
-          <a:effectRef idx="2">
-            <a:schemeClr val="accent1"/>
-          </a:effectRef>
-          <a:fontRef idx="minor">
-            <a:schemeClr val="lt1"/>
-          </a:fontRef>
-        </p:style>
-        <p:txBody>
-          <a:bodyPr rtlCol="0" anchor="ctr"/>
-          <a:lstStyle/>
-          <a:p>
-            <a:pPr algn="ctr"/>
-          </a:p>
-        </p:txBody>
-      </p:sp>
-      <p:sp>
-        <p:nvSpPr>
-          <p:cNvPr id="48" name="TextBox 47"/>
-          <p:cNvSpPr txBox="1"/>
-          <p:nvPr/>
-        </p:nvSpPr>
-        <p:spPr>
-          <a:xfrm>
-            <a:off x="10451592" y="3227832"/>
-            <a:ext cx="1225296" cy="530352"/>
-          </a:xfrm>
-          <a:prstGeom prst="rect">
-            <a:avLst/>
-          </a:prstGeom>
-          <a:noFill/>
-        </p:spPr>
-        <p:txBody>
-          <a:bodyPr wrap="square" lIns="0" rIns="0" tIns="0" bIns="0">
-            <a:spAutoFit/>
-          </a:bodyPr>
-          <a:lstStyle/>
-          <a:p>
-            <a:pPr algn="l">
-              <a:spcAft>
-                <a:spcPts val="100"/>
-              </a:spcAft>
-            </a:pPr>
-            <a:r>
-              <a:rPr sz="1250" b="1">
-                <a:solidFill>
-                  <a:srgbClr val="141414"/>
-                </a:solidFill>
-                <a:latin typeface="Arial"/>
-              </a:rPr>
-              <a:t>FAT / SFT</a:t>
-            </a:r>
-          </a:p>
-          <a:p>
-            <a:pPr algn="l">
-              <a:spcAft>
-                <a:spcPts val="100"/>
-              </a:spcAft>
-            </a:pPr>
-            <a:r>
-              <a:rPr sz="1300" b="1">
-                <a:solidFill>
-                  <a:srgbClr val="141414"/>
-                </a:solidFill>
-                <a:latin typeface="Arial"/>
-              </a:rPr>
-              <a:t>2 units</a:t>
-            </a:r>
-          </a:p>
-          <a:p>
-            <a:pPr algn="l">
-              <a:spcAft>
-                <a:spcPts val="100"/>
-              </a:spcAft>
-            </a:pPr>
-            <a:r>
-              <a:rPr sz="800" b="0">
-                <a:solidFill>
-                  <a:srgbClr val="6B6B6B"/>
-                </a:solidFill>
-                <a:latin typeface="Arial"/>
-              </a:rPr>
-              <a:t>quantity only</a:t>
-            </a:r>
-          </a:p>
-        </p:txBody>
-      </p:sp>
-      <p:sp>
-        <p:nvSpPr>
-          <p:cNvPr id="49" name="Rounded Rectangle 48"/>
-          <p:cNvSpPr/>
-          <p:nvPr/>
-        </p:nvSpPr>
-        <p:spPr>
-          <a:xfrm>
-            <a:off x="10369296" y="4005072"/>
-            <a:ext cx="1389888" cy="640080"/>
-          </a:xfrm>
-          <a:prstGeom prst="roundRect">
-            <a:avLst/>
-          </a:prstGeom>
-          <a:solidFill>
-            <a:srgbClr val="D9D9D9"/>
-          </a:solidFill>
-          <a:ln w="12700">
-            <a:solidFill>
-              <a:srgbClr val="A5A5A5"/>
-            </a:solidFill>
-          </a:ln>
-          <a:effectLst/>
-        </p:spPr>
-        <p:style>
-          <a:lnRef idx="1">
-            <a:schemeClr val="accent1"/>
-          </a:lnRef>
-          <a:fillRef idx="3">
-            <a:schemeClr val="accent1"/>
-          </a:fillRef>
-          <a:effectRef idx="2">
-            <a:schemeClr val="accent1"/>
-          </a:effectRef>
-          <a:fontRef idx="minor">
-            <a:schemeClr val="lt1"/>
-          </a:fontRef>
-        </p:style>
-        <p:txBody>
-          <a:bodyPr rtlCol="0" anchor="ctr"/>
-          <a:lstStyle/>
-          <a:p>
-            <a:pPr algn="ctr"/>
-          </a:p>
-        </p:txBody>
-      </p:sp>
-      <p:sp>
-        <p:nvSpPr>
-          <p:cNvPr id="50" name="TextBox 49"/>
-          <p:cNvSpPr txBox="1"/>
-          <p:nvPr/>
-        </p:nvSpPr>
-        <p:spPr>
-          <a:xfrm>
-            <a:off x="10451592" y="4069080"/>
-            <a:ext cx="1225296" cy="530352"/>
-          </a:xfrm>
-          <a:prstGeom prst="rect">
-            <a:avLst/>
-          </a:prstGeom>
-          <a:noFill/>
-        </p:spPr>
-        <p:txBody>
-          <a:bodyPr wrap="square" lIns="0" rIns="0" tIns="0" bIns="0">
-            <a:spAutoFit/>
-          </a:bodyPr>
-          <a:lstStyle/>
-          <a:p>
-            <a:pPr algn="l">
-              <a:spcAft>
-                <a:spcPts val="100"/>
-              </a:spcAft>
-            </a:pPr>
-            <a:r>
-              <a:rPr sz="1250" b="1">
-                <a:solidFill>
-                  <a:srgbClr val="141414"/>
-                </a:solidFill>
-                <a:latin typeface="Arial"/>
-              </a:rPr>
-              <a:t>Runin</a:t>
-            </a:r>
-          </a:p>
-          <a:p>
-            <a:pPr algn="l">
-              <a:spcAft>
-                <a:spcPts val="100"/>
-              </a:spcAft>
-            </a:pPr>
-            <a:r>
-              <a:rPr sz="850" b="0">
-                <a:solidFill>
-                  <a:srgbClr val="6B6B6B"/>
-                </a:solidFill>
-                <a:latin typeface="Arial"/>
-              </a:rPr>
-              <a:t>counted with FAT / SFT</a:t>
-            </a:r>
-          </a:p>
-        </p:txBody>
-      </p:sp>
-      <p:sp>
-        <p:nvSpPr>
-          <p:cNvPr id="51" name="Rounded Rectangle 50"/>
-          <p:cNvSpPr/>
-          <p:nvPr/>
-        </p:nvSpPr>
-        <p:spPr>
-          <a:xfrm>
-            <a:off x="10369296" y="4846320"/>
-            <a:ext cx="1389888" cy="640080"/>
-          </a:xfrm>
-          <a:prstGeom prst="roundRect">
-            <a:avLst/>
-          </a:prstGeom>
-          <a:solidFill>
-            <a:srgbClr val="DAE8FC"/>
-          </a:solidFill>
-          <a:ln w="12700">
-            <a:solidFill>
-              <a:srgbClr val="7EA6D9"/>
-            </a:solidFill>
-          </a:ln>
-          <a:effectLst/>
-        </p:spPr>
-        <p:style>
-          <a:lnRef idx="1">
-            <a:schemeClr val="accent1"/>
-          </a:lnRef>
-          <a:fillRef idx="3">
-            <a:schemeClr val="accent1"/>
-          </a:fillRef>
-          <a:effectRef idx="2">
-            <a:schemeClr val="accent1"/>
-          </a:effectRef>
-          <a:fontRef idx="minor">
-            <a:schemeClr val="lt1"/>
-          </a:fontRef>
-        </p:style>
-        <p:txBody>
-          <a:bodyPr rtlCol="0" anchor="ctr"/>
-          <a:lstStyle/>
-          <a:p>
-            <a:pPr algn="ctr"/>
-          </a:p>
-        </p:txBody>
-      </p:sp>
-      <p:sp>
-        <p:nvSpPr>
-          <p:cNvPr id="52" name="TextBox 51"/>
-          <p:cNvSpPr txBox="1"/>
-          <p:nvPr/>
-        </p:nvSpPr>
-        <p:spPr>
-          <a:xfrm>
-            <a:off x="10451592" y="4910328"/>
-            <a:ext cx="1225296" cy="530352"/>
-          </a:xfrm>
-          <a:prstGeom prst="rect">
-            <a:avLst/>
-          </a:prstGeom>
-          <a:noFill/>
-        </p:spPr>
-        <p:txBody>
-          <a:bodyPr wrap="square" lIns="0" rIns="0" tIns="0" bIns="0">
-            <a:spAutoFit/>
-          </a:bodyPr>
-          <a:lstStyle/>
-          <a:p>
-            <a:pPr algn="l">
-              <a:spcAft>
-                <a:spcPts val="100"/>
-              </a:spcAft>
-            </a:pPr>
-            <a:r>
-              <a:rPr sz="1250" b="0">
-                <a:solidFill>
-                  <a:srgbClr val="141414"/>
-                </a:solidFill>
-                <a:latin typeface="Arial"/>
-              </a:rPr>
-              <a:t>Pack</a:t>
-            </a:r>
-          </a:p>
-        </p:txBody>
-      </p:sp>
-      <p:cxnSp>
-        <p:nvCxnSpPr>
-          <p:cNvPr id="53" name="Connector 52"/>
-          <p:cNvCxnSpPr/>
-          <p:nvPr/>
-        </p:nvCxnSpPr>
-        <p:spPr>
-          <a:xfrm>
-            <a:off x="1307592" y="2121408"/>
-            <a:ext cx="0" cy="201168"/>
-          </a:xfrm>
-          <a:prstGeom prst="line">
-            <a:avLst/>
-          </a:prstGeom>
-          <a:ln w="13970">
-            <a:solidFill>
-              <a:srgbClr val="8A8882"/>
-            </a:solidFill>
-            <a:tailEnd type="triangle" w="sm" len="sm"/>
-          </a:ln>
-        </p:spPr>
-        <p:style>
-          <a:lnRef idx="2">
-            <a:schemeClr val="accent1"/>
-          </a:lnRef>
-          <a:fillRef idx="0">
-            <a:schemeClr val="accent1"/>
-          </a:fillRef>
-          <a:effectRef idx="1">
-            <a:schemeClr val="accent1"/>
-          </a:effectRef>
-          <a:fontRef idx="minor">
-            <a:schemeClr val="tx1"/>
-          </a:fontRef>
-        </p:style>
-      </p:cxnSp>
-      <p:cxnSp>
-        <p:nvCxnSpPr>
-          <p:cNvPr id="54" name="Connector 53"/>
-          <p:cNvCxnSpPr/>
-          <p:nvPr/>
-        </p:nvCxnSpPr>
-        <p:spPr>
-          <a:xfrm>
-            <a:off x="1307592" y="2962656"/>
-            <a:ext cx="0" cy="201168"/>
-          </a:xfrm>
-          <a:prstGeom prst="line">
-            <a:avLst/>
-          </a:prstGeom>
-          <a:ln w="13970">
-            <a:solidFill>
-              <a:srgbClr val="8A8882"/>
-            </a:solidFill>
-            <a:tailEnd type="triangle" w="sm" len="sm"/>
-          </a:ln>
-        </p:spPr>
-        <p:style>
-          <a:lnRef idx="2">
-            <a:schemeClr val="accent1"/>
-          </a:lnRef>
-          <a:fillRef idx="0">
-            <a:schemeClr val="accent1"/>
-          </a:fillRef>
-          <a:effectRef idx="1">
-            <a:schemeClr val="accent1"/>
-          </a:effectRef>
-          <a:fontRef idx="minor">
-            <a:schemeClr val="tx1"/>
-          </a:fontRef>
-        </p:style>
-      </p:cxnSp>
-      <p:cxnSp>
-        <p:nvCxnSpPr>
-          <p:cNvPr id="55" name="Connector 54"/>
-          <p:cNvCxnSpPr/>
-          <p:nvPr/>
-        </p:nvCxnSpPr>
-        <p:spPr>
-          <a:xfrm>
-            <a:off x="1307592" y="3803904"/>
-            <a:ext cx="0" cy="201168"/>
-          </a:xfrm>
-          <a:prstGeom prst="line">
-            <a:avLst/>
-          </a:prstGeom>
-          <a:ln w="13970">
-            <a:solidFill>
-              <a:srgbClr val="8A8882"/>
-            </a:solidFill>
-            <a:tailEnd type="triangle" w="sm" len="sm"/>
-          </a:ln>
-        </p:spPr>
-        <p:style>
-          <a:lnRef idx="2">
-            <a:schemeClr val="accent1"/>
-          </a:lnRef>
-          <a:fillRef idx="0">
-            <a:schemeClr val="accent1"/>
-          </a:fillRef>
-          <a:effectRef idx="1">
-            <a:schemeClr val="accent1"/>
-          </a:effectRef>
-          <a:fontRef idx="minor">
-            <a:schemeClr val="tx1"/>
-          </a:fontRef>
-        </p:style>
-      </p:cxnSp>
-      <p:cxnSp>
-        <p:nvCxnSpPr>
-          <p:cNvPr id="56" name="Connector 55"/>
-          <p:cNvCxnSpPr/>
-          <p:nvPr/>
-        </p:nvCxnSpPr>
-        <p:spPr>
-          <a:xfrm>
-            <a:off x="1956815" y="3483864"/>
-            <a:ext cx="1069849" cy="0"/>
-          </a:xfrm>
-          <a:prstGeom prst="line">
-            <a:avLst/>
-          </a:prstGeom>
-          <a:ln w="13970">
-            <a:solidFill>
-              <a:srgbClr val="8A8882"/>
-            </a:solidFill>
-          </a:ln>
-        </p:spPr>
-        <p:style>
-          <a:lnRef idx="2">
-            <a:schemeClr val="accent1"/>
-          </a:lnRef>
-          <a:fillRef idx="0">
-            <a:schemeClr val="accent1"/>
-          </a:fillRef>
-          <a:effectRef idx="1">
-            <a:schemeClr val="accent1"/>
-          </a:effectRef>
-          <a:fontRef idx="minor">
-            <a:schemeClr val="tx1"/>
-          </a:fontRef>
-        </p:style>
-      </p:cxnSp>
-      <p:cxnSp>
-        <p:nvCxnSpPr>
-          <p:cNvPr id="57" name="Connector 56"/>
-          <p:cNvCxnSpPr/>
-          <p:nvPr/>
-        </p:nvCxnSpPr>
-        <p:spPr>
-          <a:xfrm flipV="1">
-            <a:off x="3026664" y="2121408"/>
-            <a:ext cx="0" cy="1362456"/>
-          </a:xfrm>
-          <a:prstGeom prst="line">
-            <a:avLst/>
-          </a:prstGeom>
-          <a:ln w="13970">
-            <a:solidFill>
-              <a:srgbClr val="8A8882"/>
-            </a:solidFill>
-            <a:tailEnd type="triangle" w="sm" len="sm"/>
-          </a:ln>
-        </p:spPr>
-        <p:style>
-          <a:lnRef idx="2">
-            <a:schemeClr val="accent1"/>
-          </a:lnRef>
-          <a:fillRef idx="0">
-            <a:schemeClr val="accent1"/>
-          </a:fillRef>
-          <a:effectRef idx="1">
-            <a:schemeClr val="accent1"/>
-          </a:effectRef>
-          <a:fontRef idx="minor">
-            <a:schemeClr val="tx1"/>
-          </a:fontRef>
-        </p:style>
-      </p:cxnSp>
-      <p:cxnSp>
-        <p:nvCxnSpPr>
-          <p:cNvPr id="58" name="Connector 57"/>
-          <p:cNvCxnSpPr/>
-          <p:nvPr/>
-        </p:nvCxnSpPr>
-        <p:spPr>
-          <a:xfrm>
-            <a:off x="2752344" y="2121408"/>
-            <a:ext cx="274320" cy="1883664"/>
-          </a:xfrm>
-          <a:prstGeom prst="line">
-            <a:avLst/>
-          </a:prstGeom>
-          <a:ln w="13970">
-            <a:solidFill>
-              <a:srgbClr val="8A8882"/>
-            </a:solidFill>
-            <a:tailEnd type="triangle" w="sm" len="sm"/>
-          </a:ln>
-        </p:spPr>
-        <p:style>
-          <a:lnRef idx="2">
-            <a:schemeClr val="accent1"/>
-          </a:lnRef>
-          <a:fillRef idx="0">
-            <a:schemeClr val="accent1"/>
-          </a:fillRef>
-          <a:effectRef idx="1">
-            <a:schemeClr val="accent1"/>
-          </a:effectRef>
-          <a:fontRef idx="minor">
-            <a:schemeClr val="tx1"/>
-          </a:fontRef>
-        </p:style>
-      </p:cxnSp>
-      <p:sp>
-        <p:nvSpPr>
-          <p:cNvPr id="59" name="TextBox 58"/>
-          <p:cNvSpPr txBox="1"/>
-          <p:nvPr/>
-        </p:nvSpPr>
-        <p:spPr>
-          <a:xfrm>
-            <a:off x="3072384" y="3822192"/>
-            <a:ext cx="1005840" cy="182880"/>
-          </a:xfrm>
-          <a:prstGeom prst="rect">
-            <a:avLst/>
-          </a:prstGeom>
-          <a:noFill/>
-        </p:spPr>
-        <p:txBody>
-          <a:bodyPr wrap="square" lIns="0" rIns="0" tIns="0" bIns="0">
-            <a:spAutoFit/>
-          </a:bodyPr>
-          <a:lstStyle/>
-          <a:p>
-            <a:pPr algn="l">
-              <a:spcAft>
-                <a:spcPts val="0"/>
-              </a:spcAft>
-            </a:pPr>
-            <a:r>
-              <a:rPr sz="850" b="0">
-                <a:solidFill>
-                  <a:srgbClr val="6B6B6B"/>
-                </a:solidFill>
-                <a:latin typeface="Arial"/>
-              </a:rPr>
-              <a:t>VBB</a:t>
-            </a:r>
-          </a:p>
-        </p:txBody>
-      </p:sp>
-      <p:cxnSp>
-        <p:nvCxnSpPr>
-          <p:cNvPr id="60" name="Connector 59"/>
-          <p:cNvCxnSpPr/>
-          <p:nvPr/>
-        </p:nvCxnSpPr>
-        <p:spPr>
-          <a:xfrm>
-            <a:off x="3337560" y="2121408"/>
-            <a:ext cx="0" cy="1362456"/>
-          </a:xfrm>
-          <a:prstGeom prst="line">
-            <a:avLst/>
-          </a:prstGeom>
-          <a:ln w="13970">
-            <a:solidFill>
-              <a:srgbClr val="8A8882"/>
-            </a:solidFill>
-          </a:ln>
-        </p:spPr>
-        <p:style>
-          <a:lnRef idx="2">
-            <a:schemeClr val="accent1"/>
-          </a:lnRef>
-          <a:fillRef idx="0">
-            <a:schemeClr val="accent1"/>
-          </a:fillRef>
-          <a:effectRef idx="1">
-            <a:schemeClr val="accent1"/>
-          </a:effectRef>
-          <a:fontRef idx="minor">
-            <a:schemeClr val="tx1"/>
-          </a:fontRef>
-        </p:style>
-      </p:cxnSp>
-      <p:cxnSp>
-        <p:nvCxnSpPr>
-          <p:cNvPr id="61" name="Connector 60"/>
-          <p:cNvCxnSpPr/>
-          <p:nvPr/>
-        </p:nvCxnSpPr>
-        <p:spPr>
-          <a:xfrm>
-            <a:off x="3337560" y="3483864"/>
-            <a:ext cx="502920" cy="0"/>
-          </a:xfrm>
-          <a:prstGeom prst="line">
-            <a:avLst/>
-          </a:prstGeom>
-          <a:ln w="13970">
-            <a:solidFill>
-              <a:srgbClr val="8A8882"/>
-            </a:solidFill>
-            <a:tailEnd type="triangle" w="sm" len="sm"/>
-          </a:ln>
-        </p:spPr>
-        <p:style>
-          <a:lnRef idx="2">
-            <a:schemeClr val="accent1"/>
-          </a:lnRef>
-          <a:fillRef idx="0">
-            <a:schemeClr val="accent1"/>
-          </a:fillRef>
-          <a:effectRef idx="1">
-            <a:schemeClr val="accent1"/>
-          </a:effectRef>
-          <a:fontRef idx="minor">
-            <a:schemeClr val="tx1"/>
-          </a:fontRef>
-        </p:style>
-      </p:cxnSp>
-      <p:sp>
-        <p:nvSpPr>
-          <p:cNvPr id="62" name="TextBox 61"/>
-          <p:cNvSpPr txBox="1"/>
-          <p:nvPr/>
-        </p:nvSpPr>
-        <p:spPr>
-          <a:xfrm>
-            <a:off x="3383279" y="3300984"/>
-            <a:ext cx="1005840" cy="182880"/>
-          </a:xfrm>
-          <a:prstGeom prst="rect">
-            <a:avLst/>
-          </a:prstGeom>
-          <a:noFill/>
-        </p:spPr>
-        <p:txBody>
-          <a:bodyPr wrap="square" lIns="0" rIns="0" tIns="0" bIns="0">
-            <a:spAutoFit/>
-          </a:bodyPr>
-          <a:lstStyle/>
-          <a:p>
-            <a:pPr algn="l">
-              <a:spcAft>
-                <a:spcPts val="0"/>
-              </a:spcAft>
-            </a:pPr>
-            <a:r>
-              <a:rPr sz="850" b="0">
-                <a:solidFill>
-                  <a:srgbClr val="6B6B6B"/>
-                </a:solidFill>
-                <a:latin typeface="Arial"/>
-              </a:rPr>
-              <a:t>PV1</a:t>
-            </a:r>
-          </a:p>
-        </p:txBody>
-      </p:sp>
-      <p:cxnSp>
-        <p:nvCxnSpPr>
-          <p:cNvPr id="63" name="Connector 62"/>
-          <p:cNvCxnSpPr/>
-          <p:nvPr/>
-        </p:nvCxnSpPr>
-        <p:spPr>
-          <a:xfrm flipV="1">
-            <a:off x="3026664" y="1389888"/>
-            <a:ext cx="0" cy="91440"/>
-          </a:xfrm>
-          <a:prstGeom prst="line">
-            <a:avLst/>
-          </a:prstGeom>
-          <a:ln w="13970">
-            <a:solidFill>
-              <a:srgbClr val="8A8882"/>
-            </a:solidFill>
-          </a:ln>
-        </p:spPr>
-        <p:style>
-          <a:lnRef idx="2">
-            <a:schemeClr val="accent1"/>
-          </a:lnRef>
-          <a:fillRef idx="0">
-            <a:schemeClr val="accent1"/>
-          </a:fillRef>
-          <a:effectRef idx="1">
-            <a:schemeClr val="accent1"/>
-          </a:effectRef>
-          <a:fontRef idx="minor">
-            <a:schemeClr val="tx1"/>
-          </a:fontRef>
-        </p:style>
-      </p:cxnSp>
-      <p:cxnSp>
-        <p:nvCxnSpPr>
-          <p:cNvPr id="64" name="Connector 63"/>
-          <p:cNvCxnSpPr/>
-          <p:nvPr/>
-        </p:nvCxnSpPr>
-        <p:spPr>
-          <a:xfrm>
-            <a:off x="3026664" y="1389888"/>
-            <a:ext cx="2871216" cy="0"/>
-          </a:xfrm>
-          <a:prstGeom prst="line">
-            <a:avLst/>
-          </a:prstGeom>
-          <a:ln w="13970">
-            <a:solidFill>
-              <a:srgbClr val="8A8882"/>
-            </a:solidFill>
-          </a:ln>
-        </p:spPr>
-        <p:style>
-          <a:lnRef idx="2">
-            <a:schemeClr val="accent1"/>
-          </a:lnRef>
-          <a:fillRef idx="0">
-            <a:schemeClr val="accent1"/>
-          </a:fillRef>
-          <a:effectRef idx="1">
-            <a:schemeClr val="accent1"/>
-          </a:effectRef>
-          <a:fontRef idx="minor">
-            <a:schemeClr val="tx1"/>
-          </a:fontRef>
-        </p:style>
-      </p:cxnSp>
-      <p:cxnSp>
-        <p:nvCxnSpPr>
-          <p:cNvPr id="65" name="Connector 64"/>
-          <p:cNvCxnSpPr/>
-          <p:nvPr/>
-        </p:nvCxnSpPr>
-        <p:spPr>
-          <a:xfrm>
-            <a:off x="5897880" y="1389888"/>
-            <a:ext cx="0" cy="91440"/>
-          </a:xfrm>
-          <a:prstGeom prst="line">
-            <a:avLst/>
-          </a:prstGeom>
-          <a:ln w="13970">
-            <a:solidFill>
-              <a:srgbClr val="8A8882"/>
-            </a:solidFill>
-            <a:tailEnd type="triangle" w="sm" len="sm"/>
-          </a:ln>
-        </p:spPr>
-        <p:style>
-          <a:lnRef idx="2">
-            <a:schemeClr val="accent1"/>
-          </a:lnRef>
-          <a:fillRef idx="0">
-            <a:schemeClr val="accent1"/>
-          </a:fillRef>
-          <a:effectRef idx="1">
-            <a:schemeClr val="accent1"/>
-          </a:effectRef>
-          <a:fontRef idx="minor">
-            <a:schemeClr val="tx1"/>
-          </a:fontRef>
-        </p:style>
-      </p:cxnSp>
-      <p:sp>
-        <p:nvSpPr>
-          <p:cNvPr id="66" name="TextBox 65"/>
-          <p:cNvSpPr txBox="1"/>
-          <p:nvPr/>
-        </p:nvSpPr>
-        <p:spPr>
-          <a:xfrm>
-            <a:off x="4142232" y="1216152"/>
-            <a:ext cx="1005840" cy="182880"/>
-          </a:xfrm>
-          <a:prstGeom prst="rect">
-            <a:avLst/>
-          </a:prstGeom>
-          <a:noFill/>
-        </p:spPr>
-        <p:txBody>
-          <a:bodyPr wrap="square" lIns="0" rIns="0" tIns="0" bIns="0">
-            <a:spAutoFit/>
-          </a:bodyPr>
-          <a:lstStyle/>
-          <a:p>
-            <a:pPr algn="l">
-              <a:spcAft>
-                <a:spcPts val="0"/>
-              </a:spcAft>
-            </a:pPr>
-            <a:r>
-              <a:rPr sz="850" b="0">
-                <a:solidFill>
-                  <a:srgbClr val="6B6B6B"/>
-                </a:solidFill>
-                <a:latin typeface="Arial"/>
-              </a:rPr>
-              <a:t>HPB &amp; PDB</a:t>
-            </a:r>
-          </a:p>
-        </p:txBody>
-      </p:sp>
-      <p:cxnSp>
-        <p:nvCxnSpPr>
-          <p:cNvPr id="67" name="Connector 66"/>
-          <p:cNvCxnSpPr/>
-          <p:nvPr/>
-        </p:nvCxnSpPr>
-        <p:spPr>
-          <a:xfrm>
-            <a:off x="3675887" y="4325112"/>
-            <a:ext cx="2221993" cy="0"/>
-          </a:xfrm>
-          <a:prstGeom prst="line">
-            <a:avLst/>
-          </a:prstGeom>
-          <a:ln w="13970">
-            <a:solidFill>
-              <a:srgbClr val="8A8882"/>
-            </a:solidFill>
-          </a:ln>
-        </p:spPr>
-        <p:style>
-          <a:lnRef idx="2">
-            <a:schemeClr val="accent1"/>
-          </a:lnRef>
-          <a:fillRef idx="0">
-            <a:schemeClr val="accent1"/>
-          </a:fillRef>
-          <a:effectRef idx="1">
-            <a:schemeClr val="accent1"/>
-          </a:effectRef>
-          <a:fontRef idx="minor">
-            <a:schemeClr val="tx1"/>
-          </a:fontRef>
-        </p:style>
-      </p:cxnSp>
-      <p:cxnSp>
-        <p:nvCxnSpPr>
-          <p:cNvPr id="68" name="Connector 67"/>
-          <p:cNvCxnSpPr/>
-          <p:nvPr/>
-        </p:nvCxnSpPr>
-        <p:spPr>
-          <a:xfrm flipV="1">
-            <a:off x="5897880" y="2121408"/>
-            <a:ext cx="0" cy="2203704"/>
-          </a:xfrm>
-          <a:prstGeom prst="line">
-            <a:avLst/>
-          </a:prstGeom>
-          <a:ln w="13970">
-            <a:solidFill>
-              <a:srgbClr val="8A8882"/>
-            </a:solidFill>
-            <a:tailEnd type="triangle" w="sm" len="sm"/>
-          </a:ln>
-        </p:spPr>
-        <p:style>
-          <a:lnRef idx="2">
-            <a:schemeClr val="accent1"/>
-          </a:lnRef>
-          <a:fillRef idx="0">
-            <a:schemeClr val="accent1"/>
-          </a:fillRef>
-          <a:effectRef idx="1">
-            <a:schemeClr val="accent1"/>
-          </a:effectRef>
-          <a:fontRef idx="minor">
-            <a:schemeClr val="tx1"/>
-          </a:fontRef>
-        </p:style>
-      </p:cxnSp>
-      <p:cxnSp>
-        <p:nvCxnSpPr>
-          <p:cNvPr id="69" name="Connector 68"/>
-          <p:cNvCxnSpPr/>
-          <p:nvPr/>
-        </p:nvCxnSpPr>
-        <p:spPr>
-          <a:xfrm flipV="1">
-            <a:off x="4489704" y="2962656"/>
-            <a:ext cx="0" cy="201168"/>
-          </a:xfrm>
-          <a:prstGeom prst="line">
-            <a:avLst/>
-          </a:prstGeom>
-          <a:ln w="13970">
-            <a:solidFill>
-              <a:srgbClr val="8A8882"/>
-            </a:solidFill>
-            <a:tailEnd type="triangle" w="sm" len="sm"/>
-          </a:ln>
-        </p:spPr>
-        <p:style>
-          <a:lnRef idx="2">
-            <a:schemeClr val="accent1"/>
-          </a:lnRef>
-          <a:fillRef idx="0">
-            <a:schemeClr val="accent1"/>
-          </a:fillRef>
-          <a:effectRef idx="1">
-            <a:schemeClr val="accent1"/>
-          </a:effectRef>
-          <a:fontRef idx="minor">
-            <a:schemeClr val="tx1"/>
-          </a:fontRef>
-        </p:style>
-      </p:cxnSp>
-      <p:cxnSp>
-        <p:nvCxnSpPr>
-          <p:cNvPr id="70" name="Connector 69"/>
-          <p:cNvCxnSpPr/>
-          <p:nvPr/>
-        </p:nvCxnSpPr>
-        <p:spPr>
-          <a:xfrm flipV="1">
-            <a:off x="4489704" y="2121408"/>
-            <a:ext cx="0" cy="201168"/>
-          </a:xfrm>
-          <a:prstGeom prst="line">
-            <a:avLst/>
-          </a:prstGeom>
-          <a:ln w="13970">
-            <a:solidFill>
-              <a:srgbClr val="8A8882"/>
-            </a:solidFill>
-            <a:tailEnd type="triangle" w="sm" len="sm"/>
-          </a:ln>
-        </p:spPr>
-        <p:style>
-          <a:lnRef idx="2">
-            <a:schemeClr val="accent1"/>
-          </a:lnRef>
-          <a:fillRef idx="0">
-            <a:schemeClr val="accent1"/>
-          </a:fillRef>
-          <a:effectRef idx="1">
-            <a:schemeClr val="accent1"/>
-          </a:effectRef>
-          <a:fontRef idx="minor">
-            <a:schemeClr val="tx1"/>
-          </a:fontRef>
-        </p:style>
-      </p:cxnSp>
-      <p:cxnSp>
-        <p:nvCxnSpPr>
-          <p:cNvPr id="71" name="Connector 70"/>
-          <p:cNvCxnSpPr/>
-          <p:nvPr/>
-        </p:nvCxnSpPr>
-        <p:spPr>
-          <a:xfrm>
-            <a:off x="5138928" y="1801368"/>
-            <a:ext cx="219456" cy="0"/>
-          </a:xfrm>
-          <a:prstGeom prst="line">
-            <a:avLst/>
-          </a:prstGeom>
-          <a:ln w="13970">
-            <a:solidFill>
-              <a:srgbClr val="8A8882"/>
-            </a:solidFill>
-            <a:tailEnd type="triangle" w="sm" len="sm"/>
-          </a:ln>
-        </p:spPr>
-        <p:style>
-          <a:lnRef idx="2">
-            <a:schemeClr val="accent1"/>
-          </a:lnRef>
-          <a:fillRef idx="0">
-            <a:schemeClr val="accent1"/>
-          </a:fillRef>
-          <a:effectRef idx="1">
-            <a:schemeClr val="accent1"/>
-          </a:effectRef>
-          <a:fontRef idx="minor">
-            <a:schemeClr val="tx1"/>
-          </a:fontRef>
-        </p:style>
-      </p:cxnSp>
-      <p:cxnSp>
-        <p:nvCxnSpPr>
-          <p:cNvPr id="72" name="Connector 71"/>
-          <p:cNvCxnSpPr/>
-          <p:nvPr/>
-        </p:nvCxnSpPr>
-        <p:spPr>
-          <a:xfrm>
-            <a:off x="6437376" y="1801368"/>
-            <a:ext cx="1499616" cy="0"/>
-          </a:xfrm>
-          <a:prstGeom prst="line">
-            <a:avLst/>
-          </a:prstGeom>
-          <a:ln w="13970">
-            <a:solidFill>
-              <a:srgbClr val="8A8882"/>
-            </a:solidFill>
-          </a:ln>
-        </p:spPr>
-        <p:style>
-          <a:lnRef idx="2">
-            <a:schemeClr val="accent1"/>
-          </a:lnRef>
-          <a:fillRef idx="0">
-            <a:schemeClr val="accent1"/>
-          </a:fillRef>
-          <a:effectRef idx="1">
-            <a:schemeClr val="accent1"/>
-          </a:effectRef>
-          <a:fontRef idx="minor">
-            <a:schemeClr val="tx1"/>
-          </a:fontRef>
-        </p:style>
-      </p:cxnSp>
-      <p:cxnSp>
-        <p:nvCxnSpPr>
-          <p:cNvPr id="73" name="Connector 72"/>
-          <p:cNvCxnSpPr/>
-          <p:nvPr/>
-        </p:nvCxnSpPr>
-        <p:spPr>
-          <a:xfrm>
-            <a:off x="7936992" y="1801368"/>
-            <a:ext cx="0" cy="521208"/>
-          </a:xfrm>
-          <a:prstGeom prst="line">
-            <a:avLst/>
-          </a:prstGeom>
-          <a:ln w="13970">
-            <a:solidFill>
-              <a:srgbClr val="8A8882"/>
-            </a:solidFill>
-            <a:tailEnd type="triangle" w="sm" len="sm"/>
-          </a:ln>
-        </p:spPr>
-        <p:style>
-          <a:lnRef idx="2">
-            <a:schemeClr val="accent1"/>
-          </a:lnRef>
-          <a:fillRef idx="0">
-            <a:schemeClr val="accent1"/>
-          </a:fillRef>
-          <a:effectRef idx="1">
-            <a:schemeClr val="accent1"/>
-          </a:effectRef>
-          <a:fontRef idx="minor">
-            <a:schemeClr val="tx1"/>
-          </a:fontRef>
-        </p:style>
-      </p:cxnSp>
-      <p:cxnSp>
-        <p:nvCxnSpPr>
-          <p:cNvPr id="74" name="Connector 73"/>
-          <p:cNvCxnSpPr/>
-          <p:nvPr/>
-        </p:nvCxnSpPr>
-        <p:spPr>
-          <a:xfrm>
-            <a:off x="5897880" y="2121408"/>
-            <a:ext cx="0" cy="2203704"/>
-          </a:xfrm>
-          <a:prstGeom prst="line">
-            <a:avLst/>
-          </a:prstGeom>
-          <a:ln w="13970">
-            <a:solidFill>
-              <a:srgbClr val="8A8882"/>
-            </a:solidFill>
-          </a:ln>
-        </p:spPr>
-        <p:style>
-          <a:lnRef idx="2">
-            <a:schemeClr val="accent1"/>
-          </a:lnRef>
-          <a:fillRef idx="0">
-            <a:schemeClr val="accent1"/>
-          </a:fillRef>
-          <a:effectRef idx="1">
-            <a:schemeClr val="accent1"/>
-          </a:effectRef>
-          <a:fontRef idx="minor">
-            <a:schemeClr val="tx1"/>
-          </a:fontRef>
-        </p:style>
-      </p:cxnSp>
-      <p:cxnSp>
-        <p:nvCxnSpPr>
-          <p:cNvPr id="75" name="Connector 74"/>
-          <p:cNvCxnSpPr/>
-          <p:nvPr/>
-        </p:nvCxnSpPr>
-        <p:spPr>
-          <a:xfrm>
-            <a:off x="5897880" y="4325112"/>
-            <a:ext cx="1344168" cy="0"/>
-          </a:xfrm>
-          <a:prstGeom prst="line">
-            <a:avLst/>
-          </a:prstGeom>
-          <a:ln w="13970">
-            <a:solidFill>
-              <a:srgbClr val="8A8882"/>
-            </a:solidFill>
-            <a:tailEnd type="triangle" w="sm" len="sm"/>
-          </a:ln>
-        </p:spPr>
-        <p:style>
-          <a:lnRef idx="2">
-            <a:schemeClr val="accent1"/>
-          </a:lnRef>
-          <a:fillRef idx="0">
-            <a:schemeClr val="accent1"/>
-          </a:fillRef>
-          <a:effectRef idx="1">
-            <a:schemeClr val="accent1"/>
-          </a:effectRef>
-          <a:fontRef idx="minor">
-            <a:schemeClr val="tx1"/>
-          </a:fontRef>
-        </p:style>
-      </p:cxnSp>
-      <p:cxnSp>
-        <p:nvCxnSpPr>
-          <p:cNvPr id="76" name="Connector 75"/>
-          <p:cNvCxnSpPr/>
-          <p:nvPr/>
-        </p:nvCxnSpPr>
-        <p:spPr>
-          <a:xfrm flipV="1">
-            <a:off x="7936992" y="3803904"/>
-            <a:ext cx="0" cy="201168"/>
-          </a:xfrm>
-          <a:prstGeom prst="line">
-            <a:avLst/>
-          </a:prstGeom>
-          <a:ln w="13970">
-            <a:solidFill>
-              <a:srgbClr val="8A8882"/>
-            </a:solidFill>
-            <a:tailEnd type="triangle" w="sm" len="sm"/>
-          </a:ln>
-        </p:spPr>
-        <p:style>
-          <a:lnRef idx="2">
-            <a:schemeClr val="accent1"/>
-          </a:lnRef>
-          <a:fillRef idx="0">
-            <a:schemeClr val="accent1"/>
-          </a:fillRef>
-          <a:effectRef idx="1">
-            <a:schemeClr val="accent1"/>
-          </a:effectRef>
-          <a:fontRef idx="minor">
-            <a:schemeClr val="tx1"/>
-          </a:fontRef>
-        </p:style>
-      </p:cxnSp>
-      <p:cxnSp>
-        <p:nvCxnSpPr>
-          <p:cNvPr id="77" name="Connector 76"/>
-          <p:cNvCxnSpPr/>
-          <p:nvPr/>
-        </p:nvCxnSpPr>
-        <p:spPr>
-          <a:xfrm flipV="1">
-            <a:off x="7936992" y="2962656"/>
-            <a:ext cx="0" cy="201168"/>
-          </a:xfrm>
-          <a:prstGeom prst="line">
-            <a:avLst/>
-          </a:prstGeom>
-          <a:ln w="13970">
-            <a:solidFill>
-              <a:srgbClr val="8A8882"/>
-            </a:solidFill>
-            <a:tailEnd type="triangle" w="sm" len="sm"/>
-          </a:ln>
-        </p:spPr>
-        <p:style>
-          <a:lnRef idx="2">
-            <a:schemeClr val="accent1"/>
-          </a:lnRef>
-          <a:fillRef idx="0">
-            <a:schemeClr val="accent1"/>
-          </a:fillRef>
-          <a:effectRef idx="1">
-            <a:schemeClr val="accent1"/>
-          </a:effectRef>
-          <a:fontRef idx="minor">
-            <a:schemeClr val="tx1"/>
-          </a:fontRef>
-        </p:style>
-      </p:cxnSp>
-      <p:cxnSp>
-        <p:nvCxnSpPr>
-          <p:cNvPr id="78" name="Connector 77"/>
-          <p:cNvCxnSpPr/>
-          <p:nvPr/>
-        </p:nvCxnSpPr>
-        <p:spPr>
-          <a:xfrm>
-            <a:off x="8631936" y="2642616"/>
-            <a:ext cx="109728" cy="0"/>
-          </a:xfrm>
-          <a:prstGeom prst="line">
-            <a:avLst/>
-          </a:prstGeom>
-          <a:ln w="13970">
-            <a:solidFill>
-              <a:srgbClr val="8A8882"/>
-            </a:solidFill>
-            <a:tailEnd type="triangle" w="sm" len="sm"/>
-          </a:ln>
-        </p:spPr>
-        <p:style>
-          <a:lnRef idx="2">
-            <a:schemeClr val="accent1"/>
-          </a:lnRef>
-          <a:fillRef idx="0">
-            <a:schemeClr val="accent1"/>
-          </a:fillRef>
-          <a:effectRef idx="1">
-            <a:schemeClr val="accent1"/>
-          </a:effectRef>
-          <a:fontRef idx="minor">
-            <a:schemeClr val="tx1"/>
-          </a:fontRef>
-        </p:style>
-      </p:cxnSp>
-      <p:cxnSp>
-        <p:nvCxnSpPr>
-          <p:cNvPr id="79" name="Connector 78"/>
-          <p:cNvCxnSpPr/>
-          <p:nvPr/>
-        </p:nvCxnSpPr>
-        <p:spPr>
-          <a:xfrm>
-            <a:off x="10040112" y="2642616"/>
-            <a:ext cx="329184" cy="0"/>
-          </a:xfrm>
-          <a:prstGeom prst="line">
-            <a:avLst/>
-          </a:prstGeom>
-          <a:ln w="13970">
-            <a:solidFill>
-              <a:srgbClr val="8A8882"/>
-            </a:solidFill>
-            <a:tailEnd type="triangle" w="sm" len="sm"/>
-          </a:ln>
-        </p:spPr>
-        <p:style>
-          <a:lnRef idx="2">
-            <a:schemeClr val="accent1"/>
-          </a:lnRef>
-          <a:fillRef idx="0">
-            <a:schemeClr val="accent1"/>
-          </a:fillRef>
-          <a:effectRef idx="1">
-            <a:schemeClr val="accent1"/>
-          </a:effectRef>
-          <a:fontRef idx="minor">
-            <a:schemeClr val="tx1"/>
-          </a:fontRef>
-        </p:style>
-      </p:cxnSp>
-      <p:cxnSp>
-        <p:nvCxnSpPr>
-          <p:cNvPr id="80" name="Connector 79"/>
-          <p:cNvCxnSpPr/>
-          <p:nvPr/>
-        </p:nvCxnSpPr>
-        <p:spPr>
-          <a:xfrm>
-            <a:off x="11064240" y="2962656"/>
-            <a:ext cx="0" cy="201168"/>
-          </a:xfrm>
-          <a:prstGeom prst="line">
-            <a:avLst/>
-          </a:prstGeom>
-          <a:ln w="13970">
-            <a:solidFill>
-              <a:srgbClr val="8A8882"/>
-            </a:solidFill>
-            <a:tailEnd type="triangle" w="sm" len="sm"/>
-          </a:ln>
-        </p:spPr>
-        <p:style>
-          <a:lnRef idx="2">
-            <a:schemeClr val="accent1"/>
-          </a:lnRef>
-          <a:fillRef idx="0">
-            <a:schemeClr val="accent1"/>
-          </a:fillRef>
-          <a:effectRef idx="1">
-            <a:schemeClr val="accent1"/>
-          </a:effectRef>
-          <a:fontRef idx="minor">
-            <a:schemeClr val="tx1"/>
-          </a:fontRef>
-        </p:style>
-      </p:cxnSp>
-      <p:cxnSp>
-        <p:nvCxnSpPr>
-          <p:cNvPr id="81" name="Connector 80"/>
-          <p:cNvCxnSpPr/>
-          <p:nvPr/>
-        </p:nvCxnSpPr>
-        <p:spPr>
-          <a:xfrm>
-            <a:off x="11064240" y="3803904"/>
-            <a:ext cx="0" cy="201168"/>
-          </a:xfrm>
-          <a:prstGeom prst="line">
-            <a:avLst/>
-          </a:prstGeom>
-          <a:ln w="13970">
-            <a:solidFill>
-              <a:srgbClr val="8A8882"/>
-            </a:solidFill>
-            <a:tailEnd type="triangle" w="sm" len="sm"/>
-          </a:ln>
-        </p:spPr>
-        <p:style>
-          <a:lnRef idx="2">
-            <a:schemeClr val="accent1"/>
-          </a:lnRef>
-          <a:fillRef idx="0">
-            <a:schemeClr val="accent1"/>
-          </a:fillRef>
-          <a:effectRef idx="1">
-            <a:schemeClr val="accent1"/>
-          </a:effectRef>
-          <a:fontRef idx="minor">
-            <a:schemeClr val="tx1"/>
-          </a:fontRef>
-        </p:style>
-      </p:cxnSp>
-      <p:cxnSp>
-        <p:nvCxnSpPr>
-          <p:cNvPr id="82" name="Connector 81"/>
-          <p:cNvCxnSpPr/>
-          <p:nvPr/>
-        </p:nvCxnSpPr>
-        <p:spPr>
-          <a:xfrm>
-            <a:off x="11064240" y="4645152"/>
-            <a:ext cx="0" cy="201168"/>
-          </a:xfrm>
-          <a:prstGeom prst="line">
-            <a:avLst/>
-          </a:prstGeom>
-          <a:ln w="13970">
-            <a:solidFill>
-              <a:srgbClr val="8A8882"/>
-            </a:solidFill>
-            <a:tailEnd type="triangle" w="sm" len="sm"/>
-          </a:ln>
-        </p:spPr>
-        <p:style>
-          <a:lnRef idx="2">
-            <a:schemeClr val="accent1"/>
-          </a:lnRef>
-          <a:fillRef idx="0">
-            <a:schemeClr val="accent1"/>
-          </a:fillRef>
-          <a:effectRef idx="1">
-            <a:schemeClr val="accent1"/>
-          </a:effectRef>
-          <a:fontRef idx="minor">
-            <a:schemeClr val="tx1"/>
-          </a:fontRef>
-        </p:style>
-      </p:cxnSp>
-      <p:sp>
-        <p:nvSpPr>
-          <p:cNvPr id="83" name="TextBox 82"/>
-          <p:cNvSpPr txBox="1"/>
-          <p:nvPr/>
-        </p:nvSpPr>
-        <p:spPr>
-          <a:xfrm>
-            <a:off x="658368" y="5989320"/>
-            <a:ext cx="10911535" cy="731520"/>
-          </a:xfrm>
-          <a:prstGeom prst="rect">
-            <a:avLst/>
-          </a:prstGeom>
-          <a:noFill/>
-        </p:spPr>
-        <p:txBody>
-          <a:bodyPr wrap="square" lIns="0" rIns="0" tIns="0" bIns="0">
-            <a:spAutoFit/>
-          </a:bodyPr>
-          <a:lstStyle/>
-          <a:p>
-            <a:pPr algn="l">
-              <a:spcAft>
-                <a:spcPts val="100"/>
-              </a:spcAft>
-            </a:pPr>
-            <a:r>
-              <a:rPr sz="950" b="1">
-                <a:solidFill>
-                  <a:srgbClr val="6B6B6B"/>
-                </a:solidFill>
-                <a:latin typeface="Arial"/>
-              </a:rPr>
-              <a:t>Green</a:t>
-            </a:r>
-            <a:r>
-              <a:rPr sz="950" b="0">
-                <a:solidFill>
-                  <a:srgbClr val="6B6B6B"/>
-                </a:solidFill>
-                <a:latin typeface="Arial"/>
-              </a:rPr>
-              <a:t> = yields, and we measure it.   </a:t>
-            </a:r>
-            <a:r>
-              <a:rPr sz="950" b="1">
-                <a:solidFill>
-                  <a:srgbClr val="6B6B6B"/>
-                </a:solidFill>
-                <a:latin typeface="Arial"/>
-              </a:rPr>
-              <a:t>Amber</a:t>
-            </a:r>
-            <a:r>
-              <a:rPr sz="950" b="0">
-                <a:solidFill>
-                  <a:srgbClr val="6B6B6B"/>
-                </a:solidFill>
-                <a:latin typeface="Arial"/>
-              </a:rPr>
-              <a:t> = quantity only, no yield reported.   </a:t>
-            </a:r>
-            <a:r>
-              <a:rPr sz="950" b="1">
-                <a:solidFill>
-                  <a:srgbClr val="6B6B6B"/>
-                </a:solidFill>
-                <a:latin typeface="Arial"/>
-              </a:rPr>
-              <a:t>Grey</a:t>
-            </a:r>
-            <a:r>
-              <a:rPr sz="950" b="0">
-                <a:solidFill>
-                  <a:srgbClr val="6B6B6B"/>
-                </a:solidFill>
-                <a:latin typeface="Arial"/>
-              </a:rPr>
-              <a:t> = builds, moves, or measured elsewhere.</a:t>
-            </a:r>
-          </a:p>
-          <a:p>
-            <a:pPr algn="l">
-              <a:spcAft>
-                <a:spcPts val="100"/>
-              </a:spcAft>
-            </a:pPr>
-            <a:r>
-              <a:rPr sz="850" b="0">
-                <a:solidFill>
-                  <a:srgbClr val="6B6B6B"/>
-                </a:solidFill>
-                <a:latin typeface="Arial"/>
-              </a:rPr>
-              <a:t>Quantity only: L10 FAT, L10 SFT, L10 RIN, L10 2U, L11 Test. L10 and L11 are chassis and rack level and in bring-up — a percentage over three chassis swings 33 points on one unit, so the counts are published and the yields are not.</a:t>
-            </a:r>
-          </a:p>
-          <a:p>
-            <a:pPr algn="l">
-              <a:spcAft>
-                <a:spcPts val="100"/>
-              </a:spcAft>
-            </a:pPr>
-            <a:r>
-              <a:rPr sz="850" b="0">
-                <a:solidFill>
-                  <a:srgbClr val="6B6B6B"/>
-                </a:solidFill>
-                <a:latin typeface="Arial"/>
-              </a:rPr>
-              <a:t>Source: pega2 – pega5 (ESVM), one row per unit. WST and FT reported by Sigurd. VBB provisioning drawn for the flow but left out of the yield view.</a:t>
+              <a:t>Source: pega2 – pega5 (ESVM), one row per unit.</a:t>
             </a:r>
           </a:p>
         </p:txBody>

--- a/weekly/2026-W33/weekly-2026-W33.pptx
+++ b/weekly/2026-W33/weekly-2026-W33.pptx
@@ -3126,7 +3126,7 @@
                 </a:solidFill>
                 <a:latin typeface="Arial"/>
               </a:rPr>
-              <a:t>How to read this</a:t>
+              <a:t>Basic Level of Production Metrics</a:t>
             </a:r>
           </a:p>
           <a:p>
@@ -3142,7 +3142,7 @@
                 </a:solidFill>
                 <a:latin typeface="Arial"/>
               </a:rPr>
-              <a:t>three numbers, and why the table on the next pages is broken out by test step</a:t>
+              <a:t>2026-W33 · the three numbers this deck reports, and what each one is for</a:t>
             </a:r>
           </a:p>
         </p:txBody>
@@ -3199,27 +3199,27 @@
         </p:nvSpPr>
         <p:spPr>
           <a:xfrm>
-            <a:off x="566928" y="1481328"/>
-            <a:ext cx="2331720" cy="1005840"/>
-          </a:xfrm>
-          <a:prstGeom prst="rect">
-            <a:avLst/>
-          </a:prstGeom>
-          <a:noFill/>
-        </p:spPr>
-        <p:txBody>
-          <a:bodyPr wrap="square" lIns="0" rIns="0" tIns="0" bIns="0">
-            <a:spAutoFit/>
-          </a:bodyPr>
-          <a:lstStyle/>
-          <a:p>
-            <a:pPr algn="l">
-              <a:spcAft>
-                <a:spcPts val="200"/>
-              </a:spcAft>
-            </a:pPr>
-            <a:r>
-              <a:rPr sz="1700" b="1">
+            <a:off x="685800" y="1572768"/>
+            <a:ext cx="2011680" cy="457200"/>
+          </a:xfrm>
+          <a:prstGeom prst="rect">
+            <a:avLst/>
+          </a:prstGeom>
+          <a:noFill/>
+        </p:spPr>
+        <p:txBody>
+          <a:bodyPr wrap="square" lIns="0" rIns="0" tIns="0" bIns="0">
+            <a:spAutoFit/>
+          </a:bodyPr>
+          <a:lstStyle/>
+          <a:p>
+            <a:pPr algn="l">
+              <a:spcAft>
+                <a:spcPts val="0"/>
+              </a:spcAft>
+            </a:pPr>
+            <a:r>
+              <a:rPr sz="1800" b="1">
                 <a:solidFill>
                   <a:srgbClr val="141414"/>
                 </a:solidFill>
@@ -3228,22 +3228,6 @@
               <a:t>1.  Capacity</a:t>
             </a:r>
           </a:p>
-          <a:p>
-            <a:pPr algn="l">
-              <a:spcAft>
-                <a:spcPts val="200"/>
-              </a:spcAft>
-            </a:pPr>
-            <a:r>
-              <a:rPr sz="1150" b="0">
-                <a:solidFill>
-                  <a:srgbClr val="6B6B6B"/>
-                </a:solidFill>
-                <a:latin typeface="Arial"/>
-              </a:rPr>
-              <a:t>How many units a step can put through in a week.</a:t>
-            </a:r>
-          </a:p>
         </p:txBody>
       </p:sp>
       <p:sp>
@@ -3254,8 +3238,8 @@
         </p:nvSpPr>
         <p:spPr>
           <a:xfrm>
-            <a:off x="3063240" y="1517904"/>
-            <a:ext cx="4206240" cy="1188720"/>
+            <a:off x="2880360" y="1572768"/>
+            <a:ext cx="4206240" cy="731520"/>
           </a:xfrm>
           <a:prstGeom prst="rect">
             <a:avLst/>
@@ -3274,13 +3258,13 @@
               </a:spcAft>
             </a:pPr>
             <a:r>
-              <a:rPr sz="1200" b="0">
+              <a:rPr sz="1500" b="0">
                 <a:solidFill>
                   <a:srgbClr val="141414"/>
                 </a:solidFill>
                 <a:latin typeface="Arial"/>
               </a:rPr>
-              <a:t>Counted here as units and runs at each step: 407 step-visits across 573 runs this week. Runs exceed visits because a unit can occupy a station more than once — which is why capacity and retest are the same conversation.</a:t>
+              <a:t>How many units we are producing</a:t>
             </a:r>
           </a:p>
         </p:txBody>
@@ -3293,8 +3277,63 @@
         </p:nvSpPr>
         <p:spPr>
           <a:xfrm>
-            <a:off x="7543800" y="1517904"/>
-            <a:ext cx="4114800" cy="1188720"/>
+            <a:off x="7360920" y="1591056"/>
+            <a:ext cx="4206240" cy="914400"/>
+          </a:xfrm>
+          <a:prstGeom prst="rect">
+            <a:avLst/>
+          </a:prstGeom>
+          <a:noFill/>
+        </p:spPr>
+        <p:txBody>
+          <a:bodyPr wrap="square" lIns="0" rIns="0" tIns="0" bIns="0">
+            <a:spAutoFit/>
+          </a:bodyPr>
+          <a:lstStyle/>
+          <a:p>
+            <a:pPr algn="l">
+              <a:spcAft>
+                <a:spcPts val="300"/>
+              </a:spcAft>
+            </a:pPr>
+            <a:r>
+              <a:rPr sz="1150" b="1">
+                <a:solidFill>
+                  <a:srgbClr val="141414"/>
+                </a:solidFill>
+                <a:latin typeface="Arial"/>
+              </a:rPr>
+              <a:t>407 units through 7 steps this week, across 573 runs.</a:t>
+            </a:r>
+          </a:p>
+          <a:p>
+            <a:pPr algn="l">
+              <a:spcAft>
+                <a:spcPts val="300"/>
+              </a:spcAft>
+            </a:pPr>
+            <a:r>
+              <a:rPr sz="1100" b="0">
+                <a:solidFill>
+                  <a:srgbClr val="6B6B6B"/>
+                </a:solidFill>
+                <a:latin typeface="Arial"/>
+              </a:rPr>
+              <a:t>It sets the schedule: a station cannot ship what it cannot test.</a:t>
+            </a:r>
+          </a:p>
+        </p:txBody>
+      </p:sp>
+      <p:sp>
+        <p:nvSpPr>
+          <p:cNvPr id="7" name="TextBox 6"/>
+          <p:cNvSpPr txBox="1"/>
+          <p:nvPr/>
+        </p:nvSpPr>
+        <p:spPr>
+          <a:xfrm>
+            <a:off x="685800" y="2944368"/>
+            <a:ext cx="2011680" cy="457200"/>
           </a:xfrm>
           <a:prstGeom prst="rect">
             <a:avLst/>
@@ -3313,91 +3352,121 @@
               </a:spcAft>
             </a:pPr>
             <a:r>
-              <a:rPr sz="1200" b="1">
+              <a:rPr sz="1800" b="1">
                 <a:solidFill>
                   <a:srgbClr val="141414"/>
                 </a:solidFill>
                 <a:latin typeface="Arial"/>
               </a:rPr>
-              <a:t>Why it matters.  </a:t>
-            </a:r>
-            <a:r>
-              <a:rPr sz="1200" b="0">
+              <a:t>2.  Yield</a:t>
+            </a:r>
+          </a:p>
+        </p:txBody>
+      </p:sp>
+      <p:sp>
+        <p:nvSpPr>
+          <p:cNvPr id="8" name="TextBox 7"/>
+          <p:cNvSpPr txBox="1"/>
+          <p:nvPr/>
+        </p:nvSpPr>
+        <p:spPr>
+          <a:xfrm>
+            <a:off x="2880360" y="2944368"/>
+            <a:ext cx="4206240" cy="731520"/>
+          </a:xfrm>
+          <a:prstGeom prst="rect">
+            <a:avLst/>
+          </a:prstGeom>
+          <a:noFill/>
+        </p:spPr>
+        <p:txBody>
+          <a:bodyPr wrap="square" lIns="0" rIns="0" tIns="0" bIns="0">
+            <a:spAutoFit/>
+          </a:bodyPr>
+          <a:lstStyle/>
+          <a:p>
+            <a:pPr algn="l">
+              <a:spcAft>
+                <a:spcPts val="0"/>
+              </a:spcAft>
+            </a:pPr>
+            <a:r>
+              <a:rPr sz="1500" b="0">
                 <a:solidFill>
                   <a:srgbClr val="141414"/>
                 </a:solidFill>
                 <a:latin typeface="Arial"/>
               </a:rPr>
-              <a:t>It sets the schedule. A station cannot ship what it cannot test, and every re-run is a slot a new unit did not get.</a:t>
-            </a:r>
-          </a:p>
-        </p:txBody>
-      </p:sp>
-      <p:sp>
-        <p:nvSpPr>
-          <p:cNvPr id="7" name="TextBox 6"/>
-          <p:cNvSpPr txBox="1"/>
-          <p:nvPr/>
-        </p:nvSpPr>
-        <p:spPr>
-          <a:xfrm>
-            <a:off x="566928" y="2926080"/>
-            <a:ext cx="2331720" cy="1005840"/>
-          </a:xfrm>
-          <a:prstGeom prst="rect">
-            <a:avLst/>
-          </a:prstGeom>
-          <a:noFill/>
-        </p:spPr>
-        <p:txBody>
-          <a:bodyPr wrap="square" lIns="0" rIns="0" tIns="0" bIns="0">
-            <a:spAutoFit/>
-          </a:bodyPr>
-          <a:lstStyle/>
-          <a:p>
-            <a:pPr algn="l">
-              <a:spcAft>
-                <a:spcPts val="200"/>
-              </a:spcAft>
-            </a:pPr>
-            <a:r>
-              <a:rPr sz="1700" b="1">
+              <a:t>How many percentage we can ship vs total production</a:t>
+            </a:r>
+          </a:p>
+        </p:txBody>
+      </p:sp>
+      <p:sp>
+        <p:nvSpPr>
+          <p:cNvPr id="9" name="TextBox 8"/>
+          <p:cNvSpPr txBox="1"/>
+          <p:nvPr/>
+        </p:nvSpPr>
+        <p:spPr>
+          <a:xfrm>
+            <a:off x="7360920" y="2962656"/>
+            <a:ext cx="4206240" cy="914400"/>
+          </a:xfrm>
+          <a:prstGeom prst="rect">
+            <a:avLst/>
+          </a:prstGeom>
+          <a:noFill/>
+        </p:spPr>
+        <p:txBody>
+          <a:bodyPr wrap="square" lIns="0" rIns="0" tIns="0" bIns="0">
+            <a:spAutoFit/>
+          </a:bodyPr>
+          <a:lstStyle/>
+          <a:p>
+            <a:pPr algn="l">
+              <a:spcAft>
+                <a:spcPts val="300"/>
+              </a:spcAft>
+            </a:pPr>
+            <a:r>
+              <a:rPr sz="1150" b="1">
                 <a:solidFill>
                   <a:srgbClr val="141414"/>
                 </a:solidFill>
                 <a:latin typeface="Arial"/>
               </a:rPr>
-              <a:t>2.  Yield</a:t>
-            </a:r>
-          </a:p>
-          <a:p>
-            <a:pPr algn="l">
-              <a:spcAft>
-                <a:spcPts val="200"/>
-              </a:spcAft>
-            </a:pPr>
-            <a:r>
-              <a:rPr sz="1150" b="0">
-                <a:solidFill>
-                  <a:srgbClr val="6B6B6B"/>
-                </a:solidFill>
-                <a:latin typeface="Arial"/>
-              </a:rPr>
-              <a:t>The share of units that pass.</a:t>
-            </a:r>
-          </a:p>
-        </p:txBody>
-      </p:sp>
-      <p:sp>
-        <p:nvSpPr>
-          <p:cNvPr id="8" name="TextBox 7"/>
-          <p:cNvSpPr txBox="1"/>
-          <p:nvPr/>
-        </p:nvSpPr>
-        <p:spPr>
-          <a:xfrm>
-            <a:off x="3063240" y="2962656"/>
-            <a:ext cx="4206240" cy="1188720"/>
+              <a:t>First pass 65.5% at MLT and 54.3% at HTT — 35.6% rolled across the two.</a:t>
+            </a:r>
+          </a:p>
+          <a:p>
+            <a:pPr algn="l">
+              <a:spcAft>
+                <a:spcPts val="300"/>
+              </a:spcAft>
+            </a:pPr>
+            <a:r>
+              <a:rPr sz="1100" b="0">
+                <a:solidFill>
+                  <a:srgbClr val="6B6B6B"/>
+                </a:solidFill>
+                <a:latin typeface="Arial"/>
+              </a:rPr>
+              <a:t>It sets how many units must be started to ship one.</a:t>
+            </a:r>
+          </a:p>
+        </p:txBody>
+      </p:sp>
+      <p:sp>
+        <p:nvSpPr>
+          <p:cNvPr id="10" name="TextBox 9"/>
+          <p:cNvSpPr txBox="1"/>
+          <p:nvPr/>
+        </p:nvSpPr>
+        <p:spPr>
+          <a:xfrm>
+            <a:off x="685800" y="4315968"/>
+            <a:ext cx="2011680" cy="457200"/>
           </a:xfrm>
           <a:prstGeom prst="rect">
             <a:avLst/>
@@ -3416,27 +3485,27 @@
               </a:spcAft>
             </a:pPr>
             <a:r>
-              <a:rPr sz="1200" b="0">
+              <a:rPr sz="1800" b="1">
                 <a:solidFill>
                   <a:srgbClr val="141414"/>
                 </a:solidFill>
                 <a:latin typeface="Arial"/>
               </a:rPr>
-              <a:t>First-pass yield counts units that passed on their first attempt (65.5% at MLT). Yield after retest counts units that passed eventually (74.6%). The gap between them is work done twice.</a:t>
-            </a:r>
-          </a:p>
-        </p:txBody>
-      </p:sp>
-      <p:sp>
-        <p:nvSpPr>
-          <p:cNvPr id="9" name="TextBox 8"/>
-          <p:cNvSpPr txBox="1"/>
-          <p:nvPr/>
-        </p:nvSpPr>
-        <p:spPr>
-          <a:xfrm>
-            <a:off x="7543800" y="2962656"/>
-            <a:ext cx="4114800" cy="1188720"/>
+              <a:t>3.  Retest</a:t>
+            </a:r>
+          </a:p>
+        </p:txBody>
+      </p:sp>
+      <p:sp>
+        <p:nvSpPr>
+          <p:cNvPr id="11" name="TextBox 10"/>
+          <p:cNvSpPr txBox="1"/>
+          <p:nvPr/>
+        </p:nvSpPr>
+        <p:spPr>
+          <a:xfrm>
+            <a:off x="2880360" y="4315968"/>
+            <a:ext cx="4206240" cy="731520"/>
           </a:xfrm>
           <a:prstGeom prst="rect">
             <a:avLst/>
@@ -3455,164 +3524,68 @@
               </a:spcAft>
             </a:pPr>
             <a:r>
-              <a:rPr sz="1200" b="1">
+              <a:rPr sz="1500" b="0">
                 <a:solidFill>
                   <a:srgbClr val="141414"/>
                 </a:solidFill>
                 <a:latin typeface="Arial"/>
               </a:rPr>
-              <a:t>Why it matters.  </a:t>
-            </a:r>
-            <a:r>
-              <a:rPr sz="1200" b="0">
+              <a:t>How stable is the test</a:t>
+            </a:r>
+          </a:p>
+        </p:txBody>
+      </p:sp>
+      <p:sp>
+        <p:nvSpPr>
+          <p:cNvPr id="12" name="TextBox 11"/>
+          <p:cNvSpPr txBox="1"/>
+          <p:nvPr/>
+        </p:nvSpPr>
+        <p:spPr>
+          <a:xfrm>
+            <a:off x="7360920" y="4334256"/>
+            <a:ext cx="4206240" cy="914400"/>
+          </a:xfrm>
+          <a:prstGeom prst="rect">
+            <a:avLst/>
+          </a:prstGeom>
+          <a:noFill/>
+        </p:spPr>
+        <p:txBody>
+          <a:bodyPr wrap="square" lIns="0" rIns="0" tIns="0" bIns="0">
+            <a:spAutoFit/>
+          </a:bodyPr>
+          <a:lstStyle/>
+          <a:p>
+            <a:pPr algn="l">
+              <a:spcAft>
+                <a:spcPts val="300"/>
+              </a:spcAft>
+            </a:pPr>
+            <a:r>
+              <a:rPr sz="1150" b="1">
                 <a:solidFill>
                   <a:srgbClr val="141414"/>
                 </a:solidFill>
                 <a:latin typeface="Arial"/>
               </a:rPr>
-              <a:t>It sets how many units you must start to ship one. At a rolled 35.6% through MLT and HTT, roughly three modules are started for every one that comes out clean first time.</a:t>
-            </a:r>
-          </a:p>
-        </p:txBody>
-      </p:sp>
-      <p:sp>
-        <p:nvSpPr>
-          <p:cNvPr id="10" name="TextBox 9"/>
-          <p:cNvSpPr txBox="1"/>
-          <p:nvPr/>
-        </p:nvSpPr>
-        <p:spPr>
-          <a:xfrm>
-            <a:off x="566928" y="4370832"/>
-            <a:ext cx="2331720" cy="1005840"/>
-          </a:xfrm>
-          <a:prstGeom prst="rect">
-            <a:avLst/>
-          </a:prstGeom>
-          <a:noFill/>
-        </p:spPr>
-        <p:txBody>
-          <a:bodyPr wrap="square" lIns="0" rIns="0" tIns="0" bIns="0">
-            <a:spAutoFit/>
-          </a:bodyPr>
-          <a:lstStyle/>
-          <a:p>
-            <a:pPr algn="l">
-              <a:spcAft>
-                <a:spcPts val="200"/>
-              </a:spcAft>
-            </a:pPr>
-            <a:r>
-              <a:rPr sz="1700" b="1">
-                <a:solidFill>
-                  <a:srgbClr val="141414"/>
-                </a:solidFill>
-                <a:latin typeface="Arial"/>
-              </a:rPr>
-              <a:t>3.  Retest</a:t>
-            </a:r>
-          </a:p>
-          <a:p>
-            <a:pPr algn="l">
-              <a:spcAft>
-                <a:spcPts val="200"/>
-              </a:spcAft>
-            </a:pPr>
-            <a:r>
-              <a:rPr sz="1150" b="0">
-                <a:solidFill>
-                  <a:srgbClr val="6B6B6B"/>
-                </a:solidFill>
-                <a:latin typeface="Arial"/>
-              </a:rPr>
-              <a:t>The share of units that had to be run again.</a:t>
-            </a:r>
-          </a:p>
-        </p:txBody>
-      </p:sp>
-      <p:sp>
-        <p:nvSpPr>
-          <p:cNvPr id="11" name="TextBox 10"/>
-          <p:cNvSpPr txBox="1"/>
-          <p:nvPr/>
-        </p:nvSpPr>
-        <p:spPr>
-          <a:xfrm>
-            <a:off x="3063240" y="4407408"/>
-            <a:ext cx="4206240" cy="1188720"/>
-          </a:xfrm>
-          <a:prstGeom prst="rect">
-            <a:avLst/>
-          </a:prstGeom>
-          <a:noFill/>
-        </p:spPr>
-        <p:txBody>
-          <a:bodyPr wrap="square" lIns="0" rIns="0" tIns="0" bIns="0">
-            <a:spAutoFit/>
-          </a:bodyPr>
-          <a:lstStyle/>
-          <a:p>
-            <a:pPr algn="l">
-              <a:spcAft>
-                <a:spcPts val="0"/>
-              </a:spcAft>
-            </a:pPr>
-            <a:r>
-              <a:rPr sz="1200" b="0">
-                <a:solidFill>
-                  <a:srgbClr val="141414"/>
-                </a:solidFill>
-                <a:latin typeface="Arial"/>
-              </a:rPr>
-              <a:t>19.7% of units at MLT and 27.6% at HTT came back for a second run — 45 and 47 units. Not the same as failures: a unit can be re-run and pass, and most are.</a:t>
-            </a:r>
-          </a:p>
-        </p:txBody>
-      </p:sp>
-      <p:sp>
-        <p:nvSpPr>
-          <p:cNvPr id="12" name="TextBox 11"/>
-          <p:cNvSpPr txBox="1"/>
-          <p:nvPr/>
-        </p:nvSpPr>
-        <p:spPr>
-          <a:xfrm>
-            <a:off x="7543800" y="4407408"/>
-            <a:ext cx="4114800" cy="1188720"/>
-          </a:xfrm>
-          <a:prstGeom prst="rect">
-            <a:avLst/>
-          </a:prstGeom>
-          <a:noFill/>
-        </p:spPr>
-        <p:txBody>
-          <a:bodyPr wrap="square" lIns="0" rIns="0" tIns="0" bIns="0">
-            <a:spAutoFit/>
-          </a:bodyPr>
-          <a:lstStyle/>
-          <a:p>
-            <a:pPr algn="l">
-              <a:spcAft>
-                <a:spcPts val="0"/>
-              </a:spcAft>
-            </a:pPr>
-            <a:r>
-              <a:rPr sz="1200" b="1">
-                <a:solidFill>
-                  <a:srgbClr val="141414"/>
-                </a:solidFill>
-                <a:latin typeface="Arial"/>
-              </a:rPr>
-              <a:t>Why it matters.  </a:t>
-            </a:r>
-            <a:r>
-              <a:rPr sz="1200" b="0">
-                <a:solidFill>
-                  <a:srgbClr val="141414"/>
-                </a:solidFill>
-                <a:latin typeface="Arial"/>
-              </a:rPr>
-              <a:t>It is where yield loss turns into capacity loss. Recovering a unit on the second try protects the shipment and costs the station time it will not get back.</a:t>
+              <a:t>19.7% of MLT units and 27.6% of HTT units had to be run again — 45 and 47 units.</a:t>
+            </a:r>
+          </a:p>
+          <a:p>
+            <a:pPr algn="l">
+              <a:spcAft>
+                <a:spcPts val="300"/>
+              </a:spcAft>
+            </a:pPr>
+            <a:r>
+              <a:rPr sz="1100" b="0">
+                <a:solidFill>
+                  <a:srgbClr val="6B6B6B"/>
+                </a:solidFill>
+                <a:latin typeface="Arial"/>
+              </a:rPr>
+              <a:t>It is where yield loss turns into lost capacity.</a:t>
             </a:r>
           </a:p>
         </p:txBody>
@@ -3625,8 +3598,8 @@
         </p:nvSpPr>
         <p:spPr>
           <a:xfrm>
-            <a:off x="566928" y="5779008"/>
-            <a:ext cx="11057839" cy="12700"/>
+            <a:off x="685800" y="5806440"/>
+            <a:ext cx="10820095" cy="12700"/>
           </a:xfrm>
           <a:prstGeom prst="rect">
             <a:avLst/>
@@ -3669,8 +3642,8 @@
         </p:nvSpPr>
         <p:spPr>
           <a:xfrm>
-            <a:off x="566928" y="5943600"/>
-            <a:ext cx="11057839" cy="640080"/>
+            <a:off x="685800" y="5989320"/>
+            <a:ext cx="10820095" cy="548640"/>
           </a:xfrm>
           <a:prstGeom prst="rect">
             <a:avLst/>
@@ -3689,7 +3662,7 @@
               </a:spcAft>
             </a:pPr>
             <a:r>
-              <a:rPr sz="1300" b="1">
+              <a:rPr sz="1250" b="1">
                 <a:solidFill>
                   <a:srgbClr val="141414"/>
                 </a:solidFill>
@@ -3698,7 +3671,7 @@
               <a:t>Why it is broken out by test step:  </a:t>
             </a:r>
             <a:r>
-              <a:rPr sz="1300" b="0">
+              <a:rPr sz="1250" b="0">
                 <a:solidFill>
                   <a:srgbClr val="141414"/>
                 </a:solidFill>
@@ -7544,7 +7517,7 @@
                 </a:solidFill>
                 <a:latin typeface="Arial"/>
               </a:rPr>
-              <a:t>against the programme's own gates — coverage, then stability, then efficiency; a station clears one before the next is worth measuring</a:t>
+              <a:t>two actions, each against a target and where 2026-W33 finished</a:t>
             </a:r>
           </a:p>
         </p:txBody>
@@ -7601,8 +7574,8 @@
         </p:nvSpPr>
         <p:spPr>
           <a:xfrm>
-            <a:off x="566928" y="1481328"/>
-            <a:ext cx="365760" cy="365760"/>
+            <a:off x="658368" y="1517904"/>
+            <a:ext cx="347472" cy="347472"/>
           </a:xfrm>
           <a:prstGeom prst="ellipse">
             <a:avLst/>
@@ -7645,8 +7618,8 @@
         </p:nvSpPr>
         <p:spPr>
           <a:xfrm>
-            <a:off x="566928" y="1545336"/>
-            <a:ext cx="365760" cy="274320"/>
+            <a:off x="658368" y="1572768"/>
+            <a:ext cx="347472" cy="274320"/>
           </a:xfrm>
           <a:prstGeom prst="rect">
             <a:avLst/>
@@ -7665,212 +7638,339 @@
               </a:spcAft>
             </a:pPr>
             <a:r>
+              <a:rPr sz="1300" b="1">
+                <a:solidFill>
+                  <a:srgbClr val="FFFFFF"/>
+                </a:solidFill>
+                <a:latin typeface="Arial"/>
+              </a:rPr>
+              <a:t>a</a:t>
+            </a:r>
+          </a:p>
+        </p:txBody>
+      </p:sp>
+      <p:sp>
+        <p:nvSpPr>
+          <p:cNvPr id="6" name="TextBox 5"/>
+          <p:cNvSpPr txBox="1"/>
+          <p:nvPr/>
+        </p:nvSpPr>
+        <p:spPr>
+          <a:xfrm>
+            <a:off x="1152144" y="1517904"/>
+            <a:ext cx="5852160" cy="640080"/>
+          </a:xfrm>
+          <a:prstGeom prst="rect">
+            <a:avLst/>
+          </a:prstGeom>
+          <a:noFill/>
+        </p:spPr>
+        <p:txBody>
+          <a:bodyPr wrap="square" lIns="0" rIns="0" tIns="0" bIns="0">
+            <a:spAutoFit/>
+          </a:bodyPr>
+          <a:lstStyle/>
+          <a:p>
+            <a:pPr algn="l">
+              <a:spcAft>
+                <a:spcPts val="200"/>
+              </a:spcAft>
+            </a:pPr>
+            <a:r>
+              <a:rPr sz="1700" b="1">
+                <a:solidFill>
+                  <a:srgbClr val="141414"/>
+                </a:solidFill>
+                <a:latin typeface="Arial"/>
+              </a:rPr>
+              <a:t>Improve the yield / stability of L6 test</a:t>
+            </a:r>
+          </a:p>
+        </p:txBody>
+      </p:sp>
+      <p:sp>
+        <p:nvSpPr>
+          <p:cNvPr id="7" name="TextBox 6"/>
+          <p:cNvSpPr txBox="1"/>
+          <p:nvPr/>
+        </p:nvSpPr>
+        <p:spPr>
+          <a:xfrm>
+            <a:off x="1298448" y="2249424"/>
+            <a:ext cx="1371600" cy="256032"/>
+          </a:xfrm>
+          <a:prstGeom prst="rect">
+            <a:avLst/>
+          </a:prstGeom>
+          <a:noFill/>
+        </p:spPr>
+        <p:txBody>
+          <a:bodyPr wrap="square" lIns="0" rIns="0" tIns="0" bIns="0">
+            <a:spAutoFit/>
+          </a:bodyPr>
+          <a:lstStyle/>
+          <a:p>
+            <a:pPr algn="l">
+              <a:spcAft>
+                <a:spcPts val="0"/>
+              </a:spcAft>
+            </a:pPr>
+            <a:r>
+              <a:rPr sz="1100" b="0">
+                <a:solidFill>
+                  <a:srgbClr val="6B6B6B"/>
+                </a:solidFill>
+                <a:latin typeface="Arial"/>
+              </a:rPr>
+              <a:t>Yield target</a:t>
+            </a:r>
+          </a:p>
+        </p:txBody>
+      </p:sp>
+      <p:sp>
+        <p:nvSpPr>
+          <p:cNvPr id="8" name="TextBox 7"/>
+          <p:cNvSpPr txBox="1"/>
+          <p:nvPr/>
+        </p:nvSpPr>
+        <p:spPr>
+          <a:xfrm>
+            <a:off x="2697480" y="2249424"/>
+            <a:ext cx="1554480" cy="256032"/>
+          </a:xfrm>
+          <a:prstGeom prst="rect">
+            <a:avLst/>
+          </a:prstGeom>
+          <a:noFill/>
+        </p:spPr>
+        <p:txBody>
+          <a:bodyPr wrap="square" lIns="0" rIns="0" tIns="0" bIns="0">
+            <a:spAutoFit/>
+          </a:bodyPr>
+          <a:lstStyle/>
+          <a:p>
+            <a:pPr algn="l">
+              <a:spcAft>
+                <a:spcPts val="0"/>
+              </a:spcAft>
+            </a:pPr>
+            <a:r>
               <a:rPr sz="1400" b="1">
                 <a:solidFill>
-                  <a:srgbClr val="FFFFFF"/>
-                </a:solidFill>
-                <a:latin typeface="Arial"/>
-              </a:rPr>
-              <a:t>a</a:t>
-            </a:r>
-          </a:p>
-        </p:txBody>
-      </p:sp>
-      <p:sp>
-        <p:nvSpPr>
-          <p:cNvPr id="6" name="TextBox 5"/>
-          <p:cNvSpPr txBox="1"/>
-          <p:nvPr/>
-        </p:nvSpPr>
-        <p:spPr>
-          <a:xfrm>
-            <a:off x="1078992" y="1481328"/>
-            <a:ext cx="5486400" cy="640080"/>
-          </a:xfrm>
-          <a:prstGeom prst="rect">
-            <a:avLst/>
-          </a:prstGeom>
-          <a:noFill/>
-        </p:spPr>
-        <p:txBody>
-          <a:bodyPr wrap="square" lIns="0" rIns="0" tIns="0" bIns="0">
-            <a:spAutoFit/>
-          </a:bodyPr>
-          <a:lstStyle/>
-          <a:p>
-            <a:pPr algn="l">
-              <a:spcAft>
-                <a:spcPts val="200"/>
-              </a:spcAft>
-            </a:pPr>
-            <a:r>
-              <a:rPr sz="1800" b="1">
+                  <a:srgbClr val="1B7F3B"/>
+                </a:solidFill>
+                <a:latin typeface="Arial"/>
+              </a:rPr>
+              <a:t>85%</a:t>
+            </a:r>
+          </a:p>
+        </p:txBody>
+      </p:sp>
+      <p:sp>
+        <p:nvSpPr>
+          <p:cNvPr id="9" name="TextBox 8"/>
+          <p:cNvSpPr txBox="1"/>
+          <p:nvPr/>
+        </p:nvSpPr>
+        <p:spPr>
+          <a:xfrm>
+            <a:off x="4343400" y="2249424"/>
+            <a:ext cx="2743200" cy="256032"/>
+          </a:xfrm>
+          <a:prstGeom prst="rect">
+            <a:avLst/>
+          </a:prstGeom>
+          <a:noFill/>
+        </p:spPr>
+        <p:txBody>
+          <a:bodyPr wrap="square" lIns="0" rIns="0" tIns="0" bIns="0">
+            <a:spAutoFit/>
+          </a:bodyPr>
+          <a:lstStyle/>
+          <a:p>
+            <a:pPr algn="l">
+              <a:spcAft>
+                <a:spcPts val="0"/>
+              </a:spcAft>
+            </a:pPr>
+            <a:r>
+              <a:rPr sz="1100" b="0">
+                <a:solidFill>
+                  <a:srgbClr val="6B6B6B"/>
+                </a:solidFill>
+                <a:latin typeface="Arial"/>
+              </a:rPr>
+              <a:t>today 65.5% at MLT, 54.3% at HTT</a:t>
+            </a:r>
+          </a:p>
+        </p:txBody>
+      </p:sp>
+      <p:sp>
+        <p:nvSpPr>
+          <p:cNvPr id="10" name="TextBox 9"/>
+          <p:cNvSpPr txBox="1"/>
+          <p:nvPr/>
+        </p:nvSpPr>
+        <p:spPr>
+          <a:xfrm>
+            <a:off x="1298448" y="2596896"/>
+            <a:ext cx="1371600" cy="256032"/>
+          </a:xfrm>
+          <a:prstGeom prst="rect">
+            <a:avLst/>
+          </a:prstGeom>
+          <a:noFill/>
+        </p:spPr>
+        <p:txBody>
+          <a:bodyPr wrap="square" lIns="0" rIns="0" tIns="0" bIns="0">
+            <a:spAutoFit/>
+          </a:bodyPr>
+          <a:lstStyle/>
+          <a:p>
+            <a:pPr algn="l">
+              <a:spcAft>
+                <a:spcPts val="0"/>
+              </a:spcAft>
+            </a:pPr>
+            <a:r>
+              <a:rPr sz="1100" b="0">
+                <a:solidFill>
+                  <a:srgbClr val="6B6B6B"/>
+                </a:solidFill>
+                <a:latin typeface="Arial"/>
+              </a:rPr>
+              <a:t>Stability</a:t>
+            </a:r>
+          </a:p>
+        </p:txBody>
+      </p:sp>
+      <p:sp>
+        <p:nvSpPr>
+          <p:cNvPr id="11" name="TextBox 10"/>
+          <p:cNvSpPr txBox="1"/>
+          <p:nvPr/>
+        </p:nvSpPr>
+        <p:spPr>
+          <a:xfrm>
+            <a:off x="2697480" y="2596896"/>
+            <a:ext cx="1554480" cy="256032"/>
+          </a:xfrm>
+          <a:prstGeom prst="rect">
+            <a:avLst/>
+          </a:prstGeom>
+          <a:noFill/>
+        </p:spPr>
+        <p:txBody>
+          <a:bodyPr wrap="square" lIns="0" rIns="0" tIns="0" bIns="0">
+            <a:spAutoFit/>
+          </a:bodyPr>
+          <a:lstStyle/>
+          <a:p>
+            <a:pPr algn="l">
+              <a:spcAft>
+                <a:spcPts val="0"/>
+              </a:spcAft>
+            </a:pPr>
+            <a:r>
+              <a:rPr sz="1400" b="1">
+                <a:solidFill>
+                  <a:srgbClr val="1B7F3B"/>
+                </a:solidFill>
+                <a:latin typeface="Arial"/>
+              </a:rPr>
+              <a:t>&lt; 10% retest</a:t>
+            </a:r>
+          </a:p>
+        </p:txBody>
+      </p:sp>
+      <p:sp>
+        <p:nvSpPr>
+          <p:cNvPr id="12" name="TextBox 11"/>
+          <p:cNvSpPr txBox="1"/>
+          <p:nvPr/>
+        </p:nvSpPr>
+        <p:spPr>
+          <a:xfrm>
+            <a:off x="4343400" y="2596896"/>
+            <a:ext cx="2743200" cy="256032"/>
+          </a:xfrm>
+          <a:prstGeom prst="rect">
+            <a:avLst/>
+          </a:prstGeom>
+          <a:noFill/>
+        </p:spPr>
+        <p:txBody>
+          <a:bodyPr wrap="square" lIns="0" rIns="0" tIns="0" bIns="0">
+            <a:spAutoFit/>
+          </a:bodyPr>
+          <a:lstStyle/>
+          <a:p>
+            <a:pPr algn="l">
+              <a:spcAft>
+                <a:spcPts val="0"/>
+              </a:spcAft>
+            </a:pPr>
+            <a:r>
+              <a:rPr sz="1100" b="0">
+                <a:solidFill>
+                  <a:srgbClr val="6B6B6B"/>
+                </a:solidFill>
+                <a:latin typeface="Arial"/>
+              </a:rPr>
+              <a:t>today 19.7% at MLT, 27.6% at HTT</a:t>
+            </a:r>
+          </a:p>
+        </p:txBody>
+      </p:sp>
+      <p:sp>
+        <p:nvSpPr>
+          <p:cNvPr id="13" name="TextBox 12"/>
+          <p:cNvSpPr txBox="1"/>
+          <p:nvPr/>
+        </p:nvSpPr>
+        <p:spPr>
+          <a:xfrm>
+            <a:off x="7360920" y="1554480"/>
+            <a:ext cx="4206240" cy="1280160"/>
+          </a:xfrm>
+          <a:prstGeom prst="rect">
+            <a:avLst/>
+          </a:prstGeom>
+          <a:noFill/>
+        </p:spPr>
+        <p:txBody>
+          <a:bodyPr wrap="square" lIns="0" rIns="0" tIns="0" bIns="0">
+            <a:spAutoFit/>
+          </a:bodyPr>
+          <a:lstStyle/>
+          <a:p>
+            <a:pPr algn="l">
+              <a:spcAft>
+                <a:spcPts val="0"/>
+              </a:spcAft>
+            </a:pPr>
+            <a:r>
+              <a:rPr sz="1200" b="0">
                 <a:solidFill>
                   <a:srgbClr val="141414"/>
                 </a:solidFill>
                 <a:latin typeface="Arial"/>
               </a:rPr>
-              <a:t>Develop and maintain full coverage for L6</a:t>
-            </a:r>
-          </a:p>
-          <a:p>
-            <a:pPr algn="l">
-              <a:spcAft>
-                <a:spcPts val="200"/>
-              </a:spcAft>
-            </a:pPr>
-            <a:r>
-              <a:rPr sz="1100" b="0">
-                <a:solidFill>
-                  <a:srgbClr val="6B6B6B"/>
-                </a:solidFill>
-                <a:latin typeface="Arial"/>
-              </a:rPr>
-              <a:t>Gate: </a:t>
-            </a:r>
-            <a:r>
-              <a:rPr sz="1100" b="1">
-                <a:solidFill>
-                  <a:srgbClr val="1C62B8"/>
-                </a:solidFill>
-                <a:latin typeface="Arial"/>
-              </a:rPr>
-              <a:t>Coverage</a:t>
-            </a:r>
-          </a:p>
-        </p:txBody>
-      </p:sp>
-      <p:sp>
-        <p:nvSpPr>
-          <p:cNvPr id="7" name="TextBox 6"/>
-          <p:cNvSpPr txBox="1"/>
-          <p:nvPr/>
-        </p:nvSpPr>
-        <p:spPr>
-          <a:xfrm>
-            <a:off x="1078992" y="2194560"/>
-            <a:ext cx="5120640" cy="1280160"/>
-          </a:xfrm>
-          <a:prstGeom prst="rect">
-            <a:avLst/>
-          </a:prstGeom>
-          <a:noFill/>
-        </p:spPr>
-        <p:txBody>
-          <a:bodyPr wrap="square" lIns="0" rIns="0" tIns="0" bIns="0">
-            <a:spAutoFit/>
-          </a:bodyPr>
-          <a:lstStyle/>
-          <a:p>
-            <a:pPr algn="l">
-              <a:spcAft>
-                <a:spcPts val="0"/>
-              </a:spcAft>
-            </a:pPr>
-            <a:r>
-              <a:rPr sz="1150" b="1">
-                <a:solidFill>
-                  <a:srgbClr val="141414"/>
-                </a:solidFill>
-                <a:latin typeface="Arial"/>
-              </a:rPr>
-              <a:t>Why now.  </a:t>
-            </a:r>
-            <a:r>
-              <a:rPr sz="1150" b="0">
-                <a:solidFill>
-                  <a:srgbClr val="141414"/>
-                </a:solidFill>
-                <a:latin typeface="Arial"/>
-              </a:rPr>
-              <a:t>MLT and HTT are the only steps with enough volume to read, and they are where the line loses most of its units: first pass 65.5% and 54.3%, recovered to 74.6% and 68.8% by re-running 45 and 47 units.</a:t>
-            </a:r>
-          </a:p>
-        </p:txBody>
-      </p:sp>
-      <p:sp>
-        <p:nvSpPr>
-          <p:cNvPr id="8" name="TextBox 7"/>
-          <p:cNvSpPr txBox="1"/>
-          <p:nvPr/>
-        </p:nvSpPr>
-        <p:spPr>
-          <a:xfrm>
-            <a:off x="6492240" y="1499616"/>
-            <a:ext cx="5120640" cy="1371600"/>
-          </a:xfrm>
-          <a:prstGeom prst="rect">
-            <a:avLst/>
-          </a:prstGeom>
-          <a:noFill/>
-        </p:spPr>
-        <p:txBody>
-          <a:bodyPr wrap="square" lIns="0" rIns="0" tIns="0" bIns="0">
-            <a:spAutoFit/>
-          </a:bodyPr>
-          <a:lstStyle/>
-          <a:p>
-            <a:pPr algn="l">
-              <a:spcAft>
-                <a:spcPts val="600"/>
-              </a:spcAft>
-            </a:pPr>
-            <a:r>
-              <a:rPr sz="1150" b="1">
-                <a:solidFill>
-                  <a:srgbClr val="141414"/>
-                </a:solidFill>
-                <a:latin typeface="Arial"/>
-              </a:rPr>
-              <a:t>What good looks like.  </a:t>
-            </a:r>
-            <a:r>
-              <a:rPr sz="1150" b="0">
-                <a:solidFill>
-                  <a:srgbClr val="141414"/>
-                </a:solidFill>
-                <a:latin typeface="Arial"/>
-              </a:rPr>
-              <a:t>Full, maintained coverage at L6 — every board, every condition, and the suite kept in step as releases land. Coverage is the first gate and the only one L6 has the volume to be measured against today.</a:t>
-            </a:r>
-          </a:p>
-          <a:p>
-            <a:pPr algn="l">
-              <a:spcAft>
-                <a:spcPts val="600"/>
-              </a:spcAft>
-            </a:pPr>
-            <a:r>
-              <a:rPr sz="1050" b="1">
-                <a:solidFill>
-                  <a:srgbClr val="6B6B6B"/>
-                </a:solidFill>
-                <a:latin typeface="Arial"/>
-              </a:rPr>
-              <a:t>Owner.  </a:t>
-            </a:r>
-            <a:r>
-              <a:rPr sz="1050" b="0">
-                <a:solidFill>
-                  <a:srgbClr val="6B6B6B"/>
-                </a:solidFill>
-                <a:latin typeface="Arial"/>
-              </a:rPr>
-              <a:t>SW team leads define and execute the content; production involved.</a:t>
-            </a:r>
-          </a:p>
-        </p:txBody>
-      </p:sp>
-      <p:sp>
-        <p:nvSpPr>
-          <p:cNvPr id="9" name="Oval 8"/>
+              <a:t>L6 is the only level with the volume to be measured against a target at all, and it is where the line loses most of its units.</a:t>
+            </a:r>
+          </a:p>
+        </p:txBody>
+      </p:sp>
+      <p:sp>
+        <p:nvSpPr>
+          <p:cNvPr id="14" name="Oval 13"/>
           <p:cNvSpPr/>
           <p:nvPr/>
         </p:nvSpPr>
         <p:spPr>
           <a:xfrm>
-            <a:off x="566928" y="3630168"/>
-            <a:ext cx="365760" cy="365760"/>
+            <a:off x="658368" y="3639312"/>
+            <a:ext cx="347472" cy="347472"/>
           </a:xfrm>
           <a:prstGeom prst="ellipse">
             <a:avLst/>
@@ -7907,14 +8007,14 @@
       </p:sp>
       <p:sp>
         <p:nvSpPr>
-          <p:cNvPr id="10" name="TextBox 9"/>
-          <p:cNvSpPr txBox="1"/>
-          <p:nvPr/>
-        </p:nvSpPr>
-        <p:spPr>
-          <a:xfrm>
-            <a:off x="566928" y="3694176"/>
-            <a:ext cx="365760" cy="274320"/>
+          <p:cNvPr id="15" name="TextBox 14"/>
+          <p:cNvSpPr txBox="1"/>
+          <p:nvPr/>
+        </p:nvSpPr>
+        <p:spPr>
+          <a:xfrm>
+            <a:off x="658368" y="3694176"/>
+            <a:ext cx="347472" cy="274320"/>
           </a:xfrm>
           <a:prstGeom prst="rect">
             <a:avLst/>
@@ -7933,212 +8033,364 @@
               </a:spcAft>
             </a:pPr>
             <a:r>
+              <a:rPr sz="1300" b="1">
+                <a:solidFill>
+                  <a:srgbClr val="FFFFFF"/>
+                </a:solidFill>
+                <a:latin typeface="Arial"/>
+              </a:rPr>
+              <a:t>b</a:t>
+            </a:r>
+          </a:p>
+        </p:txBody>
+      </p:sp>
+      <p:sp>
+        <p:nvSpPr>
+          <p:cNvPr id="16" name="TextBox 15"/>
+          <p:cNvSpPr txBox="1"/>
+          <p:nvPr/>
+        </p:nvSpPr>
+        <p:spPr>
+          <a:xfrm>
+            <a:off x="1152144" y="3639312"/>
+            <a:ext cx="5852160" cy="640080"/>
+          </a:xfrm>
+          <a:prstGeom prst="rect">
+            <a:avLst/>
+          </a:prstGeom>
+          <a:noFill/>
+        </p:spPr>
+        <p:txBody>
+          <a:bodyPr wrap="square" lIns="0" rIns="0" tIns="0" bIns="0">
+            <a:spAutoFit/>
+          </a:bodyPr>
+          <a:lstStyle/>
+          <a:p>
+            <a:pPr algn="l">
+              <a:spcAft>
+                <a:spcPts val="200"/>
+              </a:spcAft>
+            </a:pPr>
+            <a:r>
+              <a:rPr sz="1700" b="1">
+                <a:solidFill>
+                  <a:srgbClr val="141414"/>
+                </a:solidFill>
+                <a:latin typeface="Arial"/>
+              </a:rPr>
+              <a:t>Speed up development of multiple L10 test units</a:t>
+            </a:r>
+          </a:p>
+          <a:p>
+            <a:pPr algn="l">
+              <a:spcAft>
+                <a:spcPts val="200"/>
+              </a:spcAft>
+            </a:pPr>
+            <a:r>
+              <a:rPr sz="1100" b="0">
+                <a:solidFill>
+                  <a:srgbClr val="6B6B6B"/>
+                </a:solidFill>
+                <a:latin typeface="Arial"/>
+              </a:rPr>
+              <a:t>Gate: </a:t>
+            </a:r>
+            <a:r>
+              <a:rPr sz="1100" b="1">
+                <a:solidFill>
+                  <a:srgbClr val="B3281E"/>
+                </a:solidFill>
+                <a:latin typeface="Arial"/>
+              </a:rPr>
+              <a:t>only 1–2 units onsite</a:t>
+            </a:r>
+          </a:p>
+        </p:txBody>
+      </p:sp>
+      <p:sp>
+        <p:nvSpPr>
+          <p:cNvPr id="17" name="TextBox 16"/>
+          <p:cNvSpPr txBox="1"/>
+          <p:nvPr/>
+        </p:nvSpPr>
+        <p:spPr>
+          <a:xfrm>
+            <a:off x="1298448" y="4370832"/>
+            <a:ext cx="1371600" cy="256032"/>
+          </a:xfrm>
+          <a:prstGeom prst="rect">
+            <a:avLst/>
+          </a:prstGeom>
+          <a:noFill/>
+        </p:spPr>
+        <p:txBody>
+          <a:bodyPr wrap="square" lIns="0" rIns="0" tIns="0" bIns="0">
+            <a:spAutoFit/>
+          </a:bodyPr>
+          <a:lstStyle/>
+          <a:p>
+            <a:pPr algn="l">
+              <a:spcAft>
+                <a:spcPts val="0"/>
+              </a:spcAft>
+            </a:pPr>
+            <a:r>
+              <a:rPr sz="1100" b="0">
+                <a:solidFill>
+                  <a:srgbClr val="6B6B6B"/>
+                </a:solidFill>
+                <a:latin typeface="Arial"/>
+              </a:rPr>
+              <a:t>Target</a:t>
+            </a:r>
+          </a:p>
+        </p:txBody>
+      </p:sp>
+      <p:sp>
+        <p:nvSpPr>
+          <p:cNvPr id="18" name="TextBox 17"/>
+          <p:cNvSpPr txBox="1"/>
+          <p:nvPr/>
+        </p:nvSpPr>
+        <p:spPr>
+          <a:xfrm>
+            <a:off x="2697480" y="4370832"/>
+            <a:ext cx="1554480" cy="256032"/>
+          </a:xfrm>
+          <a:prstGeom prst="rect">
+            <a:avLst/>
+          </a:prstGeom>
+          <a:noFill/>
+        </p:spPr>
+        <p:txBody>
+          <a:bodyPr wrap="square" lIns="0" rIns="0" tIns="0" bIns="0">
+            <a:spAutoFit/>
+          </a:bodyPr>
+          <a:lstStyle/>
+          <a:p>
+            <a:pPr algn="l">
+              <a:spcAft>
+                <a:spcPts val="0"/>
+              </a:spcAft>
+            </a:pPr>
+            <a:r>
               <a:rPr sz="1400" b="1">
                 <a:solidFill>
-                  <a:srgbClr val="FFFFFF"/>
-                </a:solidFill>
-                <a:latin typeface="Arial"/>
-              </a:rPr>
-              <a:t>b</a:t>
-            </a:r>
-          </a:p>
-        </p:txBody>
-      </p:sp>
-      <p:sp>
-        <p:nvSpPr>
-          <p:cNvPr id="11" name="TextBox 10"/>
-          <p:cNvSpPr txBox="1"/>
-          <p:nvPr/>
-        </p:nvSpPr>
-        <p:spPr>
-          <a:xfrm>
-            <a:off x="1078992" y="3630168"/>
-            <a:ext cx="5486400" cy="640080"/>
-          </a:xfrm>
-          <a:prstGeom prst="rect">
-            <a:avLst/>
-          </a:prstGeom>
-          <a:noFill/>
-        </p:spPr>
-        <p:txBody>
-          <a:bodyPr wrap="square" lIns="0" rIns="0" tIns="0" bIns="0">
-            <a:spAutoFit/>
-          </a:bodyPr>
-          <a:lstStyle/>
-          <a:p>
-            <a:pPr algn="l">
-              <a:spcAft>
-                <a:spcPts val="200"/>
-              </a:spcAft>
-            </a:pPr>
-            <a:r>
-              <a:rPr sz="1800" b="1">
+                  <a:srgbClr val="1B7F3B"/>
+                </a:solidFill>
+                <a:latin typeface="Arial"/>
+              </a:rPr>
+              <a:t>3 to 10 units</a:t>
+            </a:r>
+          </a:p>
+        </p:txBody>
+      </p:sp>
+      <p:sp>
+        <p:nvSpPr>
+          <p:cNvPr id="19" name="TextBox 18"/>
+          <p:cNvSpPr txBox="1"/>
+          <p:nvPr/>
+        </p:nvSpPr>
+        <p:spPr>
+          <a:xfrm>
+            <a:off x="4343400" y="4370832"/>
+            <a:ext cx="2743200" cy="256032"/>
+          </a:xfrm>
+          <a:prstGeom prst="rect">
+            <a:avLst/>
+          </a:prstGeom>
+          <a:noFill/>
+        </p:spPr>
+        <p:txBody>
+          <a:bodyPr wrap="square" lIns="0" rIns="0" tIns="0" bIns="0">
+            <a:spAutoFit/>
+          </a:bodyPr>
+          <a:lstStyle/>
+          <a:p>
+            <a:pPr algn="l">
+              <a:spcAft>
+                <a:spcPts val="0"/>
+              </a:spcAft>
+            </a:pPr>
+            <a:r>
+              <a:rPr sz="1100" b="0">
+                <a:solidFill>
+                  <a:srgbClr val="6B6B6B"/>
+                </a:solidFill>
+                <a:latin typeface="Arial"/>
+              </a:rPr>
+              <a:t>assembled for test development</a:t>
+            </a:r>
+          </a:p>
+        </p:txBody>
+      </p:sp>
+      <p:sp>
+        <p:nvSpPr>
+          <p:cNvPr id="20" name="TextBox 19"/>
+          <p:cNvSpPr txBox="1"/>
+          <p:nvPr/>
+        </p:nvSpPr>
+        <p:spPr>
+          <a:xfrm>
+            <a:off x="1298448" y="4718304"/>
+            <a:ext cx="1371600" cy="256032"/>
+          </a:xfrm>
+          <a:prstGeom prst="rect">
+            <a:avLst/>
+          </a:prstGeom>
+          <a:noFill/>
+        </p:spPr>
+        <p:txBody>
+          <a:bodyPr wrap="square" lIns="0" rIns="0" tIns="0" bIns="0">
+            <a:spAutoFit/>
+          </a:bodyPr>
+          <a:lstStyle/>
+          <a:p>
+            <a:pPr algn="l">
+              <a:spcAft>
+                <a:spcPts val="0"/>
+              </a:spcAft>
+            </a:pPr>
+            <a:r>
+              <a:rPr sz="1100" b="0">
+                <a:solidFill>
+                  <a:srgbClr val="6B6B6B"/>
+                </a:solidFill>
+                <a:latin typeface="Arial"/>
+              </a:rPr>
+              <a:t>Coverage</a:t>
+            </a:r>
+          </a:p>
+        </p:txBody>
+      </p:sp>
+      <p:sp>
+        <p:nvSpPr>
+          <p:cNvPr id="21" name="TextBox 20"/>
+          <p:cNvSpPr txBox="1"/>
+          <p:nvPr/>
+        </p:nvSpPr>
+        <p:spPr>
+          <a:xfrm>
+            <a:off x="2697480" y="4718304"/>
+            <a:ext cx="1554480" cy="256032"/>
+          </a:xfrm>
+          <a:prstGeom prst="rect">
+            <a:avLst/>
+          </a:prstGeom>
+          <a:noFill/>
+        </p:spPr>
+        <p:txBody>
+          <a:bodyPr wrap="square" lIns="0" rIns="0" tIns="0" bIns="0">
+            <a:spAutoFit/>
+          </a:bodyPr>
+          <a:lstStyle/>
+          <a:p>
+            <a:pPr algn="l">
+              <a:spcAft>
+                <a:spcPts val="0"/>
+              </a:spcAft>
+            </a:pPr>
+            <a:r>
+              <a:rPr sz="1400" b="1">
+                <a:solidFill>
+                  <a:srgbClr val="1B7F3B"/>
+                </a:solidFill>
+                <a:latin typeface="Arial"/>
+              </a:rPr>
+              <a:t>full coverage</a:t>
+            </a:r>
+          </a:p>
+        </p:txBody>
+      </p:sp>
+      <p:sp>
+        <p:nvSpPr>
+          <p:cNvPr id="22" name="TextBox 21"/>
+          <p:cNvSpPr txBox="1"/>
+          <p:nvPr/>
+        </p:nvSpPr>
+        <p:spPr>
+          <a:xfrm>
+            <a:off x="4343400" y="4718304"/>
+            <a:ext cx="2743200" cy="256032"/>
+          </a:xfrm>
+          <a:prstGeom prst="rect">
+            <a:avLst/>
+          </a:prstGeom>
+          <a:noFill/>
+        </p:spPr>
+        <p:txBody>
+          <a:bodyPr wrap="square" lIns="0" rIns="0" tIns="0" bIns="0">
+            <a:spAutoFit/>
+          </a:bodyPr>
+          <a:lstStyle/>
+          <a:p>
+            <a:pPr algn="l">
+              <a:spcAft>
+                <a:spcPts val="0"/>
+              </a:spcAft>
+            </a:pPr>
+            <a:r>
+              <a:rPr sz="1100" b="0">
+                <a:solidFill>
+                  <a:srgbClr val="6B6B6B"/>
+                </a:solidFill>
+                <a:latin typeface="Arial"/>
+              </a:rPr>
+              <a:t>today 7 units across four steps</a:t>
+            </a:r>
+          </a:p>
+        </p:txBody>
+      </p:sp>
+      <p:sp>
+        <p:nvSpPr>
+          <p:cNvPr id="23" name="TextBox 22"/>
+          <p:cNvSpPr txBox="1"/>
+          <p:nvPr/>
+        </p:nvSpPr>
+        <p:spPr>
+          <a:xfrm>
+            <a:off x="7360920" y="3675888"/>
+            <a:ext cx="4206240" cy="1280160"/>
+          </a:xfrm>
+          <a:prstGeom prst="rect">
+            <a:avLst/>
+          </a:prstGeom>
+          <a:noFill/>
+        </p:spPr>
+        <p:txBody>
+          <a:bodyPr wrap="square" lIns="0" rIns="0" tIns="0" bIns="0">
+            <a:spAutoFit/>
+          </a:bodyPr>
+          <a:lstStyle/>
+          <a:p>
+            <a:pPr algn="l">
+              <a:spcAft>
+                <a:spcPts val="0"/>
+              </a:spcAft>
+            </a:pPr>
+            <a:r>
+              <a:rPr sz="1200" b="0">
                 <a:solidFill>
                   <a:srgbClr val="141414"/>
                 </a:solidFill>
                 <a:latin typeface="Arial"/>
               </a:rPr>
-              <a:t>Speed up development of multiple L10 test units</a:t>
-            </a:r>
-          </a:p>
-          <a:p>
-            <a:pPr algn="l">
-              <a:spcAft>
-                <a:spcPts val="200"/>
-              </a:spcAft>
-            </a:pPr>
-            <a:r>
-              <a:rPr sz="1100" b="0">
-                <a:solidFill>
-                  <a:srgbClr val="6B6B6B"/>
-                </a:solidFill>
-                <a:latin typeface="Arial"/>
-              </a:rPr>
-              <a:t>Gate: </a:t>
-            </a:r>
-            <a:r>
-              <a:rPr sz="1100" b="1">
-                <a:solidFill>
-                  <a:srgbClr val="1C62B8"/>
-                </a:solidFill>
-                <a:latin typeface="Arial"/>
-              </a:rPr>
-              <a:t>Volume, before any gate</a:t>
-            </a:r>
-          </a:p>
-        </p:txBody>
-      </p:sp>
-      <p:sp>
-        <p:nvSpPr>
-          <p:cNvPr id="12" name="TextBox 11"/>
-          <p:cNvSpPr txBox="1"/>
-          <p:nvPr/>
-        </p:nvSpPr>
-        <p:spPr>
-          <a:xfrm>
-            <a:off x="1078992" y="4343400"/>
-            <a:ext cx="5120640" cy="1280160"/>
-          </a:xfrm>
-          <a:prstGeom prst="rect">
-            <a:avLst/>
-          </a:prstGeom>
-          <a:noFill/>
-        </p:spPr>
-        <p:txBody>
-          <a:bodyPr wrap="square" lIns="0" rIns="0" tIns="0" bIns="0">
-            <a:spAutoFit/>
-          </a:bodyPr>
-          <a:lstStyle/>
-          <a:p>
-            <a:pPr algn="l">
-              <a:spcAft>
-                <a:spcPts val="0"/>
-              </a:spcAft>
-            </a:pPr>
-            <a:r>
-              <a:rPr sz="1150" b="1">
-                <a:solidFill>
-                  <a:srgbClr val="141414"/>
-                </a:solidFill>
-                <a:latin typeface="Arial"/>
-              </a:rPr>
-              <a:t>Why now.  </a:t>
-            </a:r>
-            <a:r>
-              <a:rPr sz="1150" b="0">
-                <a:solidFill>
-                  <a:srgbClr val="141414"/>
-                </a:solidFill>
-                <a:latin typeface="Arial"/>
-              </a:rPr>
-              <a:t>L10 ran 7 units across its four steps all week — 2 at FAT, 1 at SFT, 1 at RIN, 3 at 2U. That is why every L10 box on this deck says quantity only: there is no yield to read, and no gate can be measured on single digits.</a:t>
-            </a:r>
-          </a:p>
-        </p:txBody>
-      </p:sp>
-      <p:sp>
-        <p:nvSpPr>
-          <p:cNvPr id="13" name="TextBox 12"/>
-          <p:cNvSpPr txBox="1"/>
-          <p:nvPr/>
-        </p:nvSpPr>
-        <p:spPr>
-          <a:xfrm>
-            <a:off x="6492240" y="3648456"/>
-            <a:ext cx="5120640" cy="1371600"/>
-          </a:xfrm>
-          <a:prstGeom prst="rect">
-            <a:avLst/>
-          </a:prstGeom>
-          <a:noFill/>
-        </p:spPr>
-        <p:txBody>
-          <a:bodyPr wrap="square" lIns="0" rIns="0" tIns="0" bIns="0">
-            <a:spAutoFit/>
-          </a:bodyPr>
-          <a:lstStyle/>
-          <a:p>
-            <a:pPr algn="l">
-              <a:spcAft>
-                <a:spcPts val="600"/>
-              </a:spcAft>
-            </a:pPr>
-            <a:r>
-              <a:rPr sz="1150" b="1">
-                <a:solidFill>
-                  <a:srgbClr val="141414"/>
-                </a:solidFill>
-                <a:latin typeface="Arial"/>
-              </a:rPr>
-              <a:t>What good looks like.  </a:t>
-            </a:r>
-            <a:r>
-              <a:rPr sz="1150" b="0">
-                <a:solidFill>
-                  <a:srgbClr val="141414"/>
-                </a:solidFill>
-                <a:latin typeface="Arial"/>
-              </a:rPr>
-              <a:t>More L10 units, sooner. Not to improve the yield — to make a yield exist. Until L10 is running tens of chassis a week, its coverage cannot be judged, its stability cannot be measured, and its efficiency is not yet a question.</a:t>
-            </a:r>
-          </a:p>
-          <a:p>
-            <a:pPr algn="l">
-              <a:spcAft>
-                <a:spcPts val="600"/>
-              </a:spcAft>
-            </a:pPr>
-            <a:r>
-              <a:rPr sz="1050" b="1">
-                <a:solidFill>
-                  <a:srgbClr val="6B6B6B"/>
-                </a:solidFill>
-                <a:latin typeface="Arial"/>
-              </a:rPr>
-              <a:t>Owner.  </a:t>
-            </a:r>
-            <a:r>
-              <a:rPr sz="1050" b="0">
-                <a:solidFill>
-                  <a:srgbClr val="6B6B6B"/>
-                </a:solidFill>
-                <a:latin typeface="Arial"/>
-              </a:rPr>
-              <a:t>Production, with the L10 station owners.</a:t>
-            </a:r>
-          </a:p>
-        </p:txBody>
-      </p:sp>
-      <p:sp>
-        <p:nvSpPr>
-          <p:cNvPr id="14" name="Rectangle 13"/>
+              <a:t>Not to improve the L10 yield — to make one exist. On single digits there is nothing to read, which is why every L10 box on this deck says quantity only.</a:t>
+            </a:r>
+          </a:p>
+        </p:txBody>
+      </p:sp>
+      <p:sp>
+        <p:nvSpPr>
+          <p:cNvPr id="24" name="Rectangle 23"/>
           <p:cNvSpPr/>
           <p:nvPr/>
         </p:nvSpPr>
         <p:spPr>
           <a:xfrm>
-            <a:off x="566928" y="5870448"/>
-            <a:ext cx="11057839" cy="12700"/>
+            <a:off x="658368" y="5870448"/>
+            <a:ext cx="10874959" cy="12700"/>
           </a:xfrm>
           <a:prstGeom prst="rect">
             <a:avLst/>
@@ -8175,14 +8427,14 @@
       </p:sp>
       <p:sp>
         <p:nvSpPr>
-          <p:cNvPr id="15" name="TextBox 14"/>
-          <p:cNvSpPr txBox="1"/>
-          <p:nvPr/>
-        </p:nvSpPr>
-        <p:spPr>
-          <a:xfrm>
-            <a:off x="566928" y="6016752"/>
-            <a:ext cx="11057839" cy="548640"/>
+          <p:cNvPr id="25" name="TextBox 24"/>
+          <p:cNvSpPr txBox="1"/>
+          <p:nvPr/>
+        </p:nvSpPr>
+        <p:spPr>
+          <a:xfrm>
+            <a:off x="658368" y="6016752"/>
+            <a:ext cx="10874959" cy="548640"/>
           </a:xfrm>
           <a:prstGeom prst="rect">
             <a:avLst/>
@@ -8216,7 +8468,7 @@
                 </a:solidFill>
                 <a:latin typeface="Arial"/>
               </a:rPr>
-              <a:t>Measuring stability before coverage tells you a suite repeats — including repeating what it never tested; measuring efficiency before stability buys stations to fix flakiness. L6 is at the first gate with the volume to prove it; L10 is not yet at a gate at all.</a:t>
+              <a:t>Coverage, then stability, then efficiency — a station clears one gate before the next is worth measuring. L6 is at the first gate with the volume to prove it; L10 is not yet at a gate at all.</a:t>
             </a:r>
           </a:p>
         </p:txBody>
